--- a/slides/pptx/第08回_社内の知識を検索できるようにする.pptx
+++ b/slides/pptx/第08回_社内の知識を検索できるようにする.pptx
@@ -12,9 +12,14 @@
     <p:sldId id="260" r:id="rId6"/>
     <p:sldId id="261" r:id="rId7"/>
     <p:sldId id="262" r:id="rId8"/>
+    <p:sldId id="263" r:id="rId9"/>
+    <p:sldId id="264" r:id="rId10"/>
+    <p:sldId id="265" r:id="rId11"/>
+    <p:sldId id="266" r:id="rId12"/>
+    <p:sldId id="267" r:id="rId13"/>
   </p:sldIdLst>
   <p:notesMasterIdLst>
-    <p:notesMasterId r:id="rId9"/>
+    <p:notesMasterId r:id="rId14"/>
   </p:notesMasterIdLst>
   <p:sldSz cx="12192000" cy="6858000"/>
   <p:notesSz cx="6858000" cy="12192000"/>
@@ -508,8 +513,7 @@
           <a:p>
             <a:r>
               <a:rPr lang="en-US" dirty="0"/>
-              <a:t>ノウハウが特定の人に偏っている状態への、直接の打ち手です。
-【ゴール】1つの領域について、社内資料を検索できるAIを動かします。あわせて、何が足りないかを可視化します。</a:t>
+              <a:t>前回の宿題（自動化を1週間流したか）を確認。止まった記録があれば、その場で一緒に原因を見る。直すのはここでよい。</a:t>
             </a:r>
             <a:endParaRPr lang="en-US" dirty="0"/>
           </a:p>
@@ -533,6 +537,270 @@
             <a:fld id="{F7021451-1387-4CA6-816F-3879F97B5CBC}" type="slidenum">
               <a:rPr lang="en-US"/>
               <a:t>1</a:t>
+            </a:fld>
+            <a:endParaRPr lang="en-US"/>
+          </a:p>
+        </p:txBody>
+      </p:sp>
+    </p:spTree>
+    <p:extLst>
+      <p:ext uri="{BB962C8B-B14F-4D97-AF65-F5344CB8AC3E}">
+        <p14:creationId xmlns:p14="http://schemas.microsoft.com/office/powerpoint/2010/main" val="1024086991"/>
+      </p:ext>
+    </p:extLst>
+  </p:cSld>
+  <p:clrMapOvr>
+    <a:masterClrMapping/>
+  </p:clrMapOvr>
+</p:notes>
+</file>
+
+<file path=ppt/notesSlides/notesSlide10.xml><?xml version="1.0" encoding="utf-8"?>
+<p:notes xmlns:a="http://schemas.openxmlformats.org/drawingml/2006/main" xmlns:r="http://schemas.openxmlformats.org/officeDocument/2006/relationships" xmlns:p="http://schemas.openxmlformats.org/presentationml/2006/main">
+  <p:cSld>
+    <p:spTree>
+      <p:nvGrpSpPr>
+        <p:cNvPr id="1" name=""/>
+        <p:cNvGrpSpPr/>
+        <p:nvPr/>
+      </p:nvGrpSpPr>
+      <p:grpSpPr>
+        <a:xfrm>
+          <a:off x="0" y="0"/>
+          <a:ext cx="0" cy="0"/>
+          <a:chOff x="0" y="0"/>
+          <a:chExt cx="0" cy="0"/>
+        </a:xfrm>
+      </p:grpSpPr>
+      <p:sp>
+        <p:nvSpPr>
+          <p:cNvPr id="2" name="Slide Image Placeholder 1"/>
+          <p:cNvSpPr>
+            <a:spLocks noGrp="1" noRot="1" noChangeAspect="1"/>
+          </p:cNvSpPr>
+          <p:nvPr>
+            <p:ph type="sldImg"/>
+          </p:nvPr>
+        </p:nvSpPr>
+        <p:spPr/>
+      </p:sp>
+      <p:sp>
+        <p:nvSpPr>
+          <p:cNvPr id="3" name="Notes Placeholder 2"/>
+          <p:cNvSpPr>
+            <a:spLocks noGrp="1"/>
+          </p:cNvSpPr>
+          <p:nvPr>
+            <p:ph type="body" idx="1"/>
+          </p:nvPr>
+        </p:nvSpPr>
+        <p:spPr/>
+        <p:txBody>
+          <a:bodyPr/>
+          <a:lstStyle/>
+          <a:p>
+            <a:r>
+              <a:rPr lang="en-US" dirty="0"/>
+              <a:t>更新担当を決める。ここが空欄のナレッジは半年で腐る、と明言する。</a:t>
+            </a:r>
+            <a:endParaRPr lang="en-US" dirty="0"/>
+          </a:p>
+        </p:txBody>
+      </p:sp>
+      <p:sp>
+        <p:nvSpPr>
+          <p:cNvPr id="4" name="Slide Number Placeholder 3"/>
+          <p:cNvSpPr>
+            <a:spLocks noGrp="1"/>
+          </p:cNvSpPr>
+          <p:nvPr>
+            <p:ph type="sldNum" sz="quarter" idx="10"/>
+          </p:nvPr>
+        </p:nvSpPr>
+        <p:spPr/>
+        <p:txBody>
+          <a:bodyPr/>
+          <a:lstStyle/>
+          <a:p>
+            <a:fld id="{F7021451-1387-4CA6-816F-3879F97B5CBC}" type="slidenum">
+              <a:rPr lang="en-US"/>
+              <a:t>10</a:t>
+            </a:fld>
+            <a:endParaRPr lang="en-US"/>
+          </a:p>
+        </p:txBody>
+      </p:sp>
+    </p:spTree>
+    <p:extLst>
+      <p:ext uri="{BB962C8B-B14F-4D97-AF65-F5344CB8AC3E}">
+        <p14:creationId xmlns:p14="http://schemas.microsoft.com/office/powerpoint/2010/main" val="1024086991"/>
+      </p:ext>
+    </p:extLst>
+  </p:cSld>
+  <p:clrMapOvr>
+    <a:masterClrMapping/>
+  </p:clrMapOvr>
+</p:notes>
+</file>
+
+<file path=ppt/notesSlides/notesSlide11.xml><?xml version="1.0" encoding="utf-8"?>
+<p:notes xmlns:a="http://schemas.openxmlformats.org/drawingml/2006/main" xmlns:r="http://schemas.openxmlformats.org/officeDocument/2006/relationships" xmlns:p="http://schemas.openxmlformats.org/presentationml/2006/main">
+  <p:cSld>
+    <p:spTree>
+      <p:nvGrpSpPr>
+        <p:cNvPr id="1" name=""/>
+        <p:cNvGrpSpPr/>
+        <p:nvPr/>
+      </p:nvGrpSpPr>
+      <p:grpSpPr>
+        <a:xfrm>
+          <a:off x="0" y="0"/>
+          <a:ext cx="0" cy="0"/>
+          <a:chOff x="0" y="0"/>
+          <a:chExt cx="0" cy="0"/>
+        </a:xfrm>
+      </p:grpSpPr>
+      <p:sp>
+        <p:nvSpPr>
+          <p:cNvPr id="2" name="Slide Image Placeholder 1"/>
+          <p:cNvSpPr>
+            <a:spLocks noGrp="1" noRot="1" noChangeAspect="1"/>
+          </p:cNvSpPr>
+          <p:nvPr>
+            <p:ph type="sldImg"/>
+          </p:nvPr>
+        </p:nvSpPr>
+        <p:spPr/>
+      </p:sp>
+      <p:sp>
+        <p:nvSpPr>
+          <p:cNvPr id="3" name="Notes Placeholder 2"/>
+          <p:cNvSpPr>
+            <a:spLocks noGrp="1"/>
+          </p:cNvSpPr>
+          <p:nvPr>
+            <p:ph type="body" idx="1"/>
+          </p:nvPr>
+        </p:nvSpPr>
+        <p:spPr/>
+        <p:txBody>
+          <a:bodyPr/>
+          <a:lstStyle/>
+          <a:p>
+            <a:r>
+              <a:rPr lang="en-US" dirty="0"/>
+              <a:t>経営者の関心が最も高まる場面。事業承継の話に接続すると、講座の位置づけが一段上がる。急がず時間を取る。</a:t>
+            </a:r>
+            <a:endParaRPr lang="en-US" dirty="0"/>
+          </a:p>
+        </p:txBody>
+      </p:sp>
+      <p:sp>
+        <p:nvSpPr>
+          <p:cNvPr id="4" name="Slide Number Placeholder 3"/>
+          <p:cNvSpPr>
+            <a:spLocks noGrp="1"/>
+          </p:cNvSpPr>
+          <p:nvPr>
+            <p:ph type="sldNum" sz="quarter" idx="10"/>
+          </p:nvPr>
+        </p:nvSpPr>
+        <p:spPr/>
+        <p:txBody>
+          <a:bodyPr/>
+          <a:lstStyle/>
+          <a:p>
+            <a:fld id="{F7021451-1387-4CA6-816F-3879F97B5CBC}" type="slidenum">
+              <a:rPr lang="en-US"/>
+              <a:t>11</a:t>
+            </a:fld>
+            <a:endParaRPr lang="en-US"/>
+          </a:p>
+        </p:txBody>
+      </p:sp>
+    </p:spTree>
+    <p:extLst>
+      <p:ext uri="{BB962C8B-B14F-4D97-AF65-F5344CB8AC3E}">
+        <p14:creationId xmlns:p14="http://schemas.microsoft.com/office/powerpoint/2010/main" val="1024086991"/>
+      </p:ext>
+    </p:extLst>
+  </p:cSld>
+  <p:clrMapOvr>
+    <a:masterClrMapping/>
+  </p:clrMapOvr>
+</p:notes>
+</file>
+
+<file path=ppt/notesSlides/notesSlide12.xml><?xml version="1.0" encoding="utf-8"?>
+<p:notes xmlns:a="http://schemas.openxmlformats.org/drawingml/2006/main" xmlns:r="http://schemas.openxmlformats.org/officeDocument/2006/relationships" xmlns:p="http://schemas.openxmlformats.org/presentationml/2006/main">
+  <p:cSld>
+    <p:spTree>
+      <p:nvGrpSpPr>
+        <p:cNvPr id="1" name=""/>
+        <p:cNvGrpSpPr/>
+        <p:nvPr/>
+      </p:nvGrpSpPr>
+      <p:grpSpPr>
+        <a:xfrm>
+          <a:off x="0" y="0"/>
+          <a:ext cx="0" cy="0"/>
+          <a:chOff x="0" y="0"/>
+          <a:chExt cx="0" cy="0"/>
+        </a:xfrm>
+      </p:grpSpPr>
+      <p:sp>
+        <p:nvSpPr>
+          <p:cNvPr id="2" name="Slide Image Placeholder 1"/>
+          <p:cNvSpPr>
+            <a:spLocks noGrp="1" noRot="1" noChangeAspect="1"/>
+          </p:cNvSpPr>
+          <p:nvPr>
+            <p:ph type="sldImg"/>
+          </p:nvPr>
+        </p:nvSpPr>
+        <p:spPr/>
+      </p:sp>
+      <p:sp>
+        <p:nvSpPr>
+          <p:cNvPr id="3" name="Notes Placeholder 2"/>
+          <p:cNvSpPr>
+            <a:spLocks noGrp="1"/>
+          </p:cNvSpPr>
+          <p:nvPr>
+            <p:ph type="body" idx="1"/>
+          </p:nvPr>
+        </p:nvSpPr>
+        <p:spPr/>
+        <p:txBody>
+          <a:bodyPr/>
+          <a:lstStyle/>
+          <a:p>
+            <a:r>
+              <a:rPr lang="en-US" dirty="0"/>
+              <a:t>「最も簡単な1件」を一緒に選ぶ。難しいものを選ぶと止まる。選ぶところまでを今日やる。</a:t>
+            </a:r>
+            <a:endParaRPr lang="en-US" dirty="0"/>
+          </a:p>
+        </p:txBody>
+      </p:sp>
+      <p:sp>
+        <p:nvSpPr>
+          <p:cNvPr id="4" name="Slide Number Placeholder 3"/>
+          <p:cNvSpPr>
+            <a:spLocks noGrp="1"/>
+          </p:cNvSpPr>
+          <p:nvPr>
+            <p:ph type="sldNum" sz="quarter" idx="10"/>
+          </p:nvPr>
+        </p:nvSpPr>
+        <p:spPr/>
+        <p:txBody>
+          <a:bodyPr/>
+          <a:lstStyle/>
+          <a:p>
+            <a:fld id="{F7021451-1387-4CA6-816F-3879F97B5CBC}" type="slidenum">
+              <a:rPr lang="en-US"/>
+              <a:t>12</a:t>
             </a:fld>
             <a:endParaRPr lang="en-US"/>
           </a:p>
@@ -597,7 +865,7 @@
           <a:p>
             <a:r>
               <a:rPr lang="en-US" dirty="0"/>
-              <a:t>ここは30秒で。今日の到達点だけ言って、すぐ本題へ。</a:t>
+              <a:t>「あれどこでしたっけ」が週に何回起きているかを聞く。数を言語化すると、この回の価値が伝わる。</a:t>
             </a:r>
             <a:endParaRPr lang="en-US" dirty="0"/>
           </a:p>
@@ -685,7 +953,7 @@
           <a:p>
             <a:r>
               <a:rPr lang="en-US" dirty="0"/>
-              <a:t>先に結論を言わず、受講者の実物を題材にしてこの型に当てはめて見せる。</a:t>
+              <a:t>「作ることより、答えられなかった質問を集めることに価値がある」と先に言う。これを言っておかないと、精度が出なかったときに失敗した気分になる。</a:t>
             </a:r>
             <a:endParaRPr lang="en-US" dirty="0"/>
           </a:p>
@@ -773,7 +1041,7 @@
           <a:p>
             <a:r>
               <a:rPr lang="en-US" dirty="0"/>
-              <a:t>必ず左（失敗例）から。自分の失敗として話す。うまくいく例だけ見せると、受講者は自分の失敗を言わなくなる。</a:t>
+              <a:t>△を×と混同させない。ここが今日いちばん大事な概念。「答えられない」と言えることが正しい、という価値観を渡す。</a:t>
             </a:r>
             <a:endParaRPr lang="en-US" dirty="0"/>
           </a:p>
@@ -861,7 +1129,7 @@
           <a:p>
             <a:r>
               <a:rPr lang="en-US" dirty="0"/>
-              <a:t>ここから講師は口頭指示のみ。画面を操作するのは必ず受講者。歯がゆくても手を出さない。</a:t>
+              <a:t>5列の表を見せながら、右2列（誰が・いつまでに）が空欄だと永久に埋まらないことを言う。第11回の体制設計につながる伏線。</a:t>
             </a:r>
             <a:endParaRPr lang="en-US" dirty="0"/>
           </a:p>
@@ -949,7 +1217,7 @@
           <a:p>
             <a:r>
               <a:rPr lang="en-US" dirty="0"/>
-              <a:t>ここは資料を読み上げない。自分の言葉と、匿名事例で話す。</a:t>
+              <a:t>「全部入れたい」と言われたら、実際に全部入れて精度が落ちるところを見せるのが最も早い。説得より実証。</a:t>
             </a:r>
             <a:endParaRPr lang="en-US" dirty="0"/>
           </a:p>
@@ -1037,7 +1305,7 @@
           <a:p>
             <a:r>
               <a:rPr lang="en-US" dirty="0"/>
-              <a:t>その場でカレンダーに入れてもらう。口頭の約束で終わらせない。</a:t>
+              <a:t>8件取れたら喜ぶ。ただし△2件を「足りない資料が2つ見つかった」と読み替えて見せる。ここで価値の転換が起きる。</a:t>
             </a:r>
             <a:endParaRPr lang="en-US" dirty="0"/>
           </a:p>
@@ -1061,6 +1329,182 @@
             <a:fld id="{F7021451-1387-4CA6-816F-3879F97B5CBC}" type="slidenum">
               <a:rPr lang="en-US"/>
               <a:t>7</a:t>
+            </a:fld>
+            <a:endParaRPr lang="en-US"/>
+          </a:p>
+        </p:txBody>
+      </p:sp>
+    </p:spTree>
+    <p:extLst>
+      <p:ext uri="{BB962C8B-B14F-4D97-AF65-F5344CB8AC3E}">
+        <p14:creationId xmlns:p14="http://schemas.microsoft.com/office/powerpoint/2010/main" val="1024086991"/>
+      </p:ext>
+    </p:extLst>
+  </p:cSld>
+  <p:clrMapOvr>
+    <a:masterClrMapping/>
+  </p:clrMapOvr>
+</p:notes>
+</file>
+
+<file path=ppt/notesSlides/notesSlide8.xml><?xml version="1.0" encoding="utf-8"?>
+<p:notes xmlns:a="http://schemas.openxmlformats.org/drawingml/2006/main" xmlns:r="http://schemas.openxmlformats.org/officeDocument/2006/relationships" xmlns:p="http://schemas.openxmlformats.org/presentationml/2006/main">
+  <p:cSld>
+    <p:spTree>
+      <p:nvGrpSpPr>
+        <p:cNvPr id="1" name=""/>
+        <p:cNvGrpSpPr/>
+        <p:nvPr/>
+      </p:nvGrpSpPr>
+      <p:grpSpPr>
+        <a:xfrm>
+          <a:off x="0" y="0"/>
+          <a:ext cx="0" cy="0"/>
+          <a:chOff x="0" y="0"/>
+          <a:chExt cx="0" cy="0"/>
+        </a:xfrm>
+      </p:grpSpPr>
+      <p:sp>
+        <p:nvSpPr>
+          <p:cNvPr id="2" name="Slide Image Placeholder 1"/>
+          <p:cNvSpPr>
+            <a:spLocks noGrp="1" noRot="1" noChangeAspect="1"/>
+          </p:cNvSpPr>
+          <p:nvPr>
+            <p:ph type="sldImg"/>
+          </p:nvPr>
+        </p:nvSpPr>
+        <p:spPr/>
+      </p:sp>
+      <p:sp>
+        <p:nvSpPr>
+          <p:cNvPr id="3" name="Notes Placeholder 2"/>
+          <p:cNvSpPr>
+            <a:spLocks noGrp="1"/>
+          </p:cNvSpPr>
+          <p:nvPr>
+            <p:ph type="body" idx="1"/>
+          </p:nvPr>
+        </p:nvSpPr>
+        <p:spPr/>
+        <p:txBody>
+          <a:bodyPr/>
+          <a:lstStyle/>
+          <a:p>
+            <a:r>
+              <a:rPr lang="en-US" dirty="0"/>
+              <a:t>1つ目は頻出。スキャン画像の山を前に固まらない。この回で全部やろうとせず、リストに送る判断を見せる。</a:t>
+            </a:r>
+            <a:endParaRPr lang="en-US" dirty="0"/>
+          </a:p>
+        </p:txBody>
+      </p:sp>
+      <p:sp>
+        <p:nvSpPr>
+          <p:cNvPr id="4" name="Slide Number Placeholder 3"/>
+          <p:cNvSpPr>
+            <a:spLocks noGrp="1"/>
+          </p:cNvSpPr>
+          <p:nvPr>
+            <p:ph type="sldNum" sz="quarter" idx="10"/>
+          </p:nvPr>
+        </p:nvSpPr>
+        <p:spPr/>
+        <p:txBody>
+          <a:bodyPr/>
+          <a:lstStyle/>
+          <a:p>
+            <a:fld id="{F7021451-1387-4CA6-816F-3879F97B5CBC}" type="slidenum">
+              <a:rPr lang="en-US"/>
+              <a:t>8</a:t>
+            </a:fld>
+            <a:endParaRPr lang="en-US"/>
+          </a:p>
+        </p:txBody>
+      </p:sp>
+    </p:spTree>
+    <p:extLst>
+      <p:ext uri="{BB962C8B-B14F-4D97-AF65-F5344CB8AC3E}">
+        <p14:creationId xmlns:p14="http://schemas.microsoft.com/office/powerpoint/2010/main" val="1024086991"/>
+      </p:ext>
+    </p:extLst>
+  </p:cSld>
+  <p:clrMapOvr>
+    <a:masterClrMapping/>
+  </p:clrMapOvr>
+</p:notes>
+</file>
+
+<file path=ppt/notesSlides/notesSlide9.xml><?xml version="1.0" encoding="utf-8"?>
+<p:notes xmlns:a="http://schemas.openxmlformats.org/drawingml/2006/main" xmlns:r="http://schemas.openxmlformats.org/officeDocument/2006/relationships" xmlns:p="http://schemas.openxmlformats.org/presentationml/2006/main">
+  <p:cSld>
+    <p:spTree>
+      <p:nvGrpSpPr>
+        <p:cNvPr id="1" name=""/>
+        <p:cNvGrpSpPr/>
+        <p:nvPr/>
+      </p:nvGrpSpPr>
+      <p:grpSpPr>
+        <a:xfrm>
+          <a:off x="0" y="0"/>
+          <a:ext cx="0" cy="0"/>
+          <a:chOff x="0" y="0"/>
+          <a:chExt cx="0" cy="0"/>
+        </a:xfrm>
+      </p:grpSpPr>
+      <p:sp>
+        <p:nvSpPr>
+          <p:cNvPr id="2" name="Slide Image Placeholder 1"/>
+          <p:cNvSpPr>
+            <a:spLocks noGrp="1" noRot="1" noChangeAspect="1"/>
+          </p:cNvSpPr>
+          <p:nvPr>
+            <p:ph type="sldImg"/>
+          </p:nvPr>
+        </p:nvSpPr>
+        <p:spPr/>
+      </p:sp>
+      <p:sp>
+        <p:nvSpPr>
+          <p:cNvPr id="3" name="Notes Placeholder 2"/>
+          <p:cNvSpPr>
+            <a:spLocks noGrp="1"/>
+          </p:cNvSpPr>
+          <p:nvPr>
+            <p:ph type="body" idx="1"/>
+          </p:nvPr>
+        </p:nvSpPr>
+        <p:spPr/>
+        <p:txBody>
+          <a:bodyPr/>
+          <a:lstStyle/>
+          <a:p>
+            <a:r>
+              <a:rPr lang="en-US" dirty="0"/>
+              <a:t>10問は必ず投げる。感想で終わらせない。数えることで、次回以降の比較ができるようになる。</a:t>
+            </a:r>
+            <a:endParaRPr lang="en-US" dirty="0"/>
+          </a:p>
+        </p:txBody>
+      </p:sp>
+      <p:sp>
+        <p:nvSpPr>
+          <p:cNvPr id="4" name="Slide Number Placeholder 3"/>
+          <p:cNvSpPr>
+            <a:spLocks noGrp="1"/>
+          </p:cNvSpPr>
+          <p:nvPr>
+            <p:ph type="sldNum" sz="quarter" idx="10"/>
+          </p:nvPr>
+        </p:nvSpPr>
+        <p:spPr/>
+        <p:txBody>
+          <a:bodyPr/>
+          <a:lstStyle/>
+          <a:p>
+            <a:fld id="{F7021451-1387-4CA6-816F-3879F97B5CBC}" type="slidenum">
+              <a:rPr lang="en-US"/>
+              <a:t>9</a:t>
             </a:fld>
             <a:endParaRPr lang="en-US"/>
           </a:p>
@@ -1680,6 +2124,1284 @@
 </p:sld>
 </file>
 
+<file path=ppt/slides/slide10.xml><?xml version="1.0" encoding="utf-8"?>
+<p:sld xmlns:a="http://schemas.openxmlformats.org/drawingml/2006/main" xmlns:r="http://schemas.openxmlformats.org/officeDocument/2006/relationships" xmlns:p="http://schemas.openxmlformats.org/presentationml/2006/main">
+  <p:cSld name="Slide 10">
+    <p:bg>
+      <p:bgPr>
+        <a:solidFill>
+          <a:srgbClr val="F6F2EA"/>
+        </a:solidFill>
+      </p:bgPr>
+    </p:bg>
+    <p:spTree>
+      <p:nvGrpSpPr>
+        <p:cNvPr id="1" name=""/>
+        <p:cNvGrpSpPr/>
+        <p:nvPr/>
+      </p:nvGrpSpPr>
+      <p:grpSpPr>
+        <a:xfrm>
+          <a:off x="0" y="0"/>
+          <a:ext cx="0" cy="0"/>
+          <a:chOff x="0" y="0"/>
+          <a:chExt cx="0" cy="0"/>
+        </a:xfrm>
+      </p:grpSpPr>
+      <p:sp>
+        <p:nvSpPr>
+          <p:cNvPr id="2" name="Text 0"/>
+          <p:cNvSpPr txBox="1"/>
+          <p:nvPr/>
+        </p:nvSpPr>
+        <p:spPr>
+          <a:xfrm>
+            <a:off x="777240" y="566928"/>
+            <a:ext cx="10607040" cy="274320"/>
+          </a:xfrm>
+          <a:prstGeom prst="rect">
+            <a:avLst/>
+          </a:prstGeom>
+          <a:noFill/>
+          <a:ln/>
+        </p:spPr>
+        <p:txBody>
+          <a:bodyPr wrap="square" lIns="0" tIns="0" rIns="0" bIns="0" rtlCol="0" anchor="ctr"/>
+          <a:lstStyle/>
+          <a:p>
+            <a:pPr indent="0" marL="0">
+              <a:buNone/>
+            </a:pPr>
+            <a:r>
+              <a:rPr lang="en-US" sz="1100" b="1" spc="250" kern="0" dirty="0">
+                <a:solidFill>
+                  <a:srgbClr val="3B6B4A"/>
+                </a:solidFill>
+                <a:latin typeface="Yu Gothic" pitchFamily="34" charset="0"/>
+                <a:ea typeface="Yu Gothic" pitchFamily="34" charset="-122"/>
+                <a:cs typeface="Yu Gothic" pitchFamily="34" charset="-120"/>
+              </a:rPr>
+              <a:t>業務への組み込み</a:t>
+            </a:r>
+            <a:endParaRPr lang="en-US" sz="1100" dirty="0"/>
+          </a:p>
+        </p:txBody>
+      </p:sp>
+      <p:sp>
+        <p:nvSpPr>
+          <p:cNvPr id="3" name="Text 1"/>
+          <p:cNvSpPr txBox="1"/>
+          <p:nvPr/>
+        </p:nvSpPr>
+        <p:spPr>
+          <a:xfrm>
+            <a:off x="777240" y="896112"/>
+            <a:ext cx="10607040" cy="640080"/>
+          </a:xfrm>
+          <a:prstGeom prst="rect">
+            <a:avLst/>
+          </a:prstGeom>
+          <a:noFill/>
+          <a:ln/>
+        </p:spPr>
+        <p:txBody>
+          <a:bodyPr wrap="square" lIns="0" tIns="0" rIns="0" bIns="0" rtlCol="0" anchor="ctr"/>
+          <a:lstStyle/>
+          <a:p>
+            <a:pPr indent="0" marL="0">
+              <a:buNone/>
+            </a:pPr>
+            <a:r>
+              <a:rPr lang="en-US" sz="2600" b="1" dirty="0">
+                <a:solidFill>
+                  <a:srgbClr val="23201D"/>
+                </a:solidFill>
+                <a:latin typeface="Yu Gothic" pitchFamily="34" charset="0"/>
+                <a:ea typeface="Yu Gothic" pitchFamily="34" charset="-122"/>
+                <a:cs typeface="Yu Gothic" pitchFamily="34" charset="-120"/>
+              </a:rPr>
+              <a:t>帰る前に決めること</a:t>
+            </a:r>
+            <a:endParaRPr lang="en-US" sz="2600" dirty="0"/>
+          </a:p>
+        </p:txBody>
+      </p:sp>
+      <p:sp>
+        <p:nvSpPr>
+          <p:cNvPr id="4" name="Text 2"/>
+          <p:cNvSpPr txBox="1"/>
+          <p:nvPr/>
+        </p:nvSpPr>
+        <p:spPr>
+          <a:xfrm>
+            <a:off x="777240" y="1572768"/>
+            <a:ext cx="10607040" cy="320040"/>
+          </a:xfrm>
+          <a:prstGeom prst="rect">
+            <a:avLst/>
+          </a:prstGeom>
+          <a:noFill/>
+          <a:ln/>
+        </p:spPr>
+        <p:txBody>
+          <a:bodyPr wrap="square" lIns="0" tIns="0" rIns="0" bIns="0" rtlCol="0" anchor="ctr"/>
+          <a:lstStyle/>
+          <a:p>
+            <a:pPr indent="0" marL="0">
+              <a:buNone/>
+            </a:pPr>
+            <a:r>
+              <a:rPr lang="en-US" sz="1250" b="1" dirty="0">
+                <a:solidFill>
+                  <a:srgbClr val="3B6B4A"/>
+                </a:solidFill>
+                <a:latin typeface="Yu Gothic" pitchFamily="34" charset="0"/>
+                <a:ea typeface="Yu Gothic" pitchFamily="34" charset="-122"/>
+                <a:cs typeface="Yu Gothic" pitchFamily="34" charset="-120"/>
+              </a:rPr>
+              <a:t>ここを決めないと、持ち帰っても使われません。紙に書きます。</a:t>
+            </a:r>
+            <a:endParaRPr lang="en-US" sz="1250" dirty="0"/>
+          </a:p>
+        </p:txBody>
+      </p:sp>
+      <p:sp>
+        <p:nvSpPr>
+          <p:cNvPr id="5" name="Shape 3"/>
+          <p:cNvSpPr/>
+          <p:nvPr/>
+        </p:nvSpPr>
+        <p:spPr>
+          <a:xfrm>
+            <a:off x="777240" y="2103120"/>
+            <a:ext cx="10607040" cy="914400"/>
+          </a:xfrm>
+          <a:prstGeom prst="rect">
+            <a:avLst/>
+          </a:prstGeom>
+          <a:solidFill>
+            <a:srgbClr val="FFFFFF"/>
+          </a:solidFill>
+          <a:ln w="12700">
+            <a:solidFill>
+              <a:srgbClr val="EDE7DB"/>
+            </a:solidFill>
+            <a:prstDash val="solid"/>
+          </a:ln>
+        </p:spPr>
+      </p:sp>
+      <p:sp>
+        <p:nvSpPr>
+          <p:cNvPr id="6" name="Shape 4"/>
+          <p:cNvSpPr/>
+          <p:nvPr/>
+        </p:nvSpPr>
+        <p:spPr>
+          <a:xfrm>
+            <a:off x="777240" y="2103120"/>
+            <a:ext cx="54864" cy="914400"/>
+          </a:xfrm>
+          <a:prstGeom prst="rect">
+            <a:avLst/>
+          </a:prstGeom>
+          <a:solidFill>
+            <a:srgbClr val="3B6B4A"/>
+          </a:solidFill>
+          <a:ln w="12700">
+            <a:solidFill>
+              <a:srgbClr val="333333"/>
+            </a:solidFill>
+            <a:prstDash val="solid"/>
+          </a:ln>
+        </p:spPr>
+      </p:sp>
+      <p:sp>
+        <p:nvSpPr>
+          <p:cNvPr id="7" name="Text 5"/>
+          <p:cNvSpPr txBox="1"/>
+          <p:nvPr/>
+        </p:nvSpPr>
+        <p:spPr>
+          <a:xfrm>
+            <a:off x="1143000" y="2176272"/>
+            <a:ext cx="2757830" cy="768096"/>
+          </a:xfrm>
+          <a:prstGeom prst="rect">
+            <a:avLst/>
+          </a:prstGeom>
+          <a:noFill/>
+          <a:ln/>
+        </p:spPr>
+        <p:txBody>
+          <a:bodyPr wrap="square" lIns="0" tIns="0" rIns="0" bIns="0" rtlCol="0" anchor="ctr"/>
+          <a:lstStyle/>
+          <a:p>
+            <a:pPr indent="0" marL="0">
+              <a:buNone/>
+            </a:pPr>
+            <a:r>
+              <a:rPr lang="en-US" sz="1400" b="1" dirty="0">
+                <a:solidFill>
+                  <a:srgbClr val="3B6B4A"/>
+                </a:solidFill>
+                <a:latin typeface="Yu Gothic" pitchFamily="34" charset="0"/>
+                <a:ea typeface="Yu Gothic" pitchFamily="34" charset="-122"/>
+                <a:cs typeface="Yu Gothic" pitchFamily="34" charset="-120"/>
+              </a:rPr>
+              <a:t>誰に使わせるか</a:t>
+            </a:r>
+            <a:endParaRPr lang="en-US" sz="1400" dirty="0"/>
+          </a:p>
+        </p:txBody>
+      </p:sp>
+      <p:sp>
+        <p:nvSpPr>
+          <p:cNvPr id="8" name="Text 6"/>
+          <p:cNvSpPr txBox="1"/>
+          <p:nvPr/>
+        </p:nvSpPr>
+        <p:spPr>
+          <a:xfrm>
+            <a:off x="4006901" y="2176272"/>
+            <a:ext cx="7011619" cy="768096"/>
+          </a:xfrm>
+          <a:prstGeom prst="rect">
+            <a:avLst/>
+          </a:prstGeom>
+          <a:noFill/>
+          <a:ln/>
+        </p:spPr>
+        <p:txBody>
+          <a:bodyPr wrap="square" lIns="0" tIns="0" rIns="0" bIns="0" rtlCol="0" anchor="ctr"/>
+          <a:lstStyle/>
+          <a:p>
+            <a:pPr indent="0" marL="0">
+              <a:lnSpc>
+                <a:spcPct val="130000"/>
+              </a:lnSpc>
+              <a:buNone/>
+            </a:pPr>
+            <a:r>
+              <a:rPr lang="en-US" sz="1250" dirty="0">
+                <a:solidFill>
+                  <a:srgbClr val="3F3933"/>
+                </a:solidFill>
+                <a:latin typeface="Yu Gothic" pitchFamily="34" charset="0"/>
+                <a:ea typeface="Yu Gothic" pitchFamily="34" charset="-122"/>
+                <a:cs typeface="Yu Gothic" pitchFamily="34" charset="-120"/>
+              </a:rPr>
+              <a:t>総務や事務など、質問を受ける側の方から始めます</a:t>
+            </a:r>
+            <a:endParaRPr lang="en-US" sz="1250" dirty="0"/>
+          </a:p>
+        </p:txBody>
+      </p:sp>
+      <p:sp>
+        <p:nvSpPr>
+          <p:cNvPr id="9" name="Shape 7"/>
+          <p:cNvSpPr/>
+          <p:nvPr/>
+        </p:nvSpPr>
+        <p:spPr>
+          <a:xfrm>
+            <a:off x="777240" y="3154680"/>
+            <a:ext cx="10607040" cy="914400"/>
+          </a:xfrm>
+          <a:prstGeom prst="rect">
+            <a:avLst/>
+          </a:prstGeom>
+          <a:solidFill>
+            <a:srgbClr val="FFFFFF"/>
+          </a:solidFill>
+          <a:ln w="12700">
+            <a:solidFill>
+              <a:srgbClr val="EDE7DB"/>
+            </a:solidFill>
+            <a:prstDash val="solid"/>
+          </a:ln>
+        </p:spPr>
+      </p:sp>
+      <p:sp>
+        <p:nvSpPr>
+          <p:cNvPr id="10" name="Shape 8"/>
+          <p:cNvSpPr/>
+          <p:nvPr/>
+        </p:nvSpPr>
+        <p:spPr>
+          <a:xfrm>
+            <a:off x="777240" y="3154680"/>
+            <a:ext cx="54864" cy="914400"/>
+          </a:xfrm>
+          <a:prstGeom prst="rect">
+            <a:avLst/>
+          </a:prstGeom>
+          <a:solidFill>
+            <a:srgbClr val="3B6B4A"/>
+          </a:solidFill>
+          <a:ln w="12700">
+            <a:solidFill>
+              <a:srgbClr val="333333"/>
+            </a:solidFill>
+            <a:prstDash val="solid"/>
+          </a:ln>
+        </p:spPr>
+      </p:sp>
+      <p:sp>
+        <p:nvSpPr>
+          <p:cNvPr id="11" name="Text 9"/>
+          <p:cNvSpPr txBox="1"/>
+          <p:nvPr/>
+        </p:nvSpPr>
+        <p:spPr>
+          <a:xfrm>
+            <a:off x="1143000" y="3227832"/>
+            <a:ext cx="2757830" cy="768096"/>
+          </a:xfrm>
+          <a:prstGeom prst="rect">
+            <a:avLst/>
+          </a:prstGeom>
+          <a:noFill/>
+          <a:ln/>
+        </p:spPr>
+        <p:txBody>
+          <a:bodyPr wrap="square" lIns="0" tIns="0" rIns="0" bIns="0" rtlCol="0" anchor="ctr"/>
+          <a:lstStyle/>
+          <a:p>
+            <a:pPr indent="0" marL="0">
+              <a:buNone/>
+            </a:pPr>
+            <a:r>
+              <a:rPr lang="en-US" sz="1400" b="1" dirty="0">
+                <a:solidFill>
+                  <a:srgbClr val="3B6B4A"/>
+                </a:solidFill>
+                <a:latin typeface="Yu Gothic" pitchFamily="34" charset="0"/>
+                <a:ea typeface="Yu Gothic" pitchFamily="34" charset="-122"/>
+                <a:cs typeface="Yu Gothic" pitchFamily="34" charset="-120"/>
+              </a:rPr>
+              <a:t>資料を更新するのは誰か</a:t>
+            </a:r>
+            <a:endParaRPr lang="en-US" sz="1400" dirty="0"/>
+          </a:p>
+        </p:txBody>
+      </p:sp>
+      <p:sp>
+        <p:nvSpPr>
+          <p:cNvPr id="12" name="Text 10"/>
+          <p:cNvSpPr txBox="1"/>
+          <p:nvPr/>
+        </p:nvSpPr>
+        <p:spPr>
+          <a:xfrm>
+            <a:off x="4006901" y="3227832"/>
+            <a:ext cx="7011619" cy="768096"/>
+          </a:xfrm>
+          <a:prstGeom prst="rect">
+            <a:avLst/>
+          </a:prstGeom>
+          <a:noFill/>
+          <a:ln/>
+        </p:spPr>
+        <p:txBody>
+          <a:bodyPr wrap="square" lIns="0" tIns="0" rIns="0" bIns="0" rtlCol="0" anchor="ctr"/>
+          <a:lstStyle/>
+          <a:p>
+            <a:pPr indent="0" marL="0">
+              <a:lnSpc>
+                <a:spcPct val="130000"/>
+              </a:lnSpc>
+              <a:buNone/>
+            </a:pPr>
+            <a:r>
+              <a:rPr lang="en-US" sz="1250" dirty="0">
+                <a:solidFill>
+                  <a:srgbClr val="3F3933"/>
+                </a:solidFill>
+                <a:latin typeface="Yu Gothic" pitchFamily="34" charset="0"/>
+                <a:ea typeface="Yu Gothic" pitchFamily="34" charset="-122"/>
+                <a:cs typeface="Yu Gothic" pitchFamily="34" charset="-120"/>
+              </a:rPr>
+              <a:t>更新の担当が決まっていないナレッジは、半年で腐ります</a:t>
+            </a:r>
+            <a:endParaRPr lang="en-US" sz="1250" dirty="0"/>
+          </a:p>
+        </p:txBody>
+      </p:sp>
+      <p:sp>
+        <p:nvSpPr>
+          <p:cNvPr id="13" name="Shape 11"/>
+          <p:cNvSpPr/>
+          <p:nvPr/>
+        </p:nvSpPr>
+        <p:spPr>
+          <a:xfrm>
+            <a:off x="777240" y="4206240"/>
+            <a:ext cx="10607040" cy="914400"/>
+          </a:xfrm>
+          <a:prstGeom prst="rect">
+            <a:avLst/>
+          </a:prstGeom>
+          <a:solidFill>
+            <a:srgbClr val="FFFFFF"/>
+          </a:solidFill>
+          <a:ln w="12700">
+            <a:solidFill>
+              <a:srgbClr val="EDE7DB"/>
+            </a:solidFill>
+            <a:prstDash val="solid"/>
+          </a:ln>
+        </p:spPr>
+      </p:sp>
+      <p:sp>
+        <p:nvSpPr>
+          <p:cNvPr id="14" name="Shape 12"/>
+          <p:cNvSpPr/>
+          <p:nvPr/>
+        </p:nvSpPr>
+        <p:spPr>
+          <a:xfrm>
+            <a:off x="777240" y="4206240"/>
+            <a:ext cx="54864" cy="914400"/>
+          </a:xfrm>
+          <a:prstGeom prst="rect">
+            <a:avLst/>
+          </a:prstGeom>
+          <a:solidFill>
+            <a:srgbClr val="3B6B4A"/>
+          </a:solidFill>
+          <a:ln w="12700">
+            <a:solidFill>
+              <a:srgbClr val="333333"/>
+            </a:solidFill>
+            <a:prstDash val="solid"/>
+          </a:ln>
+        </p:spPr>
+      </p:sp>
+      <p:sp>
+        <p:nvSpPr>
+          <p:cNvPr id="15" name="Text 13"/>
+          <p:cNvSpPr txBox="1"/>
+          <p:nvPr/>
+        </p:nvSpPr>
+        <p:spPr>
+          <a:xfrm>
+            <a:off x="1143000" y="4279392"/>
+            <a:ext cx="2757830" cy="768096"/>
+          </a:xfrm>
+          <a:prstGeom prst="rect">
+            <a:avLst/>
+          </a:prstGeom>
+          <a:noFill/>
+          <a:ln/>
+        </p:spPr>
+        <p:txBody>
+          <a:bodyPr wrap="square" lIns="0" tIns="0" rIns="0" bIns="0" rtlCol="0" anchor="ctr"/>
+          <a:lstStyle/>
+          <a:p>
+            <a:pPr indent="0" marL="0">
+              <a:buNone/>
+            </a:pPr>
+            <a:r>
+              <a:rPr lang="en-US" sz="1400" b="1" dirty="0">
+                <a:solidFill>
+                  <a:srgbClr val="3B6B4A"/>
+                </a:solidFill>
+                <a:latin typeface="Yu Gothic" pitchFamily="34" charset="0"/>
+                <a:ea typeface="Yu Gothic" pitchFamily="34" charset="-122"/>
+                <a:cs typeface="Yu Gothic" pitchFamily="34" charset="-120"/>
+              </a:rPr>
+              <a:t>不足資料は誰がいつ作るか</a:t>
+            </a:r>
+            <a:endParaRPr lang="en-US" sz="1400" dirty="0"/>
+          </a:p>
+        </p:txBody>
+      </p:sp>
+      <p:sp>
+        <p:nvSpPr>
+          <p:cNvPr id="16" name="Text 14"/>
+          <p:cNvSpPr txBox="1"/>
+          <p:nvPr/>
+        </p:nvSpPr>
+        <p:spPr>
+          <a:xfrm>
+            <a:off x="4006901" y="4279392"/>
+            <a:ext cx="7011619" cy="768096"/>
+          </a:xfrm>
+          <a:prstGeom prst="rect">
+            <a:avLst/>
+          </a:prstGeom>
+          <a:noFill/>
+          <a:ln/>
+        </p:spPr>
+        <p:txBody>
+          <a:bodyPr wrap="square" lIns="0" tIns="0" rIns="0" bIns="0" rtlCol="0" anchor="ctr"/>
+          <a:lstStyle/>
+          <a:p>
+            <a:pPr indent="0" marL="0">
+              <a:lnSpc>
+                <a:spcPct val="130000"/>
+              </a:lnSpc>
+              <a:buNone/>
+            </a:pPr>
+            <a:r>
+              <a:rPr lang="en-US" sz="1250" dirty="0">
+                <a:solidFill>
+                  <a:srgbClr val="3F3933"/>
+                </a:solidFill>
+                <a:latin typeface="Yu Gothic" pitchFamily="34" charset="0"/>
+                <a:ea typeface="Yu Gothic" pitchFamily="34" charset="-122"/>
+                <a:cs typeface="Yu Gothic" pitchFamily="34" charset="-120"/>
+              </a:rPr>
+              <a:t>5列の表の右2列を、実名と期日で埋めます</a:t>
+            </a:r>
+            <a:endParaRPr lang="en-US" sz="1250" dirty="0"/>
+          </a:p>
+        </p:txBody>
+      </p:sp>
+      <p:sp>
+        <p:nvSpPr>
+          <p:cNvPr id="17" name="Text 15"/>
+          <p:cNvSpPr txBox="1"/>
+          <p:nvPr/>
+        </p:nvSpPr>
+        <p:spPr>
+          <a:xfrm>
+            <a:off x="777240" y="6382512"/>
+            <a:ext cx="7424928" cy="256032"/>
+          </a:xfrm>
+          <a:prstGeom prst="rect">
+            <a:avLst/>
+          </a:prstGeom>
+          <a:noFill/>
+          <a:ln/>
+        </p:spPr>
+        <p:txBody>
+          <a:bodyPr wrap="square" lIns="0" tIns="0" rIns="0" bIns="0" rtlCol="0" anchor="ctr"/>
+          <a:lstStyle/>
+          <a:p>
+            <a:pPr indent="0" marL="0">
+              <a:buNone/>
+            </a:pPr>
+            <a:r>
+              <a:rPr lang="en-US" sz="900" dirty="0">
+                <a:solidFill>
+                  <a:srgbClr val="8A8177"/>
+                </a:solidFill>
+                <a:latin typeface="Yu Gothic" pitchFamily="34" charset="0"/>
+                <a:ea typeface="Yu Gothic" pitchFamily="34" charset="-122"/>
+                <a:cs typeface="Yu Gothic" pitchFamily="34" charset="-120"/>
+              </a:rPr>
+              <a:t>第8回　社内の知識を検索できるようにする</a:t>
+            </a:r>
+            <a:endParaRPr lang="en-US" sz="900" dirty="0"/>
+          </a:p>
+        </p:txBody>
+      </p:sp>
+      <p:sp>
+        <p:nvSpPr>
+          <p:cNvPr id="18" name="Text 16"/>
+          <p:cNvSpPr txBox="1"/>
+          <p:nvPr/>
+        </p:nvSpPr>
+        <p:spPr>
+          <a:xfrm>
+            <a:off x="8202168" y="6382512"/>
+            <a:ext cx="3182112" cy="256032"/>
+          </a:xfrm>
+          <a:prstGeom prst="rect">
+            <a:avLst/>
+          </a:prstGeom>
+          <a:noFill/>
+          <a:ln/>
+        </p:spPr>
+        <p:txBody>
+          <a:bodyPr wrap="square" lIns="0" tIns="0" rIns="0" bIns="0" rtlCol="0" anchor="ctr"/>
+          <a:lstStyle/>
+          <a:p>
+            <a:pPr algn="r" indent="0" marL="0">
+              <a:buNone/>
+            </a:pPr>
+            <a:r>
+              <a:rPr lang="en-US" sz="900" dirty="0">
+                <a:solidFill>
+                  <a:srgbClr val="8A8177"/>
+                </a:solidFill>
+                <a:latin typeface="Yu Gothic" pitchFamily="34" charset="0"/>
+                <a:ea typeface="Yu Gothic" pitchFamily="34" charset="-122"/>
+                <a:cs typeface="Yu Gothic" pitchFamily="34" charset="-120"/>
+              </a:rPr>
+              <a:t>組み込み</a:t>
+            </a:r>
+            <a:endParaRPr lang="en-US" sz="900" dirty="0"/>
+          </a:p>
+        </p:txBody>
+      </p:sp>
+    </p:spTree>
+  </p:cSld>
+  <p:clrMapOvr>
+    <a:masterClrMapping/>
+  </p:clrMapOvr>
+</p:sld>
+</file>
+
+<file path=ppt/slides/slide11.xml><?xml version="1.0" encoding="utf-8"?>
+<p:sld xmlns:a="http://schemas.openxmlformats.org/drawingml/2006/main" xmlns:r="http://schemas.openxmlformats.org/officeDocument/2006/relationships" xmlns:p="http://schemas.openxmlformats.org/presentationml/2006/main">
+  <p:cSld name="Slide 11">
+    <p:bg>
+      <p:bgPr>
+        <a:solidFill>
+          <a:srgbClr val="F6F2EA"/>
+        </a:solidFill>
+      </p:bgPr>
+    </p:bg>
+    <p:spTree>
+      <p:nvGrpSpPr>
+        <p:cNvPr id="1" name=""/>
+        <p:cNvGrpSpPr/>
+        <p:nvPr/>
+      </p:nvGrpSpPr>
+      <p:grpSpPr>
+        <a:xfrm>
+          <a:off x="0" y="0"/>
+          <a:ext cx="0" cy="0"/>
+          <a:chOff x="0" y="0"/>
+          <a:chExt cx="0" cy="0"/>
+        </a:xfrm>
+      </p:grpSpPr>
+      <p:sp>
+        <p:nvSpPr>
+          <p:cNvPr id="2" name="Text 0"/>
+          <p:cNvSpPr txBox="1"/>
+          <p:nvPr/>
+        </p:nvSpPr>
+        <p:spPr>
+          <a:xfrm>
+            <a:off x="777240" y="566928"/>
+            <a:ext cx="10607040" cy="274320"/>
+          </a:xfrm>
+          <a:prstGeom prst="rect">
+            <a:avLst/>
+          </a:prstGeom>
+          <a:noFill/>
+          <a:ln/>
+        </p:spPr>
+        <p:txBody>
+          <a:bodyPr wrap="square" lIns="0" tIns="0" rIns="0" bIns="0" rtlCol="0" anchor="ctr"/>
+          <a:lstStyle/>
+          <a:p>
+            <a:pPr indent="0" marL="0">
+              <a:buNone/>
+            </a:pPr>
+            <a:r>
+              <a:rPr lang="en-US" sz="1100" b="1" spc="250" kern="0" dirty="0">
+                <a:solidFill>
+                  <a:srgbClr val="B04A2F"/>
+                </a:solidFill>
+                <a:latin typeface="Yu Gothic" pitchFamily="34" charset="0"/>
+                <a:ea typeface="Yu Gothic" pitchFamily="34" charset="-122"/>
+                <a:cs typeface="Yu Gothic" pitchFamily="34" charset="-120"/>
+              </a:rPr>
+              <a:t>ここだけは</a:t>
+            </a:r>
+            <a:endParaRPr lang="en-US" sz="1100" dirty="0"/>
+          </a:p>
+        </p:txBody>
+      </p:sp>
+      <p:sp>
+        <p:nvSpPr>
+          <p:cNvPr id="3" name="Text 1"/>
+          <p:cNvSpPr txBox="1"/>
+          <p:nvPr/>
+        </p:nvSpPr>
+        <p:spPr>
+          <a:xfrm>
+            <a:off x="777240" y="1097280"/>
+            <a:ext cx="10607040" cy="640080"/>
+          </a:xfrm>
+          <a:prstGeom prst="rect">
+            <a:avLst/>
+          </a:prstGeom>
+          <a:noFill/>
+          <a:ln/>
+        </p:spPr>
+        <p:txBody>
+          <a:bodyPr wrap="square" lIns="0" tIns="0" rIns="0" bIns="0" rtlCol="0" anchor="ctr"/>
+          <a:lstStyle/>
+          <a:p>
+            <a:pPr indent="0" marL="0">
+              <a:buNone/>
+            </a:pPr>
+            <a:r>
+              <a:rPr lang="en-US" sz="2600" b="1" dirty="0">
+                <a:solidFill>
+                  <a:srgbClr val="23201D"/>
+                </a:solidFill>
+                <a:latin typeface="Yu Gothic" pitchFamily="34" charset="0"/>
+                <a:ea typeface="Yu Gothic" pitchFamily="34" charset="-122"/>
+                <a:cs typeface="Yu Gothic" pitchFamily="34" charset="-120"/>
+              </a:rPr>
+              <a:t>答えられなかった質問こそ、成果です</a:t>
+            </a:r>
+            <a:endParaRPr lang="en-US" sz="2600" dirty="0"/>
+          </a:p>
+        </p:txBody>
+      </p:sp>
+      <p:sp>
+        <p:nvSpPr>
+          <p:cNvPr id="4" name="Shape 2"/>
+          <p:cNvSpPr/>
+          <p:nvPr/>
+        </p:nvSpPr>
+        <p:spPr>
+          <a:xfrm>
+            <a:off x="777240" y="2148840"/>
+            <a:ext cx="64008" cy="2194560"/>
+          </a:xfrm>
+          <a:prstGeom prst="rect">
+            <a:avLst/>
+          </a:prstGeom>
+          <a:solidFill>
+            <a:srgbClr val="B04A2F"/>
+          </a:solidFill>
+          <a:ln w="12700">
+            <a:solidFill>
+              <a:srgbClr val="333333"/>
+            </a:solidFill>
+            <a:prstDash val="solid"/>
+          </a:ln>
+        </p:spPr>
+      </p:sp>
+      <p:sp>
+        <p:nvSpPr>
+          <p:cNvPr id="5" name="Text 3"/>
+          <p:cNvSpPr txBox="1"/>
+          <p:nvPr/>
+        </p:nvSpPr>
+        <p:spPr>
+          <a:xfrm>
+            <a:off x="1188720" y="2148840"/>
+            <a:ext cx="9966960" cy="2194560"/>
+          </a:xfrm>
+          <a:prstGeom prst="rect">
+            <a:avLst/>
+          </a:prstGeom>
+          <a:noFill/>
+          <a:ln/>
+        </p:spPr>
+        <p:txBody>
+          <a:bodyPr wrap="square" lIns="0" tIns="0" rIns="0" bIns="0" rtlCol="0" anchor="ctr"/>
+          <a:lstStyle/>
+          <a:p>
+            <a:pPr indent="0" marL="0">
+              <a:lnSpc>
+                <a:spcPct val="160000"/>
+              </a:lnSpc>
+              <a:buNone/>
+            </a:pPr>
+            <a:r>
+              <a:rPr lang="en-US" sz="1650" dirty="0">
+                <a:solidFill>
+                  <a:srgbClr val="3F3933"/>
+                </a:solidFill>
+                <a:latin typeface="Yu Gothic" pitchFamily="34" charset="0"/>
+                <a:ea typeface="Yu Gothic" pitchFamily="34" charset="-122"/>
+                <a:cs typeface="Yu Gothic" pitchFamily="34" charset="-120"/>
+              </a:rPr>
+              <a:t>それは、資料が存在しないか、社長の頭の中にしかない知識です。AIが答えられなかったということは、新しく入った社員も答えられないということです。ここは経営者の関心が最も高まる場面なので、丁寧に扱ってください。</a:t>
+            </a:r>
+            <a:endParaRPr lang="en-US" sz="1650" dirty="0"/>
+          </a:p>
+        </p:txBody>
+      </p:sp>
+      <p:sp>
+        <p:nvSpPr>
+          <p:cNvPr id="6" name="Shape 4"/>
+          <p:cNvSpPr/>
+          <p:nvPr/>
+        </p:nvSpPr>
+        <p:spPr>
+          <a:xfrm>
+            <a:off x="777240" y="4709160"/>
+            <a:ext cx="10607040" cy="960120"/>
+          </a:xfrm>
+          <a:prstGeom prst="rect">
+            <a:avLst/>
+          </a:prstGeom>
+          <a:solidFill>
+            <a:srgbClr val="EDE7DB"/>
+          </a:solidFill>
+          <a:ln w="12700">
+            <a:solidFill>
+              <a:srgbClr val="333333"/>
+            </a:solidFill>
+            <a:prstDash val="solid"/>
+          </a:ln>
+        </p:spPr>
+      </p:sp>
+      <p:sp>
+        <p:nvSpPr>
+          <p:cNvPr id="7" name="Text 5"/>
+          <p:cNvSpPr txBox="1"/>
+          <p:nvPr/>
+        </p:nvSpPr>
+        <p:spPr>
+          <a:xfrm>
+            <a:off x="1051560" y="4800600"/>
+            <a:ext cx="1463040" cy="256032"/>
+          </a:xfrm>
+          <a:prstGeom prst="rect">
+            <a:avLst/>
+          </a:prstGeom>
+          <a:noFill/>
+          <a:ln/>
+        </p:spPr>
+        <p:txBody>
+          <a:bodyPr wrap="square" lIns="0" tIns="0" rIns="0" bIns="0" rtlCol="0" anchor="ctr"/>
+          <a:lstStyle/>
+          <a:p>
+            <a:pPr indent="0" marL="0">
+              <a:buNone/>
+            </a:pPr>
+            <a:r>
+              <a:rPr lang="en-US" sz="900" b="1" spc="150" kern="0" dirty="0">
+                <a:solidFill>
+                  <a:srgbClr val="B04A2F"/>
+                </a:solidFill>
+                <a:latin typeface="Yu Gothic" pitchFamily="34" charset="0"/>
+                <a:ea typeface="Yu Gothic" pitchFamily="34" charset="-122"/>
+                <a:cs typeface="Yu Gothic" pitchFamily="34" charset="-120"/>
+              </a:rPr>
+              <a:t>他社では</a:t>
+            </a:r>
+            <a:endParaRPr lang="en-US" sz="900" dirty="0"/>
+          </a:p>
+        </p:txBody>
+      </p:sp>
+      <p:sp>
+        <p:nvSpPr>
+          <p:cNvPr id="8" name="Text 6"/>
+          <p:cNvSpPr txBox="1"/>
+          <p:nvPr/>
+        </p:nvSpPr>
+        <p:spPr>
+          <a:xfrm>
+            <a:off x="1051560" y="5029200"/>
+            <a:ext cx="10058400" cy="566928"/>
+          </a:xfrm>
+          <a:prstGeom prst="rect">
+            <a:avLst/>
+          </a:prstGeom>
+          <a:noFill/>
+          <a:ln/>
+        </p:spPr>
+        <p:txBody>
+          <a:bodyPr wrap="square" lIns="0" tIns="0" rIns="0" bIns="0" rtlCol="0" anchor="ctr"/>
+          <a:lstStyle/>
+          <a:p>
+            <a:pPr indent="0" marL="0">
+              <a:lnSpc>
+                <a:spcPct val="130000"/>
+              </a:lnSpc>
+              <a:buNone/>
+            </a:pPr>
+            <a:r>
+              <a:rPr lang="en-US" sz="1250" dirty="0">
+                <a:solidFill>
+                  <a:srgbClr val="3F3933"/>
+                </a:solidFill>
+                <a:latin typeface="Yu Gothic" pitchFamily="34" charset="0"/>
+                <a:ea typeface="Yu Gothic" pitchFamily="34" charset="-122"/>
+                <a:cs typeface="Yu Gothic" pitchFamily="34" charset="-120"/>
+              </a:rPr>
+              <a:t>営業資料を載せた会社では、いちばん役立ったのは新人教育でした。ベテランに聞きにくい質問をAIに聞けるようになり、質問の総量が増えました。</a:t>
+            </a:r>
+            <a:endParaRPr lang="en-US" sz="1250" dirty="0"/>
+          </a:p>
+        </p:txBody>
+      </p:sp>
+      <p:sp>
+        <p:nvSpPr>
+          <p:cNvPr id="9" name="Text 7"/>
+          <p:cNvSpPr txBox="1"/>
+          <p:nvPr/>
+        </p:nvSpPr>
+        <p:spPr>
+          <a:xfrm>
+            <a:off x="777240" y="6382512"/>
+            <a:ext cx="7424928" cy="256032"/>
+          </a:xfrm>
+          <a:prstGeom prst="rect">
+            <a:avLst/>
+          </a:prstGeom>
+          <a:noFill/>
+          <a:ln/>
+        </p:spPr>
+        <p:txBody>
+          <a:bodyPr wrap="square" lIns="0" tIns="0" rIns="0" bIns="0" rtlCol="0" anchor="ctr"/>
+          <a:lstStyle/>
+          <a:p>
+            <a:pPr indent="0" marL="0">
+              <a:buNone/>
+            </a:pPr>
+            <a:r>
+              <a:rPr lang="en-US" sz="900" dirty="0">
+                <a:solidFill>
+                  <a:srgbClr val="8A8177"/>
+                </a:solidFill>
+                <a:latin typeface="Yu Gothic" pitchFamily="34" charset="0"/>
+                <a:ea typeface="Yu Gothic" pitchFamily="34" charset="-122"/>
+                <a:cs typeface="Yu Gothic" pitchFamily="34" charset="-120"/>
+              </a:rPr>
+              <a:t>第8回　社内の知識を検索できるようにする</a:t>
+            </a:r>
+            <a:endParaRPr lang="en-US" sz="900" dirty="0"/>
+          </a:p>
+        </p:txBody>
+      </p:sp>
+      <p:sp>
+        <p:nvSpPr>
+          <p:cNvPr id="10" name="Text 8"/>
+          <p:cNvSpPr txBox="1"/>
+          <p:nvPr/>
+        </p:nvSpPr>
+        <p:spPr>
+          <a:xfrm>
+            <a:off x="8202168" y="6382512"/>
+            <a:ext cx="3182112" cy="256032"/>
+          </a:xfrm>
+          <a:prstGeom prst="rect">
+            <a:avLst/>
+          </a:prstGeom>
+          <a:noFill/>
+          <a:ln/>
+        </p:spPr>
+        <p:txBody>
+          <a:bodyPr wrap="square" lIns="0" tIns="0" rIns="0" bIns="0" rtlCol="0" anchor="ctr"/>
+          <a:lstStyle/>
+          <a:p>
+            <a:pPr algn="r" indent="0" marL="0">
+              <a:buNone/>
+            </a:pPr>
+            <a:r>
+              <a:rPr lang="en-US" sz="900" dirty="0">
+                <a:solidFill>
+                  <a:srgbClr val="8A8177"/>
+                </a:solidFill>
+                <a:latin typeface="Yu Gothic" pitchFamily="34" charset="0"/>
+                <a:ea typeface="Yu Gothic" pitchFamily="34" charset="-122"/>
+                <a:cs typeface="Yu Gothic" pitchFamily="34" charset="-120"/>
+              </a:rPr>
+              <a:t>ここだけは</a:t>
+            </a:r>
+            <a:endParaRPr lang="en-US" sz="900" dirty="0"/>
+          </a:p>
+        </p:txBody>
+      </p:sp>
+    </p:spTree>
+  </p:cSld>
+  <p:clrMapOvr>
+    <a:masterClrMapping/>
+  </p:clrMapOvr>
+</p:sld>
+</file>
+
+<file path=ppt/slides/slide12.xml><?xml version="1.0" encoding="utf-8"?>
+<p:sld xmlns:a="http://schemas.openxmlformats.org/drawingml/2006/main" xmlns:r="http://schemas.openxmlformats.org/officeDocument/2006/relationships" xmlns:p="http://schemas.openxmlformats.org/presentationml/2006/main">
+  <p:cSld name="Slide 12">
+    <p:bg>
+      <p:bgPr>
+        <a:solidFill>
+          <a:srgbClr val="23201D"/>
+        </a:solidFill>
+      </p:bgPr>
+    </p:bg>
+    <p:spTree>
+      <p:nvGrpSpPr>
+        <p:cNvPr id="1" name=""/>
+        <p:cNvGrpSpPr/>
+        <p:nvPr/>
+      </p:nvGrpSpPr>
+      <p:grpSpPr>
+        <a:xfrm>
+          <a:off x="0" y="0"/>
+          <a:ext cx="0" cy="0"/>
+          <a:chOff x="0" y="0"/>
+          <a:chExt cx="0" cy="0"/>
+        </a:xfrm>
+      </p:grpSpPr>
+      <p:sp>
+        <p:nvSpPr>
+          <p:cNvPr id="2" name="Text 0"/>
+          <p:cNvSpPr txBox="1"/>
+          <p:nvPr/>
+        </p:nvSpPr>
+        <p:spPr>
+          <a:xfrm>
+            <a:off x="777240" y="1280160"/>
+            <a:ext cx="10607040" cy="365760"/>
+          </a:xfrm>
+          <a:prstGeom prst="rect">
+            <a:avLst/>
+          </a:prstGeom>
+          <a:noFill/>
+          <a:ln/>
+        </p:spPr>
+        <p:txBody>
+          <a:bodyPr wrap="square" lIns="0" tIns="0" rIns="0" bIns="0" rtlCol="0" anchor="ctr"/>
+          <a:lstStyle/>
+          <a:p>
+            <a:pPr indent="0" marL="0">
+              <a:buNone/>
+            </a:pPr>
+            <a:r>
+              <a:rPr lang="en-US" sz="1200" b="1" spc="300" kern="0" dirty="0">
+                <a:solidFill>
+                  <a:srgbClr val="B04A2F"/>
+                </a:solidFill>
+                <a:latin typeface="Yu Gothic" pitchFamily="34" charset="0"/>
+                <a:ea typeface="Yu Gothic" pitchFamily="34" charset="-122"/>
+                <a:cs typeface="Yu Gothic" pitchFamily="34" charset="-120"/>
+              </a:rPr>
+              <a:t>今日の宿題</a:t>
+            </a:r>
+            <a:endParaRPr lang="en-US" sz="1200" dirty="0"/>
+          </a:p>
+        </p:txBody>
+      </p:sp>
+      <p:sp>
+        <p:nvSpPr>
+          <p:cNvPr id="3" name="Text 1"/>
+          <p:cNvSpPr txBox="1"/>
+          <p:nvPr/>
+        </p:nvSpPr>
+        <p:spPr>
+          <a:xfrm>
+            <a:off x="777240" y="1691640"/>
+            <a:ext cx="10607040" cy="640080"/>
+          </a:xfrm>
+          <a:prstGeom prst="rect">
+            <a:avLst/>
+          </a:prstGeom>
+          <a:noFill/>
+          <a:ln/>
+        </p:spPr>
+        <p:txBody>
+          <a:bodyPr wrap="square" lIns="0" tIns="0" rIns="0" bIns="0" rtlCol="0" anchor="ctr"/>
+          <a:lstStyle/>
+          <a:p>
+            <a:pPr indent="0" marL="0">
+              <a:buNone/>
+            </a:pPr>
+            <a:r>
+              <a:rPr lang="en-US" sz="3200" b="1" dirty="0">
+                <a:solidFill>
+                  <a:srgbClr val="FFFFFF"/>
+                </a:solidFill>
+                <a:latin typeface="Yu Gothic" pitchFamily="34" charset="0"/>
+                <a:ea typeface="Yu Gothic" pitchFamily="34" charset="-122"/>
+                <a:cs typeface="Yu Gothic" pitchFamily="34" charset="-120"/>
+              </a:rPr>
+              <a:t>ひとつだけ</a:t>
+            </a:r>
+            <a:endParaRPr lang="en-US" sz="3200" dirty="0"/>
+          </a:p>
+        </p:txBody>
+      </p:sp>
+      <p:sp>
+        <p:nvSpPr>
+          <p:cNvPr id="4" name="Shape 2"/>
+          <p:cNvSpPr/>
+          <p:nvPr/>
+        </p:nvSpPr>
+        <p:spPr>
+          <a:xfrm>
+            <a:off x="777240" y="2651760"/>
+            <a:ext cx="10607040" cy="1371600"/>
+          </a:xfrm>
+          <a:prstGeom prst="rect">
+            <a:avLst/>
+          </a:prstGeom>
+          <a:solidFill>
+            <a:srgbClr val="2E2A26"/>
+          </a:solidFill>
+          <a:ln w="12700">
+            <a:solidFill>
+              <a:srgbClr val="B04A2F"/>
+            </a:solidFill>
+            <a:prstDash val="solid"/>
+          </a:ln>
+        </p:spPr>
+      </p:sp>
+      <p:sp>
+        <p:nvSpPr>
+          <p:cNvPr id="5" name="Text 3"/>
+          <p:cNvSpPr txBox="1"/>
+          <p:nvPr/>
+        </p:nvSpPr>
+        <p:spPr>
+          <a:xfrm>
+            <a:off x="1234440" y="2743200"/>
+            <a:ext cx="9692640" cy="1188720"/>
+          </a:xfrm>
+          <a:prstGeom prst="rect">
+            <a:avLst/>
+          </a:prstGeom>
+          <a:noFill/>
+          <a:ln/>
+        </p:spPr>
+        <p:txBody>
+          <a:bodyPr wrap="square" lIns="0" tIns="0" rIns="0" bIns="0" rtlCol="0" anchor="ctr"/>
+          <a:lstStyle/>
+          <a:p>
+            <a:pPr indent="0" marL="0">
+              <a:lnSpc>
+                <a:spcPct val="140000"/>
+              </a:lnSpc>
+              <a:buNone/>
+            </a:pPr>
+            <a:r>
+              <a:rPr lang="en-US" sz="1900" b="1" dirty="0">
+                <a:solidFill>
+                  <a:srgbClr val="FFFFFF"/>
+                </a:solidFill>
+                <a:latin typeface="Yu Gothic" pitchFamily="34" charset="0"/>
+                <a:ea typeface="Yu Gothic" pitchFamily="34" charset="-122"/>
+                <a:cs typeface="Yu Gothic" pitchFamily="34" charset="-120"/>
+              </a:rPr>
+              <a:t>足りない資料のうち、最も簡単な1件を埋める（作る・探す・聞き出す のいずれか）。</a:t>
+            </a:r>
+            <a:endParaRPr lang="en-US" sz="1900" dirty="0"/>
+          </a:p>
+        </p:txBody>
+      </p:sp>
+      <p:sp>
+        <p:nvSpPr>
+          <p:cNvPr id="6" name="Text 4"/>
+          <p:cNvSpPr txBox="1"/>
+          <p:nvPr/>
+        </p:nvSpPr>
+        <p:spPr>
+          <a:xfrm>
+            <a:off x="777240" y="4297680"/>
+            <a:ext cx="10607040" cy="274320"/>
+          </a:xfrm>
+          <a:prstGeom prst="rect">
+            <a:avLst/>
+          </a:prstGeom>
+          <a:noFill/>
+          <a:ln/>
+        </p:spPr>
+        <p:txBody>
+          <a:bodyPr wrap="square" lIns="0" tIns="0" rIns="0" bIns="0" rtlCol="0" anchor="ctr"/>
+          <a:lstStyle/>
+          <a:p>
+            <a:pPr indent="0" marL="0">
+              <a:buNone/>
+            </a:pPr>
+            <a:r>
+              <a:rPr lang="en-US" sz="1000" b="1" spc="200" kern="0" dirty="0">
+                <a:solidFill>
+                  <a:srgbClr val="B04A2F"/>
+                </a:solidFill>
+                <a:latin typeface="Yu Gothic" pitchFamily="34" charset="0"/>
+                <a:ea typeface="Yu Gothic" pitchFamily="34" charset="-122"/>
+                <a:cs typeface="Yu Gothic" pitchFamily="34" charset="-120"/>
+              </a:rPr>
+              <a:t>なぜこの宿題か</a:t>
+            </a:r>
+            <a:endParaRPr lang="en-US" sz="1000" dirty="0"/>
+          </a:p>
+        </p:txBody>
+      </p:sp>
+      <p:sp>
+        <p:nvSpPr>
+          <p:cNvPr id="7" name="Text 5"/>
+          <p:cNvSpPr txBox="1"/>
+          <p:nvPr/>
+        </p:nvSpPr>
+        <p:spPr>
+          <a:xfrm>
+            <a:off x="777240" y="4572000"/>
+            <a:ext cx="9546336" cy="914400"/>
+          </a:xfrm>
+          <a:prstGeom prst="rect">
+            <a:avLst/>
+          </a:prstGeom>
+          <a:noFill/>
+          <a:ln/>
+        </p:spPr>
+        <p:txBody>
+          <a:bodyPr wrap="square" lIns="0" tIns="0" rIns="0" bIns="0" rtlCol="0" anchor="ctr"/>
+          <a:lstStyle/>
+          <a:p>
+            <a:pPr indent="0" marL="0">
+              <a:lnSpc>
+                <a:spcPct val="145000"/>
+              </a:lnSpc>
+              <a:buNone/>
+            </a:pPr>
+            <a:r>
+              <a:rPr lang="en-US" sz="1350" dirty="0">
+                <a:solidFill>
+                  <a:srgbClr val="CFC6B8"/>
+                </a:solidFill>
+                <a:latin typeface="Yu Gothic" pitchFamily="34" charset="0"/>
+                <a:ea typeface="Yu Gothic" pitchFamily="34" charset="-122"/>
+                <a:cs typeface="Yu Gothic" pitchFamily="34" charset="-120"/>
+              </a:rPr>
+              <a:t>リストは作った時点では紙です。1件でも埋めると、埋められるものだと分かります。いちばん簡単なものを選んでください。難しいものから始めると、止まります。</a:t>
+            </a:r>
+            <a:endParaRPr lang="en-US" sz="1350" dirty="0"/>
+          </a:p>
+        </p:txBody>
+      </p:sp>
+      <p:sp>
+        <p:nvSpPr>
+          <p:cNvPr id="8" name="Text 6"/>
+          <p:cNvSpPr txBox="1"/>
+          <p:nvPr/>
+        </p:nvSpPr>
+        <p:spPr>
+          <a:xfrm>
+            <a:off x="777240" y="6382512"/>
+            <a:ext cx="10607040" cy="256032"/>
+          </a:xfrm>
+          <a:prstGeom prst="rect">
+            <a:avLst/>
+          </a:prstGeom>
+          <a:noFill/>
+          <a:ln/>
+        </p:spPr>
+        <p:txBody>
+          <a:bodyPr wrap="square" lIns="0" tIns="0" rIns="0" bIns="0" rtlCol="0" anchor="ctr"/>
+          <a:lstStyle/>
+          <a:p>
+            <a:pPr indent="0" marL="0">
+              <a:buNone/>
+            </a:pPr>
+            <a:r>
+              <a:rPr lang="en-US" sz="900" dirty="0">
+                <a:solidFill>
+                  <a:srgbClr val="6E6558"/>
+                </a:solidFill>
+                <a:latin typeface="Yu Gothic" pitchFamily="34" charset="0"/>
+                <a:ea typeface="Yu Gothic" pitchFamily="34" charset="-122"/>
+                <a:cs typeface="Yu Gothic" pitchFamily="34" charset="-120"/>
+              </a:rPr>
+              <a:t>第8回　社内の知識を検索できるようにする</a:t>
+            </a:r>
+            <a:endParaRPr lang="en-US" sz="900" dirty="0"/>
+          </a:p>
+        </p:txBody>
+      </p:sp>
+    </p:spTree>
+  </p:cSld>
+  <p:clrMapOvr>
+    <a:masterClrMapping/>
+  </p:clrMapOvr>
+</p:sld>
+</file>
+
 <file path=ppt/slides/slide2.xml><?xml version="1.0" encoding="utf-8"?>
 <p:sld xmlns:a="http://schemas.openxmlformats.org/drawingml/2006/main" xmlns:r="http://schemas.openxmlformats.org/officeDocument/2006/relationships" xmlns:p="http://schemas.openxmlformats.org/presentationml/2006/main">
   <p:cSld name="Slide 2">
@@ -1712,7 +3434,7 @@
         </p:nvSpPr>
         <p:spPr>
           <a:xfrm>
-            <a:off x="777240" y="777240"/>
+            <a:off x="777240" y="566928"/>
             <a:ext cx="10607040" cy="274320"/>
           </a:xfrm>
           <a:prstGeom prst="rect">
@@ -1737,7 +3459,7 @@
                 <a:ea typeface="Yu Gothic" pitchFamily="34" charset="-122"/>
                 <a:cs typeface="Yu Gothic" pitchFamily="34" charset="-120"/>
               </a:rPr>
-              <a:t>今日のゴール</a:t>
+              <a:t>今日の出発点</a:t>
             </a:r>
             <a:endParaRPr lang="en-US" sz="1100" dirty="0"/>
           </a:p>
@@ -1751,27 +3473,24 @@
         </p:nvSpPr>
         <p:spPr>
           <a:xfrm>
-            <a:off x="777240" y="1280160"/>
-            <a:ext cx="9758477" cy="1828800"/>
-          </a:xfrm>
-          <a:prstGeom prst="rect">
-            <a:avLst/>
-          </a:prstGeom>
-          <a:noFill/>
-          <a:ln/>
-        </p:spPr>
-        <p:txBody>
-          <a:bodyPr wrap="square" lIns="0" tIns="0" rIns="0" bIns="0" rtlCol="0" anchor="ctr"/>
-          <a:lstStyle/>
-          <a:p>
-            <a:pPr indent="0" marL="0">
-              <a:lnSpc>
-                <a:spcPct val="145000"/>
-              </a:lnSpc>
-              <a:buNone/>
-            </a:pPr>
-            <a:r>
-              <a:rPr lang="en-US" sz="2800" b="1" dirty="0">
+            <a:off x="777240" y="896112"/>
+            <a:ext cx="10607040" cy="640080"/>
+          </a:xfrm>
+          <a:prstGeom prst="rect">
+            <a:avLst/>
+          </a:prstGeom>
+          <a:noFill/>
+          <a:ln/>
+        </p:spPr>
+        <p:txBody>
+          <a:bodyPr wrap="square" lIns="0" tIns="0" rIns="0" bIns="0" rtlCol="0" anchor="ctr"/>
+          <a:lstStyle/>
+          <a:p>
+            <a:pPr indent="0" marL="0">
+              <a:buNone/>
+            </a:pPr>
+            <a:r>
+              <a:rPr lang="en-US" sz="2600" b="1" dirty="0">
                 <a:solidFill>
                   <a:srgbClr val="23201D"/>
                 </a:solidFill>
@@ -1779,9 +3498,9 @@
                 <a:ea typeface="Yu Gothic" pitchFamily="34" charset="-122"/>
                 <a:cs typeface="Yu Gothic" pitchFamily="34" charset="-120"/>
               </a:rPr>
-              <a:t>1つの領域について、社内資料を検索できるAIを動かします。あわせて、何が足りないかを可視化します。</a:t>
-            </a:r>
-            <a:endParaRPr lang="en-US" sz="2800" dirty="0"/>
+              <a:t>知識が、特定の人の頭の中にしかありません。</a:t>
+            </a:r>
+            <a:endParaRPr lang="en-US" sz="2600" dirty="0"/>
           </a:p>
         </p:txBody>
       </p:sp>
@@ -1793,14 +3512,323 @@
         </p:nvSpPr>
         <p:spPr>
           <a:xfrm>
-            <a:off x="777240" y="3429000"/>
-            <a:ext cx="10607040" cy="18288"/>
+            <a:off x="777240" y="1783080"/>
+            <a:ext cx="10607040" cy="713232"/>
           </a:xfrm>
           <a:prstGeom prst="rect">
             <a:avLst/>
           </a:prstGeom>
           <a:solidFill>
-            <a:srgbClr val="EDE7DB"/>
+            <a:srgbClr val="FFFFFF"/>
+          </a:solidFill>
+          <a:ln w="12700">
+            <a:solidFill>
+              <a:srgbClr val="EDE7DB"/>
+            </a:solidFill>
+            <a:prstDash val="solid"/>
+          </a:ln>
+        </p:spPr>
+      </p:sp>
+      <p:sp>
+        <p:nvSpPr>
+          <p:cNvPr id="5" name="Text 3"/>
+          <p:cNvSpPr txBox="1"/>
+          <p:nvPr/>
+        </p:nvSpPr>
+        <p:spPr>
+          <a:xfrm>
+            <a:off x="1051560" y="1783080"/>
+            <a:ext cx="365760" cy="713232"/>
+          </a:xfrm>
+          <a:prstGeom prst="rect">
+            <a:avLst/>
+          </a:prstGeom>
+          <a:noFill/>
+          <a:ln/>
+        </p:spPr>
+        <p:txBody>
+          <a:bodyPr wrap="square" lIns="0" tIns="0" rIns="0" bIns="0" rtlCol="0" anchor="ctr"/>
+          <a:lstStyle/>
+          <a:p>
+            <a:pPr indent="0" marL="0">
+              <a:buNone/>
+            </a:pPr>
+            <a:r>
+              <a:rPr lang="en-US" sz="1400" dirty="0">
+                <a:solidFill>
+                  <a:srgbClr val="8A8177"/>
+                </a:solidFill>
+                <a:latin typeface="Yu Gothic" pitchFamily="34" charset="0"/>
+                <a:ea typeface="Yu Gothic" pitchFamily="34" charset="-122"/>
+                <a:cs typeface="Yu Gothic" pitchFamily="34" charset="-120"/>
+              </a:rPr>
+              <a:t>―</a:t>
+            </a:r>
+            <a:endParaRPr lang="en-US" sz="1400" dirty="0"/>
+          </a:p>
+        </p:txBody>
+      </p:sp>
+      <p:sp>
+        <p:nvSpPr>
+          <p:cNvPr id="6" name="Text 4"/>
+          <p:cNvSpPr txBox="1"/>
+          <p:nvPr/>
+        </p:nvSpPr>
+        <p:spPr>
+          <a:xfrm>
+            <a:off x="1508760" y="1783080"/>
+            <a:ext cx="9601200" cy="713232"/>
+          </a:xfrm>
+          <a:prstGeom prst="rect">
+            <a:avLst/>
+          </a:prstGeom>
+          <a:noFill/>
+          <a:ln/>
+        </p:spPr>
+        <p:txBody>
+          <a:bodyPr wrap="square" lIns="0" tIns="0" rIns="0" bIns="0" rtlCol="0" anchor="ctr"/>
+          <a:lstStyle/>
+          <a:p>
+            <a:pPr indent="0" marL="0">
+              <a:buNone/>
+            </a:pPr>
+            <a:r>
+              <a:rPr lang="en-US" sz="1500" dirty="0">
+                <a:solidFill>
+                  <a:srgbClr val="23201D"/>
+                </a:solidFill>
+                <a:latin typeface="Yu Gothic" pitchFamily="34" charset="0"/>
+                <a:ea typeface="Yu Gothic" pitchFamily="34" charset="-122"/>
+                <a:cs typeface="Yu Gothic" pitchFamily="34" charset="-120"/>
+              </a:rPr>
+              <a:t>「あれ、どこにありましたっけ」が毎週起きている</a:t>
+            </a:r>
+            <a:endParaRPr lang="en-US" sz="1500" dirty="0"/>
+          </a:p>
+        </p:txBody>
+      </p:sp>
+      <p:sp>
+        <p:nvSpPr>
+          <p:cNvPr id="7" name="Shape 5"/>
+          <p:cNvSpPr/>
+          <p:nvPr/>
+        </p:nvSpPr>
+        <p:spPr>
+          <a:xfrm>
+            <a:off x="777240" y="2624328"/>
+            <a:ext cx="10607040" cy="713232"/>
+          </a:xfrm>
+          <a:prstGeom prst="rect">
+            <a:avLst/>
+          </a:prstGeom>
+          <a:solidFill>
+            <a:srgbClr val="FFFFFF"/>
+          </a:solidFill>
+          <a:ln w="12700">
+            <a:solidFill>
+              <a:srgbClr val="EDE7DB"/>
+            </a:solidFill>
+            <a:prstDash val="solid"/>
+          </a:ln>
+        </p:spPr>
+      </p:sp>
+      <p:sp>
+        <p:nvSpPr>
+          <p:cNvPr id="8" name="Text 6"/>
+          <p:cNvSpPr txBox="1"/>
+          <p:nvPr/>
+        </p:nvSpPr>
+        <p:spPr>
+          <a:xfrm>
+            <a:off x="1051560" y="2624328"/>
+            <a:ext cx="365760" cy="713232"/>
+          </a:xfrm>
+          <a:prstGeom prst="rect">
+            <a:avLst/>
+          </a:prstGeom>
+          <a:noFill/>
+          <a:ln/>
+        </p:spPr>
+        <p:txBody>
+          <a:bodyPr wrap="square" lIns="0" tIns="0" rIns="0" bIns="0" rtlCol="0" anchor="ctr"/>
+          <a:lstStyle/>
+          <a:p>
+            <a:pPr indent="0" marL="0">
+              <a:buNone/>
+            </a:pPr>
+            <a:r>
+              <a:rPr lang="en-US" sz="1400" dirty="0">
+                <a:solidFill>
+                  <a:srgbClr val="8A8177"/>
+                </a:solidFill>
+                <a:latin typeface="Yu Gothic" pitchFamily="34" charset="0"/>
+                <a:ea typeface="Yu Gothic" pitchFamily="34" charset="-122"/>
+                <a:cs typeface="Yu Gothic" pitchFamily="34" charset="-120"/>
+              </a:rPr>
+              <a:t>―</a:t>
+            </a:r>
+            <a:endParaRPr lang="en-US" sz="1400" dirty="0"/>
+          </a:p>
+        </p:txBody>
+      </p:sp>
+      <p:sp>
+        <p:nvSpPr>
+          <p:cNvPr id="9" name="Text 7"/>
+          <p:cNvSpPr txBox="1"/>
+          <p:nvPr/>
+        </p:nvSpPr>
+        <p:spPr>
+          <a:xfrm>
+            <a:off x="1508760" y="2624328"/>
+            <a:ext cx="9601200" cy="713232"/>
+          </a:xfrm>
+          <a:prstGeom prst="rect">
+            <a:avLst/>
+          </a:prstGeom>
+          <a:noFill/>
+          <a:ln/>
+        </p:spPr>
+        <p:txBody>
+          <a:bodyPr wrap="square" lIns="0" tIns="0" rIns="0" bIns="0" rtlCol="0" anchor="ctr"/>
+          <a:lstStyle/>
+          <a:p>
+            <a:pPr indent="0" marL="0">
+              <a:buNone/>
+            </a:pPr>
+            <a:r>
+              <a:rPr lang="en-US" sz="1500" dirty="0">
+                <a:solidFill>
+                  <a:srgbClr val="23201D"/>
+                </a:solidFill>
+                <a:latin typeface="Yu Gothic" pitchFamily="34" charset="0"/>
+                <a:ea typeface="Yu Gothic" pitchFamily="34" charset="-122"/>
+                <a:cs typeface="Yu Gothic" pitchFamily="34" charset="-120"/>
+              </a:rPr>
+              <a:t>社長に聞かないと分からないことが、いくつもある</a:t>
+            </a:r>
+            <a:endParaRPr lang="en-US" sz="1500" dirty="0"/>
+          </a:p>
+        </p:txBody>
+      </p:sp>
+      <p:sp>
+        <p:nvSpPr>
+          <p:cNvPr id="10" name="Shape 8"/>
+          <p:cNvSpPr/>
+          <p:nvPr/>
+        </p:nvSpPr>
+        <p:spPr>
+          <a:xfrm>
+            <a:off x="777240" y="3465576"/>
+            <a:ext cx="10607040" cy="713232"/>
+          </a:xfrm>
+          <a:prstGeom prst="rect">
+            <a:avLst/>
+          </a:prstGeom>
+          <a:solidFill>
+            <a:srgbClr val="FFFFFF"/>
+          </a:solidFill>
+          <a:ln w="12700">
+            <a:solidFill>
+              <a:srgbClr val="EDE7DB"/>
+            </a:solidFill>
+            <a:prstDash val="solid"/>
+          </a:ln>
+        </p:spPr>
+      </p:sp>
+      <p:sp>
+        <p:nvSpPr>
+          <p:cNvPr id="11" name="Text 9"/>
+          <p:cNvSpPr txBox="1"/>
+          <p:nvPr/>
+        </p:nvSpPr>
+        <p:spPr>
+          <a:xfrm>
+            <a:off x="1051560" y="3465576"/>
+            <a:ext cx="365760" cy="713232"/>
+          </a:xfrm>
+          <a:prstGeom prst="rect">
+            <a:avLst/>
+          </a:prstGeom>
+          <a:noFill/>
+          <a:ln/>
+        </p:spPr>
+        <p:txBody>
+          <a:bodyPr wrap="square" lIns="0" tIns="0" rIns="0" bIns="0" rtlCol="0" anchor="ctr"/>
+          <a:lstStyle/>
+          <a:p>
+            <a:pPr indent="0" marL="0">
+              <a:buNone/>
+            </a:pPr>
+            <a:r>
+              <a:rPr lang="en-US" sz="1400" dirty="0">
+                <a:solidFill>
+                  <a:srgbClr val="8A8177"/>
+                </a:solidFill>
+                <a:latin typeface="Yu Gothic" pitchFamily="34" charset="0"/>
+                <a:ea typeface="Yu Gothic" pitchFamily="34" charset="-122"/>
+                <a:cs typeface="Yu Gothic" pitchFamily="34" charset="-120"/>
+              </a:rPr>
+              <a:t>―</a:t>
+            </a:r>
+            <a:endParaRPr lang="en-US" sz="1400" dirty="0"/>
+          </a:p>
+        </p:txBody>
+      </p:sp>
+      <p:sp>
+        <p:nvSpPr>
+          <p:cNvPr id="12" name="Text 10"/>
+          <p:cNvSpPr txBox="1"/>
+          <p:nvPr/>
+        </p:nvSpPr>
+        <p:spPr>
+          <a:xfrm>
+            <a:off x="1508760" y="3465576"/>
+            <a:ext cx="9601200" cy="713232"/>
+          </a:xfrm>
+          <a:prstGeom prst="rect">
+            <a:avLst/>
+          </a:prstGeom>
+          <a:noFill/>
+          <a:ln/>
+        </p:spPr>
+        <p:txBody>
+          <a:bodyPr wrap="square" lIns="0" tIns="0" rIns="0" bIns="0" rtlCol="0" anchor="ctr"/>
+          <a:lstStyle/>
+          <a:p>
+            <a:pPr indent="0" marL="0">
+              <a:buNone/>
+            </a:pPr>
+            <a:r>
+              <a:rPr lang="en-US" sz="1500" dirty="0">
+                <a:solidFill>
+                  <a:srgbClr val="23201D"/>
+                </a:solidFill>
+                <a:latin typeface="Yu Gothic" pitchFamily="34" charset="0"/>
+                <a:ea typeface="Yu Gothic" pitchFamily="34" charset="-122"/>
+                <a:cs typeface="Yu Gothic" pitchFamily="34" charset="-120"/>
+              </a:rPr>
+              <a:t>定着を阻む要因として、ノウハウの偏在は調査でも上位に入ります</a:t>
+            </a:r>
+            <a:endParaRPr lang="en-US" sz="1500" dirty="0"/>
+          </a:p>
+        </p:txBody>
+      </p:sp>
+      <p:sp>
+        <p:nvSpPr>
+          <p:cNvPr id="13" name="Shape 11"/>
+          <p:cNvSpPr/>
+          <p:nvPr/>
+        </p:nvSpPr>
+        <p:spPr>
+          <a:xfrm>
+            <a:off x="777240" y="4526280"/>
+            <a:ext cx="10607040" cy="914400"/>
+          </a:xfrm>
+          <a:prstGeom prst="rect">
+            <a:avLst/>
+          </a:prstGeom>
+          <a:solidFill>
+            <a:srgbClr val="B04A2F"/>
           </a:solidFill>
           <a:ln w="12700">
             <a:solidFill>
@@ -1812,14 +3840,14 @@
       </p:sp>
       <p:sp>
         <p:nvSpPr>
-          <p:cNvPr id="5" name="Text 3"/>
-          <p:cNvSpPr txBox="1"/>
-          <p:nvPr/>
-        </p:nvSpPr>
-        <p:spPr>
-          <a:xfrm>
-            <a:off x="777240" y="3657600"/>
-            <a:ext cx="9015984" cy="822960"/>
+          <p:cNvPr id="14" name="Text 12"/>
+          <p:cNvSpPr txBox="1"/>
+          <p:nvPr/>
+        </p:nvSpPr>
+        <p:spPr>
+          <a:xfrm>
+            <a:off x="1143000" y="4526280"/>
+            <a:ext cx="9875520" cy="914400"/>
           </a:xfrm>
           <a:prstGeom prst="rect">
             <a:avLst/>
@@ -1833,84 +3861,59 @@
           <a:p>
             <a:pPr indent="0" marL="0">
               <a:lnSpc>
-                <a:spcPct val="140000"/>
+                <a:spcPct val="130000"/>
               </a:lnSpc>
               <a:buNone/>
             </a:pPr>
             <a:r>
-              <a:rPr lang="en-US" sz="1500" dirty="0">
-                <a:solidFill>
-                  <a:srgbClr val="5A534A"/>
-                </a:solidFill>
-                <a:latin typeface="Yu Gothic" pitchFamily="34" charset="0"/>
-                <a:ea typeface="Yu Gothic" pitchFamily="34" charset="-122"/>
-                <a:cs typeface="Yu Gothic" pitchFamily="34" charset="-120"/>
-              </a:rPr>
-              <a:t>ノウハウが特定の人に偏っている状態への、直接の打ち手です。</a:t>
-            </a:r>
-            <a:endParaRPr lang="en-US" sz="1500" dirty="0"/>
-          </a:p>
-        </p:txBody>
-      </p:sp>
-      <p:sp>
-        <p:nvSpPr>
-          <p:cNvPr id="6" name="Shape 4"/>
-          <p:cNvSpPr/>
-          <p:nvPr/>
-        </p:nvSpPr>
-        <p:spPr>
-          <a:xfrm>
-            <a:off x="777240" y="4846320"/>
-            <a:ext cx="10607040" cy="777240"/>
-          </a:xfrm>
-          <a:prstGeom prst="rect">
-            <a:avLst/>
-          </a:prstGeom>
-          <a:solidFill>
-            <a:srgbClr val="EDE7DB"/>
-          </a:solidFill>
-          <a:ln w="12700">
-            <a:solidFill>
-              <a:srgbClr val="333333"/>
-            </a:solidFill>
-            <a:prstDash val="solid"/>
-          </a:ln>
-        </p:spPr>
-      </p:sp>
-      <p:sp>
-        <p:nvSpPr>
-          <p:cNvPr id="7" name="Text 5"/>
-          <p:cNvSpPr txBox="1"/>
-          <p:nvPr/>
-        </p:nvSpPr>
-        <p:spPr>
-          <a:xfrm>
-            <a:off x="960120" y="4956048"/>
-            <a:ext cx="1956816" cy="237744"/>
-          </a:xfrm>
-          <a:prstGeom prst="rect">
-            <a:avLst/>
-          </a:prstGeom>
-          <a:noFill/>
-          <a:ln/>
-        </p:spPr>
-        <p:txBody>
-          <a:bodyPr wrap="square" lIns="0" tIns="0" rIns="0" bIns="0" rtlCol="0" anchor="ctr"/>
-          <a:lstStyle/>
-          <a:p>
-            <a:pPr indent="0" marL="0">
-              <a:buNone/>
-            </a:pPr>
-            <a:r>
-              <a:rPr lang="en-US" sz="900" b="1" dirty="0">
-                <a:solidFill>
-                  <a:srgbClr val="B04A2F"/>
-                </a:solidFill>
-                <a:latin typeface="Yu Gothic" pitchFamily="34" charset="0"/>
-                <a:ea typeface="Yu Gothic" pitchFamily="34" charset="-122"/>
-                <a:cs typeface="Yu Gothic" pitchFamily="34" charset="-120"/>
-              </a:rPr>
-              <a:t>0-15分</a:t>
+              <a:rPr lang="en-US" sz="1800" b="1" dirty="0">
+                <a:solidFill>
+                  <a:srgbClr val="FFFFFF"/>
+                </a:solidFill>
+                <a:latin typeface="Yu Gothic" pitchFamily="34" charset="0"/>
+                <a:ea typeface="Yu Gothic" pitchFamily="34" charset="-122"/>
+                <a:cs typeface="Yu Gothic" pitchFamily="34" charset="-120"/>
+              </a:rPr>
+              <a:t>今日つくるのは検索AIですが、本当の成果物は「足りない資料の一覧」です。</a:t>
+            </a:r>
+            <a:endParaRPr lang="en-US" sz="1800" dirty="0"/>
+          </a:p>
+        </p:txBody>
+      </p:sp>
+      <p:sp>
+        <p:nvSpPr>
+          <p:cNvPr id="15" name="Text 13"/>
+          <p:cNvSpPr txBox="1"/>
+          <p:nvPr/>
+        </p:nvSpPr>
+        <p:spPr>
+          <a:xfrm>
+            <a:off x="777240" y="6382512"/>
+            <a:ext cx="7424928" cy="256032"/>
+          </a:xfrm>
+          <a:prstGeom prst="rect">
+            <a:avLst/>
+          </a:prstGeom>
+          <a:noFill/>
+          <a:ln/>
+        </p:spPr>
+        <p:txBody>
+          <a:bodyPr wrap="square" lIns="0" tIns="0" rIns="0" bIns="0" rtlCol="0" anchor="ctr"/>
+          <a:lstStyle/>
+          <a:p>
+            <a:pPr indent="0" marL="0">
+              <a:buNone/>
+            </a:pPr>
+            <a:r>
+              <a:rPr lang="en-US" sz="900" dirty="0">
+                <a:solidFill>
+                  <a:srgbClr val="8A8177"/>
+                </a:solidFill>
+                <a:latin typeface="Yu Gothic" pitchFamily="34" charset="0"/>
+                <a:ea typeface="Yu Gothic" pitchFamily="34" charset="-122"/>
+                <a:cs typeface="Yu Gothic" pitchFamily="34" charset="-120"/>
+              </a:rPr>
+              <a:t>第8回　社内の知識を検索できるようにする</a:t>
             </a:r>
             <a:endParaRPr lang="en-US" sz="900" dirty="0"/>
           </a:p>
@@ -1918,377 +3921,26 @@
       </p:sp>
       <p:sp>
         <p:nvSpPr>
-          <p:cNvPr id="8" name="Text 6"/>
-          <p:cNvSpPr txBox="1"/>
-          <p:nvPr/>
-        </p:nvSpPr>
-        <p:spPr>
-          <a:xfrm>
-            <a:off x="960120" y="5193792"/>
-            <a:ext cx="1956816" cy="365760"/>
-          </a:xfrm>
-          <a:prstGeom prst="rect">
-            <a:avLst/>
-          </a:prstGeom>
-          <a:noFill/>
-          <a:ln/>
-        </p:spPr>
-        <p:txBody>
-          <a:bodyPr wrap="square" lIns="0" tIns="0" rIns="0" bIns="0" rtlCol="0" anchor="ctr"/>
-          <a:lstStyle/>
-          <a:p>
-            <a:pPr indent="0" marL="0">
-              <a:buNone/>
-            </a:pPr>
-            <a:r>
-              <a:rPr lang="en-US" sz="1100" dirty="0">
-                <a:solidFill>
-                  <a:srgbClr val="23201D"/>
-                </a:solidFill>
-                <a:latin typeface="Yu Gothic" pitchFamily="34" charset="0"/>
-                <a:ea typeface="Yu Gothic" pitchFamily="34" charset="-122"/>
-                <a:cs typeface="Yu Gothic" pitchFamily="34" charset="-120"/>
-              </a:rPr>
-              <a:t>前回の宿題を実物で</a:t>
-            </a:r>
-            <a:endParaRPr lang="en-US" sz="1100" dirty="0"/>
-          </a:p>
-        </p:txBody>
-      </p:sp>
-      <p:sp>
-        <p:nvSpPr>
-          <p:cNvPr id="9" name="Text 7"/>
-          <p:cNvSpPr txBox="1"/>
-          <p:nvPr/>
-        </p:nvSpPr>
-        <p:spPr>
-          <a:xfrm>
-            <a:off x="3008376" y="4956048"/>
-            <a:ext cx="1956816" cy="237744"/>
-          </a:xfrm>
-          <a:prstGeom prst="rect">
-            <a:avLst/>
-          </a:prstGeom>
-          <a:noFill/>
-          <a:ln/>
-        </p:spPr>
-        <p:txBody>
-          <a:bodyPr wrap="square" lIns="0" tIns="0" rIns="0" bIns="0" rtlCol="0" anchor="ctr"/>
-          <a:lstStyle/>
-          <a:p>
-            <a:pPr indent="0" marL="0">
-              <a:buNone/>
-            </a:pPr>
-            <a:r>
-              <a:rPr lang="en-US" sz="900" b="1" dirty="0">
-                <a:solidFill>
-                  <a:srgbClr val="B04A2F"/>
-                </a:solidFill>
-                <a:latin typeface="Yu Gothic" pitchFamily="34" charset="0"/>
-                <a:ea typeface="Yu Gothic" pitchFamily="34" charset="-122"/>
-                <a:cs typeface="Yu Gothic" pitchFamily="34" charset="-120"/>
-              </a:rPr>
-              <a:t>15-35分</a:t>
-            </a:r>
-            <a:endParaRPr lang="en-US" sz="900" dirty="0"/>
-          </a:p>
-        </p:txBody>
-      </p:sp>
-      <p:sp>
-        <p:nvSpPr>
-          <p:cNvPr id="10" name="Text 8"/>
-          <p:cNvSpPr txBox="1"/>
-          <p:nvPr/>
-        </p:nvSpPr>
-        <p:spPr>
-          <a:xfrm>
-            <a:off x="3008376" y="5193792"/>
-            <a:ext cx="1956816" cy="365760"/>
-          </a:xfrm>
-          <a:prstGeom prst="rect">
-            <a:avLst/>
-          </a:prstGeom>
-          <a:noFill/>
-          <a:ln/>
-        </p:spPr>
-        <p:txBody>
-          <a:bodyPr wrap="square" lIns="0" tIns="0" rIns="0" bIns="0" rtlCol="0" anchor="ctr"/>
-          <a:lstStyle/>
-          <a:p>
-            <a:pPr indent="0" marL="0">
-              <a:buNone/>
-            </a:pPr>
-            <a:r>
-              <a:rPr lang="en-US" sz="1100" dirty="0">
-                <a:solidFill>
-                  <a:srgbClr val="23201D"/>
-                </a:solidFill>
-                <a:latin typeface="Yu Gothic" pitchFamily="34" charset="0"/>
-                <a:ea typeface="Yu Gothic" pitchFamily="34" charset="-122"/>
-                <a:cs typeface="Yu Gothic" pitchFamily="34" charset="-120"/>
-              </a:rPr>
-              <a:t>テーマとデモ</a:t>
-            </a:r>
-            <a:endParaRPr lang="en-US" sz="1100" dirty="0"/>
-          </a:p>
-        </p:txBody>
-      </p:sp>
-      <p:sp>
-        <p:nvSpPr>
-          <p:cNvPr id="11" name="Text 9"/>
-          <p:cNvSpPr txBox="1"/>
-          <p:nvPr/>
-        </p:nvSpPr>
-        <p:spPr>
-          <a:xfrm>
-            <a:off x="5056632" y="4956048"/>
-            <a:ext cx="1956816" cy="237744"/>
-          </a:xfrm>
-          <a:prstGeom prst="rect">
-            <a:avLst/>
-          </a:prstGeom>
-          <a:noFill/>
-          <a:ln/>
-        </p:spPr>
-        <p:txBody>
-          <a:bodyPr wrap="square" lIns="0" tIns="0" rIns="0" bIns="0" rtlCol="0" anchor="ctr"/>
-          <a:lstStyle/>
-          <a:p>
-            <a:pPr indent="0" marL="0">
-              <a:buNone/>
-            </a:pPr>
-            <a:r>
-              <a:rPr lang="en-US" sz="900" b="1" dirty="0">
-                <a:solidFill>
-                  <a:srgbClr val="B04A2F"/>
-                </a:solidFill>
-                <a:latin typeface="Yu Gothic" pitchFamily="34" charset="0"/>
-                <a:ea typeface="Yu Gothic" pitchFamily="34" charset="-122"/>
-                <a:cs typeface="Yu Gothic" pitchFamily="34" charset="-120"/>
-              </a:rPr>
-              <a:t>35-90分</a:t>
-            </a:r>
-            <a:endParaRPr lang="en-US" sz="900" dirty="0"/>
-          </a:p>
-        </p:txBody>
-      </p:sp>
-      <p:sp>
-        <p:nvSpPr>
-          <p:cNvPr id="12" name="Text 10"/>
-          <p:cNvSpPr txBox="1"/>
-          <p:nvPr/>
-        </p:nvSpPr>
-        <p:spPr>
-          <a:xfrm>
-            <a:off x="5056632" y="5193792"/>
-            <a:ext cx="1956816" cy="365760"/>
-          </a:xfrm>
-          <a:prstGeom prst="rect">
-            <a:avLst/>
-          </a:prstGeom>
-          <a:noFill/>
-          <a:ln/>
-        </p:spPr>
-        <p:txBody>
-          <a:bodyPr wrap="square" lIns="0" tIns="0" rIns="0" bIns="0" rtlCol="0" anchor="ctr"/>
-          <a:lstStyle/>
-          <a:p>
-            <a:pPr indent="0" marL="0">
-              <a:buNone/>
-            </a:pPr>
-            <a:r>
-              <a:rPr lang="en-US" sz="1100" dirty="0">
-                <a:solidFill>
-                  <a:srgbClr val="23201D"/>
-                </a:solidFill>
-                <a:latin typeface="Yu Gothic" pitchFamily="34" charset="0"/>
-                <a:ea typeface="Yu Gothic" pitchFamily="34" charset="-122"/>
-                <a:cs typeface="Yu Gothic" pitchFamily="34" charset="-120"/>
-              </a:rPr>
-              <a:t>一緒に手を動かす</a:t>
-            </a:r>
-            <a:endParaRPr lang="en-US" sz="1100" dirty="0"/>
-          </a:p>
-        </p:txBody>
-      </p:sp>
-      <p:sp>
-        <p:nvSpPr>
-          <p:cNvPr id="13" name="Text 11"/>
-          <p:cNvSpPr txBox="1"/>
-          <p:nvPr/>
-        </p:nvSpPr>
-        <p:spPr>
-          <a:xfrm>
-            <a:off x="7104888" y="4956048"/>
-            <a:ext cx="1956816" cy="237744"/>
-          </a:xfrm>
-          <a:prstGeom prst="rect">
-            <a:avLst/>
-          </a:prstGeom>
-          <a:noFill/>
-          <a:ln/>
-        </p:spPr>
-        <p:txBody>
-          <a:bodyPr wrap="square" lIns="0" tIns="0" rIns="0" bIns="0" rtlCol="0" anchor="ctr"/>
-          <a:lstStyle/>
-          <a:p>
-            <a:pPr indent="0" marL="0">
-              <a:buNone/>
-            </a:pPr>
-            <a:r>
-              <a:rPr lang="en-US" sz="900" b="1" dirty="0">
-                <a:solidFill>
-                  <a:srgbClr val="B04A2F"/>
-                </a:solidFill>
-                <a:latin typeface="Yu Gothic" pitchFamily="34" charset="0"/>
-                <a:ea typeface="Yu Gothic" pitchFamily="34" charset="-122"/>
-                <a:cs typeface="Yu Gothic" pitchFamily="34" charset="-120"/>
-              </a:rPr>
-              <a:t>90-105分</a:t>
-            </a:r>
-            <a:endParaRPr lang="en-US" sz="900" dirty="0"/>
-          </a:p>
-        </p:txBody>
-      </p:sp>
-      <p:sp>
-        <p:nvSpPr>
-          <p:cNvPr id="14" name="Text 12"/>
-          <p:cNvSpPr txBox="1"/>
-          <p:nvPr/>
-        </p:nvSpPr>
-        <p:spPr>
-          <a:xfrm>
-            <a:off x="7104888" y="5193792"/>
-            <a:ext cx="1956816" cy="365760"/>
-          </a:xfrm>
-          <a:prstGeom prst="rect">
-            <a:avLst/>
-          </a:prstGeom>
-          <a:noFill/>
-          <a:ln/>
-        </p:spPr>
-        <p:txBody>
-          <a:bodyPr wrap="square" lIns="0" tIns="0" rIns="0" bIns="0" rtlCol="0" anchor="ctr"/>
-          <a:lstStyle/>
-          <a:p>
-            <a:pPr indent="0" marL="0">
-              <a:buNone/>
-            </a:pPr>
-            <a:r>
-              <a:rPr lang="en-US" sz="1100" dirty="0">
-                <a:solidFill>
-                  <a:srgbClr val="23201D"/>
-                </a:solidFill>
-                <a:latin typeface="Yu Gothic" pitchFamily="34" charset="0"/>
-                <a:ea typeface="Yu Gothic" pitchFamily="34" charset="-122"/>
-                <a:cs typeface="Yu Gothic" pitchFamily="34" charset="-120"/>
-              </a:rPr>
-              <a:t>業務への組み込み</a:t>
-            </a:r>
-            <a:endParaRPr lang="en-US" sz="1100" dirty="0"/>
-          </a:p>
-        </p:txBody>
-      </p:sp>
-      <p:sp>
-        <p:nvSpPr>
-          <p:cNvPr id="15" name="Text 13"/>
-          <p:cNvSpPr txBox="1"/>
-          <p:nvPr/>
-        </p:nvSpPr>
-        <p:spPr>
-          <a:xfrm>
-            <a:off x="9153144" y="4956048"/>
-            <a:ext cx="1956816" cy="237744"/>
-          </a:xfrm>
-          <a:prstGeom prst="rect">
-            <a:avLst/>
-          </a:prstGeom>
-          <a:noFill/>
-          <a:ln/>
-        </p:spPr>
-        <p:txBody>
-          <a:bodyPr wrap="square" lIns="0" tIns="0" rIns="0" bIns="0" rtlCol="0" anchor="ctr"/>
-          <a:lstStyle/>
-          <a:p>
-            <a:pPr indent="0" marL="0">
-              <a:buNone/>
-            </a:pPr>
-            <a:r>
-              <a:rPr lang="en-US" sz="900" b="1" dirty="0">
-                <a:solidFill>
-                  <a:srgbClr val="B04A2F"/>
-                </a:solidFill>
-                <a:latin typeface="Yu Gothic" pitchFamily="34" charset="0"/>
-                <a:ea typeface="Yu Gothic" pitchFamily="34" charset="-122"/>
-                <a:cs typeface="Yu Gothic" pitchFamily="34" charset="-120"/>
-              </a:rPr>
-              <a:t>105-120分</a:t>
-            </a:r>
-            <a:endParaRPr lang="en-US" sz="900" dirty="0"/>
-          </a:p>
-        </p:txBody>
-      </p:sp>
-      <p:sp>
-        <p:nvSpPr>
           <p:cNvPr id="16" name="Text 14"/>
           <p:cNvSpPr txBox="1"/>
           <p:nvPr/>
         </p:nvSpPr>
         <p:spPr>
           <a:xfrm>
-            <a:off x="9153144" y="5193792"/>
-            <a:ext cx="1956816" cy="365760"/>
-          </a:xfrm>
-          <a:prstGeom prst="rect">
-            <a:avLst/>
-          </a:prstGeom>
-          <a:noFill/>
-          <a:ln/>
-        </p:spPr>
-        <p:txBody>
-          <a:bodyPr wrap="square" lIns="0" tIns="0" rIns="0" bIns="0" rtlCol="0" anchor="ctr"/>
-          <a:lstStyle/>
-          <a:p>
-            <a:pPr indent="0" marL="0">
-              <a:buNone/>
-            </a:pPr>
-            <a:r>
-              <a:rPr lang="en-US" sz="1100" dirty="0">
-                <a:solidFill>
-                  <a:srgbClr val="23201D"/>
-                </a:solidFill>
-                <a:latin typeface="Yu Gothic" pitchFamily="34" charset="0"/>
-                <a:ea typeface="Yu Gothic" pitchFamily="34" charset="-122"/>
-                <a:cs typeface="Yu Gothic" pitchFamily="34" charset="-120"/>
-              </a:rPr>
-              <a:t>宿題・記録</a:t>
-            </a:r>
-            <a:endParaRPr lang="en-US" sz="1100" dirty="0"/>
-          </a:p>
-        </p:txBody>
-      </p:sp>
-      <p:sp>
-        <p:nvSpPr>
-          <p:cNvPr id="17" name="Text 15"/>
-          <p:cNvSpPr txBox="1"/>
-          <p:nvPr/>
-        </p:nvSpPr>
-        <p:spPr>
-          <a:xfrm>
-            <a:off x="777240" y="6355080"/>
-            <a:ext cx="7424928" cy="274320"/>
-          </a:xfrm>
-          <a:prstGeom prst="rect">
-            <a:avLst/>
-          </a:prstGeom>
-          <a:noFill/>
-          <a:ln/>
-        </p:spPr>
-        <p:txBody>
-          <a:bodyPr wrap="square" lIns="0" tIns="0" rIns="0" bIns="0" rtlCol="0" anchor="ctr"/>
-          <a:lstStyle/>
-          <a:p>
-            <a:pPr indent="0" marL="0">
+            <a:off x="8202168" y="6382512"/>
+            <a:ext cx="3182112" cy="256032"/>
+          </a:xfrm>
+          <a:prstGeom prst="rect">
+            <a:avLst/>
+          </a:prstGeom>
+          <a:noFill/>
+          <a:ln/>
+        </p:spPr>
+        <p:txBody>
+          <a:bodyPr wrap="square" lIns="0" tIns="0" rIns="0" bIns="0" rtlCol="0" anchor="ctr"/>
+          <a:lstStyle/>
+          <a:p>
+            <a:pPr algn="r" indent="0" marL="0">
               <a:buNone/>
             </a:pPr>
             <a:r>
@@ -2300,46 +3952,7 @@
                 <a:ea typeface="Yu Gothic" pitchFamily="34" charset="-122"/>
                 <a:cs typeface="Yu Gothic" pitchFamily="34" charset="-120"/>
               </a:rPr>
-              <a:t>第8回　社内の知識を検索できるようにする</a:t>
-            </a:r>
-            <a:endParaRPr lang="en-US" sz="900" dirty="0"/>
-          </a:p>
-        </p:txBody>
-      </p:sp>
-      <p:sp>
-        <p:nvSpPr>
-          <p:cNvPr id="18" name="Text 16"/>
-          <p:cNvSpPr txBox="1"/>
-          <p:nvPr/>
-        </p:nvSpPr>
-        <p:spPr>
-          <a:xfrm>
-            <a:off x="8202168" y="6355080"/>
-            <a:ext cx="3182112" cy="274320"/>
-          </a:xfrm>
-          <a:prstGeom prst="rect">
-            <a:avLst/>
-          </a:prstGeom>
-          <a:noFill/>
-          <a:ln/>
-        </p:spPr>
-        <p:txBody>
-          <a:bodyPr wrap="square" lIns="0" tIns="0" rIns="0" bIns="0" rtlCol="0" anchor="ctr"/>
-          <a:lstStyle/>
-          <a:p>
-            <a:pPr algn="r" indent="0" marL="0">
-              <a:buNone/>
-            </a:pPr>
-            <a:r>
-              <a:rPr lang="en-US" sz="900" dirty="0">
-                <a:solidFill>
-                  <a:srgbClr val="8A8177"/>
-                </a:solidFill>
-                <a:latin typeface="Yu Gothic" pitchFamily="34" charset="0"/>
-                <a:ea typeface="Yu Gothic" pitchFamily="34" charset="-122"/>
-                <a:cs typeface="Yu Gothic" pitchFamily="34" charset="-120"/>
-              </a:rPr>
-              <a:t>今日のゴール</a:t>
+              <a:t>出発点</a:t>
             </a:r>
             <a:endParaRPr lang="en-US" sz="900" dirty="0"/>
           </a:p>
@@ -2385,7 +3998,7 @@
         </p:nvSpPr>
         <p:spPr>
           <a:xfrm>
-            <a:off x="777240" y="640080"/>
+            <a:off x="777240" y="566928"/>
             <a:ext cx="10607040" cy="274320"/>
           </a:xfrm>
           <a:prstGeom prst="rect">
@@ -2410,7 +4023,7 @@
                 <a:ea typeface="Yu Gothic" pitchFamily="34" charset="-122"/>
                 <a:cs typeface="Yu Gothic" pitchFamily="34" charset="-120"/>
               </a:rPr>
-              <a:t>考え方</a:t>
+              <a:t>今日のゴール</a:t>
             </a:r>
             <a:endParaRPr lang="en-US" sz="1100" dirty="0"/>
           </a:p>
@@ -2424,24 +4037,27 @@
         </p:nvSpPr>
         <p:spPr>
           <a:xfrm>
-            <a:off x="777240" y="960120"/>
-            <a:ext cx="10607040" cy="640080"/>
-          </a:xfrm>
-          <a:prstGeom prst="rect">
-            <a:avLst/>
-          </a:prstGeom>
-          <a:noFill/>
-          <a:ln/>
-        </p:spPr>
-        <p:txBody>
-          <a:bodyPr wrap="square" lIns="0" tIns="0" rIns="0" bIns="0" rtlCol="0" anchor="ctr"/>
-          <a:lstStyle/>
-          <a:p>
-            <a:pPr indent="0" marL="0">
-              <a:buNone/>
-            </a:pPr>
-            <a:r>
-              <a:rPr lang="en-US" sz="2700" b="1" dirty="0">
+            <a:off x="777240" y="1143000"/>
+            <a:ext cx="9864547" cy="1645920"/>
+          </a:xfrm>
+          <a:prstGeom prst="rect">
+            <a:avLst/>
+          </a:prstGeom>
+          <a:noFill/>
+          <a:ln/>
+        </p:spPr>
+        <p:txBody>
+          <a:bodyPr wrap="square" lIns="0" tIns="0" rIns="0" bIns="0" rtlCol="0" anchor="ctr"/>
+          <a:lstStyle/>
+          <a:p>
+            <a:pPr indent="0" marL="0">
+              <a:lnSpc>
+                <a:spcPct val="145000"/>
+              </a:lnSpc>
+              <a:buNone/>
+            </a:pPr>
+            <a:r>
+              <a:rPr lang="en-US" sz="2600" b="1" dirty="0">
                 <a:solidFill>
                   <a:srgbClr val="23201D"/>
                 </a:solidFill>
@@ -2449,9 +4065,9 @@
                 <a:ea typeface="Yu Gothic" pitchFamily="34" charset="-122"/>
                 <a:cs typeface="Yu Gothic" pitchFamily="34" charset="-120"/>
               </a:rPr>
-              <a:t>精度は、3分類で数えます</a:t>
-            </a:r>
-            <a:endParaRPr lang="en-US" sz="2700" dirty="0"/>
+              <a:t>1つの領域について、社内資料を検索できるAIを動かします。あわせて、何が足りないかを可視化します。</a:t>
+            </a:r>
+            <a:endParaRPr lang="en-US" sz="2600" dirty="0"/>
           </a:p>
         </p:txBody>
       </p:sp>
@@ -2463,18 +4079,18 @@
         </p:nvSpPr>
         <p:spPr>
           <a:xfrm>
-            <a:off x="777240" y="1783080"/>
-            <a:ext cx="10607040" cy="1167384"/>
+            <a:off x="777240" y="3063240"/>
+            <a:ext cx="10607040" cy="18288"/>
           </a:xfrm>
           <a:prstGeom prst="rect">
             <a:avLst/>
           </a:prstGeom>
           <a:solidFill>
-            <a:srgbClr val="FFFFFF"/>
+            <a:srgbClr val="EDE7DB"/>
           </a:solidFill>
           <a:ln w="12700">
             <a:solidFill>
-              <a:srgbClr val="EDE7DB"/>
+              <a:srgbClr val="333333"/>
             </a:solidFill>
             <a:prstDash val="solid"/>
           </a:ln>
@@ -2482,24 +4098,66 @@
       </p:sp>
       <p:sp>
         <p:nvSpPr>
-          <p:cNvPr id="5" name="Shape 3"/>
+          <p:cNvPr id="5" name="Text 3"/>
+          <p:cNvSpPr txBox="1"/>
+          <p:nvPr/>
+        </p:nvSpPr>
+        <p:spPr>
+          <a:xfrm>
+            <a:off x="777240" y="3291840"/>
+            <a:ext cx="9334195" cy="1005840"/>
+          </a:xfrm>
+          <a:prstGeom prst="rect">
+            <a:avLst/>
+          </a:prstGeom>
+          <a:noFill/>
+          <a:ln/>
+        </p:spPr>
+        <p:txBody>
+          <a:bodyPr wrap="square" lIns="0" tIns="0" rIns="0" bIns="0" rtlCol="0" anchor="ctr"/>
+          <a:lstStyle/>
+          <a:p>
+            <a:pPr indent="0" marL="0">
+              <a:lnSpc>
+                <a:spcPct val="140000"/>
+              </a:lnSpc>
+              <a:buNone/>
+            </a:pPr>
+            <a:r>
+              <a:rPr lang="en-US" sz="1450" dirty="0">
+                <a:solidFill>
+                  <a:srgbClr val="5A534A"/>
+                </a:solidFill>
+                <a:latin typeface="Yu Gothic" pitchFamily="34" charset="0"/>
+                <a:ea typeface="Yu Gothic" pitchFamily="34" charset="-122"/>
+                <a:cs typeface="Yu Gothic" pitchFamily="34" charset="-120"/>
+              </a:rPr>
+              <a:t>今日は、作ることより「答えられなかった質問」を集めることに価値があります。</a:t>
+            </a:r>
+            <a:endParaRPr lang="en-US" sz="1450" dirty="0"/>
+          </a:p>
+        </p:txBody>
+      </p:sp>
+      <p:sp>
+        <p:nvSpPr>
+          <p:cNvPr id="6" name="Shape 4"/>
           <p:cNvSpPr/>
           <p:nvPr/>
         </p:nvSpPr>
         <p:spPr>
           <a:xfrm>
-            <a:off x="1033272" y="2174748"/>
-            <a:ext cx="384048" cy="384048"/>
-          </a:xfrm>
-          <a:prstGeom prst="ellipse">
+            <a:off x="777240" y="4754880"/>
+            <a:ext cx="10607040" cy="822960"/>
+          </a:xfrm>
+          <a:prstGeom prst="rect">
             <a:avLst/>
           </a:prstGeom>
           <a:solidFill>
-            <a:srgbClr val="B04A2F"/>
+            <a:srgbClr val="EDE7DB"/>
           </a:solidFill>
           <a:ln w="12700">
             <a:solidFill>
-              <a:srgbClr val="B04A2F"/>
+              <a:srgbClr val="333333"/>
             </a:solidFill>
             <a:prstDash val="solid"/>
           </a:ln>
@@ -2507,69 +4165,69 @@
       </p:sp>
       <p:sp>
         <p:nvSpPr>
-          <p:cNvPr id="6" name="Text 4"/>
-          <p:cNvSpPr txBox="1"/>
-          <p:nvPr/>
-        </p:nvSpPr>
-        <p:spPr>
-          <a:xfrm>
-            <a:off x="1033272" y="2174748"/>
-            <a:ext cx="384048" cy="384048"/>
-          </a:xfrm>
-          <a:prstGeom prst="rect">
-            <a:avLst/>
-          </a:prstGeom>
-          <a:noFill/>
-          <a:ln/>
-        </p:spPr>
-        <p:txBody>
-          <a:bodyPr wrap="square" lIns="0" tIns="0" rIns="0" bIns="0" rtlCol="0" anchor="ctr"/>
-          <a:lstStyle/>
-          <a:p>
-            <a:pPr algn="ctr" indent="0" marL="0">
-              <a:buNone/>
-            </a:pPr>
-            <a:r>
-              <a:rPr lang="en-US" sz="1400" b="1" dirty="0">
-                <a:solidFill>
-                  <a:srgbClr val="FFFFFF"/>
-                </a:solidFill>
-                <a:latin typeface="Yu Gothic" pitchFamily="34" charset="0"/>
-                <a:ea typeface="Yu Gothic" pitchFamily="34" charset="-122"/>
-                <a:cs typeface="Yu Gothic" pitchFamily="34" charset="-120"/>
-              </a:rPr>
-              <a:t>1</a:t>
-            </a:r>
-            <a:endParaRPr lang="en-US" sz="1400" dirty="0"/>
-          </a:p>
-        </p:txBody>
-      </p:sp>
-      <p:sp>
-        <p:nvSpPr>
           <p:cNvPr id="7" name="Text 5"/>
           <p:cNvSpPr txBox="1"/>
           <p:nvPr/>
         </p:nvSpPr>
         <p:spPr>
           <a:xfrm>
-            <a:off x="1645920" y="1874520"/>
-            <a:ext cx="3394253" cy="984504"/>
-          </a:xfrm>
-          <a:prstGeom prst="rect">
-            <a:avLst/>
-          </a:prstGeom>
-          <a:noFill/>
-          <a:ln/>
-        </p:spPr>
-        <p:txBody>
-          <a:bodyPr wrap="square" lIns="0" tIns="0" rIns="0" bIns="0" rtlCol="0" anchor="ctr"/>
-          <a:lstStyle/>
-          <a:p>
-            <a:pPr indent="0" marL="0">
-              <a:buNone/>
-            </a:pPr>
-            <a:r>
-              <a:rPr lang="en-US" sz="1500" b="1" dirty="0">
+            <a:off x="960120" y="4873752"/>
+            <a:ext cx="1956816" cy="237744"/>
+          </a:xfrm>
+          <a:prstGeom prst="rect">
+            <a:avLst/>
+          </a:prstGeom>
+          <a:noFill/>
+          <a:ln/>
+        </p:spPr>
+        <p:txBody>
+          <a:bodyPr wrap="square" lIns="0" tIns="0" rIns="0" bIns="0" rtlCol="0" anchor="ctr"/>
+          <a:lstStyle/>
+          <a:p>
+            <a:pPr indent="0" marL="0">
+              <a:buNone/>
+            </a:pPr>
+            <a:r>
+              <a:rPr lang="en-US" sz="900" b="1" dirty="0">
+                <a:solidFill>
+                  <a:srgbClr val="B04A2F"/>
+                </a:solidFill>
+                <a:latin typeface="Yu Gothic" pitchFamily="34" charset="0"/>
+                <a:ea typeface="Yu Gothic" pitchFamily="34" charset="-122"/>
+                <a:cs typeface="Yu Gothic" pitchFamily="34" charset="-120"/>
+              </a:rPr>
+              <a:t>0-15分</a:t>
+            </a:r>
+            <a:endParaRPr lang="en-US" sz="900" dirty="0"/>
+          </a:p>
+        </p:txBody>
+      </p:sp>
+      <p:sp>
+        <p:nvSpPr>
+          <p:cNvPr id="8" name="Text 6"/>
+          <p:cNvSpPr txBox="1"/>
+          <p:nvPr/>
+        </p:nvSpPr>
+        <p:spPr>
+          <a:xfrm>
+            <a:off x="960120" y="5111496"/>
+            <a:ext cx="1956816" cy="384048"/>
+          </a:xfrm>
+          <a:prstGeom prst="rect">
+            <a:avLst/>
+          </a:prstGeom>
+          <a:noFill/>
+          <a:ln/>
+        </p:spPr>
+        <p:txBody>
+          <a:bodyPr wrap="square" lIns="0" tIns="0" rIns="0" bIns="0" rtlCol="0" anchor="ctr"/>
+          <a:lstStyle/>
+          <a:p>
+            <a:pPr indent="0" marL="0">
+              <a:buNone/>
+            </a:pPr>
+            <a:r>
+              <a:rPr lang="en-US" sz="1100" dirty="0">
                 <a:solidFill>
                   <a:srgbClr val="23201D"/>
                 </a:solidFill>
@@ -2577,103 +4235,89 @@
                 <a:ea typeface="Yu Gothic" pitchFamily="34" charset="-122"/>
                 <a:cs typeface="Yu Gothic" pitchFamily="34" charset="-120"/>
               </a:rPr>
-              <a:t>○ 正しく答えた</a:t>
-            </a:r>
-            <a:endParaRPr lang="en-US" sz="1500" dirty="0"/>
-          </a:p>
-        </p:txBody>
-      </p:sp>
-      <p:sp>
-        <p:nvSpPr>
-          <p:cNvPr id="8" name="Text 6"/>
-          <p:cNvSpPr txBox="1"/>
-          <p:nvPr/>
-        </p:nvSpPr>
-        <p:spPr>
-          <a:xfrm>
-            <a:off x="5146243" y="1874520"/>
-            <a:ext cx="5963717" cy="984504"/>
-          </a:xfrm>
-          <a:prstGeom prst="rect">
-            <a:avLst/>
-          </a:prstGeom>
-          <a:noFill/>
-          <a:ln/>
-        </p:spPr>
-        <p:txBody>
-          <a:bodyPr wrap="square" lIns="0" tIns="0" rIns="0" bIns="0" rtlCol="0" anchor="ctr"/>
-          <a:lstStyle/>
-          <a:p>
-            <a:pPr indent="0" marL="0">
-              <a:lnSpc>
-                <a:spcPct val="130000"/>
-              </a:lnSpc>
-              <a:buNone/>
-            </a:pPr>
-            <a:r>
-              <a:rPr lang="en-US" sz="1250" dirty="0">
-                <a:solidFill>
-                  <a:srgbClr val="5A534A"/>
-                </a:solidFill>
-                <a:latin typeface="Yu Gothic" pitchFamily="34" charset="0"/>
-                <a:ea typeface="Yu Gothic" pitchFamily="34" charset="-122"/>
-                <a:cs typeface="Yu Gothic" pitchFamily="34" charset="-120"/>
-              </a:rPr>
-              <a:t>資料の記載と一致している</a:t>
-            </a:r>
-            <a:endParaRPr lang="en-US" sz="1250" dirty="0"/>
-          </a:p>
-        </p:txBody>
-      </p:sp>
-      <p:sp>
-        <p:nvSpPr>
-          <p:cNvPr id="9" name="Shape 7"/>
-          <p:cNvSpPr/>
-          <p:nvPr/>
-        </p:nvSpPr>
-        <p:spPr>
-          <a:xfrm>
-            <a:off x="777240" y="3096768"/>
-            <a:ext cx="10607040" cy="1167384"/>
-          </a:xfrm>
-          <a:prstGeom prst="rect">
-            <a:avLst/>
-          </a:prstGeom>
-          <a:solidFill>
-            <a:srgbClr val="FFFFFF"/>
-          </a:solidFill>
-          <a:ln w="12700">
-            <a:solidFill>
-              <a:srgbClr val="EDE7DB"/>
-            </a:solidFill>
-            <a:prstDash val="solid"/>
-          </a:ln>
-        </p:spPr>
-      </p:sp>
-      <p:sp>
-        <p:nvSpPr>
-          <p:cNvPr id="10" name="Shape 8"/>
-          <p:cNvSpPr/>
-          <p:nvPr/>
-        </p:nvSpPr>
-        <p:spPr>
-          <a:xfrm>
-            <a:off x="1033272" y="3488436"/>
-            <a:ext cx="384048" cy="384048"/>
-          </a:xfrm>
-          <a:prstGeom prst="ellipse">
-            <a:avLst/>
-          </a:prstGeom>
-          <a:solidFill>
-            <a:srgbClr val="B04A2F"/>
-          </a:solidFill>
-          <a:ln w="12700">
-            <a:solidFill>
-              <a:srgbClr val="B04A2F"/>
-            </a:solidFill>
-            <a:prstDash val="solid"/>
-          </a:ln>
-        </p:spPr>
+              <a:t>前回の宿題を実物で</a:t>
+            </a:r>
+            <a:endParaRPr lang="en-US" sz="1100" dirty="0"/>
+          </a:p>
+        </p:txBody>
+      </p:sp>
+      <p:sp>
+        <p:nvSpPr>
+          <p:cNvPr id="9" name="Text 7"/>
+          <p:cNvSpPr txBox="1"/>
+          <p:nvPr/>
+        </p:nvSpPr>
+        <p:spPr>
+          <a:xfrm>
+            <a:off x="3008376" y="4873752"/>
+            <a:ext cx="1956816" cy="237744"/>
+          </a:xfrm>
+          <a:prstGeom prst="rect">
+            <a:avLst/>
+          </a:prstGeom>
+          <a:noFill/>
+          <a:ln/>
+        </p:spPr>
+        <p:txBody>
+          <a:bodyPr wrap="square" lIns="0" tIns="0" rIns="0" bIns="0" rtlCol="0" anchor="ctr"/>
+          <a:lstStyle/>
+          <a:p>
+            <a:pPr indent="0" marL="0">
+              <a:buNone/>
+            </a:pPr>
+            <a:r>
+              <a:rPr lang="en-US" sz="900" b="1" dirty="0">
+                <a:solidFill>
+                  <a:srgbClr val="B04A2F"/>
+                </a:solidFill>
+                <a:latin typeface="Yu Gothic" pitchFamily="34" charset="0"/>
+                <a:ea typeface="Yu Gothic" pitchFamily="34" charset="-122"/>
+                <a:cs typeface="Yu Gothic" pitchFamily="34" charset="-120"/>
+              </a:rPr>
+              <a:t>15-35分</a:t>
+            </a:r>
+            <a:endParaRPr lang="en-US" sz="900" dirty="0"/>
+          </a:p>
+        </p:txBody>
+      </p:sp>
+      <p:sp>
+        <p:nvSpPr>
+          <p:cNvPr id="10" name="Text 8"/>
+          <p:cNvSpPr txBox="1"/>
+          <p:nvPr/>
+        </p:nvSpPr>
+        <p:spPr>
+          <a:xfrm>
+            <a:off x="3008376" y="5111496"/>
+            <a:ext cx="1956816" cy="384048"/>
+          </a:xfrm>
+          <a:prstGeom prst="rect">
+            <a:avLst/>
+          </a:prstGeom>
+          <a:noFill/>
+          <a:ln/>
+        </p:spPr>
+        <p:txBody>
+          <a:bodyPr wrap="square" lIns="0" tIns="0" rIns="0" bIns="0" rtlCol="0" anchor="ctr"/>
+          <a:lstStyle/>
+          <a:p>
+            <a:pPr indent="0" marL="0">
+              <a:buNone/>
+            </a:pPr>
+            <a:r>
+              <a:rPr lang="en-US" sz="1100" dirty="0">
+                <a:solidFill>
+                  <a:srgbClr val="23201D"/>
+                </a:solidFill>
+                <a:latin typeface="Yu Gothic" pitchFamily="34" charset="0"/>
+                <a:ea typeface="Yu Gothic" pitchFamily="34" charset="-122"/>
+                <a:cs typeface="Yu Gothic" pitchFamily="34" charset="-120"/>
+              </a:rPr>
+              <a:t>テーマとデモ</a:t>
+            </a:r>
+            <a:endParaRPr lang="en-US" sz="1100" dirty="0"/>
+          </a:p>
+        </p:txBody>
       </p:sp>
       <p:sp>
         <p:nvSpPr>
@@ -2683,34 +4327,34 @@
         </p:nvSpPr>
         <p:spPr>
           <a:xfrm>
-            <a:off x="1033272" y="3488436"/>
-            <a:ext cx="384048" cy="384048"/>
-          </a:xfrm>
-          <a:prstGeom prst="rect">
-            <a:avLst/>
-          </a:prstGeom>
-          <a:noFill/>
-          <a:ln/>
-        </p:spPr>
-        <p:txBody>
-          <a:bodyPr wrap="square" lIns="0" tIns="0" rIns="0" bIns="0" rtlCol="0" anchor="ctr"/>
-          <a:lstStyle/>
-          <a:p>
-            <a:pPr algn="ctr" indent="0" marL="0">
-              <a:buNone/>
-            </a:pPr>
-            <a:r>
-              <a:rPr lang="en-US" sz="1400" b="1" dirty="0">
-                <a:solidFill>
-                  <a:srgbClr val="FFFFFF"/>
-                </a:solidFill>
-                <a:latin typeface="Yu Gothic" pitchFamily="34" charset="0"/>
-                <a:ea typeface="Yu Gothic" pitchFamily="34" charset="-122"/>
-                <a:cs typeface="Yu Gothic" pitchFamily="34" charset="-120"/>
-              </a:rPr>
-              <a:t>2</a:t>
-            </a:r>
-            <a:endParaRPr lang="en-US" sz="1400" dirty="0"/>
+            <a:off x="5056632" y="4873752"/>
+            <a:ext cx="1956816" cy="237744"/>
+          </a:xfrm>
+          <a:prstGeom prst="rect">
+            <a:avLst/>
+          </a:prstGeom>
+          <a:noFill/>
+          <a:ln/>
+        </p:spPr>
+        <p:txBody>
+          <a:bodyPr wrap="square" lIns="0" tIns="0" rIns="0" bIns="0" rtlCol="0" anchor="ctr"/>
+          <a:lstStyle/>
+          <a:p>
+            <a:pPr indent="0" marL="0">
+              <a:buNone/>
+            </a:pPr>
+            <a:r>
+              <a:rPr lang="en-US" sz="900" b="1" dirty="0">
+                <a:solidFill>
+                  <a:srgbClr val="B04A2F"/>
+                </a:solidFill>
+                <a:latin typeface="Yu Gothic" pitchFamily="34" charset="0"/>
+                <a:ea typeface="Yu Gothic" pitchFamily="34" charset="-122"/>
+                <a:cs typeface="Yu Gothic" pitchFamily="34" charset="-120"/>
+              </a:rPr>
+              <a:t>35-90分</a:t>
+            </a:r>
+            <a:endParaRPr lang="en-US" sz="900" dirty="0"/>
           </a:p>
         </p:txBody>
       </p:sp>
@@ -2722,24 +4366,24 @@
         </p:nvSpPr>
         <p:spPr>
           <a:xfrm>
-            <a:off x="1645920" y="3188208"/>
-            <a:ext cx="3394253" cy="984504"/>
-          </a:xfrm>
-          <a:prstGeom prst="rect">
-            <a:avLst/>
-          </a:prstGeom>
-          <a:noFill/>
-          <a:ln/>
-        </p:spPr>
-        <p:txBody>
-          <a:bodyPr wrap="square" lIns="0" tIns="0" rIns="0" bIns="0" rtlCol="0" anchor="ctr"/>
-          <a:lstStyle/>
-          <a:p>
-            <a:pPr indent="0" marL="0">
-              <a:buNone/>
-            </a:pPr>
-            <a:r>
-              <a:rPr lang="en-US" sz="1500" b="1" dirty="0">
+            <a:off x="5056632" y="5111496"/>
+            <a:ext cx="1956816" cy="384048"/>
+          </a:xfrm>
+          <a:prstGeom prst="rect">
+            <a:avLst/>
+          </a:prstGeom>
+          <a:noFill/>
+          <a:ln/>
+        </p:spPr>
+        <p:txBody>
+          <a:bodyPr wrap="square" lIns="0" tIns="0" rIns="0" bIns="0" rtlCol="0" anchor="ctr"/>
+          <a:lstStyle/>
+          <a:p>
+            <a:pPr indent="0" marL="0">
+              <a:buNone/>
+            </a:pPr>
+            <a:r>
+              <a:rPr lang="en-US" sz="1100" dirty="0">
                 <a:solidFill>
                   <a:srgbClr val="23201D"/>
                 </a:solidFill>
@@ -2747,9 +4391,9 @@
                 <a:ea typeface="Yu Gothic" pitchFamily="34" charset="-122"/>
                 <a:cs typeface="Yu Gothic" pitchFamily="34" charset="-120"/>
               </a:rPr>
-              <a:t>△「記載がありません」と答えた</a:t>
-            </a:r>
-            <a:endParaRPr lang="en-US" sz="1500" dirty="0"/>
+              <a:t>一緒に手を動かす</a:t>
+            </a:r>
+            <a:endParaRPr lang="en-US" sz="1100" dirty="0"/>
           </a:p>
         </p:txBody>
       </p:sp>
@@ -2761,89 +4405,114 @@
         </p:nvSpPr>
         <p:spPr>
           <a:xfrm>
-            <a:off x="5146243" y="3188208"/>
-            <a:ext cx="5963717" cy="984504"/>
-          </a:xfrm>
-          <a:prstGeom prst="rect">
-            <a:avLst/>
-          </a:prstGeom>
-          <a:noFill/>
-          <a:ln/>
-        </p:spPr>
-        <p:txBody>
-          <a:bodyPr wrap="square" lIns="0" tIns="0" rIns="0" bIns="0" rtlCol="0" anchor="ctr"/>
-          <a:lstStyle/>
-          <a:p>
-            <a:pPr indent="0" marL="0">
-              <a:lnSpc>
-                <a:spcPct val="130000"/>
-              </a:lnSpc>
-              <a:buNone/>
-            </a:pPr>
-            <a:r>
-              <a:rPr lang="en-US" sz="1250" dirty="0">
-                <a:solidFill>
-                  <a:srgbClr val="5A534A"/>
-                </a:solidFill>
-                <a:latin typeface="Yu Gothic" pitchFamily="34" charset="0"/>
-                <a:ea typeface="Yu Gothic" pitchFamily="34" charset="-122"/>
-                <a:cs typeface="Yu Gothic" pitchFamily="34" charset="-120"/>
-              </a:rPr>
-              <a:t>正しい振る舞いです。×ではありません</a:t>
-            </a:r>
-            <a:endParaRPr lang="en-US" sz="1250" dirty="0"/>
-          </a:p>
-        </p:txBody>
-      </p:sp>
-      <p:sp>
-        <p:nvSpPr>
-          <p:cNvPr id="14" name="Shape 12"/>
-          <p:cNvSpPr/>
-          <p:nvPr/>
-        </p:nvSpPr>
-        <p:spPr>
-          <a:xfrm>
-            <a:off x="777240" y="4410456"/>
-            <a:ext cx="10607040" cy="1167384"/>
-          </a:xfrm>
-          <a:prstGeom prst="rect">
-            <a:avLst/>
-          </a:prstGeom>
-          <a:solidFill>
-            <a:srgbClr val="FFFFFF"/>
-          </a:solidFill>
-          <a:ln w="12700">
-            <a:solidFill>
-              <a:srgbClr val="EDE7DB"/>
-            </a:solidFill>
-            <a:prstDash val="solid"/>
-          </a:ln>
-        </p:spPr>
-      </p:sp>
-      <p:sp>
-        <p:nvSpPr>
-          <p:cNvPr id="15" name="Shape 13"/>
-          <p:cNvSpPr/>
-          <p:nvPr/>
-        </p:nvSpPr>
-        <p:spPr>
-          <a:xfrm>
-            <a:off x="1033272" y="4802124"/>
-            <a:ext cx="384048" cy="384048"/>
-          </a:xfrm>
-          <a:prstGeom prst="ellipse">
-            <a:avLst/>
-          </a:prstGeom>
-          <a:solidFill>
-            <a:srgbClr val="B04A2F"/>
-          </a:solidFill>
-          <a:ln w="12700">
-            <a:solidFill>
-              <a:srgbClr val="B04A2F"/>
-            </a:solidFill>
-            <a:prstDash val="solid"/>
-          </a:ln>
-        </p:spPr>
+            <a:off x="7104888" y="4873752"/>
+            <a:ext cx="1956816" cy="237744"/>
+          </a:xfrm>
+          <a:prstGeom prst="rect">
+            <a:avLst/>
+          </a:prstGeom>
+          <a:noFill/>
+          <a:ln/>
+        </p:spPr>
+        <p:txBody>
+          <a:bodyPr wrap="square" lIns="0" tIns="0" rIns="0" bIns="0" rtlCol="0" anchor="ctr"/>
+          <a:lstStyle/>
+          <a:p>
+            <a:pPr indent="0" marL="0">
+              <a:buNone/>
+            </a:pPr>
+            <a:r>
+              <a:rPr lang="en-US" sz="900" b="1" dirty="0">
+                <a:solidFill>
+                  <a:srgbClr val="B04A2F"/>
+                </a:solidFill>
+                <a:latin typeface="Yu Gothic" pitchFamily="34" charset="0"/>
+                <a:ea typeface="Yu Gothic" pitchFamily="34" charset="-122"/>
+                <a:cs typeface="Yu Gothic" pitchFamily="34" charset="-120"/>
+              </a:rPr>
+              <a:t>90-105分</a:t>
+            </a:r>
+            <a:endParaRPr lang="en-US" sz="900" dirty="0"/>
+          </a:p>
+        </p:txBody>
+      </p:sp>
+      <p:sp>
+        <p:nvSpPr>
+          <p:cNvPr id="14" name="Text 12"/>
+          <p:cNvSpPr txBox="1"/>
+          <p:nvPr/>
+        </p:nvSpPr>
+        <p:spPr>
+          <a:xfrm>
+            <a:off x="7104888" y="5111496"/>
+            <a:ext cx="1956816" cy="384048"/>
+          </a:xfrm>
+          <a:prstGeom prst="rect">
+            <a:avLst/>
+          </a:prstGeom>
+          <a:noFill/>
+          <a:ln/>
+        </p:spPr>
+        <p:txBody>
+          <a:bodyPr wrap="square" lIns="0" tIns="0" rIns="0" bIns="0" rtlCol="0" anchor="ctr"/>
+          <a:lstStyle/>
+          <a:p>
+            <a:pPr indent="0" marL="0">
+              <a:buNone/>
+            </a:pPr>
+            <a:r>
+              <a:rPr lang="en-US" sz="1100" dirty="0">
+                <a:solidFill>
+                  <a:srgbClr val="23201D"/>
+                </a:solidFill>
+                <a:latin typeface="Yu Gothic" pitchFamily="34" charset="0"/>
+                <a:ea typeface="Yu Gothic" pitchFamily="34" charset="-122"/>
+                <a:cs typeface="Yu Gothic" pitchFamily="34" charset="-120"/>
+              </a:rPr>
+              <a:t>業務への組み込み</a:t>
+            </a:r>
+            <a:endParaRPr lang="en-US" sz="1100" dirty="0"/>
+          </a:p>
+        </p:txBody>
+      </p:sp>
+      <p:sp>
+        <p:nvSpPr>
+          <p:cNvPr id="15" name="Text 13"/>
+          <p:cNvSpPr txBox="1"/>
+          <p:nvPr/>
+        </p:nvSpPr>
+        <p:spPr>
+          <a:xfrm>
+            <a:off x="9153144" y="4873752"/>
+            <a:ext cx="1956816" cy="237744"/>
+          </a:xfrm>
+          <a:prstGeom prst="rect">
+            <a:avLst/>
+          </a:prstGeom>
+          <a:noFill/>
+          <a:ln/>
+        </p:spPr>
+        <p:txBody>
+          <a:bodyPr wrap="square" lIns="0" tIns="0" rIns="0" bIns="0" rtlCol="0" anchor="ctr"/>
+          <a:lstStyle/>
+          <a:p>
+            <a:pPr indent="0" marL="0">
+              <a:buNone/>
+            </a:pPr>
+            <a:r>
+              <a:rPr lang="en-US" sz="900" b="1" dirty="0">
+                <a:solidFill>
+                  <a:srgbClr val="B04A2F"/>
+                </a:solidFill>
+                <a:latin typeface="Yu Gothic" pitchFamily="34" charset="0"/>
+                <a:ea typeface="Yu Gothic" pitchFamily="34" charset="-122"/>
+                <a:cs typeface="Yu Gothic" pitchFamily="34" charset="-120"/>
+              </a:rPr>
+              <a:t>105-120分</a:t>
+            </a:r>
+            <a:endParaRPr lang="en-US" sz="900" dirty="0"/>
+          </a:p>
+        </p:txBody>
       </p:sp>
       <p:sp>
         <p:nvSpPr>
@@ -2853,34 +4522,34 @@
         </p:nvSpPr>
         <p:spPr>
           <a:xfrm>
-            <a:off x="1033272" y="4802124"/>
-            <a:ext cx="384048" cy="384048"/>
-          </a:xfrm>
-          <a:prstGeom prst="rect">
-            <a:avLst/>
-          </a:prstGeom>
-          <a:noFill/>
-          <a:ln/>
-        </p:spPr>
-        <p:txBody>
-          <a:bodyPr wrap="square" lIns="0" tIns="0" rIns="0" bIns="0" rtlCol="0" anchor="ctr"/>
-          <a:lstStyle/>
-          <a:p>
-            <a:pPr algn="ctr" indent="0" marL="0">
-              <a:buNone/>
-            </a:pPr>
-            <a:r>
-              <a:rPr lang="en-US" sz="1400" b="1" dirty="0">
-                <a:solidFill>
-                  <a:srgbClr val="FFFFFF"/>
-                </a:solidFill>
-                <a:latin typeface="Yu Gothic" pitchFamily="34" charset="0"/>
-                <a:ea typeface="Yu Gothic" pitchFamily="34" charset="-122"/>
-                <a:cs typeface="Yu Gothic" pitchFamily="34" charset="-120"/>
-              </a:rPr>
-              <a:t>3</a:t>
-            </a:r>
-            <a:endParaRPr lang="en-US" sz="1400" dirty="0"/>
+            <a:off x="9153144" y="5111496"/>
+            <a:ext cx="1956816" cy="384048"/>
+          </a:xfrm>
+          <a:prstGeom prst="rect">
+            <a:avLst/>
+          </a:prstGeom>
+          <a:noFill/>
+          <a:ln/>
+        </p:spPr>
+        <p:txBody>
+          <a:bodyPr wrap="square" lIns="0" tIns="0" rIns="0" bIns="0" rtlCol="0" anchor="ctr"/>
+          <a:lstStyle/>
+          <a:p>
+            <a:pPr indent="0" marL="0">
+              <a:buNone/>
+            </a:pPr>
+            <a:r>
+              <a:rPr lang="en-US" sz="1100" dirty="0">
+                <a:solidFill>
+                  <a:srgbClr val="23201D"/>
+                </a:solidFill>
+                <a:latin typeface="Yu Gothic" pitchFamily="34" charset="0"/>
+                <a:ea typeface="Yu Gothic" pitchFamily="34" charset="-122"/>
+                <a:cs typeface="Yu Gothic" pitchFamily="34" charset="-120"/>
+              </a:rPr>
+              <a:t>宿題・記録</a:t>
+            </a:r>
+            <a:endParaRPr lang="en-US" sz="1100" dirty="0"/>
           </a:p>
         </p:txBody>
       </p:sp>
@@ -2892,34 +4561,34 @@
         </p:nvSpPr>
         <p:spPr>
           <a:xfrm>
-            <a:off x="1645920" y="4501896"/>
-            <a:ext cx="3394253" cy="984504"/>
-          </a:xfrm>
-          <a:prstGeom prst="rect">
-            <a:avLst/>
-          </a:prstGeom>
-          <a:noFill/>
-          <a:ln/>
-        </p:spPr>
-        <p:txBody>
-          <a:bodyPr wrap="square" lIns="0" tIns="0" rIns="0" bIns="0" rtlCol="0" anchor="ctr"/>
-          <a:lstStyle/>
-          <a:p>
-            <a:pPr indent="0" marL="0">
-              <a:buNone/>
-            </a:pPr>
-            <a:r>
-              <a:rPr lang="en-US" sz="1500" b="1" dirty="0">
-                <a:solidFill>
-                  <a:srgbClr val="23201D"/>
-                </a:solidFill>
-                <a:latin typeface="Yu Gothic" pitchFamily="34" charset="0"/>
-                <a:ea typeface="Yu Gothic" pitchFamily="34" charset="-122"/>
-                <a:cs typeface="Yu Gothic" pitchFamily="34" charset="-120"/>
-              </a:rPr>
-              <a:t>× 間違えた・それらしい嘘</a:t>
-            </a:r>
-            <a:endParaRPr lang="en-US" sz="1500" dirty="0"/>
+            <a:off x="777240" y="6382512"/>
+            <a:ext cx="7424928" cy="256032"/>
+          </a:xfrm>
+          <a:prstGeom prst="rect">
+            <a:avLst/>
+          </a:prstGeom>
+          <a:noFill/>
+          <a:ln/>
+        </p:spPr>
+        <p:txBody>
+          <a:bodyPr wrap="square" lIns="0" tIns="0" rIns="0" bIns="0" rtlCol="0" anchor="ctr"/>
+          <a:lstStyle/>
+          <a:p>
+            <a:pPr indent="0" marL="0">
+              <a:buNone/>
+            </a:pPr>
+            <a:r>
+              <a:rPr lang="en-US" sz="900" dirty="0">
+                <a:solidFill>
+                  <a:srgbClr val="8A8177"/>
+                </a:solidFill>
+                <a:latin typeface="Yu Gothic" pitchFamily="34" charset="0"/>
+                <a:ea typeface="Yu Gothic" pitchFamily="34" charset="-122"/>
+                <a:cs typeface="Yu Gothic" pitchFamily="34" charset="-120"/>
+              </a:rPr>
+              <a:t>第8回　社内の知識を検索できるようにする</a:t>
+            </a:r>
+            <a:endParaRPr lang="en-US" sz="900" dirty="0"/>
           </a:p>
         </p:txBody>
       </p:sp>
@@ -2931,101 +4600,20 @@
         </p:nvSpPr>
         <p:spPr>
           <a:xfrm>
-            <a:off x="5146243" y="4501896"/>
-            <a:ext cx="5963717" cy="984504"/>
-          </a:xfrm>
-          <a:prstGeom prst="rect">
-            <a:avLst/>
-          </a:prstGeom>
-          <a:noFill/>
-          <a:ln/>
-        </p:spPr>
-        <p:txBody>
-          <a:bodyPr wrap="square" lIns="0" tIns="0" rIns="0" bIns="0" rtlCol="0" anchor="ctr"/>
-          <a:lstStyle/>
-          <a:p>
-            <a:pPr indent="0" marL="0">
-              <a:lnSpc>
-                <a:spcPct val="130000"/>
-              </a:lnSpc>
-              <a:buNone/>
-            </a:pPr>
-            <a:r>
-              <a:rPr lang="en-US" sz="1250" dirty="0">
-                <a:solidFill>
-                  <a:srgbClr val="5A534A"/>
-                </a:solidFill>
-                <a:latin typeface="Yu Gothic" pitchFamily="34" charset="0"/>
-                <a:ea typeface="Yu Gothic" pitchFamily="34" charset="-122"/>
-                <a:cs typeface="Yu Gothic" pitchFamily="34" charset="-120"/>
-              </a:rPr>
-              <a:t>1件でもあれば原因を潰します。最も危険です</a:t>
-            </a:r>
-            <a:endParaRPr lang="en-US" sz="1250" dirty="0"/>
-          </a:p>
-        </p:txBody>
-      </p:sp>
-      <p:sp>
-        <p:nvSpPr>
-          <p:cNvPr id="19" name="Text 17"/>
-          <p:cNvSpPr txBox="1"/>
-          <p:nvPr/>
-        </p:nvSpPr>
-        <p:spPr>
-          <a:xfrm>
-            <a:off x="777240" y="5715000"/>
-            <a:ext cx="10607040" cy="457200"/>
-          </a:xfrm>
-          <a:prstGeom prst="rect">
-            <a:avLst/>
-          </a:prstGeom>
-          <a:noFill/>
-          <a:ln/>
-        </p:spPr>
-        <p:txBody>
-          <a:bodyPr wrap="square" lIns="0" tIns="0" rIns="0" bIns="0" rtlCol="0" anchor="ctr"/>
-          <a:lstStyle/>
-          <a:p>
-            <a:pPr indent="0" marL="0">
-              <a:buNone/>
-            </a:pPr>
-            <a:r>
-              <a:rPr lang="en-US" sz="1200" b="1" dirty="0">
-                <a:solidFill>
-                  <a:srgbClr val="B04A2F"/>
-                </a:solidFill>
-                <a:latin typeface="Yu Gothic" pitchFamily="34" charset="0"/>
-                <a:ea typeface="Yu Gothic" pitchFamily="34" charset="-122"/>
-                <a:cs typeface="Yu Gothic" pitchFamily="34" charset="-120"/>
-              </a:rPr>
-              <a:t>10問投げて、○が7件以上あれば実務に出せます。</a:t>
-            </a:r>
-            <a:endParaRPr lang="en-US" sz="1200" dirty="0"/>
-          </a:p>
-        </p:txBody>
-      </p:sp>
-      <p:sp>
-        <p:nvSpPr>
-          <p:cNvPr id="20" name="Text 18"/>
-          <p:cNvSpPr txBox="1"/>
-          <p:nvPr/>
-        </p:nvSpPr>
-        <p:spPr>
-          <a:xfrm>
-            <a:off x="777240" y="6355080"/>
-            <a:ext cx="7424928" cy="274320"/>
-          </a:xfrm>
-          <a:prstGeom prst="rect">
-            <a:avLst/>
-          </a:prstGeom>
-          <a:noFill/>
-          <a:ln/>
-        </p:spPr>
-        <p:txBody>
-          <a:bodyPr wrap="square" lIns="0" tIns="0" rIns="0" bIns="0" rtlCol="0" anchor="ctr"/>
-          <a:lstStyle/>
-          <a:p>
-            <a:pPr indent="0" marL="0">
+            <a:off x="8202168" y="6382512"/>
+            <a:ext cx="3182112" cy="256032"/>
+          </a:xfrm>
+          <a:prstGeom prst="rect">
+            <a:avLst/>
+          </a:prstGeom>
+          <a:noFill/>
+          <a:ln/>
+        </p:spPr>
+        <p:txBody>
+          <a:bodyPr wrap="square" lIns="0" tIns="0" rIns="0" bIns="0" rtlCol="0" anchor="ctr"/>
+          <a:lstStyle/>
+          <a:p>
+            <a:pPr algn="r" indent="0" marL="0">
               <a:buNone/>
             </a:pPr>
             <a:r>
@@ -3037,46 +4625,7 @@
                 <a:ea typeface="Yu Gothic" pitchFamily="34" charset="-122"/>
                 <a:cs typeface="Yu Gothic" pitchFamily="34" charset="-120"/>
               </a:rPr>
-              <a:t>第8回　社内の知識を検索できるようにする</a:t>
-            </a:r>
-            <a:endParaRPr lang="en-US" sz="900" dirty="0"/>
-          </a:p>
-        </p:txBody>
-      </p:sp>
-      <p:sp>
-        <p:nvSpPr>
-          <p:cNvPr id="21" name="Text 19"/>
-          <p:cNvSpPr txBox="1"/>
-          <p:nvPr/>
-        </p:nvSpPr>
-        <p:spPr>
-          <a:xfrm>
-            <a:off x="8202168" y="6355080"/>
-            <a:ext cx="3182112" cy="274320"/>
-          </a:xfrm>
-          <a:prstGeom prst="rect">
-            <a:avLst/>
-          </a:prstGeom>
-          <a:noFill/>
-          <a:ln/>
-        </p:spPr>
-        <p:txBody>
-          <a:bodyPr wrap="square" lIns="0" tIns="0" rIns="0" bIns="0" rtlCol="0" anchor="ctr"/>
-          <a:lstStyle/>
-          <a:p>
-            <a:pPr algn="r" indent="0" marL="0">
-              <a:buNone/>
-            </a:pPr>
-            <a:r>
-              <a:rPr lang="en-US" sz="900" dirty="0">
-                <a:solidFill>
-                  <a:srgbClr val="8A8177"/>
-                </a:solidFill>
-                <a:latin typeface="Yu Gothic" pitchFamily="34" charset="0"/>
-                <a:ea typeface="Yu Gothic" pitchFamily="34" charset="-122"/>
-                <a:cs typeface="Yu Gothic" pitchFamily="34" charset="-120"/>
-              </a:rPr>
-              <a:t>考え方</a:t>
+              <a:t>ゴール</a:t>
             </a:r>
             <a:endParaRPr lang="en-US" sz="900" dirty="0"/>
           </a:p>
@@ -3122,7 +4671,7 @@
         </p:nvSpPr>
         <p:spPr>
           <a:xfrm>
-            <a:off x="777240" y="640080"/>
+            <a:off x="777240" y="566928"/>
             <a:ext cx="10607040" cy="274320"/>
           </a:xfrm>
           <a:prstGeom prst="rect">
@@ -3147,7 +4696,7 @@
                 <a:ea typeface="Yu Gothic" pitchFamily="34" charset="-122"/>
                 <a:cs typeface="Yu Gothic" pitchFamily="34" charset="-120"/>
               </a:rPr>
-              <a:t>実演</a:t>
+              <a:t>考え方</a:t>
             </a:r>
             <a:endParaRPr lang="en-US" sz="1100" dirty="0"/>
           </a:p>
@@ -3161,7 +4710,7 @@
         </p:nvSpPr>
         <p:spPr>
           <a:xfrm>
-            <a:off x="777240" y="960120"/>
+            <a:off x="777240" y="896112"/>
             <a:ext cx="10607040" cy="640080"/>
           </a:xfrm>
           <a:prstGeom prst="rect">
@@ -3178,7 +4727,7 @@
               <a:buNone/>
             </a:pPr>
             <a:r>
-              <a:rPr lang="en-US" sz="2700" b="1" dirty="0">
+              <a:rPr lang="en-US" sz="2600" b="1" dirty="0">
                 <a:solidFill>
                   <a:srgbClr val="23201D"/>
                 </a:solidFill>
@@ -3186,9 +4735,9 @@
                 <a:ea typeface="Yu Gothic" pitchFamily="34" charset="-122"/>
                 <a:cs typeface="Yu Gothic" pitchFamily="34" charset="-120"/>
               </a:rPr>
-              <a:t>範囲を広げるほど、精度は落ちます</a:t>
-            </a:r>
-            <a:endParaRPr lang="en-US" sz="2700" dirty="0"/>
+              <a:t>精度は、3分類で数えます</a:t>
+            </a:r>
+            <a:endParaRPr lang="en-US" sz="2600" dirty="0"/>
           </a:p>
         </p:txBody>
       </p:sp>
@@ -3200,18 +4749,18 @@
         </p:nvSpPr>
         <p:spPr>
           <a:xfrm>
-            <a:off x="777240" y="1828800"/>
-            <a:ext cx="4983480" cy="3566160"/>
+            <a:off x="777240" y="1700784"/>
+            <a:ext cx="10607040" cy="1188720"/>
           </a:xfrm>
           <a:prstGeom prst="rect">
             <a:avLst/>
           </a:prstGeom>
           <a:solidFill>
-            <a:srgbClr val="EDE7DB"/>
+            <a:srgbClr val="FFFFFF"/>
           </a:solidFill>
-          <a:ln w="15875">
+          <a:ln w="12700">
             <a:solidFill>
-              <a:srgbClr val="8A8177"/>
+              <a:srgbClr val="EDE7DB"/>
             </a:solidFill>
             <a:prstDash val="solid"/>
           </a:ln>
@@ -3225,455 +4774,8 @@
         </p:nvSpPr>
         <p:spPr>
           <a:xfrm>
-            <a:off x="777240" y="1828800"/>
-            <a:ext cx="4983480" cy="566928"/>
-          </a:xfrm>
-          <a:prstGeom prst="rect">
-            <a:avLst/>
-          </a:prstGeom>
-          <a:solidFill>
-            <a:srgbClr val="8A8177"/>
-          </a:solidFill>
-          <a:ln w="12700">
-            <a:solidFill>
-              <a:srgbClr val="333333"/>
-            </a:solidFill>
-            <a:prstDash val="solid"/>
-          </a:ln>
-        </p:spPr>
-      </p:sp>
-      <p:sp>
-        <p:nvSpPr>
-          <p:cNvPr id="6" name="Text 4"/>
-          <p:cNvSpPr txBox="1"/>
-          <p:nvPr/>
-        </p:nvSpPr>
-        <p:spPr>
-          <a:xfrm>
-            <a:off x="1005840" y="1883664"/>
-            <a:ext cx="4526280" cy="457200"/>
-          </a:xfrm>
-          <a:prstGeom prst="rect">
-            <a:avLst/>
-          </a:prstGeom>
-          <a:noFill/>
-          <a:ln/>
-        </p:spPr>
-        <p:txBody>
-          <a:bodyPr wrap="square" lIns="0" tIns="0" rIns="0" bIns="0" rtlCol="0" anchor="ctr"/>
-          <a:lstStyle/>
-          <a:p>
-            <a:pPr indent="0" marL="0">
-              <a:buNone/>
-            </a:pPr>
-            <a:r>
-              <a:rPr lang="en-US" sz="1400" b="1" dirty="0">
-                <a:solidFill>
-                  <a:srgbClr val="FFFFFF"/>
-                </a:solidFill>
-                <a:latin typeface="Yu Gothic" pitchFamily="34" charset="0"/>
-                <a:ea typeface="Yu Gothic" pitchFamily="34" charset="-122"/>
-                <a:cs typeface="Yu Gothic" pitchFamily="34" charset="-120"/>
-              </a:rPr>
-              <a:t>よくある要望</a:t>
-            </a:r>
-            <a:endParaRPr lang="en-US" sz="1400" dirty="0"/>
-          </a:p>
-        </p:txBody>
-      </p:sp>
-      <p:sp>
-        <p:nvSpPr>
-          <p:cNvPr id="7" name="Text 5"/>
-          <p:cNvSpPr txBox="1"/>
-          <p:nvPr/>
-        </p:nvSpPr>
-        <p:spPr>
-          <a:xfrm>
-            <a:off x="1097280" y="2606040"/>
-            <a:ext cx="4343400" cy="548640"/>
-          </a:xfrm>
-          <a:prstGeom prst="rect">
-            <a:avLst/>
-          </a:prstGeom>
-          <a:noFill/>
-          <a:ln/>
-        </p:spPr>
-        <p:txBody>
-          <a:bodyPr wrap="square" lIns="0" tIns="0" rIns="0" bIns="0" rtlCol="0" anchor="ctr"/>
-          <a:lstStyle/>
-          <a:p>
-            <a:pPr indent="0" marL="0">
-              <a:lnSpc>
-                <a:spcPct val="125000"/>
-              </a:lnSpc>
-              <a:buNone/>
-            </a:pPr>
-            <a:r>
-              <a:rPr lang="en-US" sz="1300" dirty="0">
-                <a:solidFill>
-                  <a:srgbClr val="23201D"/>
-                </a:solidFill>
-                <a:latin typeface="Yu Gothic" pitchFamily="34" charset="0"/>
-                <a:ea typeface="Yu Gothic" pitchFamily="34" charset="-122"/>
-                <a:cs typeface="Yu Gothic" pitchFamily="34" charset="-120"/>
-              </a:rPr>
-              <a:t>全社の資料を全部入れたい</a:t>
-            </a:r>
-            <a:endParaRPr lang="en-US" sz="1300" dirty="0"/>
-          </a:p>
-        </p:txBody>
-      </p:sp>
-      <p:sp>
-        <p:nvSpPr>
-          <p:cNvPr id="8" name="Text 6"/>
-          <p:cNvSpPr txBox="1"/>
-          <p:nvPr/>
-        </p:nvSpPr>
-        <p:spPr>
-          <a:xfrm>
-            <a:off x="1097280" y="3172968"/>
-            <a:ext cx="4343400" cy="548640"/>
-          </a:xfrm>
-          <a:prstGeom prst="rect">
-            <a:avLst/>
-          </a:prstGeom>
-          <a:noFill/>
-          <a:ln/>
-        </p:spPr>
-        <p:txBody>
-          <a:bodyPr wrap="square" lIns="0" tIns="0" rIns="0" bIns="0" rtlCol="0" anchor="ctr"/>
-          <a:lstStyle/>
-          <a:p>
-            <a:pPr indent="0" marL="0">
-              <a:lnSpc>
-                <a:spcPct val="125000"/>
-              </a:lnSpc>
-              <a:buNone/>
-            </a:pPr>
-            <a:r>
-              <a:rPr lang="en-US" sz="1300" dirty="0">
-                <a:solidFill>
-                  <a:srgbClr val="23201D"/>
-                </a:solidFill>
-                <a:latin typeface="Yu Gothic" pitchFamily="34" charset="0"/>
-                <a:ea typeface="Yu Gothic" pitchFamily="34" charset="-122"/>
-                <a:cs typeface="Yu Gothic" pitchFamily="34" charset="-120"/>
-              </a:rPr>
-              <a:t>古い版・下書き・個人メモも入れる</a:t>
-            </a:r>
-            <a:endParaRPr lang="en-US" sz="1300" dirty="0"/>
-          </a:p>
-        </p:txBody>
-      </p:sp>
-      <p:sp>
-        <p:nvSpPr>
-          <p:cNvPr id="9" name="Text 7"/>
-          <p:cNvSpPr txBox="1"/>
-          <p:nvPr/>
-        </p:nvSpPr>
-        <p:spPr>
-          <a:xfrm>
-            <a:off x="1097280" y="3739896"/>
-            <a:ext cx="4343400" cy="548640"/>
-          </a:xfrm>
-          <a:prstGeom prst="rect">
-            <a:avLst/>
-          </a:prstGeom>
-          <a:noFill/>
-          <a:ln/>
-        </p:spPr>
-        <p:txBody>
-          <a:bodyPr wrap="square" lIns="0" tIns="0" rIns="0" bIns="0" rtlCol="0" anchor="ctr"/>
-          <a:lstStyle/>
-          <a:p>
-            <a:pPr indent="0" marL="0">
-              <a:lnSpc>
-                <a:spcPct val="125000"/>
-              </a:lnSpc>
-              <a:buNone/>
-            </a:pPr>
-            <a:r>
-              <a:rPr lang="en-US" sz="1300" dirty="0">
-                <a:solidFill>
-                  <a:srgbClr val="23201D"/>
-                </a:solidFill>
-                <a:latin typeface="Yu Gothic" pitchFamily="34" charset="0"/>
-                <a:ea typeface="Yu Gothic" pitchFamily="34" charset="-122"/>
-                <a:cs typeface="Yu Gothic" pitchFamily="34" charset="-120"/>
-              </a:rPr>
-              <a:t>結果、どれが正しいか分からなくなる</a:t>
-            </a:r>
-            <a:endParaRPr lang="en-US" sz="1300" dirty="0"/>
-          </a:p>
-        </p:txBody>
-      </p:sp>
-      <p:sp>
-        <p:nvSpPr>
-          <p:cNvPr id="10" name="Shape 8"/>
-          <p:cNvSpPr/>
-          <p:nvPr/>
-        </p:nvSpPr>
-        <p:spPr>
-          <a:xfrm>
-            <a:off x="6400800" y="1828800"/>
-            <a:ext cx="4983480" cy="3566160"/>
-          </a:xfrm>
-          <a:prstGeom prst="rect">
-            <a:avLst/>
-          </a:prstGeom>
-          <a:solidFill>
-            <a:srgbClr val="FFFFFF"/>
-          </a:solidFill>
-          <a:ln w="15875">
-            <a:solidFill>
-              <a:srgbClr val="3B6B4A"/>
-            </a:solidFill>
-            <a:prstDash val="solid"/>
-          </a:ln>
-        </p:spPr>
-      </p:sp>
-      <p:sp>
-        <p:nvSpPr>
-          <p:cNvPr id="11" name="Shape 9"/>
-          <p:cNvSpPr/>
-          <p:nvPr/>
-        </p:nvSpPr>
-        <p:spPr>
-          <a:xfrm>
-            <a:off x="6400800" y="1828800"/>
-            <a:ext cx="4983480" cy="566928"/>
-          </a:xfrm>
-          <a:prstGeom prst="rect">
-            <a:avLst/>
-          </a:prstGeom>
-          <a:solidFill>
-            <a:srgbClr val="3B6B4A"/>
-          </a:solidFill>
-          <a:ln w="12700">
-            <a:solidFill>
-              <a:srgbClr val="333333"/>
-            </a:solidFill>
-            <a:prstDash val="solid"/>
-          </a:ln>
-        </p:spPr>
-      </p:sp>
-      <p:sp>
-        <p:nvSpPr>
-          <p:cNvPr id="12" name="Text 10"/>
-          <p:cNvSpPr txBox="1"/>
-          <p:nvPr/>
-        </p:nvSpPr>
-        <p:spPr>
-          <a:xfrm>
-            <a:off x="6629400" y="1883664"/>
-            <a:ext cx="4526280" cy="457200"/>
-          </a:xfrm>
-          <a:prstGeom prst="rect">
-            <a:avLst/>
-          </a:prstGeom>
-          <a:noFill/>
-          <a:ln/>
-        </p:spPr>
-        <p:txBody>
-          <a:bodyPr wrap="square" lIns="0" tIns="0" rIns="0" bIns="0" rtlCol="0" anchor="ctr"/>
-          <a:lstStyle/>
-          <a:p>
-            <a:pPr indent="0" marL="0">
-              <a:buNone/>
-            </a:pPr>
-            <a:r>
-              <a:rPr lang="en-US" sz="1400" b="1" dirty="0">
-                <a:solidFill>
-                  <a:srgbClr val="FFFFFF"/>
-                </a:solidFill>
-                <a:latin typeface="Yu Gothic" pitchFamily="34" charset="0"/>
-                <a:ea typeface="Yu Gothic" pitchFamily="34" charset="-122"/>
-                <a:cs typeface="Yu Gothic" pitchFamily="34" charset="-120"/>
-              </a:rPr>
-              <a:t>1領域に絞る</a:t>
-            </a:r>
-            <a:endParaRPr lang="en-US" sz="1400" dirty="0"/>
-          </a:p>
-        </p:txBody>
-      </p:sp>
-      <p:sp>
-        <p:nvSpPr>
-          <p:cNvPr id="13" name="Text 11"/>
-          <p:cNvSpPr txBox="1"/>
-          <p:nvPr/>
-        </p:nvSpPr>
-        <p:spPr>
-          <a:xfrm>
-            <a:off x="6720840" y="2606040"/>
-            <a:ext cx="4343400" cy="548640"/>
-          </a:xfrm>
-          <a:prstGeom prst="rect">
-            <a:avLst/>
-          </a:prstGeom>
-          <a:noFill/>
-          <a:ln/>
-        </p:spPr>
-        <p:txBody>
-          <a:bodyPr wrap="square" lIns="0" tIns="0" rIns="0" bIns="0" rtlCol="0" anchor="ctr"/>
-          <a:lstStyle/>
-          <a:p>
-            <a:pPr indent="0" marL="0">
-              <a:lnSpc>
-                <a:spcPct val="125000"/>
-              </a:lnSpc>
-              <a:buNone/>
-            </a:pPr>
-            <a:r>
-              <a:rPr lang="en-US" sz="1300" dirty="0">
-                <a:solidFill>
-                  <a:srgbClr val="23201D"/>
-                </a:solidFill>
-                <a:latin typeface="Yu Gothic" pitchFamily="34" charset="0"/>
-                <a:ea typeface="Yu Gothic" pitchFamily="34" charset="-122"/>
-                <a:cs typeface="Yu Gothic" pitchFamily="34" charset="-120"/>
-              </a:rPr>
-              <a:t>就業規則・社内手続き（揃っていて成功しやすい）</a:t>
-            </a:r>
-            <a:endParaRPr lang="en-US" sz="1300" dirty="0"/>
-          </a:p>
-        </p:txBody>
-      </p:sp>
-      <p:sp>
-        <p:nvSpPr>
-          <p:cNvPr id="14" name="Text 12"/>
-          <p:cNvSpPr txBox="1"/>
-          <p:nvPr/>
-        </p:nvSpPr>
-        <p:spPr>
-          <a:xfrm>
-            <a:off x="6720840" y="3172968"/>
-            <a:ext cx="4343400" cy="548640"/>
-          </a:xfrm>
-          <a:prstGeom prst="rect">
-            <a:avLst/>
-          </a:prstGeom>
-          <a:noFill/>
-          <a:ln/>
-        </p:spPr>
-        <p:txBody>
-          <a:bodyPr wrap="square" lIns="0" tIns="0" rIns="0" bIns="0" rtlCol="0" anchor="ctr"/>
-          <a:lstStyle/>
-          <a:p>
-            <a:pPr indent="0" marL="0">
-              <a:lnSpc>
-                <a:spcPct val="125000"/>
-              </a:lnSpc>
-              <a:buNone/>
-            </a:pPr>
-            <a:r>
-              <a:rPr lang="en-US" sz="1300" dirty="0">
-                <a:solidFill>
-                  <a:srgbClr val="23201D"/>
-                </a:solidFill>
-                <a:latin typeface="Yu Gothic" pitchFamily="34" charset="0"/>
-                <a:ea typeface="Yu Gothic" pitchFamily="34" charset="-122"/>
-                <a:cs typeface="Yu Gothic" pitchFamily="34" charset="-120"/>
-              </a:rPr>
-              <a:t>製品・サービス仕様</a:t>
-            </a:r>
-            <a:endParaRPr lang="en-US" sz="1300" dirty="0"/>
-          </a:p>
-        </p:txBody>
-      </p:sp>
-      <p:sp>
-        <p:nvSpPr>
-          <p:cNvPr id="15" name="Text 13"/>
-          <p:cNvSpPr txBox="1"/>
-          <p:nvPr/>
-        </p:nvSpPr>
-        <p:spPr>
-          <a:xfrm>
-            <a:off x="6720840" y="3739896"/>
-            <a:ext cx="4343400" cy="548640"/>
-          </a:xfrm>
-          <a:prstGeom prst="rect">
-            <a:avLst/>
-          </a:prstGeom>
-          <a:noFill/>
-          <a:ln/>
-        </p:spPr>
-        <p:txBody>
-          <a:bodyPr wrap="square" lIns="0" tIns="0" rIns="0" bIns="0" rtlCol="0" anchor="ctr"/>
-          <a:lstStyle/>
-          <a:p>
-            <a:pPr indent="0" marL="0">
-              <a:lnSpc>
-                <a:spcPct val="125000"/>
-              </a:lnSpc>
-              <a:buNone/>
-            </a:pPr>
-            <a:r>
-              <a:rPr lang="en-US" sz="1300" dirty="0">
-                <a:solidFill>
-                  <a:srgbClr val="23201D"/>
-                </a:solidFill>
-                <a:latin typeface="Yu Gothic" pitchFamily="34" charset="0"/>
-                <a:ea typeface="Yu Gothic" pitchFamily="34" charset="-122"/>
-                <a:cs typeface="Yu Gothic" pitchFamily="34" charset="-120"/>
-              </a:rPr>
-              <a:t>過去の見積・提案</a:t>
-            </a:r>
-            <a:endParaRPr lang="en-US" sz="1300" dirty="0"/>
-          </a:p>
-        </p:txBody>
-      </p:sp>
-      <p:sp>
-        <p:nvSpPr>
-          <p:cNvPr id="16" name="Text 14"/>
-          <p:cNvSpPr txBox="1"/>
-          <p:nvPr/>
-        </p:nvSpPr>
-        <p:spPr>
-          <a:xfrm>
-            <a:off x="6720840" y="4306824"/>
-            <a:ext cx="4343400" cy="548640"/>
-          </a:xfrm>
-          <a:prstGeom prst="rect">
-            <a:avLst/>
-          </a:prstGeom>
-          <a:noFill/>
-          <a:ln/>
-        </p:spPr>
-        <p:txBody>
-          <a:bodyPr wrap="square" lIns="0" tIns="0" rIns="0" bIns="0" rtlCol="0" anchor="ctr"/>
-          <a:lstStyle/>
-          <a:p>
-            <a:pPr indent="0" marL="0">
-              <a:lnSpc>
-                <a:spcPct val="125000"/>
-              </a:lnSpc>
-              <a:buNone/>
-            </a:pPr>
-            <a:r>
-              <a:rPr lang="en-US" sz="1300" dirty="0">
-                <a:solidFill>
-                  <a:srgbClr val="23201D"/>
-                </a:solidFill>
-                <a:latin typeface="Yu Gothic" pitchFamily="34" charset="0"/>
-                <a:ea typeface="Yu Gothic" pitchFamily="34" charset="-122"/>
-                <a:cs typeface="Yu Gothic" pitchFamily="34" charset="-120"/>
-              </a:rPr>
-              <a:t>まず1つ。広げるのは精度を見てから</a:t>
-            </a:r>
-            <a:endParaRPr lang="en-US" sz="1300" dirty="0"/>
-          </a:p>
-        </p:txBody>
-      </p:sp>
-      <p:sp>
-        <p:nvSpPr>
-          <p:cNvPr id="17" name="Shape 15"/>
-          <p:cNvSpPr/>
-          <p:nvPr/>
-        </p:nvSpPr>
-        <p:spPr>
-          <a:xfrm>
-            <a:off x="5815584" y="3337560"/>
-            <a:ext cx="512064" cy="512064"/>
+            <a:off x="1014984" y="2112264"/>
+            <a:ext cx="365760" cy="365760"/>
           </a:xfrm>
           <a:prstGeom prst="ellipse">
             <a:avLst/>
@@ -3691,40 +4793,461 @@
       </p:sp>
       <p:sp>
         <p:nvSpPr>
+          <p:cNvPr id="6" name="Text 4"/>
+          <p:cNvSpPr txBox="1"/>
+          <p:nvPr/>
+        </p:nvSpPr>
+        <p:spPr>
+          <a:xfrm>
+            <a:off x="1014984" y="2112264"/>
+            <a:ext cx="365760" cy="365760"/>
+          </a:xfrm>
+          <a:prstGeom prst="rect">
+            <a:avLst/>
+          </a:prstGeom>
+          <a:noFill/>
+          <a:ln/>
+        </p:spPr>
+        <p:txBody>
+          <a:bodyPr wrap="square" lIns="0" tIns="0" rIns="0" bIns="0" rtlCol="0" anchor="ctr"/>
+          <a:lstStyle/>
+          <a:p>
+            <a:pPr algn="ctr" indent="0" marL="0">
+              <a:buNone/>
+            </a:pPr>
+            <a:r>
+              <a:rPr lang="en-US" sz="1300" b="1" dirty="0">
+                <a:solidFill>
+                  <a:srgbClr val="FFFFFF"/>
+                </a:solidFill>
+                <a:latin typeface="Yu Gothic" pitchFamily="34" charset="0"/>
+                <a:ea typeface="Yu Gothic" pitchFamily="34" charset="-122"/>
+                <a:cs typeface="Yu Gothic" pitchFamily="34" charset="-120"/>
+              </a:rPr>
+              <a:t>1</a:t>
+            </a:r>
+            <a:endParaRPr lang="en-US" sz="1300" dirty="0"/>
+          </a:p>
+        </p:txBody>
+      </p:sp>
+      <p:sp>
+        <p:nvSpPr>
+          <p:cNvPr id="7" name="Text 5"/>
+          <p:cNvSpPr txBox="1"/>
+          <p:nvPr/>
+        </p:nvSpPr>
+        <p:spPr>
+          <a:xfrm>
+            <a:off x="1600200" y="1773936"/>
+            <a:ext cx="3182112" cy="1042416"/>
+          </a:xfrm>
+          <a:prstGeom prst="rect">
+            <a:avLst/>
+          </a:prstGeom>
+          <a:noFill/>
+          <a:ln/>
+        </p:spPr>
+        <p:txBody>
+          <a:bodyPr wrap="square" lIns="0" tIns="0" rIns="0" bIns="0" rtlCol="0" anchor="ctr"/>
+          <a:lstStyle/>
+          <a:p>
+            <a:pPr indent="0" marL="0">
+              <a:buNone/>
+            </a:pPr>
+            <a:r>
+              <a:rPr lang="en-US" sz="1450" b="1" dirty="0">
+                <a:solidFill>
+                  <a:srgbClr val="23201D"/>
+                </a:solidFill>
+                <a:latin typeface="Yu Gothic" pitchFamily="34" charset="0"/>
+                <a:ea typeface="Yu Gothic" pitchFamily="34" charset="-122"/>
+                <a:cs typeface="Yu Gothic" pitchFamily="34" charset="-120"/>
+              </a:rPr>
+              <a:t>○ 正しく答えた</a:t>
+            </a:r>
+            <a:endParaRPr lang="en-US" sz="1450" dirty="0"/>
+          </a:p>
+        </p:txBody>
+      </p:sp>
+      <p:sp>
+        <p:nvSpPr>
+          <p:cNvPr id="8" name="Text 6"/>
+          <p:cNvSpPr txBox="1"/>
+          <p:nvPr/>
+        </p:nvSpPr>
+        <p:spPr>
+          <a:xfrm>
+            <a:off x="4888382" y="1773936"/>
+            <a:ext cx="6267298" cy="1042416"/>
+          </a:xfrm>
+          <a:prstGeom prst="rect">
+            <a:avLst/>
+          </a:prstGeom>
+          <a:noFill/>
+          <a:ln/>
+        </p:spPr>
+        <p:txBody>
+          <a:bodyPr wrap="square" lIns="0" tIns="0" rIns="0" bIns="0" rtlCol="0" anchor="ctr"/>
+          <a:lstStyle/>
+          <a:p>
+            <a:pPr indent="0" marL="0">
+              <a:lnSpc>
+                <a:spcPct val="130000"/>
+              </a:lnSpc>
+              <a:buNone/>
+            </a:pPr>
+            <a:r>
+              <a:rPr lang="en-US" sz="1200" dirty="0">
+                <a:solidFill>
+                  <a:srgbClr val="5A534A"/>
+                </a:solidFill>
+                <a:latin typeface="Yu Gothic" pitchFamily="34" charset="0"/>
+                <a:ea typeface="Yu Gothic" pitchFamily="34" charset="-122"/>
+                <a:cs typeface="Yu Gothic" pitchFamily="34" charset="-120"/>
+              </a:rPr>
+              <a:t>資料の記載と一致している。10問中7件あれば実務に出せます</a:t>
+            </a:r>
+            <a:endParaRPr lang="en-US" sz="1200" dirty="0"/>
+          </a:p>
+        </p:txBody>
+      </p:sp>
+      <p:sp>
+        <p:nvSpPr>
+          <p:cNvPr id="9" name="Shape 7"/>
+          <p:cNvSpPr/>
+          <p:nvPr/>
+        </p:nvSpPr>
+        <p:spPr>
+          <a:xfrm>
+            <a:off x="777240" y="3017520"/>
+            <a:ext cx="10607040" cy="1188720"/>
+          </a:xfrm>
+          <a:prstGeom prst="rect">
+            <a:avLst/>
+          </a:prstGeom>
+          <a:solidFill>
+            <a:srgbClr val="FFFFFF"/>
+          </a:solidFill>
+          <a:ln w="12700">
+            <a:solidFill>
+              <a:srgbClr val="EDE7DB"/>
+            </a:solidFill>
+            <a:prstDash val="solid"/>
+          </a:ln>
+        </p:spPr>
+      </p:sp>
+      <p:sp>
+        <p:nvSpPr>
+          <p:cNvPr id="10" name="Shape 8"/>
+          <p:cNvSpPr/>
+          <p:nvPr/>
+        </p:nvSpPr>
+        <p:spPr>
+          <a:xfrm>
+            <a:off x="1014984" y="3429000"/>
+            <a:ext cx="365760" cy="365760"/>
+          </a:xfrm>
+          <a:prstGeom prst="ellipse">
+            <a:avLst/>
+          </a:prstGeom>
+          <a:solidFill>
+            <a:srgbClr val="B04A2F"/>
+          </a:solidFill>
+          <a:ln w="12700">
+            <a:solidFill>
+              <a:srgbClr val="333333"/>
+            </a:solidFill>
+            <a:prstDash val="solid"/>
+          </a:ln>
+        </p:spPr>
+      </p:sp>
+      <p:sp>
+        <p:nvSpPr>
+          <p:cNvPr id="11" name="Text 9"/>
+          <p:cNvSpPr txBox="1"/>
+          <p:nvPr/>
+        </p:nvSpPr>
+        <p:spPr>
+          <a:xfrm>
+            <a:off x="1014984" y="3429000"/>
+            <a:ext cx="365760" cy="365760"/>
+          </a:xfrm>
+          <a:prstGeom prst="rect">
+            <a:avLst/>
+          </a:prstGeom>
+          <a:noFill/>
+          <a:ln/>
+        </p:spPr>
+        <p:txBody>
+          <a:bodyPr wrap="square" lIns="0" tIns="0" rIns="0" bIns="0" rtlCol="0" anchor="ctr"/>
+          <a:lstStyle/>
+          <a:p>
+            <a:pPr algn="ctr" indent="0" marL="0">
+              <a:buNone/>
+            </a:pPr>
+            <a:r>
+              <a:rPr lang="en-US" sz="1300" b="1" dirty="0">
+                <a:solidFill>
+                  <a:srgbClr val="FFFFFF"/>
+                </a:solidFill>
+                <a:latin typeface="Yu Gothic" pitchFamily="34" charset="0"/>
+                <a:ea typeface="Yu Gothic" pitchFamily="34" charset="-122"/>
+                <a:cs typeface="Yu Gothic" pitchFamily="34" charset="-120"/>
+              </a:rPr>
+              <a:t>2</a:t>
+            </a:r>
+            <a:endParaRPr lang="en-US" sz="1300" dirty="0"/>
+          </a:p>
+        </p:txBody>
+      </p:sp>
+      <p:sp>
+        <p:nvSpPr>
+          <p:cNvPr id="12" name="Text 10"/>
+          <p:cNvSpPr txBox="1"/>
+          <p:nvPr/>
+        </p:nvSpPr>
+        <p:spPr>
+          <a:xfrm>
+            <a:off x="1600200" y="3090672"/>
+            <a:ext cx="3182112" cy="1042416"/>
+          </a:xfrm>
+          <a:prstGeom prst="rect">
+            <a:avLst/>
+          </a:prstGeom>
+          <a:noFill/>
+          <a:ln/>
+        </p:spPr>
+        <p:txBody>
+          <a:bodyPr wrap="square" lIns="0" tIns="0" rIns="0" bIns="0" rtlCol="0" anchor="ctr"/>
+          <a:lstStyle/>
+          <a:p>
+            <a:pPr indent="0" marL="0">
+              <a:buNone/>
+            </a:pPr>
+            <a:r>
+              <a:rPr lang="en-US" sz="1450" b="1" dirty="0">
+                <a:solidFill>
+                  <a:srgbClr val="23201D"/>
+                </a:solidFill>
+                <a:latin typeface="Yu Gothic" pitchFamily="34" charset="0"/>
+                <a:ea typeface="Yu Gothic" pitchFamily="34" charset="-122"/>
+                <a:cs typeface="Yu Gothic" pitchFamily="34" charset="-120"/>
+              </a:rPr>
+              <a:t>△「記載がありません」と答えた</a:t>
+            </a:r>
+            <a:endParaRPr lang="en-US" sz="1450" dirty="0"/>
+          </a:p>
+        </p:txBody>
+      </p:sp>
+      <p:sp>
+        <p:nvSpPr>
+          <p:cNvPr id="13" name="Text 11"/>
+          <p:cNvSpPr txBox="1"/>
+          <p:nvPr/>
+        </p:nvSpPr>
+        <p:spPr>
+          <a:xfrm>
+            <a:off x="4888382" y="3090672"/>
+            <a:ext cx="6267298" cy="1042416"/>
+          </a:xfrm>
+          <a:prstGeom prst="rect">
+            <a:avLst/>
+          </a:prstGeom>
+          <a:noFill/>
+          <a:ln/>
+        </p:spPr>
+        <p:txBody>
+          <a:bodyPr wrap="square" lIns="0" tIns="0" rIns="0" bIns="0" rtlCol="0" anchor="ctr"/>
+          <a:lstStyle/>
+          <a:p>
+            <a:pPr indent="0" marL="0">
+              <a:lnSpc>
+                <a:spcPct val="130000"/>
+              </a:lnSpc>
+              <a:buNone/>
+            </a:pPr>
+            <a:r>
+              <a:rPr lang="en-US" sz="1200" dirty="0">
+                <a:solidFill>
+                  <a:srgbClr val="5A534A"/>
+                </a:solidFill>
+                <a:latin typeface="Yu Gothic" pitchFamily="34" charset="0"/>
+                <a:ea typeface="Yu Gothic" pitchFamily="34" charset="-122"/>
+                <a:cs typeface="Yu Gothic" pitchFamily="34" charset="-120"/>
+              </a:rPr>
+              <a:t>正しい振る舞いです。×ではありません。資料不足として記録します</a:t>
+            </a:r>
+            <a:endParaRPr lang="en-US" sz="1200" dirty="0"/>
+          </a:p>
+        </p:txBody>
+      </p:sp>
+      <p:sp>
+        <p:nvSpPr>
+          <p:cNvPr id="14" name="Shape 12"/>
+          <p:cNvSpPr/>
+          <p:nvPr/>
+        </p:nvSpPr>
+        <p:spPr>
+          <a:xfrm>
+            <a:off x="777240" y="4334256"/>
+            <a:ext cx="10607040" cy="1188720"/>
+          </a:xfrm>
+          <a:prstGeom prst="rect">
+            <a:avLst/>
+          </a:prstGeom>
+          <a:solidFill>
+            <a:srgbClr val="FFFFFF"/>
+          </a:solidFill>
+          <a:ln w="12700">
+            <a:solidFill>
+              <a:srgbClr val="EDE7DB"/>
+            </a:solidFill>
+            <a:prstDash val="solid"/>
+          </a:ln>
+        </p:spPr>
+      </p:sp>
+      <p:sp>
+        <p:nvSpPr>
+          <p:cNvPr id="15" name="Shape 13"/>
+          <p:cNvSpPr/>
+          <p:nvPr/>
+        </p:nvSpPr>
+        <p:spPr>
+          <a:xfrm>
+            <a:off x="1014984" y="4745736"/>
+            <a:ext cx="365760" cy="365760"/>
+          </a:xfrm>
+          <a:prstGeom prst="ellipse">
+            <a:avLst/>
+          </a:prstGeom>
+          <a:solidFill>
+            <a:srgbClr val="B04A2F"/>
+          </a:solidFill>
+          <a:ln w="12700">
+            <a:solidFill>
+              <a:srgbClr val="333333"/>
+            </a:solidFill>
+            <a:prstDash val="solid"/>
+          </a:ln>
+        </p:spPr>
+      </p:sp>
+      <p:sp>
+        <p:nvSpPr>
+          <p:cNvPr id="16" name="Text 14"/>
+          <p:cNvSpPr txBox="1"/>
+          <p:nvPr/>
+        </p:nvSpPr>
+        <p:spPr>
+          <a:xfrm>
+            <a:off x="1014984" y="4745736"/>
+            <a:ext cx="365760" cy="365760"/>
+          </a:xfrm>
+          <a:prstGeom prst="rect">
+            <a:avLst/>
+          </a:prstGeom>
+          <a:noFill/>
+          <a:ln/>
+        </p:spPr>
+        <p:txBody>
+          <a:bodyPr wrap="square" lIns="0" tIns="0" rIns="0" bIns="0" rtlCol="0" anchor="ctr"/>
+          <a:lstStyle/>
+          <a:p>
+            <a:pPr algn="ctr" indent="0" marL="0">
+              <a:buNone/>
+            </a:pPr>
+            <a:r>
+              <a:rPr lang="en-US" sz="1300" b="1" dirty="0">
+                <a:solidFill>
+                  <a:srgbClr val="FFFFFF"/>
+                </a:solidFill>
+                <a:latin typeface="Yu Gothic" pitchFamily="34" charset="0"/>
+                <a:ea typeface="Yu Gothic" pitchFamily="34" charset="-122"/>
+                <a:cs typeface="Yu Gothic" pitchFamily="34" charset="-120"/>
+              </a:rPr>
+              <a:t>3</a:t>
+            </a:r>
+            <a:endParaRPr lang="en-US" sz="1300" dirty="0"/>
+          </a:p>
+        </p:txBody>
+      </p:sp>
+      <p:sp>
+        <p:nvSpPr>
+          <p:cNvPr id="17" name="Text 15"/>
+          <p:cNvSpPr txBox="1"/>
+          <p:nvPr/>
+        </p:nvSpPr>
+        <p:spPr>
+          <a:xfrm>
+            <a:off x="1600200" y="4407408"/>
+            <a:ext cx="3182112" cy="1042416"/>
+          </a:xfrm>
+          <a:prstGeom prst="rect">
+            <a:avLst/>
+          </a:prstGeom>
+          <a:noFill/>
+          <a:ln/>
+        </p:spPr>
+        <p:txBody>
+          <a:bodyPr wrap="square" lIns="0" tIns="0" rIns="0" bIns="0" rtlCol="0" anchor="ctr"/>
+          <a:lstStyle/>
+          <a:p>
+            <a:pPr indent="0" marL="0">
+              <a:buNone/>
+            </a:pPr>
+            <a:r>
+              <a:rPr lang="en-US" sz="1450" b="1" dirty="0">
+                <a:solidFill>
+                  <a:srgbClr val="23201D"/>
+                </a:solidFill>
+                <a:latin typeface="Yu Gothic" pitchFamily="34" charset="0"/>
+                <a:ea typeface="Yu Gothic" pitchFamily="34" charset="-122"/>
+                <a:cs typeface="Yu Gothic" pitchFamily="34" charset="-120"/>
+              </a:rPr>
+              <a:t>× 間違えた・それらしい嘘</a:t>
+            </a:r>
+            <a:endParaRPr lang="en-US" sz="1450" dirty="0"/>
+          </a:p>
+        </p:txBody>
+      </p:sp>
+      <p:sp>
+        <p:nvSpPr>
           <p:cNvPr id="18" name="Text 16"/>
           <p:cNvSpPr txBox="1"/>
           <p:nvPr/>
         </p:nvSpPr>
         <p:spPr>
           <a:xfrm>
-            <a:off x="5815584" y="3337560"/>
-            <a:ext cx="512064" cy="512064"/>
-          </a:xfrm>
-          <a:prstGeom prst="rect">
-            <a:avLst/>
-          </a:prstGeom>
-          <a:noFill/>
-          <a:ln/>
-        </p:spPr>
-        <p:txBody>
-          <a:bodyPr wrap="square" lIns="0" tIns="0" rIns="0" bIns="0" rtlCol="0" anchor="ctr"/>
-          <a:lstStyle/>
-          <a:p>
-            <a:pPr algn="ctr" indent="0" marL="0">
-              <a:buNone/>
-            </a:pPr>
-            <a:r>
-              <a:rPr lang="en-US" sz="1800" b="1" dirty="0">
-                <a:solidFill>
-                  <a:srgbClr val="FFFFFF"/>
-                </a:solidFill>
-                <a:latin typeface="Yu Gothic" pitchFamily="34" charset="0"/>
-                <a:ea typeface="Yu Gothic" pitchFamily="34" charset="-122"/>
-                <a:cs typeface="Yu Gothic" pitchFamily="34" charset="-120"/>
-              </a:rPr>
-              <a:t>→</a:t>
-            </a:r>
-            <a:endParaRPr lang="en-US" sz="1800" dirty="0"/>
+            <a:off x="4888382" y="4407408"/>
+            <a:ext cx="6267298" cy="1042416"/>
+          </a:xfrm>
+          <a:prstGeom prst="rect">
+            <a:avLst/>
+          </a:prstGeom>
+          <a:noFill/>
+          <a:ln/>
+        </p:spPr>
+        <p:txBody>
+          <a:bodyPr wrap="square" lIns="0" tIns="0" rIns="0" bIns="0" rtlCol="0" anchor="ctr"/>
+          <a:lstStyle/>
+          <a:p>
+            <a:pPr indent="0" marL="0">
+              <a:lnSpc>
+                <a:spcPct val="130000"/>
+              </a:lnSpc>
+              <a:buNone/>
+            </a:pPr>
+            <a:r>
+              <a:rPr lang="en-US" sz="1200" dirty="0">
+                <a:solidFill>
+                  <a:srgbClr val="5A534A"/>
+                </a:solidFill>
+                <a:latin typeface="Yu Gothic" pitchFamily="34" charset="0"/>
+                <a:ea typeface="Yu Gothic" pitchFamily="34" charset="-122"/>
+                <a:cs typeface="Yu Gothic" pitchFamily="34" charset="-120"/>
+              </a:rPr>
+              <a:t>最も危険。1件でもあれば原因を潰します</a:t>
+            </a:r>
+            <a:endParaRPr lang="en-US" sz="1200" dirty="0"/>
           </a:p>
         </p:txBody>
       </p:sp>
@@ -3736,8 +5259,47 @@
         </p:nvSpPr>
         <p:spPr>
           <a:xfrm>
-            <a:off x="777240" y="6355080"/>
-            <a:ext cx="7424928" cy="274320"/>
+            <a:off x="777240" y="5669280"/>
+            <a:ext cx="10607040" cy="411480"/>
+          </a:xfrm>
+          <a:prstGeom prst="rect">
+            <a:avLst/>
+          </a:prstGeom>
+          <a:noFill/>
+          <a:ln/>
+        </p:spPr>
+        <p:txBody>
+          <a:bodyPr wrap="square" lIns="0" tIns="0" rIns="0" bIns="0" rtlCol="0" anchor="ctr"/>
+          <a:lstStyle/>
+          <a:p>
+            <a:pPr indent="0" marL="0">
+              <a:buNone/>
+            </a:pPr>
+            <a:r>
+              <a:rPr lang="en-US" sz="1200" b="1" dirty="0">
+                <a:solidFill>
+                  <a:srgbClr val="B04A2F"/>
+                </a:solidFill>
+                <a:latin typeface="Yu Gothic" pitchFamily="34" charset="0"/>
+                <a:ea typeface="Yu Gothic" pitchFamily="34" charset="-122"/>
+                <a:cs typeface="Yu Gothic" pitchFamily="34" charset="-120"/>
+              </a:rPr>
+              <a:t>△を×と混同しないでください。「答えられない」は正常な振る舞いです。ここを誤ると、嘘をつくAIのほうが高評価になってしまいます。</a:t>
+            </a:r>
+            <a:endParaRPr lang="en-US" sz="1200" dirty="0"/>
+          </a:p>
+        </p:txBody>
+      </p:sp>
+      <p:sp>
+        <p:nvSpPr>
+          <p:cNvPr id="20" name="Text 18"/>
+          <p:cNvSpPr txBox="1"/>
+          <p:nvPr/>
+        </p:nvSpPr>
+        <p:spPr>
+          <a:xfrm>
+            <a:off x="777240" y="6382512"/>
+            <a:ext cx="7424928" cy="256032"/>
           </a:xfrm>
           <a:prstGeom prst="rect">
             <a:avLst/>
@@ -3769,14 +5331,14 @@
       </p:sp>
       <p:sp>
         <p:nvSpPr>
-          <p:cNvPr id="20" name="Text 18"/>
-          <p:cNvSpPr txBox="1"/>
-          <p:nvPr/>
-        </p:nvSpPr>
-        <p:spPr>
-          <a:xfrm>
-            <a:off x="8202168" y="6355080"/>
-            <a:ext cx="3182112" cy="274320"/>
+          <p:cNvPr id="21" name="Text 19"/>
+          <p:cNvSpPr txBox="1"/>
+          <p:nvPr/>
+        </p:nvSpPr>
+        <p:spPr>
+          <a:xfrm>
+            <a:off x="8202168" y="6382512"/>
+            <a:ext cx="3182112" cy="256032"/>
           </a:xfrm>
           <a:prstGeom prst="rect">
             <a:avLst/>
@@ -3800,7 +5362,7 @@
                 <a:ea typeface="Yu Gothic" pitchFamily="34" charset="-122"/>
                 <a:cs typeface="Yu Gothic" pitchFamily="34" charset="-120"/>
               </a:rPr>
-              <a:t>実演</a:t>
+              <a:t>考え方</a:t>
             </a:r>
             <a:endParaRPr lang="en-US" sz="900" dirty="0"/>
           </a:p>
@@ -3846,7 +5408,7 @@
         </p:nvSpPr>
         <p:spPr>
           <a:xfrm>
-            <a:off x="777240" y="640080"/>
+            <a:off x="777240" y="566928"/>
             <a:ext cx="10607040" cy="274320"/>
           </a:xfrm>
           <a:prstGeom prst="rect">
@@ -3871,7 +5433,7 @@
                 <a:ea typeface="Yu Gothic" pitchFamily="34" charset="-122"/>
                 <a:cs typeface="Yu Gothic" pitchFamily="34" charset="-120"/>
               </a:rPr>
-              <a:t>演習</a:t>
+              <a:t>あてはめ</a:t>
             </a:r>
             <a:endParaRPr lang="en-US" sz="1100" dirty="0"/>
           </a:p>
@@ -3885,7 +5447,7 @@
         </p:nvSpPr>
         <p:spPr>
           <a:xfrm>
-            <a:off x="777240" y="960120"/>
+            <a:off x="777240" y="896112"/>
             <a:ext cx="10607040" cy="640080"/>
           </a:xfrm>
           <a:prstGeom prst="rect">
@@ -3902,7 +5464,7 @@
               <a:buNone/>
             </a:pPr>
             <a:r>
-              <a:rPr lang="en-US" sz="2700" b="1" dirty="0">
+              <a:rPr lang="en-US" sz="2600" b="1" dirty="0">
                 <a:solidFill>
                   <a:srgbClr val="23201D"/>
                 </a:solidFill>
@@ -3910,61 +5472,22 @@
                 <a:ea typeface="Yu Gothic" pitchFamily="34" charset="-122"/>
                 <a:cs typeface="Yu Gothic" pitchFamily="34" charset="-120"/>
               </a:rPr>
-              <a:t>今日、一緒にやること</a:t>
-            </a:r>
-            <a:endParaRPr lang="en-US" sz="2700" dirty="0"/>
-          </a:p>
-        </p:txBody>
-      </p:sp>
-      <p:sp>
-        <p:nvSpPr>
-          <p:cNvPr id="4" name="Text 2"/>
-          <p:cNvSpPr txBox="1"/>
-          <p:nvPr/>
-        </p:nvSpPr>
-        <p:spPr>
-          <a:xfrm>
-            <a:off x="777240" y="1627632"/>
-            <a:ext cx="10607040" cy="320040"/>
-          </a:xfrm>
-          <a:prstGeom prst="rect">
-            <a:avLst/>
-          </a:prstGeom>
-          <a:noFill/>
-          <a:ln/>
-        </p:spPr>
-        <p:txBody>
-          <a:bodyPr wrap="square" lIns="0" tIns="0" rIns="0" bIns="0" rtlCol="0" anchor="ctr"/>
-          <a:lstStyle/>
-          <a:p>
-            <a:pPr indent="0" marL="0">
-              <a:buNone/>
-            </a:pPr>
-            <a:r>
-              <a:rPr lang="en-US" sz="1250" b="1" dirty="0">
-                <a:solidFill>
-                  <a:srgbClr val="2F4F6B"/>
-                </a:solidFill>
-                <a:latin typeface="Yu Gothic" pitchFamily="34" charset="0"/>
-                <a:ea typeface="Yu Gothic" pitchFamily="34" charset="-122"/>
-                <a:cs typeface="Yu Gothic" pitchFamily="34" charset="-120"/>
-              </a:rPr>
-              <a:t>55分。操作するのはご自身です。</a:t>
-            </a:r>
-            <a:endParaRPr lang="en-US" sz="1250" dirty="0"/>
-          </a:p>
-        </p:txBody>
-      </p:sp>
-      <p:sp>
-        <p:nvSpPr>
-          <p:cNvPr id="5" name="Shape 3"/>
+              <a:t>足りない資料の一覧は、この5列で</a:t>
+            </a:r>
+            <a:endParaRPr lang="en-US" sz="2600" dirty="0"/>
+          </a:p>
+        </p:txBody>
+      </p:sp>
+      <p:sp>
+        <p:nvSpPr>
+          <p:cNvPr id="4" name="Shape 2"/>
           <p:cNvSpPr/>
           <p:nvPr/>
         </p:nvSpPr>
         <p:spPr>
           <a:xfrm>
-            <a:off x="777240" y="2240280"/>
-            <a:ext cx="3383280" cy="2697480"/>
+            <a:off x="777240" y="1691640"/>
+            <a:ext cx="10607040" cy="3401568"/>
           </a:xfrm>
           <a:prstGeom prst="rect">
             <a:avLst/>
@@ -3972,9 +5495,9 @@
           <a:solidFill>
             <a:srgbClr val="FFFFFF"/>
           </a:solidFill>
-          <a:ln w="12700">
+          <a:ln w="15875">
             <a:solidFill>
-              <a:srgbClr val="EDE7DB"/>
+              <a:srgbClr val="2F4F6B"/>
             </a:solidFill>
             <a:prstDash val="solid"/>
           </a:ln>
@@ -3982,16 +5505,16 @@
       </p:sp>
       <p:sp>
         <p:nvSpPr>
-          <p:cNvPr id="6" name="Shape 4"/>
+          <p:cNvPr id="5" name="Shape 3"/>
           <p:cNvSpPr/>
           <p:nvPr/>
         </p:nvSpPr>
         <p:spPr>
           <a:xfrm>
-            <a:off x="1051560" y="2487168"/>
-            <a:ext cx="438912" cy="438912"/>
-          </a:xfrm>
-          <a:prstGeom prst="ellipse">
+            <a:off x="777240" y="1691640"/>
+            <a:ext cx="10607040" cy="457200"/>
+          </a:xfrm>
+          <a:prstGeom prst="rect">
             <a:avLst/>
           </a:prstGeom>
           <a:solidFill>
@@ -3999,7 +5522,7 @@
           </a:solidFill>
           <a:ln w="12700">
             <a:solidFill>
-              <a:srgbClr val="2F4F6B"/>
+              <a:srgbClr val="333333"/>
             </a:solidFill>
             <a:prstDash val="solid"/>
           </a:ln>
@@ -4007,40 +5530,82 @@
       </p:sp>
       <p:sp>
         <p:nvSpPr>
+          <p:cNvPr id="6" name="Text 4"/>
+          <p:cNvSpPr txBox="1"/>
+          <p:nvPr/>
+        </p:nvSpPr>
+        <p:spPr>
+          <a:xfrm>
+            <a:off x="1051560" y="1709928"/>
+            <a:ext cx="10058400" cy="420624"/>
+          </a:xfrm>
+          <a:prstGeom prst="rect">
+            <a:avLst/>
+          </a:prstGeom>
+          <a:noFill/>
+          <a:ln/>
+        </p:spPr>
+        <p:txBody>
+          <a:bodyPr wrap="square" lIns="0" tIns="0" rIns="0" bIns="0" rtlCol="0" anchor="ctr"/>
+          <a:lstStyle/>
+          <a:p>
+            <a:pPr indent="0" marL="0">
+              <a:buNone/>
+            </a:pPr>
+            <a:r>
+              <a:rPr lang="en-US" sz="1200" b="1" dirty="0">
+                <a:solidFill>
+                  <a:srgbClr val="FFFFFF"/>
+                </a:solidFill>
+                <a:latin typeface="Yu Gothic" pitchFamily="34" charset="0"/>
+                <a:ea typeface="Yu Gothic" pitchFamily="34" charset="-122"/>
+                <a:cs typeface="Yu Gothic" pitchFamily="34" charset="-120"/>
+              </a:rPr>
+              <a:t>不足資料リスト（記入例）</a:t>
+            </a:r>
+            <a:endParaRPr lang="en-US" sz="1200" dirty="0"/>
+          </a:p>
+        </p:txBody>
+      </p:sp>
+      <p:sp>
+        <p:nvSpPr>
           <p:cNvPr id="7" name="Text 5"/>
           <p:cNvSpPr txBox="1"/>
           <p:nvPr/>
         </p:nvSpPr>
         <p:spPr>
           <a:xfrm>
-            <a:off x="1051560" y="2487168"/>
-            <a:ext cx="438912" cy="438912"/>
-          </a:xfrm>
-          <a:prstGeom prst="rect">
-            <a:avLst/>
-          </a:prstGeom>
-          <a:noFill/>
-          <a:ln/>
-        </p:spPr>
-        <p:txBody>
-          <a:bodyPr wrap="square" lIns="0" tIns="0" rIns="0" bIns="0" rtlCol="0" anchor="ctr"/>
-          <a:lstStyle/>
-          <a:p>
-            <a:pPr algn="ctr" indent="0" marL="0">
-              <a:buNone/>
-            </a:pPr>
-            <a:r>
-              <a:rPr lang="en-US" sz="1400" b="1" dirty="0">
-                <a:solidFill>
-                  <a:srgbClr val="FFFFFF"/>
-                </a:solidFill>
-                <a:latin typeface="Yu Gothic" pitchFamily="34" charset="0"/>
-                <a:ea typeface="Yu Gothic" pitchFamily="34" charset="-122"/>
-                <a:cs typeface="Yu Gothic" pitchFamily="34" charset="-120"/>
-              </a:rPr>
-              <a:t>1</a:t>
-            </a:r>
-            <a:endParaRPr lang="en-US" sz="1400" dirty="0"/>
+            <a:off x="1097280" y="2331720"/>
+            <a:ext cx="2057400" cy="530352"/>
+          </a:xfrm>
+          <a:prstGeom prst="rect">
+            <a:avLst/>
+          </a:prstGeom>
+          <a:noFill/>
+          <a:ln/>
+        </p:spPr>
+        <p:txBody>
+          <a:bodyPr wrap="square" lIns="0" tIns="0" rIns="0" bIns="0" rtlCol="0" anchor="ctr"/>
+          <a:lstStyle/>
+          <a:p>
+            <a:pPr indent="0" marL="0">
+              <a:lnSpc>
+                <a:spcPct val="110000"/>
+              </a:lnSpc>
+              <a:buNone/>
+            </a:pPr>
+            <a:r>
+              <a:rPr lang="en-US" sz="1100" b="1" dirty="0">
+                <a:solidFill>
+                  <a:srgbClr val="2F4F6B"/>
+                </a:solidFill>
+                <a:latin typeface="Yu Gothic" pitchFamily="34" charset="0"/>
+                <a:ea typeface="Yu Gothic" pitchFamily="34" charset="-122"/>
+                <a:cs typeface="Yu Gothic" pitchFamily="34" charset="-120"/>
+              </a:rPr>
+              <a:t>答えられなかった質問</a:t>
+            </a:r>
+            <a:endParaRPr lang="en-US" sz="1100" dirty="0"/>
           </a:p>
         </p:txBody>
       </p:sp>
@@ -4052,8 +5617,8 @@
         </p:nvSpPr>
         <p:spPr>
           <a:xfrm>
-            <a:off x="1051560" y="3035808"/>
-            <a:ext cx="2834640" cy="777240"/>
+            <a:off x="3291840" y="2331720"/>
+            <a:ext cx="7772400" cy="530352"/>
           </a:xfrm>
           <a:prstGeom prst="rect">
             <a:avLst/>
@@ -4067,22 +5632,22 @@
           <a:p>
             <a:pPr indent="0" marL="0">
               <a:lnSpc>
-                <a:spcPct val="125000"/>
+                <a:spcPct val="115000"/>
               </a:lnSpc>
               <a:buNone/>
             </a:pPr>
             <a:r>
-              <a:rPr lang="en-US" sz="1500" b="1" dirty="0">
+              <a:rPr lang="en-US" sz="1150" dirty="0">
                 <a:solidFill>
                   <a:srgbClr val="23201D"/>
                 </a:solidFill>
-                <a:latin typeface="Yu Gothic" pitchFamily="34" charset="0"/>
-                <a:ea typeface="Yu Gothic" pitchFamily="34" charset="-122"/>
-                <a:cs typeface="Yu Gothic" pitchFamily="34" charset="-120"/>
-              </a:rPr>
-              <a:t>1領域を決めて、資料を載せる</a:t>
-            </a:r>
-            <a:endParaRPr lang="en-US" sz="1500" dirty="0"/>
+                <a:latin typeface="Consolas" pitchFamily="34" charset="0"/>
+                <a:ea typeface="Consolas" pitchFamily="34" charset="-122"/>
+                <a:cs typeface="Consolas" pitchFamily="34" charset="-120"/>
+              </a:rPr>
+              <a:t>外注先に出せる加工の範囲は？</a:t>
+            </a:r>
+            <a:endParaRPr lang="en-US" sz="1150" dirty="0"/>
           </a:p>
         </p:txBody>
       </p:sp>
@@ -4094,8 +5659,8 @@
         </p:nvSpPr>
         <p:spPr>
           <a:xfrm>
-            <a:off x="1051560" y="3822192"/>
-            <a:ext cx="2834640" cy="960120"/>
+            <a:off x="1097280" y="2862072"/>
+            <a:ext cx="2057400" cy="530352"/>
           </a:xfrm>
           <a:prstGeom prst="rect">
             <a:avLst/>
@@ -4109,12 +5674,348 @@
           <a:p>
             <a:pPr indent="0" marL="0">
               <a:lnSpc>
-                <a:spcPct val="130000"/>
+                <a:spcPct val="110000"/>
               </a:lnSpc>
               <a:buNone/>
             </a:pPr>
             <a:r>
-              <a:rPr lang="en-US" sz="1200" dirty="0">
+              <a:rPr lang="en-US" sz="1100" b="1" dirty="0">
+                <a:solidFill>
+                  <a:srgbClr val="2F4F6B"/>
+                </a:solidFill>
+                <a:latin typeface="Yu Gothic" pitchFamily="34" charset="0"/>
+                <a:ea typeface="Yu Gothic" pitchFamily="34" charset="-122"/>
+                <a:cs typeface="Yu Gothic" pitchFamily="34" charset="-120"/>
+              </a:rPr>
+              <a:t>必要な資料</a:t>
+            </a:r>
+            <a:endParaRPr lang="en-US" sz="1100" dirty="0"/>
+          </a:p>
+        </p:txBody>
+      </p:sp>
+      <p:sp>
+        <p:nvSpPr>
+          <p:cNvPr id="10" name="Text 8"/>
+          <p:cNvSpPr txBox="1"/>
+          <p:nvPr/>
+        </p:nvSpPr>
+        <p:spPr>
+          <a:xfrm>
+            <a:off x="3291840" y="2862072"/>
+            <a:ext cx="7772400" cy="530352"/>
+          </a:xfrm>
+          <a:prstGeom prst="rect">
+            <a:avLst/>
+          </a:prstGeom>
+          <a:noFill/>
+          <a:ln/>
+        </p:spPr>
+        <p:txBody>
+          <a:bodyPr wrap="square" lIns="0" tIns="0" rIns="0" bIns="0" rtlCol="0" anchor="ctr"/>
+          <a:lstStyle/>
+          <a:p>
+            <a:pPr indent="0" marL="0">
+              <a:lnSpc>
+                <a:spcPct val="115000"/>
+              </a:lnSpc>
+              <a:buNone/>
+            </a:pPr>
+            <a:r>
+              <a:rPr lang="en-US" sz="1150" dirty="0">
+                <a:solidFill>
+                  <a:srgbClr val="23201D"/>
+                </a:solidFill>
+                <a:latin typeface="Consolas" pitchFamily="34" charset="0"/>
+                <a:ea typeface="Consolas" pitchFamily="34" charset="-122"/>
+                <a:cs typeface="Consolas" pitchFamily="34" charset="-120"/>
+              </a:rPr>
+              <a:t>外注可否の判断基準</a:t>
+            </a:r>
+            <a:endParaRPr lang="en-US" sz="1150" dirty="0"/>
+          </a:p>
+        </p:txBody>
+      </p:sp>
+      <p:sp>
+        <p:nvSpPr>
+          <p:cNvPr id="11" name="Text 9"/>
+          <p:cNvSpPr txBox="1"/>
+          <p:nvPr/>
+        </p:nvSpPr>
+        <p:spPr>
+          <a:xfrm>
+            <a:off x="1097280" y="3392424"/>
+            <a:ext cx="2057400" cy="530352"/>
+          </a:xfrm>
+          <a:prstGeom prst="rect">
+            <a:avLst/>
+          </a:prstGeom>
+          <a:noFill/>
+          <a:ln/>
+        </p:spPr>
+        <p:txBody>
+          <a:bodyPr wrap="square" lIns="0" tIns="0" rIns="0" bIns="0" rtlCol="0" anchor="ctr"/>
+          <a:lstStyle/>
+          <a:p>
+            <a:pPr indent="0" marL="0">
+              <a:lnSpc>
+                <a:spcPct val="110000"/>
+              </a:lnSpc>
+              <a:buNone/>
+            </a:pPr>
+            <a:r>
+              <a:rPr lang="en-US" sz="1100" b="1" dirty="0">
+                <a:solidFill>
+                  <a:srgbClr val="2F4F6B"/>
+                </a:solidFill>
+                <a:latin typeface="Yu Gothic" pitchFamily="34" charset="0"/>
+                <a:ea typeface="Yu Gothic" pitchFamily="34" charset="-122"/>
+                <a:cs typeface="Yu Gothic" pitchFamily="34" charset="-120"/>
+              </a:rPr>
+              <a:t>いまどこにあるか</a:t>
+            </a:r>
+            <a:endParaRPr lang="en-US" sz="1100" dirty="0"/>
+          </a:p>
+        </p:txBody>
+      </p:sp>
+      <p:sp>
+        <p:nvSpPr>
+          <p:cNvPr id="12" name="Text 10"/>
+          <p:cNvSpPr txBox="1"/>
+          <p:nvPr/>
+        </p:nvSpPr>
+        <p:spPr>
+          <a:xfrm>
+            <a:off x="3291840" y="3392424"/>
+            <a:ext cx="7772400" cy="530352"/>
+          </a:xfrm>
+          <a:prstGeom prst="rect">
+            <a:avLst/>
+          </a:prstGeom>
+          <a:noFill/>
+          <a:ln/>
+        </p:spPr>
+        <p:txBody>
+          <a:bodyPr wrap="square" lIns="0" tIns="0" rIns="0" bIns="0" rtlCol="0" anchor="ctr"/>
+          <a:lstStyle/>
+          <a:p>
+            <a:pPr indent="0" marL="0">
+              <a:lnSpc>
+                <a:spcPct val="115000"/>
+              </a:lnSpc>
+              <a:buNone/>
+            </a:pPr>
+            <a:r>
+              <a:rPr lang="en-US" sz="1150" dirty="0">
+                <a:solidFill>
+                  <a:srgbClr val="23201D"/>
+                </a:solidFill>
+                <a:latin typeface="Consolas" pitchFamily="34" charset="0"/>
+                <a:ea typeface="Consolas" pitchFamily="34" charset="-122"/>
+                <a:cs typeface="Consolas" pitchFamily="34" charset="-120"/>
+              </a:rPr>
+              <a:t>社長の頭の中のみ</a:t>
+            </a:r>
+            <a:endParaRPr lang="en-US" sz="1150" dirty="0"/>
+          </a:p>
+        </p:txBody>
+      </p:sp>
+      <p:sp>
+        <p:nvSpPr>
+          <p:cNvPr id="13" name="Text 11"/>
+          <p:cNvSpPr txBox="1"/>
+          <p:nvPr/>
+        </p:nvSpPr>
+        <p:spPr>
+          <a:xfrm>
+            <a:off x="1097280" y="3922776"/>
+            <a:ext cx="2057400" cy="530352"/>
+          </a:xfrm>
+          <a:prstGeom prst="rect">
+            <a:avLst/>
+          </a:prstGeom>
+          <a:noFill/>
+          <a:ln/>
+        </p:spPr>
+        <p:txBody>
+          <a:bodyPr wrap="square" lIns="0" tIns="0" rIns="0" bIns="0" rtlCol="0" anchor="ctr"/>
+          <a:lstStyle/>
+          <a:p>
+            <a:pPr indent="0" marL="0">
+              <a:lnSpc>
+                <a:spcPct val="110000"/>
+              </a:lnSpc>
+              <a:buNone/>
+            </a:pPr>
+            <a:r>
+              <a:rPr lang="en-US" sz="1100" b="1" dirty="0">
+                <a:solidFill>
+                  <a:srgbClr val="2F4F6B"/>
+                </a:solidFill>
+                <a:latin typeface="Yu Gothic" pitchFamily="34" charset="0"/>
+                <a:ea typeface="Yu Gothic" pitchFamily="34" charset="-122"/>
+                <a:cs typeface="Yu Gothic" pitchFamily="34" charset="-120"/>
+              </a:rPr>
+              <a:t>誰が作るか</a:t>
+            </a:r>
+            <a:endParaRPr lang="en-US" sz="1100" dirty="0"/>
+          </a:p>
+        </p:txBody>
+      </p:sp>
+      <p:sp>
+        <p:nvSpPr>
+          <p:cNvPr id="14" name="Text 12"/>
+          <p:cNvSpPr txBox="1"/>
+          <p:nvPr/>
+        </p:nvSpPr>
+        <p:spPr>
+          <a:xfrm>
+            <a:off x="3291840" y="3922776"/>
+            <a:ext cx="7772400" cy="530352"/>
+          </a:xfrm>
+          <a:prstGeom prst="rect">
+            <a:avLst/>
+          </a:prstGeom>
+          <a:noFill/>
+          <a:ln/>
+        </p:spPr>
+        <p:txBody>
+          <a:bodyPr wrap="square" lIns="0" tIns="0" rIns="0" bIns="0" rtlCol="0" anchor="ctr"/>
+          <a:lstStyle/>
+          <a:p>
+            <a:pPr indent="0" marL="0">
+              <a:lnSpc>
+                <a:spcPct val="115000"/>
+              </a:lnSpc>
+              <a:buNone/>
+            </a:pPr>
+            <a:r>
+              <a:rPr lang="en-US" sz="1150" dirty="0">
+                <a:solidFill>
+                  <a:srgbClr val="23201D"/>
+                </a:solidFill>
+                <a:latin typeface="Consolas" pitchFamily="34" charset="0"/>
+                <a:ea typeface="Consolas" pitchFamily="34" charset="-122"/>
+                <a:cs typeface="Consolas" pitchFamily="34" charset="-120"/>
+              </a:rPr>
+              <a:t>工場長（社長の口述を書き起こす）</a:t>
+            </a:r>
+            <a:endParaRPr lang="en-US" sz="1150" dirty="0"/>
+          </a:p>
+        </p:txBody>
+      </p:sp>
+      <p:sp>
+        <p:nvSpPr>
+          <p:cNvPr id="15" name="Text 13"/>
+          <p:cNvSpPr txBox="1"/>
+          <p:nvPr/>
+        </p:nvSpPr>
+        <p:spPr>
+          <a:xfrm>
+            <a:off x="1097280" y="4453128"/>
+            <a:ext cx="2057400" cy="530352"/>
+          </a:xfrm>
+          <a:prstGeom prst="rect">
+            <a:avLst/>
+          </a:prstGeom>
+          <a:noFill/>
+          <a:ln/>
+        </p:spPr>
+        <p:txBody>
+          <a:bodyPr wrap="square" lIns="0" tIns="0" rIns="0" bIns="0" rtlCol="0" anchor="ctr"/>
+          <a:lstStyle/>
+          <a:p>
+            <a:pPr indent="0" marL="0">
+              <a:lnSpc>
+                <a:spcPct val="110000"/>
+              </a:lnSpc>
+              <a:buNone/>
+            </a:pPr>
+            <a:r>
+              <a:rPr lang="en-US" sz="1100" b="1" dirty="0">
+                <a:solidFill>
+                  <a:srgbClr val="2F4F6B"/>
+                </a:solidFill>
+                <a:latin typeface="Yu Gothic" pitchFamily="34" charset="0"/>
+                <a:ea typeface="Yu Gothic" pitchFamily="34" charset="-122"/>
+                <a:cs typeface="Yu Gothic" pitchFamily="34" charset="-120"/>
+              </a:rPr>
+              <a:t>いつまでに</a:t>
+            </a:r>
+            <a:endParaRPr lang="en-US" sz="1100" dirty="0"/>
+          </a:p>
+        </p:txBody>
+      </p:sp>
+      <p:sp>
+        <p:nvSpPr>
+          <p:cNvPr id="16" name="Text 14"/>
+          <p:cNvSpPr txBox="1"/>
+          <p:nvPr/>
+        </p:nvSpPr>
+        <p:spPr>
+          <a:xfrm>
+            <a:off x="3291840" y="4453128"/>
+            <a:ext cx="7772400" cy="530352"/>
+          </a:xfrm>
+          <a:prstGeom prst="rect">
+            <a:avLst/>
+          </a:prstGeom>
+          <a:noFill/>
+          <a:ln/>
+        </p:spPr>
+        <p:txBody>
+          <a:bodyPr wrap="square" lIns="0" tIns="0" rIns="0" bIns="0" rtlCol="0" anchor="ctr"/>
+          <a:lstStyle/>
+          <a:p>
+            <a:pPr indent="0" marL="0">
+              <a:lnSpc>
+                <a:spcPct val="115000"/>
+              </a:lnSpc>
+              <a:buNone/>
+            </a:pPr>
+            <a:r>
+              <a:rPr lang="en-US" sz="1150" dirty="0">
+                <a:solidFill>
+                  <a:srgbClr val="23201D"/>
+                </a:solidFill>
+                <a:latin typeface="Consolas" pitchFamily="34" charset="0"/>
+                <a:ea typeface="Consolas" pitchFamily="34" charset="-122"/>
+                <a:cs typeface="Consolas" pitchFamily="34" charset="-120"/>
+              </a:rPr>
+              <a:t>来月末</a:t>
+            </a:r>
+            <a:endParaRPr lang="en-US" sz="1150" dirty="0"/>
+          </a:p>
+        </p:txBody>
+      </p:sp>
+      <p:sp>
+        <p:nvSpPr>
+          <p:cNvPr id="17" name="Text 15"/>
+          <p:cNvSpPr txBox="1"/>
+          <p:nvPr/>
+        </p:nvSpPr>
+        <p:spPr>
+          <a:xfrm>
+            <a:off x="777240" y="5239512"/>
+            <a:ext cx="10607040" cy="548640"/>
+          </a:xfrm>
+          <a:prstGeom prst="rect">
+            <a:avLst/>
+          </a:prstGeom>
+          <a:noFill/>
+          <a:ln/>
+        </p:spPr>
+        <p:txBody>
+          <a:bodyPr wrap="square" lIns="0" tIns="0" rIns="0" bIns="0" rtlCol="0" anchor="ctr"/>
+          <a:lstStyle/>
+          <a:p>
+            <a:pPr indent="0" marL="0">
+              <a:lnSpc>
+                <a:spcPct val="135000"/>
+              </a:lnSpc>
+              <a:buNone/>
+            </a:pPr>
+            <a:r>
+              <a:rPr lang="en-US" sz="1250" dirty="0">
                 <a:solidFill>
                   <a:srgbClr val="5A534A"/>
                 </a:solidFill>
@@ -4122,271 +6023,9 @@
                 <a:ea typeface="Yu Gothic" pitchFamily="34" charset="-122"/>
                 <a:cs typeface="Yu Gothic" pitchFamily="34" charset="-120"/>
               </a:rPr>
-              <a:t>入れない判断が、品質を決めます</a:t>
-            </a:r>
-            <a:endParaRPr lang="en-US" sz="1200" dirty="0"/>
-          </a:p>
-        </p:txBody>
-      </p:sp>
-      <p:sp>
-        <p:nvSpPr>
-          <p:cNvPr id="10" name="Shape 8"/>
-          <p:cNvSpPr/>
-          <p:nvPr/>
-        </p:nvSpPr>
-        <p:spPr>
-          <a:xfrm>
-            <a:off x="4389120" y="2240280"/>
-            <a:ext cx="3383280" cy="2697480"/>
-          </a:xfrm>
-          <a:prstGeom prst="rect">
-            <a:avLst/>
-          </a:prstGeom>
-          <a:solidFill>
-            <a:srgbClr val="FFFFFF"/>
-          </a:solidFill>
-          <a:ln w="12700">
-            <a:solidFill>
-              <a:srgbClr val="EDE7DB"/>
-            </a:solidFill>
-            <a:prstDash val="solid"/>
-          </a:ln>
-        </p:spPr>
-      </p:sp>
-      <p:sp>
-        <p:nvSpPr>
-          <p:cNvPr id="11" name="Shape 9"/>
-          <p:cNvSpPr/>
-          <p:nvPr/>
-        </p:nvSpPr>
-        <p:spPr>
-          <a:xfrm>
-            <a:off x="4663440" y="2487168"/>
-            <a:ext cx="438912" cy="438912"/>
-          </a:xfrm>
-          <a:prstGeom prst="ellipse">
-            <a:avLst/>
-          </a:prstGeom>
-          <a:solidFill>
-            <a:srgbClr val="2F4F6B"/>
-          </a:solidFill>
-          <a:ln w="12700">
-            <a:solidFill>
-              <a:srgbClr val="2F4F6B"/>
-            </a:solidFill>
-            <a:prstDash val="solid"/>
-          </a:ln>
-        </p:spPr>
-      </p:sp>
-      <p:sp>
-        <p:nvSpPr>
-          <p:cNvPr id="12" name="Text 10"/>
-          <p:cNvSpPr txBox="1"/>
-          <p:nvPr/>
-        </p:nvSpPr>
-        <p:spPr>
-          <a:xfrm>
-            <a:off x="4663440" y="2487168"/>
-            <a:ext cx="438912" cy="438912"/>
-          </a:xfrm>
-          <a:prstGeom prst="rect">
-            <a:avLst/>
-          </a:prstGeom>
-          <a:noFill/>
-          <a:ln/>
-        </p:spPr>
-        <p:txBody>
-          <a:bodyPr wrap="square" lIns="0" tIns="0" rIns="0" bIns="0" rtlCol="0" anchor="ctr"/>
-          <a:lstStyle/>
-          <a:p>
-            <a:pPr algn="ctr" indent="0" marL="0">
-              <a:buNone/>
-            </a:pPr>
-            <a:r>
-              <a:rPr lang="en-US" sz="1400" b="1" dirty="0">
-                <a:solidFill>
-                  <a:srgbClr val="FFFFFF"/>
-                </a:solidFill>
-                <a:latin typeface="Yu Gothic" pitchFamily="34" charset="0"/>
-                <a:ea typeface="Yu Gothic" pitchFamily="34" charset="-122"/>
-                <a:cs typeface="Yu Gothic" pitchFamily="34" charset="-120"/>
-              </a:rPr>
-              <a:t>2</a:t>
-            </a:r>
-            <a:endParaRPr lang="en-US" sz="1400" dirty="0"/>
-          </a:p>
-        </p:txBody>
-      </p:sp>
-      <p:sp>
-        <p:nvSpPr>
-          <p:cNvPr id="13" name="Text 11"/>
-          <p:cNvSpPr txBox="1"/>
-          <p:nvPr/>
-        </p:nvSpPr>
-        <p:spPr>
-          <a:xfrm>
-            <a:off x="4663440" y="3035808"/>
-            <a:ext cx="2834640" cy="777240"/>
-          </a:xfrm>
-          <a:prstGeom prst="rect">
-            <a:avLst/>
-          </a:prstGeom>
-          <a:noFill/>
-          <a:ln/>
-        </p:spPr>
-        <p:txBody>
-          <a:bodyPr wrap="square" lIns="0" tIns="0" rIns="0" bIns="0" rtlCol="0" anchor="ctr"/>
-          <a:lstStyle/>
-          <a:p>
-            <a:pPr indent="0" marL="0">
-              <a:lnSpc>
-                <a:spcPct val="125000"/>
-              </a:lnSpc>
-              <a:buNone/>
-            </a:pPr>
-            <a:r>
-              <a:rPr lang="en-US" sz="1500" b="1" dirty="0">
-                <a:solidFill>
-                  <a:srgbClr val="23201D"/>
-                </a:solidFill>
-                <a:latin typeface="Yu Gothic" pitchFamily="34" charset="0"/>
-                <a:ea typeface="Yu Gothic" pitchFamily="34" charset="-122"/>
-                <a:cs typeface="Yu Gothic" pitchFamily="34" charset="-120"/>
-              </a:rPr>
-              <a:t>10問投げて、精度を測る</a:t>
-            </a:r>
-            <a:endParaRPr lang="en-US" sz="1500" dirty="0"/>
-          </a:p>
-        </p:txBody>
-      </p:sp>
-      <p:sp>
-        <p:nvSpPr>
-          <p:cNvPr id="14" name="Text 12"/>
-          <p:cNvSpPr txBox="1"/>
-          <p:nvPr/>
-        </p:nvSpPr>
-        <p:spPr>
-          <a:xfrm>
-            <a:off x="4663440" y="3822192"/>
-            <a:ext cx="2834640" cy="960120"/>
-          </a:xfrm>
-          <a:prstGeom prst="rect">
-            <a:avLst/>
-          </a:prstGeom>
-          <a:noFill/>
-          <a:ln/>
-        </p:spPr>
-        <p:txBody>
-          <a:bodyPr wrap="square" lIns="0" tIns="0" rIns="0" bIns="0" rtlCol="0" anchor="ctr"/>
-          <a:lstStyle/>
-          <a:p>
-            <a:pPr indent="0" marL="0">
-              <a:lnSpc>
-                <a:spcPct val="130000"/>
-              </a:lnSpc>
-              <a:buNone/>
-            </a:pPr>
-            <a:r>
-              <a:rPr lang="en-US" sz="1200" dirty="0">
-                <a:solidFill>
-                  <a:srgbClr val="5A534A"/>
-                </a:solidFill>
-                <a:latin typeface="Yu Gothic" pitchFamily="34" charset="0"/>
-                <a:ea typeface="Yu Gothic" pitchFamily="34" charset="-122"/>
-                <a:cs typeface="Yu Gothic" pitchFamily="34" charset="-120"/>
-              </a:rPr>
-              <a:t>社員の方が実際にしそうな質問で試します</a:t>
-            </a:r>
-            <a:endParaRPr lang="en-US" sz="1200" dirty="0"/>
-          </a:p>
-        </p:txBody>
-      </p:sp>
-      <p:sp>
-        <p:nvSpPr>
-          <p:cNvPr id="15" name="Shape 13"/>
-          <p:cNvSpPr/>
-          <p:nvPr/>
-        </p:nvSpPr>
-        <p:spPr>
-          <a:xfrm>
-            <a:off x="8001000" y="2240280"/>
-            <a:ext cx="3383280" cy="2697480"/>
-          </a:xfrm>
-          <a:prstGeom prst="rect">
-            <a:avLst/>
-          </a:prstGeom>
-          <a:solidFill>
-            <a:srgbClr val="FFFFFF"/>
-          </a:solidFill>
-          <a:ln w="12700">
-            <a:solidFill>
-              <a:srgbClr val="EDE7DB"/>
-            </a:solidFill>
-            <a:prstDash val="solid"/>
-          </a:ln>
-        </p:spPr>
-      </p:sp>
-      <p:sp>
-        <p:nvSpPr>
-          <p:cNvPr id="16" name="Shape 14"/>
-          <p:cNvSpPr/>
-          <p:nvPr/>
-        </p:nvSpPr>
-        <p:spPr>
-          <a:xfrm>
-            <a:off x="8275320" y="2487168"/>
-            <a:ext cx="438912" cy="438912"/>
-          </a:xfrm>
-          <a:prstGeom prst="ellipse">
-            <a:avLst/>
-          </a:prstGeom>
-          <a:solidFill>
-            <a:srgbClr val="2F4F6B"/>
-          </a:solidFill>
-          <a:ln w="12700">
-            <a:solidFill>
-              <a:srgbClr val="2F4F6B"/>
-            </a:solidFill>
-            <a:prstDash val="solid"/>
-          </a:ln>
-        </p:spPr>
-      </p:sp>
-      <p:sp>
-        <p:nvSpPr>
-          <p:cNvPr id="17" name="Text 15"/>
-          <p:cNvSpPr txBox="1"/>
-          <p:nvPr/>
-        </p:nvSpPr>
-        <p:spPr>
-          <a:xfrm>
-            <a:off x="8275320" y="2487168"/>
-            <a:ext cx="438912" cy="438912"/>
-          </a:xfrm>
-          <a:prstGeom prst="rect">
-            <a:avLst/>
-          </a:prstGeom>
-          <a:noFill/>
-          <a:ln/>
-        </p:spPr>
-        <p:txBody>
-          <a:bodyPr wrap="square" lIns="0" tIns="0" rIns="0" bIns="0" rtlCol="0" anchor="ctr"/>
-          <a:lstStyle/>
-          <a:p>
-            <a:pPr algn="ctr" indent="0" marL="0">
-              <a:buNone/>
-            </a:pPr>
-            <a:r>
-              <a:rPr lang="en-US" sz="1400" b="1" dirty="0">
-                <a:solidFill>
-                  <a:srgbClr val="FFFFFF"/>
-                </a:solidFill>
-                <a:latin typeface="Yu Gothic" pitchFamily="34" charset="0"/>
-                <a:ea typeface="Yu Gothic" pitchFamily="34" charset="-122"/>
-                <a:cs typeface="Yu Gothic" pitchFamily="34" charset="-120"/>
-              </a:rPr>
-              <a:t>3</a:t>
-            </a:r>
-            <a:endParaRPr lang="en-US" sz="1400" dirty="0"/>
+              <a:t>この表が、そのまま事業承継の課題リストになります。AIを入れたら、自社に何が無いかが分かった——これが本講座で最も価値のある副産物です。</a:t>
+            </a:r>
+            <a:endParaRPr lang="en-US" sz="1250" dirty="0"/>
           </a:p>
         </p:txBody>
       </p:sp>
@@ -4398,37 +6037,34 @@
         </p:nvSpPr>
         <p:spPr>
           <a:xfrm>
-            <a:off x="8275320" y="3035808"/>
-            <a:ext cx="2834640" cy="777240"/>
-          </a:xfrm>
-          <a:prstGeom prst="rect">
-            <a:avLst/>
-          </a:prstGeom>
-          <a:noFill/>
-          <a:ln/>
-        </p:spPr>
-        <p:txBody>
-          <a:bodyPr wrap="square" lIns="0" tIns="0" rIns="0" bIns="0" rtlCol="0" anchor="ctr"/>
-          <a:lstStyle/>
-          <a:p>
-            <a:pPr indent="0" marL="0">
-              <a:lnSpc>
-                <a:spcPct val="125000"/>
-              </a:lnSpc>
-              <a:buNone/>
-            </a:pPr>
-            <a:r>
-              <a:rPr lang="en-US" sz="1500" b="1" dirty="0">
-                <a:solidFill>
-                  <a:srgbClr val="23201D"/>
-                </a:solidFill>
-                <a:latin typeface="Yu Gothic" pitchFamily="34" charset="0"/>
-                <a:ea typeface="Yu Gothic" pitchFamily="34" charset="-122"/>
-                <a:cs typeface="Yu Gothic" pitchFamily="34" charset="-120"/>
-              </a:rPr>
-              <a:t>答えられなかった質問を書き出す</a:t>
-            </a:r>
-            <a:endParaRPr lang="en-US" sz="1500" dirty="0"/>
+            <a:off x="777240" y="6382512"/>
+            <a:ext cx="7424928" cy="256032"/>
+          </a:xfrm>
+          <a:prstGeom prst="rect">
+            <a:avLst/>
+          </a:prstGeom>
+          <a:noFill/>
+          <a:ln/>
+        </p:spPr>
+        <p:txBody>
+          <a:bodyPr wrap="square" lIns="0" tIns="0" rIns="0" bIns="0" rtlCol="0" anchor="ctr"/>
+          <a:lstStyle/>
+          <a:p>
+            <a:pPr indent="0" marL="0">
+              <a:buNone/>
+            </a:pPr>
+            <a:r>
+              <a:rPr lang="en-US" sz="900" dirty="0">
+                <a:solidFill>
+                  <a:srgbClr val="8A8177"/>
+                </a:solidFill>
+                <a:latin typeface="Yu Gothic" pitchFamily="34" charset="0"/>
+                <a:ea typeface="Yu Gothic" pitchFamily="34" charset="-122"/>
+                <a:cs typeface="Yu Gothic" pitchFamily="34" charset="-120"/>
+              </a:rPr>
+              <a:t>第8回　社内の知識を検索できるようにする</a:t>
+            </a:r>
+            <a:endParaRPr lang="en-US" sz="900" dirty="0"/>
           </a:p>
         </p:txBody>
       </p:sp>
@@ -4440,62 +6076,20 @@
         </p:nvSpPr>
         <p:spPr>
           <a:xfrm>
-            <a:off x="8275320" y="3822192"/>
-            <a:ext cx="2834640" cy="960120"/>
-          </a:xfrm>
-          <a:prstGeom prst="rect">
-            <a:avLst/>
-          </a:prstGeom>
-          <a:noFill/>
-          <a:ln/>
-        </p:spPr>
-        <p:txBody>
-          <a:bodyPr wrap="square" lIns="0" tIns="0" rIns="0" bIns="0" rtlCol="0" anchor="ctr"/>
-          <a:lstStyle/>
-          <a:p>
-            <a:pPr indent="0" marL="0">
-              <a:lnSpc>
-                <a:spcPct val="130000"/>
-              </a:lnSpc>
-              <a:buNone/>
-            </a:pPr>
-            <a:r>
-              <a:rPr lang="en-US" sz="1200" dirty="0">
-                <a:solidFill>
-                  <a:srgbClr val="5A534A"/>
-                </a:solidFill>
-                <a:latin typeface="Yu Gothic" pitchFamily="34" charset="0"/>
-                <a:ea typeface="Yu Gothic" pitchFamily="34" charset="-122"/>
-                <a:cs typeface="Yu Gothic" pitchFamily="34" charset="-120"/>
-              </a:rPr>
-              <a:t>ここが今日いちばんの成果物です</a:t>
-            </a:r>
-            <a:endParaRPr lang="en-US" sz="1200" dirty="0"/>
-          </a:p>
-        </p:txBody>
-      </p:sp>
-      <p:sp>
-        <p:nvSpPr>
-          <p:cNvPr id="20" name="Text 18"/>
-          <p:cNvSpPr txBox="1"/>
-          <p:nvPr/>
-        </p:nvSpPr>
-        <p:spPr>
-          <a:xfrm>
-            <a:off x="777240" y="6355080"/>
-            <a:ext cx="7424928" cy="274320"/>
-          </a:xfrm>
-          <a:prstGeom prst="rect">
-            <a:avLst/>
-          </a:prstGeom>
-          <a:noFill/>
-          <a:ln/>
-        </p:spPr>
-        <p:txBody>
-          <a:bodyPr wrap="square" lIns="0" tIns="0" rIns="0" bIns="0" rtlCol="0" anchor="ctr"/>
-          <a:lstStyle/>
-          <a:p>
-            <a:pPr indent="0" marL="0">
+            <a:off x="8202168" y="6382512"/>
+            <a:ext cx="3182112" cy="256032"/>
+          </a:xfrm>
+          <a:prstGeom prst="rect">
+            <a:avLst/>
+          </a:prstGeom>
+          <a:noFill/>
+          <a:ln/>
+        </p:spPr>
+        <p:txBody>
+          <a:bodyPr wrap="square" lIns="0" tIns="0" rIns="0" bIns="0" rtlCol="0" anchor="ctr"/>
+          <a:lstStyle/>
+          <a:p>
+            <a:pPr algn="r" indent="0" marL="0">
               <a:buNone/>
             </a:pPr>
             <a:r>
@@ -4507,46 +6101,7 @@
                 <a:ea typeface="Yu Gothic" pitchFamily="34" charset="-122"/>
                 <a:cs typeface="Yu Gothic" pitchFamily="34" charset="-120"/>
               </a:rPr>
-              <a:t>第8回　社内の知識を検索できるようにする</a:t>
-            </a:r>
-            <a:endParaRPr lang="en-US" sz="900" dirty="0"/>
-          </a:p>
-        </p:txBody>
-      </p:sp>
-      <p:sp>
-        <p:nvSpPr>
-          <p:cNvPr id="21" name="Text 19"/>
-          <p:cNvSpPr txBox="1"/>
-          <p:nvPr/>
-        </p:nvSpPr>
-        <p:spPr>
-          <a:xfrm>
-            <a:off x="8202168" y="6355080"/>
-            <a:ext cx="3182112" cy="274320"/>
-          </a:xfrm>
-          <a:prstGeom prst="rect">
-            <a:avLst/>
-          </a:prstGeom>
-          <a:noFill/>
-          <a:ln/>
-        </p:spPr>
-        <p:txBody>
-          <a:bodyPr wrap="square" lIns="0" tIns="0" rIns="0" bIns="0" rtlCol="0" anchor="ctr"/>
-          <a:lstStyle/>
-          <a:p>
-            <a:pPr algn="r" indent="0" marL="0">
-              <a:buNone/>
-            </a:pPr>
-            <a:r>
-              <a:rPr lang="en-US" sz="900" dirty="0">
-                <a:solidFill>
-                  <a:srgbClr val="8A8177"/>
-                </a:solidFill>
-                <a:latin typeface="Yu Gothic" pitchFamily="34" charset="0"/>
-                <a:ea typeface="Yu Gothic" pitchFamily="34" charset="-122"/>
-                <a:cs typeface="Yu Gothic" pitchFamily="34" charset="-120"/>
-              </a:rPr>
-              <a:t>演習</a:t>
+              <a:t>あてはめ</a:t>
             </a:r>
             <a:endParaRPr lang="en-US" sz="900" dirty="0"/>
           </a:p>
@@ -4592,7 +6147,7 @@
         </p:nvSpPr>
         <p:spPr>
           <a:xfrm>
-            <a:off x="777240" y="822960"/>
+            <a:off x="777240" y="566928"/>
             <a:ext cx="10607040" cy="274320"/>
           </a:xfrm>
           <a:prstGeom prst="rect">
@@ -4611,13 +6166,13 @@
             <a:r>
               <a:rPr lang="en-US" sz="1100" b="1" spc="250" kern="0" dirty="0">
                 <a:solidFill>
-                  <a:srgbClr val="B04A2F"/>
-                </a:solidFill>
-                <a:latin typeface="Yu Gothic" pitchFamily="34" charset="0"/>
-                <a:ea typeface="Yu Gothic" pitchFamily="34" charset="-122"/>
-                <a:cs typeface="Yu Gothic" pitchFamily="34" charset="-120"/>
-              </a:rPr>
-              <a:t>ここだけは</a:t>
+                  <a:srgbClr val="8A8177"/>
+                </a:solidFill>
+                <a:latin typeface="Yu Gothic" pitchFamily="34" charset="0"/>
+                <a:ea typeface="Yu Gothic" pitchFamily="34" charset="-122"/>
+                <a:cs typeface="Yu Gothic" pitchFamily="34" charset="-120"/>
+              </a:rPr>
+              <a:t>実演 ①</a:t>
             </a:r>
             <a:endParaRPr lang="en-US" sz="1100" dirty="0"/>
           </a:p>
@@ -4631,24 +6186,24 @@
         </p:nvSpPr>
         <p:spPr>
           <a:xfrm>
-            <a:off x="777240" y="1188720"/>
-            <a:ext cx="9546336" cy="822960"/>
-          </a:xfrm>
-          <a:prstGeom prst="rect">
-            <a:avLst/>
-          </a:prstGeom>
-          <a:noFill/>
-          <a:ln/>
-        </p:spPr>
-        <p:txBody>
-          <a:bodyPr wrap="square" lIns="0" tIns="0" rIns="0" bIns="0" rtlCol="0" anchor="ctr"/>
-          <a:lstStyle/>
-          <a:p>
-            <a:pPr indent="0" marL="0">
-              <a:buNone/>
-            </a:pPr>
-            <a:r>
-              <a:rPr lang="en-US" sz="3000" b="1" dirty="0">
+            <a:off x="777240" y="896112"/>
+            <a:ext cx="10607040" cy="640080"/>
+          </a:xfrm>
+          <a:prstGeom prst="rect">
+            <a:avLst/>
+          </a:prstGeom>
+          <a:noFill/>
+          <a:ln/>
+        </p:spPr>
+        <p:txBody>
+          <a:bodyPr wrap="square" lIns="0" tIns="0" rIns="0" bIns="0" rtlCol="0" anchor="ctr"/>
+          <a:lstStyle/>
+          <a:p>
+            <a:pPr indent="0" marL="0">
+              <a:buNone/>
+            </a:pPr>
+            <a:r>
+              <a:rPr lang="en-US" sz="2600" b="1" dirty="0">
                 <a:solidFill>
                   <a:srgbClr val="23201D"/>
                 </a:solidFill>
@@ -4656,9 +6211,9 @@
                 <a:ea typeface="Yu Gothic" pitchFamily="34" charset="-122"/>
                 <a:cs typeface="Yu Gothic" pitchFamily="34" charset="-120"/>
               </a:rPr>
-              <a:t>答えられなかった質問こそ、成果です</a:t>
-            </a:r>
-            <a:endParaRPr lang="en-US" sz="3000" dirty="0"/>
+              <a:t>範囲を広げすぎた場合</a:t>
+            </a:r>
+            <a:endParaRPr lang="en-US" sz="2600" dirty="0"/>
           </a:p>
         </p:txBody>
       </p:sp>
@@ -4670,14 +6225,352 @@
         </p:nvSpPr>
         <p:spPr>
           <a:xfrm>
-            <a:off x="777240" y="2331720"/>
-            <a:ext cx="64008" cy="2011680"/>
+            <a:off x="777240" y="1691640"/>
+            <a:ext cx="4879238" cy="1371600"/>
           </a:xfrm>
           <a:prstGeom prst="rect">
             <a:avLst/>
           </a:prstGeom>
           <a:solidFill>
-            <a:srgbClr val="B04A2F"/>
+            <a:srgbClr val="EDE7DB"/>
+          </a:solidFill>
+          <a:ln w="15875">
+            <a:solidFill>
+              <a:srgbClr val="8A8177"/>
+            </a:solidFill>
+            <a:prstDash val="solid"/>
+          </a:ln>
+        </p:spPr>
+      </p:sp>
+      <p:sp>
+        <p:nvSpPr>
+          <p:cNvPr id="5" name="Text 3"/>
+          <p:cNvSpPr txBox="1"/>
+          <p:nvPr/>
+        </p:nvSpPr>
+        <p:spPr>
+          <a:xfrm>
+            <a:off x="1005840" y="1783080"/>
+            <a:ext cx="1828800" cy="274320"/>
+          </a:xfrm>
+          <a:prstGeom prst="rect">
+            <a:avLst/>
+          </a:prstGeom>
+          <a:noFill/>
+          <a:ln/>
+        </p:spPr>
+        <p:txBody>
+          <a:bodyPr wrap="square" lIns="0" tIns="0" rIns="0" bIns="0" rtlCol="0" anchor="ctr"/>
+          <a:lstStyle/>
+          <a:p>
+            <a:pPr indent="0" marL="0">
+              <a:buNone/>
+            </a:pPr>
+            <a:r>
+              <a:rPr lang="en-US" sz="1000" b="1" spc="200" kern="0" dirty="0">
+                <a:solidFill>
+                  <a:srgbClr val="8A8177"/>
+                </a:solidFill>
+                <a:latin typeface="Yu Gothic" pitchFamily="34" charset="0"/>
+                <a:ea typeface="Yu Gothic" pitchFamily="34" charset="-122"/>
+                <a:cs typeface="Yu Gothic" pitchFamily="34" charset="-120"/>
+              </a:rPr>
+              <a:t>入力</a:t>
+            </a:r>
+            <a:endParaRPr lang="en-US" sz="1000" dirty="0"/>
+          </a:p>
+        </p:txBody>
+      </p:sp>
+      <p:sp>
+        <p:nvSpPr>
+          <p:cNvPr id="6" name="Text 4"/>
+          <p:cNvSpPr txBox="1"/>
+          <p:nvPr/>
+        </p:nvSpPr>
+        <p:spPr>
+          <a:xfrm>
+            <a:off x="1005840" y="2084832"/>
+            <a:ext cx="4422038" cy="868680"/>
+          </a:xfrm>
+          <a:prstGeom prst="rect">
+            <a:avLst/>
+          </a:prstGeom>
+          <a:noFill/>
+          <a:ln/>
+        </p:spPr>
+        <p:txBody>
+          <a:bodyPr wrap="square" lIns="0" tIns="0" rIns="0" bIns="0" rtlCol="0" anchor="ctr"/>
+          <a:lstStyle/>
+          <a:p>
+            <a:pPr indent="0" marL="0">
+              <a:lnSpc>
+                <a:spcPct val="125000"/>
+              </a:lnSpc>
+              <a:buNone/>
+            </a:pPr>
+            <a:r>
+              <a:rPr lang="en-US" sz="1200" dirty="0">
+                <a:solidFill>
+                  <a:srgbClr val="23201D"/>
+                </a:solidFill>
+                <a:latin typeface="Consolas" pitchFamily="34" charset="0"/>
+                <a:ea typeface="Consolas" pitchFamily="34" charset="-122"/>
+                <a:cs typeface="Consolas" pitchFamily="34" charset="-120"/>
+              </a:rPr>
+              <a:t>全社の資料を、古い版も下書きも含めて全部載せる</a:t>
+            </a:r>
+            <a:endParaRPr lang="en-US" sz="1200" dirty="0"/>
+          </a:p>
+        </p:txBody>
+      </p:sp>
+      <p:sp>
+        <p:nvSpPr>
+          <p:cNvPr id="7" name="Shape 5"/>
+          <p:cNvSpPr/>
+          <p:nvPr/>
+        </p:nvSpPr>
+        <p:spPr>
+          <a:xfrm>
+            <a:off x="6080760" y="1691640"/>
+            <a:ext cx="5303520" cy="3017520"/>
+          </a:xfrm>
+          <a:prstGeom prst="rect">
+            <a:avLst/>
+          </a:prstGeom>
+          <a:solidFill>
+            <a:srgbClr val="FFFFFF"/>
+          </a:solidFill>
+          <a:ln w="12700">
+            <a:solidFill>
+              <a:srgbClr val="EDE7DB"/>
+            </a:solidFill>
+            <a:prstDash val="solid"/>
+          </a:ln>
+        </p:spPr>
+      </p:sp>
+      <p:sp>
+        <p:nvSpPr>
+          <p:cNvPr id="8" name="Text 6"/>
+          <p:cNvSpPr txBox="1"/>
+          <p:nvPr/>
+        </p:nvSpPr>
+        <p:spPr>
+          <a:xfrm>
+            <a:off x="6309360" y="1783080"/>
+            <a:ext cx="2743200" cy="274320"/>
+          </a:xfrm>
+          <a:prstGeom prst="rect">
+            <a:avLst/>
+          </a:prstGeom>
+          <a:noFill/>
+          <a:ln/>
+        </p:spPr>
+        <p:txBody>
+          <a:bodyPr wrap="square" lIns="0" tIns="0" rIns="0" bIns="0" rtlCol="0" anchor="ctr"/>
+          <a:lstStyle/>
+          <a:p>
+            <a:pPr indent="0" marL="0">
+              <a:buNone/>
+            </a:pPr>
+            <a:r>
+              <a:rPr lang="en-US" sz="1000" b="1" spc="200" kern="0" dirty="0">
+                <a:solidFill>
+                  <a:srgbClr val="8A8177"/>
+                </a:solidFill>
+                <a:latin typeface="Yu Gothic" pitchFamily="34" charset="0"/>
+                <a:ea typeface="Yu Gothic" pitchFamily="34" charset="-122"/>
+                <a:cs typeface="Yu Gothic" pitchFamily="34" charset="-120"/>
+              </a:rPr>
+              <a:t>出てくるもの</a:t>
+            </a:r>
+            <a:endParaRPr lang="en-US" sz="1000" dirty="0"/>
+          </a:p>
+        </p:txBody>
+      </p:sp>
+      <p:sp>
+        <p:nvSpPr>
+          <p:cNvPr id="9" name="Text 7"/>
+          <p:cNvSpPr txBox="1"/>
+          <p:nvPr/>
+        </p:nvSpPr>
+        <p:spPr>
+          <a:xfrm>
+            <a:off x="6309360" y="2148840"/>
+            <a:ext cx="4846320" cy="566928"/>
+          </a:xfrm>
+          <a:prstGeom prst="rect">
+            <a:avLst/>
+          </a:prstGeom>
+          <a:noFill/>
+          <a:ln/>
+        </p:spPr>
+        <p:txBody>
+          <a:bodyPr wrap="square" lIns="0" tIns="0" rIns="0" bIns="0" rtlCol="0" anchor="ctr"/>
+          <a:lstStyle/>
+          <a:p>
+            <a:pPr indent="0" marL="0">
+              <a:lnSpc>
+                <a:spcPct val="125000"/>
+              </a:lnSpc>
+              <a:buNone/>
+            </a:pPr>
+            <a:r>
+              <a:rPr lang="en-US" sz="1250" dirty="0">
+                <a:solidFill>
+                  <a:srgbClr val="23201D"/>
+                </a:solidFill>
+                <a:latin typeface="Yu Gothic" pitchFamily="34" charset="0"/>
+                <a:ea typeface="Yu Gothic" pitchFamily="34" charset="-122"/>
+                <a:cs typeface="Yu Gothic" pitchFamily="34" charset="-120"/>
+              </a:rPr>
+              <a:t>・どれが最新か分からず、古い情報で答える</a:t>
+            </a:r>
+            <a:endParaRPr lang="en-US" sz="1250" dirty="0"/>
+          </a:p>
+        </p:txBody>
+      </p:sp>
+      <p:sp>
+        <p:nvSpPr>
+          <p:cNvPr id="10" name="Text 8"/>
+          <p:cNvSpPr txBox="1"/>
+          <p:nvPr/>
+        </p:nvSpPr>
+        <p:spPr>
+          <a:xfrm>
+            <a:off x="6309360" y="2752344"/>
+            <a:ext cx="4846320" cy="566928"/>
+          </a:xfrm>
+          <a:prstGeom prst="rect">
+            <a:avLst/>
+          </a:prstGeom>
+          <a:noFill/>
+          <a:ln/>
+        </p:spPr>
+        <p:txBody>
+          <a:bodyPr wrap="square" lIns="0" tIns="0" rIns="0" bIns="0" rtlCol="0" anchor="ctr"/>
+          <a:lstStyle/>
+          <a:p>
+            <a:pPr indent="0" marL="0">
+              <a:lnSpc>
+                <a:spcPct val="125000"/>
+              </a:lnSpc>
+              <a:buNone/>
+            </a:pPr>
+            <a:r>
+              <a:rPr lang="en-US" sz="1250" dirty="0">
+                <a:solidFill>
+                  <a:srgbClr val="23201D"/>
+                </a:solidFill>
+                <a:latin typeface="Yu Gothic" pitchFamily="34" charset="0"/>
+                <a:ea typeface="Yu Gothic" pitchFamily="34" charset="-122"/>
+                <a:cs typeface="Yu Gothic" pitchFamily="34" charset="-120"/>
+              </a:rPr>
+              <a:t>・下書きの数字を、確定値のように答える</a:t>
+            </a:r>
+            <a:endParaRPr lang="en-US" sz="1250" dirty="0"/>
+          </a:p>
+        </p:txBody>
+      </p:sp>
+      <p:sp>
+        <p:nvSpPr>
+          <p:cNvPr id="11" name="Text 9"/>
+          <p:cNvSpPr txBox="1"/>
+          <p:nvPr/>
+        </p:nvSpPr>
+        <p:spPr>
+          <a:xfrm>
+            <a:off x="6309360" y="3355848"/>
+            <a:ext cx="4846320" cy="566928"/>
+          </a:xfrm>
+          <a:prstGeom prst="rect">
+            <a:avLst/>
+          </a:prstGeom>
+          <a:noFill/>
+          <a:ln/>
+        </p:spPr>
+        <p:txBody>
+          <a:bodyPr wrap="square" lIns="0" tIns="0" rIns="0" bIns="0" rtlCol="0" anchor="ctr"/>
+          <a:lstStyle/>
+          <a:p>
+            <a:pPr indent="0" marL="0">
+              <a:lnSpc>
+                <a:spcPct val="125000"/>
+              </a:lnSpc>
+              <a:buNone/>
+            </a:pPr>
+            <a:r>
+              <a:rPr lang="en-US" sz="1250" dirty="0">
+                <a:solidFill>
+                  <a:srgbClr val="23201D"/>
+                </a:solidFill>
+                <a:latin typeface="Yu Gothic" pitchFamily="34" charset="0"/>
+                <a:ea typeface="Yu Gothic" pitchFamily="34" charset="-122"/>
+                <a:cs typeface="Yu Gothic" pitchFamily="34" charset="-120"/>
+              </a:rPr>
+              <a:t>・10問中○が3件まで落ちる</a:t>
+            </a:r>
+            <a:endParaRPr lang="en-US" sz="1250" dirty="0"/>
+          </a:p>
+        </p:txBody>
+      </p:sp>
+      <p:sp>
+        <p:nvSpPr>
+          <p:cNvPr id="12" name="Text 10"/>
+          <p:cNvSpPr txBox="1"/>
+          <p:nvPr/>
+        </p:nvSpPr>
+        <p:spPr>
+          <a:xfrm>
+            <a:off x="6309360" y="3959352"/>
+            <a:ext cx="4846320" cy="566928"/>
+          </a:xfrm>
+          <a:prstGeom prst="rect">
+            <a:avLst/>
+          </a:prstGeom>
+          <a:noFill/>
+          <a:ln/>
+        </p:spPr>
+        <p:txBody>
+          <a:bodyPr wrap="square" lIns="0" tIns="0" rIns="0" bIns="0" rtlCol="0" anchor="ctr"/>
+          <a:lstStyle/>
+          <a:p>
+            <a:pPr indent="0" marL="0">
+              <a:lnSpc>
+                <a:spcPct val="125000"/>
+              </a:lnSpc>
+              <a:buNone/>
+            </a:pPr>
+            <a:r>
+              <a:rPr lang="en-US" sz="1250" dirty="0">
+                <a:solidFill>
+                  <a:srgbClr val="23201D"/>
+                </a:solidFill>
+                <a:latin typeface="Yu Gothic" pitchFamily="34" charset="0"/>
+                <a:ea typeface="Yu Gothic" pitchFamily="34" charset="-122"/>
+                <a:cs typeface="Yu Gothic" pitchFamily="34" charset="-120"/>
+              </a:rPr>
+              <a:t>・「使えない」という評価が社内に広がる</a:t>
+            </a:r>
+            <a:endParaRPr lang="en-US" sz="1250" dirty="0"/>
+          </a:p>
+        </p:txBody>
+      </p:sp>
+      <p:sp>
+        <p:nvSpPr>
+          <p:cNvPr id="13" name="Shape 11"/>
+          <p:cNvSpPr/>
+          <p:nvPr/>
+        </p:nvSpPr>
+        <p:spPr>
+          <a:xfrm>
+            <a:off x="777240" y="3291840"/>
+            <a:ext cx="4879238" cy="1417320"/>
+          </a:xfrm>
+          <a:prstGeom prst="rect">
+            <a:avLst/>
+          </a:prstGeom>
+          <a:solidFill>
+            <a:srgbClr val="E4DFD5"/>
           </a:solidFill>
           <a:ln w="12700">
             <a:solidFill>
@@ -4689,14 +6582,14 @@
       </p:sp>
       <p:sp>
         <p:nvSpPr>
-          <p:cNvPr id="5" name="Text 3"/>
-          <p:cNvSpPr txBox="1"/>
-          <p:nvPr/>
-        </p:nvSpPr>
-        <p:spPr>
-          <a:xfrm>
-            <a:off x="1188720" y="2331720"/>
-            <a:ext cx="9966960" cy="2011680"/>
+          <p:cNvPr id="14" name="Text 12"/>
+          <p:cNvSpPr txBox="1"/>
+          <p:nvPr/>
+        </p:nvSpPr>
+        <p:spPr>
+          <a:xfrm>
+            <a:off x="1005840" y="3383280"/>
+            <a:ext cx="4422038" cy="1234440"/>
           </a:xfrm>
           <a:prstGeom prst="rect">
             <a:avLst/>
@@ -4710,12 +6603,12 @@
           <a:p>
             <a:pPr indent="0" marL="0">
               <a:lnSpc>
-                <a:spcPct val="160000"/>
+                <a:spcPct val="135000"/>
               </a:lnSpc>
               <a:buNone/>
             </a:pPr>
             <a:r>
-              <a:rPr lang="en-US" sz="1700" dirty="0">
+              <a:rPr lang="en-US" sz="1250" dirty="0">
                 <a:solidFill>
                   <a:srgbClr val="3F3933"/>
                 </a:solidFill>
@@ -4723,22 +6616,86 @@
                 <a:ea typeface="Yu Gothic" pitchFamily="34" charset="-122"/>
                 <a:cs typeface="Yu Gothic" pitchFamily="34" charset="-120"/>
               </a:rPr>
-              <a:t>それは、資料が存在しないか、社長の頭の中にしかない知識です。そのまま事業承継の課題リストになります。</a:t>
-            </a:r>
-            <a:endParaRPr lang="en-US" sz="1700" dirty="0"/>
-          </a:p>
-        </p:txBody>
-      </p:sp>
-      <p:sp>
-        <p:nvSpPr>
-          <p:cNvPr id="6" name="Text 4"/>
-          <p:cNvSpPr txBox="1"/>
-          <p:nvPr/>
-        </p:nvSpPr>
-        <p:spPr>
-          <a:xfrm>
-            <a:off x="777240" y="6355080"/>
-            <a:ext cx="7424928" cy="274320"/>
+              <a:t>載せる量と精度は比例しません。入れない判断のほうが、品質を決めています。</a:t>
+            </a:r>
+            <a:endParaRPr lang="en-US" sz="1250" dirty="0"/>
+          </a:p>
+        </p:txBody>
+      </p:sp>
+      <p:sp>
+        <p:nvSpPr>
+          <p:cNvPr id="15" name="Shape 13"/>
+          <p:cNvSpPr/>
+          <p:nvPr/>
+        </p:nvSpPr>
+        <p:spPr>
+          <a:xfrm>
+            <a:off x="777240" y="4983480"/>
+            <a:ext cx="10607040" cy="685800"/>
+          </a:xfrm>
+          <a:prstGeom prst="rect">
+            <a:avLst/>
+          </a:prstGeom>
+          <a:solidFill>
+            <a:srgbClr val="8A8177"/>
+          </a:solidFill>
+          <a:ln w="12700">
+            <a:solidFill>
+              <a:srgbClr val="333333"/>
+            </a:solidFill>
+            <a:prstDash val="solid"/>
+          </a:ln>
+        </p:spPr>
+      </p:sp>
+      <p:sp>
+        <p:nvSpPr>
+          <p:cNvPr id="16" name="Text 14"/>
+          <p:cNvSpPr txBox="1"/>
+          <p:nvPr/>
+        </p:nvSpPr>
+        <p:spPr>
+          <a:xfrm>
+            <a:off x="1097280" y="4983480"/>
+            <a:ext cx="9966960" cy="685800"/>
+          </a:xfrm>
+          <a:prstGeom prst="rect">
+            <a:avLst/>
+          </a:prstGeom>
+          <a:noFill/>
+          <a:ln/>
+        </p:spPr>
+        <p:txBody>
+          <a:bodyPr wrap="square" lIns="0" tIns="0" rIns="0" bIns="0" rtlCol="0" anchor="ctr"/>
+          <a:lstStyle/>
+          <a:p>
+            <a:pPr indent="0" marL="0">
+              <a:buNone/>
+            </a:pPr>
+            <a:r>
+              <a:rPr lang="en-US" sz="1450" b="1" dirty="0">
+                <a:solidFill>
+                  <a:srgbClr val="FFFFFF"/>
+                </a:solidFill>
+                <a:latin typeface="Yu Gothic" pitchFamily="34" charset="0"/>
+                <a:ea typeface="Yu Gothic" pitchFamily="34" charset="-122"/>
+                <a:cs typeface="Yu Gothic" pitchFamily="34" charset="-120"/>
+              </a:rPr>
+              <a:t>範囲を広げるほど、精度は落ちます</a:t>
+            </a:r>
+            <a:endParaRPr lang="en-US" sz="1450" dirty="0"/>
+          </a:p>
+        </p:txBody>
+      </p:sp>
+      <p:sp>
+        <p:nvSpPr>
+          <p:cNvPr id="17" name="Text 15"/>
+          <p:cNvSpPr txBox="1"/>
+          <p:nvPr/>
+        </p:nvSpPr>
+        <p:spPr>
+          <a:xfrm>
+            <a:off x="777240" y="6382512"/>
+            <a:ext cx="7424928" cy="256032"/>
           </a:xfrm>
           <a:prstGeom prst="rect">
             <a:avLst/>
@@ -4770,14 +6727,14 @@
       </p:sp>
       <p:sp>
         <p:nvSpPr>
-          <p:cNvPr id="7" name="Text 5"/>
-          <p:cNvSpPr txBox="1"/>
-          <p:nvPr/>
-        </p:nvSpPr>
-        <p:spPr>
-          <a:xfrm>
-            <a:off x="8202168" y="6355080"/>
-            <a:ext cx="3182112" cy="274320"/>
+          <p:cNvPr id="18" name="Text 16"/>
+          <p:cNvSpPr txBox="1"/>
+          <p:nvPr/>
+        </p:nvSpPr>
+        <p:spPr>
+          <a:xfrm>
+            <a:off x="8202168" y="6382512"/>
+            <a:ext cx="3182112" cy="256032"/>
           </a:xfrm>
           <a:prstGeom prst="rect">
             <a:avLst/>
@@ -4801,7 +6758,7 @@
                 <a:ea typeface="Yu Gothic" pitchFamily="34" charset="-122"/>
                 <a:cs typeface="Yu Gothic" pitchFamily="34" charset="-120"/>
               </a:rPr>
-              <a:t>ここだけは</a:t>
+              <a:t>実演 ①</a:t>
             </a:r>
             <a:endParaRPr lang="en-US" sz="900" dirty="0"/>
           </a:p>
@@ -4821,7 +6778,7 @@
     <p:bg>
       <p:bgPr>
         <a:solidFill>
-          <a:srgbClr val="23201D"/>
+          <a:srgbClr val="F6F2EA"/>
         </a:solidFill>
       </p:bgPr>
     </p:bg>
@@ -4847,34 +6804,34 @@
         </p:nvSpPr>
         <p:spPr>
           <a:xfrm>
-            <a:off x="777240" y="1371600"/>
-            <a:ext cx="10607040" cy="365760"/>
-          </a:xfrm>
-          <a:prstGeom prst="rect">
-            <a:avLst/>
-          </a:prstGeom>
-          <a:noFill/>
-          <a:ln/>
-        </p:spPr>
-        <p:txBody>
-          <a:bodyPr wrap="square" lIns="0" tIns="0" rIns="0" bIns="0" rtlCol="0" anchor="ctr"/>
-          <a:lstStyle/>
-          <a:p>
-            <a:pPr indent="0" marL="0">
-              <a:buNone/>
-            </a:pPr>
-            <a:r>
-              <a:rPr lang="en-US" sz="1200" b="1" spc="300" kern="0" dirty="0">
-                <a:solidFill>
-                  <a:srgbClr val="B04A2F"/>
-                </a:solidFill>
-                <a:latin typeface="Yu Gothic" pitchFamily="34" charset="0"/>
-                <a:ea typeface="Yu Gothic" pitchFamily="34" charset="-122"/>
-                <a:cs typeface="Yu Gothic" pitchFamily="34" charset="-120"/>
-              </a:rPr>
-              <a:t>今日の宿題</a:t>
-            </a:r>
-            <a:endParaRPr lang="en-US" sz="1200" dirty="0"/>
+            <a:off x="777240" y="566928"/>
+            <a:ext cx="10607040" cy="274320"/>
+          </a:xfrm>
+          <a:prstGeom prst="rect">
+            <a:avLst/>
+          </a:prstGeom>
+          <a:noFill/>
+          <a:ln/>
+        </p:spPr>
+        <p:txBody>
+          <a:bodyPr wrap="square" lIns="0" tIns="0" rIns="0" bIns="0" rtlCol="0" anchor="ctr"/>
+          <a:lstStyle/>
+          <a:p>
+            <a:pPr indent="0" marL="0">
+              <a:buNone/>
+            </a:pPr>
+            <a:r>
+              <a:rPr lang="en-US" sz="1100" b="1" spc="250" kern="0" dirty="0">
+                <a:solidFill>
+                  <a:srgbClr val="3B6B4A"/>
+                </a:solidFill>
+                <a:latin typeface="Yu Gothic" pitchFamily="34" charset="0"/>
+                <a:ea typeface="Yu Gothic" pitchFamily="34" charset="-122"/>
+                <a:cs typeface="Yu Gothic" pitchFamily="34" charset="-120"/>
+              </a:rPr>
+              <a:t>実演 ②</a:t>
+            </a:r>
+            <a:endParaRPr lang="en-US" sz="1100" dirty="0"/>
           </a:p>
         </p:txBody>
       </p:sp>
@@ -4886,7 +6843,7 @@
         </p:nvSpPr>
         <p:spPr>
           <a:xfrm>
-            <a:off x="777240" y="1783080"/>
+            <a:off x="777240" y="896112"/>
             <a:ext cx="10607040" cy="640080"/>
           </a:xfrm>
           <a:prstGeom prst="rect">
@@ -4903,17 +6860,17 @@
               <a:buNone/>
             </a:pPr>
             <a:r>
-              <a:rPr lang="en-US" sz="3200" b="1" dirty="0">
-                <a:solidFill>
-                  <a:srgbClr val="FFFFFF"/>
-                </a:solidFill>
-                <a:latin typeface="Yu Gothic" pitchFamily="34" charset="0"/>
-                <a:ea typeface="Yu Gothic" pitchFamily="34" charset="-122"/>
-                <a:cs typeface="Yu Gothic" pitchFamily="34" charset="-120"/>
-              </a:rPr>
-              <a:t>ひとつだけ</a:t>
-            </a:r>
-            <a:endParaRPr lang="en-US" sz="3200" dirty="0"/>
+              <a:rPr lang="en-US" sz="2600" b="1" dirty="0">
+                <a:solidFill>
+                  <a:srgbClr val="23201D"/>
+                </a:solidFill>
+                <a:latin typeface="Yu Gothic" pitchFamily="34" charset="0"/>
+                <a:ea typeface="Yu Gothic" pitchFamily="34" charset="-122"/>
+                <a:cs typeface="Yu Gothic" pitchFamily="34" charset="-120"/>
+              </a:rPr>
+              <a:t>1領域に絞った場合</a:t>
+            </a:r>
+            <a:endParaRPr lang="en-US" sz="2600" dirty="0"/>
           </a:p>
         </p:txBody>
       </p:sp>
@@ -4925,18 +6882,124 @@
         </p:nvSpPr>
         <p:spPr>
           <a:xfrm>
-            <a:off x="777240" y="2743200"/>
-            <a:ext cx="10607040" cy="1463040"/>
+            <a:off x="777240" y="1691640"/>
+            <a:ext cx="4879238" cy="1371600"/>
           </a:xfrm>
           <a:prstGeom prst="rect">
             <a:avLst/>
           </a:prstGeom>
           <a:solidFill>
-            <a:srgbClr val="2E2A26"/>
+            <a:srgbClr val="FFFFFF"/>
+          </a:solidFill>
+          <a:ln w="15875">
+            <a:solidFill>
+              <a:srgbClr val="3B6B4A"/>
+            </a:solidFill>
+            <a:prstDash val="solid"/>
+          </a:ln>
+        </p:spPr>
+      </p:sp>
+      <p:sp>
+        <p:nvSpPr>
+          <p:cNvPr id="5" name="Text 3"/>
+          <p:cNvSpPr txBox="1"/>
+          <p:nvPr/>
+        </p:nvSpPr>
+        <p:spPr>
+          <a:xfrm>
+            <a:off x="1005840" y="1783080"/>
+            <a:ext cx="1828800" cy="274320"/>
+          </a:xfrm>
+          <a:prstGeom prst="rect">
+            <a:avLst/>
+          </a:prstGeom>
+          <a:noFill/>
+          <a:ln/>
+        </p:spPr>
+        <p:txBody>
+          <a:bodyPr wrap="square" lIns="0" tIns="0" rIns="0" bIns="0" rtlCol="0" anchor="ctr"/>
+          <a:lstStyle/>
+          <a:p>
+            <a:pPr indent="0" marL="0">
+              <a:buNone/>
+            </a:pPr>
+            <a:r>
+              <a:rPr lang="en-US" sz="1000" b="1" spc="200" kern="0" dirty="0">
+                <a:solidFill>
+                  <a:srgbClr val="3B6B4A"/>
+                </a:solidFill>
+                <a:latin typeface="Yu Gothic" pitchFamily="34" charset="0"/>
+                <a:ea typeface="Yu Gothic" pitchFamily="34" charset="-122"/>
+                <a:cs typeface="Yu Gothic" pitchFamily="34" charset="-120"/>
+              </a:rPr>
+              <a:t>入力</a:t>
+            </a:r>
+            <a:endParaRPr lang="en-US" sz="1000" dirty="0"/>
+          </a:p>
+        </p:txBody>
+      </p:sp>
+      <p:sp>
+        <p:nvSpPr>
+          <p:cNvPr id="6" name="Text 4"/>
+          <p:cNvSpPr txBox="1"/>
+          <p:nvPr/>
+        </p:nvSpPr>
+        <p:spPr>
+          <a:xfrm>
+            <a:off x="1005840" y="2084832"/>
+            <a:ext cx="4422038" cy="868680"/>
+          </a:xfrm>
+          <a:prstGeom prst="rect">
+            <a:avLst/>
+          </a:prstGeom>
+          <a:noFill/>
+          <a:ln/>
+        </p:spPr>
+        <p:txBody>
+          <a:bodyPr wrap="square" lIns="0" tIns="0" rIns="0" bIns="0" rtlCol="0" anchor="ctr"/>
+          <a:lstStyle/>
+          <a:p>
+            <a:pPr indent="0" marL="0">
+              <a:lnSpc>
+                <a:spcPct val="125000"/>
+              </a:lnSpc>
+              <a:buNone/>
+            </a:pPr>
+            <a:r>
+              <a:rPr lang="en-US" sz="1200" dirty="0">
+                <a:solidFill>
+                  <a:srgbClr val="23201D"/>
+                </a:solidFill>
+                <a:latin typeface="Consolas" pitchFamily="34" charset="0"/>
+                <a:ea typeface="Consolas" pitchFamily="34" charset="-122"/>
+                <a:cs typeface="Consolas" pitchFamily="34" charset="-120"/>
+              </a:rPr>
+              <a:t>就業規則と社内手続きだけを、最新版に限って載せる</a:t>
+            </a:r>
+            <a:endParaRPr lang="en-US" sz="1200" dirty="0"/>
+          </a:p>
+        </p:txBody>
+      </p:sp>
+      <p:sp>
+        <p:nvSpPr>
+          <p:cNvPr id="7" name="Shape 5"/>
+          <p:cNvSpPr/>
+          <p:nvPr/>
+        </p:nvSpPr>
+        <p:spPr>
+          <a:xfrm>
+            <a:off x="6080760" y="1691640"/>
+            <a:ext cx="5303520" cy="3017520"/>
+          </a:xfrm>
+          <a:prstGeom prst="rect">
+            <a:avLst/>
+          </a:prstGeom>
+          <a:solidFill>
+            <a:srgbClr val="FFFFFF"/>
           </a:solidFill>
           <a:ln w="12700">
             <a:solidFill>
-              <a:srgbClr val="B04A2F"/>
+              <a:srgbClr val="EDE7DB"/>
             </a:solidFill>
             <a:prstDash val="solid"/>
           </a:ln>
@@ -4944,14 +7007,604 @@
       </p:sp>
       <p:sp>
         <p:nvSpPr>
+          <p:cNvPr id="8" name="Text 6"/>
+          <p:cNvSpPr txBox="1"/>
+          <p:nvPr/>
+        </p:nvSpPr>
+        <p:spPr>
+          <a:xfrm>
+            <a:off x="6309360" y="1783080"/>
+            <a:ext cx="2743200" cy="274320"/>
+          </a:xfrm>
+          <a:prstGeom prst="rect">
+            <a:avLst/>
+          </a:prstGeom>
+          <a:noFill/>
+          <a:ln/>
+        </p:spPr>
+        <p:txBody>
+          <a:bodyPr wrap="square" lIns="0" tIns="0" rIns="0" bIns="0" rtlCol="0" anchor="ctr"/>
+          <a:lstStyle/>
+          <a:p>
+            <a:pPr indent="0" marL="0">
+              <a:buNone/>
+            </a:pPr>
+            <a:r>
+              <a:rPr lang="en-US" sz="1000" b="1" spc="200" kern="0" dirty="0">
+                <a:solidFill>
+                  <a:srgbClr val="8A8177"/>
+                </a:solidFill>
+                <a:latin typeface="Yu Gothic" pitchFamily="34" charset="0"/>
+                <a:ea typeface="Yu Gothic" pitchFamily="34" charset="-122"/>
+                <a:cs typeface="Yu Gothic" pitchFamily="34" charset="-120"/>
+              </a:rPr>
+              <a:t>出てくるもの</a:t>
+            </a:r>
+            <a:endParaRPr lang="en-US" sz="1000" dirty="0"/>
+          </a:p>
+        </p:txBody>
+      </p:sp>
+      <p:sp>
+        <p:nvSpPr>
+          <p:cNvPr id="9" name="Text 7"/>
+          <p:cNvSpPr txBox="1"/>
+          <p:nvPr/>
+        </p:nvSpPr>
+        <p:spPr>
+          <a:xfrm>
+            <a:off x="6309360" y="2148840"/>
+            <a:ext cx="4846320" cy="566928"/>
+          </a:xfrm>
+          <a:prstGeom prst="rect">
+            <a:avLst/>
+          </a:prstGeom>
+          <a:noFill/>
+          <a:ln/>
+        </p:spPr>
+        <p:txBody>
+          <a:bodyPr wrap="square" lIns="0" tIns="0" rIns="0" bIns="0" rtlCol="0" anchor="ctr"/>
+          <a:lstStyle/>
+          <a:p>
+            <a:pPr indent="0" marL="0">
+              <a:lnSpc>
+                <a:spcPct val="125000"/>
+              </a:lnSpc>
+              <a:buNone/>
+            </a:pPr>
+            <a:r>
+              <a:rPr lang="en-US" sz="1250" dirty="0">
+                <a:solidFill>
+                  <a:srgbClr val="23201D"/>
+                </a:solidFill>
+                <a:latin typeface="Yu Gothic" pitchFamily="34" charset="0"/>
+                <a:ea typeface="Yu Gothic" pitchFamily="34" charset="-122"/>
+                <a:cs typeface="Yu Gothic" pitchFamily="34" charset="-120"/>
+              </a:rPr>
+              <a:t>・○が8件。実務に出せる水準</a:t>
+            </a:r>
+            <a:endParaRPr lang="en-US" sz="1250" dirty="0"/>
+          </a:p>
+        </p:txBody>
+      </p:sp>
+      <p:sp>
+        <p:nvSpPr>
+          <p:cNvPr id="10" name="Text 8"/>
+          <p:cNvSpPr txBox="1"/>
+          <p:nvPr/>
+        </p:nvSpPr>
+        <p:spPr>
+          <a:xfrm>
+            <a:off x="6309360" y="2752344"/>
+            <a:ext cx="4846320" cy="566928"/>
+          </a:xfrm>
+          <a:prstGeom prst="rect">
+            <a:avLst/>
+          </a:prstGeom>
+          <a:noFill/>
+          <a:ln/>
+        </p:spPr>
+        <p:txBody>
+          <a:bodyPr wrap="square" lIns="0" tIns="0" rIns="0" bIns="0" rtlCol="0" anchor="ctr"/>
+          <a:lstStyle/>
+          <a:p>
+            <a:pPr indent="0" marL="0">
+              <a:lnSpc>
+                <a:spcPct val="125000"/>
+              </a:lnSpc>
+              <a:buNone/>
+            </a:pPr>
+            <a:r>
+              <a:rPr lang="en-US" sz="1250" dirty="0">
+                <a:solidFill>
+                  <a:srgbClr val="23201D"/>
+                </a:solidFill>
+                <a:latin typeface="Yu Gothic" pitchFamily="34" charset="0"/>
+                <a:ea typeface="Yu Gothic" pitchFamily="34" charset="-122"/>
+                <a:cs typeface="Yu Gothic" pitchFamily="34" charset="-120"/>
+              </a:rPr>
+              <a:t>・△が2件。足りない資料として記録できる</a:t>
+            </a:r>
+            <a:endParaRPr lang="en-US" sz="1250" dirty="0"/>
+          </a:p>
+        </p:txBody>
+      </p:sp>
+      <p:sp>
+        <p:nvSpPr>
+          <p:cNvPr id="11" name="Text 9"/>
+          <p:cNvSpPr txBox="1"/>
+          <p:nvPr/>
+        </p:nvSpPr>
+        <p:spPr>
+          <a:xfrm>
+            <a:off x="6309360" y="3355848"/>
+            <a:ext cx="4846320" cy="566928"/>
+          </a:xfrm>
+          <a:prstGeom prst="rect">
+            <a:avLst/>
+          </a:prstGeom>
+          <a:noFill/>
+          <a:ln/>
+        </p:spPr>
+        <p:txBody>
+          <a:bodyPr wrap="square" lIns="0" tIns="0" rIns="0" bIns="0" rtlCol="0" anchor="ctr"/>
+          <a:lstStyle/>
+          <a:p>
+            <a:pPr indent="0" marL="0">
+              <a:lnSpc>
+                <a:spcPct val="125000"/>
+              </a:lnSpc>
+              <a:buNone/>
+            </a:pPr>
+            <a:r>
+              <a:rPr lang="en-US" sz="1250" dirty="0">
+                <a:solidFill>
+                  <a:srgbClr val="23201D"/>
+                </a:solidFill>
+                <a:latin typeface="Yu Gothic" pitchFamily="34" charset="0"/>
+                <a:ea typeface="Yu Gothic" pitchFamily="34" charset="-122"/>
+                <a:cs typeface="Yu Gothic" pitchFamily="34" charset="-120"/>
+              </a:rPr>
+              <a:t>・総務への質問が目に見えて減る</a:t>
+            </a:r>
+            <a:endParaRPr lang="en-US" sz="1250" dirty="0"/>
+          </a:p>
+        </p:txBody>
+      </p:sp>
+      <p:sp>
+        <p:nvSpPr>
+          <p:cNvPr id="12" name="Text 10"/>
+          <p:cNvSpPr txBox="1"/>
+          <p:nvPr/>
+        </p:nvSpPr>
+        <p:spPr>
+          <a:xfrm>
+            <a:off x="6309360" y="3959352"/>
+            <a:ext cx="4846320" cy="566928"/>
+          </a:xfrm>
+          <a:prstGeom prst="rect">
+            <a:avLst/>
+          </a:prstGeom>
+          <a:noFill/>
+          <a:ln/>
+        </p:spPr>
+        <p:txBody>
+          <a:bodyPr wrap="square" lIns="0" tIns="0" rIns="0" bIns="0" rtlCol="0" anchor="ctr"/>
+          <a:lstStyle/>
+          <a:p>
+            <a:pPr indent="0" marL="0">
+              <a:lnSpc>
+                <a:spcPct val="125000"/>
+              </a:lnSpc>
+              <a:buNone/>
+            </a:pPr>
+            <a:r>
+              <a:rPr lang="en-US" sz="1250" dirty="0">
+                <a:solidFill>
+                  <a:srgbClr val="23201D"/>
+                </a:solidFill>
+                <a:latin typeface="Yu Gothic" pitchFamily="34" charset="0"/>
+                <a:ea typeface="Yu Gothic" pitchFamily="34" charset="-122"/>
+                <a:cs typeface="Yu Gothic" pitchFamily="34" charset="-120"/>
+              </a:rPr>
+              <a:t>・次の領域に広げる判断ができる</a:t>
+            </a:r>
+            <a:endParaRPr lang="en-US" sz="1250" dirty="0"/>
+          </a:p>
+        </p:txBody>
+      </p:sp>
+      <p:sp>
+        <p:nvSpPr>
+          <p:cNvPr id="13" name="Shape 11"/>
+          <p:cNvSpPr/>
+          <p:nvPr/>
+        </p:nvSpPr>
+        <p:spPr>
+          <a:xfrm>
+            <a:off x="777240" y="3291840"/>
+            <a:ext cx="4879238" cy="1417320"/>
+          </a:xfrm>
+          <a:prstGeom prst="rect">
+            <a:avLst/>
+          </a:prstGeom>
+          <a:solidFill>
+            <a:srgbClr val="E7F0E9"/>
+          </a:solidFill>
+          <a:ln w="12700">
+            <a:solidFill>
+              <a:srgbClr val="333333"/>
+            </a:solidFill>
+            <a:prstDash val="solid"/>
+          </a:ln>
+        </p:spPr>
+      </p:sp>
+      <p:sp>
+        <p:nvSpPr>
+          <p:cNvPr id="14" name="Text 12"/>
+          <p:cNvSpPr txBox="1"/>
+          <p:nvPr/>
+        </p:nvSpPr>
+        <p:spPr>
+          <a:xfrm>
+            <a:off x="1005840" y="3383280"/>
+            <a:ext cx="4422038" cy="1234440"/>
+          </a:xfrm>
+          <a:prstGeom prst="rect">
+            <a:avLst/>
+          </a:prstGeom>
+          <a:noFill/>
+          <a:ln/>
+        </p:spPr>
+        <p:txBody>
+          <a:bodyPr wrap="square" lIns="0" tIns="0" rIns="0" bIns="0" rtlCol="0" anchor="ctr"/>
+          <a:lstStyle/>
+          <a:p>
+            <a:pPr indent="0" marL="0">
+              <a:lnSpc>
+                <a:spcPct val="135000"/>
+              </a:lnSpc>
+              <a:buNone/>
+            </a:pPr>
+            <a:r>
+              <a:rPr lang="en-US" sz="1250" dirty="0">
+                <a:solidFill>
+                  <a:srgbClr val="3F3933"/>
+                </a:solidFill>
+                <a:latin typeface="Yu Gothic" pitchFamily="34" charset="0"/>
+                <a:ea typeface="Yu Gothic" pitchFamily="34" charset="-122"/>
+                <a:cs typeface="Yu Gothic" pitchFamily="34" charset="-120"/>
+              </a:rPr>
+              <a:t>まず1領域。広げるのは、10問テストで精度を確認してからです。</a:t>
+            </a:r>
+            <a:endParaRPr lang="en-US" sz="1250" dirty="0"/>
+          </a:p>
+        </p:txBody>
+      </p:sp>
+      <p:sp>
+        <p:nvSpPr>
+          <p:cNvPr id="15" name="Shape 13"/>
+          <p:cNvSpPr/>
+          <p:nvPr/>
+        </p:nvSpPr>
+        <p:spPr>
+          <a:xfrm>
+            <a:off x="777240" y="4983480"/>
+            <a:ext cx="10607040" cy="685800"/>
+          </a:xfrm>
+          <a:prstGeom prst="rect">
+            <a:avLst/>
+          </a:prstGeom>
+          <a:solidFill>
+            <a:srgbClr val="3B6B4A"/>
+          </a:solidFill>
+          <a:ln w="12700">
+            <a:solidFill>
+              <a:srgbClr val="333333"/>
+            </a:solidFill>
+            <a:prstDash val="solid"/>
+          </a:ln>
+        </p:spPr>
+      </p:sp>
+      <p:sp>
+        <p:nvSpPr>
+          <p:cNvPr id="16" name="Text 14"/>
+          <p:cNvSpPr txBox="1"/>
+          <p:nvPr/>
+        </p:nvSpPr>
+        <p:spPr>
+          <a:xfrm>
+            <a:off x="1097280" y="4983480"/>
+            <a:ext cx="9966960" cy="685800"/>
+          </a:xfrm>
+          <a:prstGeom prst="rect">
+            <a:avLst/>
+          </a:prstGeom>
+          <a:noFill/>
+          <a:ln/>
+        </p:spPr>
+        <p:txBody>
+          <a:bodyPr wrap="square" lIns="0" tIns="0" rIns="0" bIns="0" rtlCol="0" anchor="ctr"/>
+          <a:lstStyle/>
+          <a:p>
+            <a:pPr indent="0" marL="0">
+              <a:buNone/>
+            </a:pPr>
+            <a:r>
+              <a:rPr lang="en-US" sz="1450" b="1" dirty="0">
+                <a:solidFill>
+                  <a:srgbClr val="FFFFFF"/>
+                </a:solidFill>
+                <a:latin typeface="Yu Gothic" pitchFamily="34" charset="0"/>
+                <a:ea typeface="Yu Gothic" pitchFamily="34" charset="-122"/>
+                <a:cs typeface="Yu Gothic" pitchFamily="34" charset="-120"/>
+              </a:rPr>
+              <a:t>絞って成功させてから、広げます</a:t>
+            </a:r>
+            <a:endParaRPr lang="en-US" sz="1450" dirty="0"/>
+          </a:p>
+        </p:txBody>
+      </p:sp>
+      <p:sp>
+        <p:nvSpPr>
+          <p:cNvPr id="17" name="Text 15"/>
+          <p:cNvSpPr txBox="1"/>
+          <p:nvPr/>
+        </p:nvSpPr>
+        <p:spPr>
+          <a:xfrm>
+            <a:off x="777240" y="6382512"/>
+            <a:ext cx="7424928" cy="256032"/>
+          </a:xfrm>
+          <a:prstGeom prst="rect">
+            <a:avLst/>
+          </a:prstGeom>
+          <a:noFill/>
+          <a:ln/>
+        </p:spPr>
+        <p:txBody>
+          <a:bodyPr wrap="square" lIns="0" tIns="0" rIns="0" bIns="0" rtlCol="0" anchor="ctr"/>
+          <a:lstStyle/>
+          <a:p>
+            <a:pPr indent="0" marL="0">
+              <a:buNone/>
+            </a:pPr>
+            <a:r>
+              <a:rPr lang="en-US" sz="900" dirty="0">
+                <a:solidFill>
+                  <a:srgbClr val="8A8177"/>
+                </a:solidFill>
+                <a:latin typeface="Yu Gothic" pitchFamily="34" charset="0"/>
+                <a:ea typeface="Yu Gothic" pitchFamily="34" charset="-122"/>
+                <a:cs typeface="Yu Gothic" pitchFamily="34" charset="-120"/>
+              </a:rPr>
+              <a:t>第8回　社内の知識を検索できるようにする</a:t>
+            </a:r>
+            <a:endParaRPr lang="en-US" sz="900" dirty="0"/>
+          </a:p>
+        </p:txBody>
+      </p:sp>
+      <p:sp>
+        <p:nvSpPr>
+          <p:cNvPr id="18" name="Text 16"/>
+          <p:cNvSpPr txBox="1"/>
+          <p:nvPr/>
+        </p:nvSpPr>
+        <p:spPr>
+          <a:xfrm>
+            <a:off x="8202168" y="6382512"/>
+            <a:ext cx="3182112" cy="256032"/>
+          </a:xfrm>
+          <a:prstGeom prst="rect">
+            <a:avLst/>
+          </a:prstGeom>
+          <a:noFill/>
+          <a:ln/>
+        </p:spPr>
+        <p:txBody>
+          <a:bodyPr wrap="square" lIns="0" tIns="0" rIns="0" bIns="0" rtlCol="0" anchor="ctr"/>
+          <a:lstStyle/>
+          <a:p>
+            <a:pPr algn="r" indent="0" marL="0">
+              <a:buNone/>
+            </a:pPr>
+            <a:r>
+              <a:rPr lang="en-US" sz="900" dirty="0">
+                <a:solidFill>
+                  <a:srgbClr val="8A8177"/>
+                </a:solidFill>
+                <a:latin typeface="Yu Gothic" pitchFamily="34" charset="0"/>
+                <a:ea typeface="Yu Gothic" pitchFamily="34" charset="-122"/>
+                <a:cs typeface="Yu Gothic" pitchFamily="34" charset="-120"/>
+              </a:rPr>
+              <a:t>実演 ②</a:t>
+            </a:r>
+            <a:endParaRPr lang="en-US" sz="900" dirty="0"/>
+          </a:p>
+        </p:txBody>
+      </p:sp>
+    </p:spTree>
+  </p:cSld>
+  <p:clrMapOvr>
+    <a:masterClrMapping/>
+  </p:clrMapOvr>
+</p:sld>
+</file>
+
+<file path=ppt/slides/slide8.xml><?xml version="1.0" encoding="utf-8"?>
+<p:sld xmlns:a="http://schemas.openxmlformats.org/drawingml/2006/main" xmlns:r="http://schemas.openxmlformats.org/officeDocument/2006/relationships" xmlns:p="http://schemas.openxmlformats.org/presentationml/2006/main">
+  <p:cSld name="Slide 8">
+    <p:bg>
+      <p:bgPr>
+        <a:solidFill>
+          <a:srgbClr val="F6F2EA"/>
+        </a:solidFill>
+      </p:bgPr>
+    </p:bg>
+    <p:spTree>
+      <p:nvGrpSpPr>
+        <p:cNvPr id="1" name=""/>
+        <p:cNvGrpSpPr/>
+        <p:nvPr/>
+      </p:nvGrpSpPr>
+      <p:grpSpPr>
+        <a:xfrm>
+          <a:off x="0" y="0"/>
+          <a:ext cx="0" cy="0"/>
+          <a:chOff x="0" y="0"/>
+          <a:chExt cx="0" cy="0"/>
+        </a:xfrm>
+      </p:grpSpPr>
+      <p:sp>
+        <p:nvSpPr>
+          <p:cNvPr id="2" name="Text 0"/>
+          <p:cNvSpPr txBox="1"/>
+          <p:nvPr/>
+        </p:nvSpPr>
+        <p:spPr>
+          <a:xfrm>
+            <a:off x="777240" y="566928"/>
+            <a:ext cx="10607040" cy="274320"/>
+          </a:xfrm>
+          <a:prstGeom prst="rect">
+            <a:avLst/>
+          </a:prstGeom>
+          <a:noFill/>
+          <a:ln/>
+        </p:spPr>
+        <p:txBody>
+          <a:bodyPr wrap="square" lIns="0" tIns="0" rIns="0" bIns="0" rtlCol="0" anchor="ctr"/>
+          <a:lstStyle/>
+          <a:p>
+            <a:pPr indent="0" marL="0">
+              <a:buNone/>
+            </a:pPr>
+            <a:r>
+              <a:rPr lang="en-US" sz="1100" b="1" spc="250" kern="0" dirty="0">
+                <a:solidFill>
+                  <a:srgbClr val="B04A2F"/>
+                </a:solidFill>
+                <a:latin typeface="Yu Gothic" pitchFamily="34" charset="0"/>
+                <a:ea typeface="Yu Gothic" pitchFamily="34" charset="-122"/>
+                <a:cs typeface="Yu Gothic" pitchFamily="34" charset="-120"/>
+              </a:rPr>
+              <a:t>つまずきやすいところ</a:t>
+            </a:r>
+            <a:endParaRPr lang="en-US" sz="1100" dirty="0"/>
+          </a:p>
+        </p:txBody>
+      </p:sp>
+      <p:sp>
+        <p:nvSpPr>
+          <p:cNvPr id="3" name="Text 1"/>
+          <p:cNvSpPr txBox="1"/>
+          <p:nvPr/>
+        </p:nvSpPr>
+        <p:spPr>
+          <a:xfrm>
+            <a:off x="777240" y="896112"/>
+            <a:ext cx="10607040" cy="640080"/>
+          </a:xfrm>
+          <a:prstGeom prst="rect">
+            <a:avLst/>
+          </a:prstGeom>
+          <a:noFill/>
+          <a:ln/>
+        </p:spPr>
+        <p:txBody>
+          <a:bodyPr wrap="square" lIns="0" tIns="0" rIns="0" bIns="0" rtlCol="0" anchor="ctr"/>
+          <a:lstStyle/>
+          <a:p>
+            <a:pPr indent="0" marL="0">
+              <a:buNone/>
+            </a:pPr>
+            <a:r>
+              <a:rPr lang="en-US" sz="2600" b="1" dirty="0">
+                <a:solidFill>
+                  <a:srgbClr val="23201D"/>
+                </a:solidFill>
+                <a:latin typeface="Yu Gothic" pitchFamily="34" charset="0"/>
+                <a:ea typeface="Yu Gothic" pitchFamily="34" charset="-122"/>
+                <a:cs typeface="Yu Gothic" pitchFamily="34" charset="-120"/>
+              </a:rPr>
+              <a:t>この回で、よく起きること</a:t>
+            </a:r>
+            <a:endParaRPr lang="en-US" sz="2600" dirty="0"/>
+          </a:p>
+        </p:txBody>
+      </p:sp>
+      <p:sp>
+        <p:nvSpPr>
+          <p:cNvPr id="4" name="Shape 2"/>
+          <p:cNvSpPr/>
+          <p:nvPr/>
+        </p:nvSpPr>
+        <p:spPr>
+          <a:xfrm>
+            <a:off x="777240" y="1737360"/>
+            <a:ext cx="10607040" cy="1078992"/>
+          </a:xfrm>
+          <a:prstGeom prst="rect">
+            <a:avLst/>
+          </a:prstGeom>
+          <a:solidFill>
+            <a:srgbClr val="FFFFFF"/>
+          </a:solidFill>
+          <a:ln w="12700">
+            <a:solidFill>
+              <a:srgbClr val="EDE7DB"/>
+            </a:solidFill>
+            <a:prstDash val="solid"/>
+          </a:ln>
+        </p:spPr>
+      </p:sp>
+      <p:sp>
+        <p:nvSpPr>
           <p:cNvPr id="5" name="Text 3"/>
           <p:cNvSpPr txBox="1"/>
           <p:nvPr/>
         </p:nvSpPr>
         <p:spPr>
           <a:xfrm>
-            <a:off x="1234440" y="2880360"/>
-            <a:ext cx="9692640" cy="1188720"/>
+            <a:off x="1051560" y="1856232"/>
+            <a:ext cx="1463040" cy="256032"/>
+          </a:xfrm>
+          <a:prstGeom prst="rect">
+            <a:avLst/>
+          </a:prstGeom>
+          <a:noFill/>
+          <a:ln/>
+        </p:spPr>
+        <p:txBody>
+          <a:bodyPr wrap="square" lIns="0" tIns="0" rIns="0" bIns="0" rtlCol="0" anchor="ctr"/>
+          <a:lstStyle/>
+          <a:p>
+            <a:pPr indent="0" marL="0">
+              <a:buNone/>
+            </a:pPr>
+            <a:r>
+              <a:rPr lang="en-US" sz="900" b="1" spc="150" kern="0" dirty="0">
+                <a:solidFill>
+                  <a:srgbClr val="8A8177"/>
+                </a:solidFill>
+                <a:latin typeface="Yu Gothic" pitchFamily="34" charset="0"/>
+                <a:ea typeface="Yu Gothic" pitchFamily="34" charset="-122"/>
+                <a:cs typeface="Yu Gothic" pitchFamily="34" charset="-120"/>
+              </a:rPr>
+              <a:t>こうなったら</a:t>
+            </a:r>
+            <a:endParaRPr lang="en-US" sz="900" dirty="0"/>
+          </a:p>
+        </p:txBody>
+      </p:sp>
+      <p:sp>
+        <p:nvSpPr>
+          <p:cNvPr id="6" name="Text 4"/>
+          <p:cNvSpPr txBox="1"/>
+          <p:nvPr/>
+        </p:nvSpPr>
+        <p:spPr>
+          <a:xfrm>
+            <a:off x="1051560" y="2121408"/>
+            <a:ext cx="4454957" cy="566928"/>
           </a:xfrm>
           <a:prstGeom prst="rect">
             <a:avLst/>
@@ -4965,12 +7618,858 @@
           <a:p>
             <a:pPr indent="0" marL="0">
               <a:lnSpc>
-                <a:spcPct val="140000"/>
+                <a:spcPct val="120000"/>
               </a:lnSpc>
               <a:buNone/>
             </a:pPr>
             <a:r>
-              <a:rPr lang="en-US" sz="1900" b="1" dirty="0">
+              <a:rPr lang="en-US" sz="1350" b="1" dirty="0">
+                <a:solidFill>
+                  <a:srgbClr val="23201D"/>
+                </a:solidFill>
+                <a:latin typeface="Yu Gothic" pitchFamily="34" charset="0"/>
+                <a:ea typeface="Yu Gothic" pitchFamily="34" charset="-122"/>
+                <a:cs typeface="Yu Gothic" pitchFamily="34" charset="-120"/>
+              </a:rPr>
+              <a:t>資料がスキャン画像で読めない</a:t>
+            </a:r>
+            <a:endParaRPr lang="en-US" sz="1350" dirty="0"/>
+          </a:p>
+        </p:txBody>
+      </p:sp>
+      <p:sp>
+        <p:nvSpPr>
+          <p:cNvPr id="7" name="Shape 5"/>
+          <p:cNvSpPr/>
+          <p:nvPr/>
+        </p:nvSpPr>
+        <p:spPr>
+          <a:xfrm>
+            <a:off x="5762549" y="1847088"/>
+            <a:ext cx="18288" cy="859536"/>
+          </a:xfrm>
+          <a:prstGeom prst="rect">
+            <a:avLst/>
+          </a:prstGeom>
+          <a:solidFill>
+            <a:srgbClr val="EDE7DB"/>
+          </a:solidFill>
+          <a:ln w="12700">
+            <a:solidFill>
+              <a:srgbClr val="333333"/>
+            </a:solidFill>
+            <a:prstDash val="solid"/>
+          </a:ln>
+        </p:spPr>
+      </p:sp>
+      <p:sp>
+        <p:nvSpPr>
+          <p:cNvPr id="8" name="Text 6"/>
+          <p:cNvSpPr txBox="1"/>
+          <p:nvPr/>
+        </p:nvSpPr>
+        <p:spPr>
+          <a:xfrm>
+            <a:off x="6080760" y="1856232"/>
+            <a:ext cx="1463040" cy="256032"/>
+          </a:xfrm>
+          <a:prstGeom prst="rect">
+            <a:avLst/>
+          </a:prstGeom>
+          <a:noFill/>
+          <a:ln/>
+        </p:spPr>
+        <p:txBody>
+          <a:bodyPr wrap="square" lIns="0" tIns="0" rIns="0" bIns="0" rtlCol="0" anchor="ctr"/>
+          <a:lstStyle/>
+          <a:p>
+            <a:pPr indent="0" marL="0">
+              <a:buNone/>
+            </a:pPr>
+            <a:r>
+              <a:rPr lang="en-US" sz="900" b="1" spc="150" kern="0" dirty="0">
+                <a:solidFill>
+                  <a:srgbClr val="B04A2F"/>
+                </a:solidFill>
+                <a:latin typeface="Yu Gothic" pitchFamily="34" charset="0"/>
+                <a:ea typeface="Yu Gothic" pitchFamily="34" charset="-122"/>
+                <a:cs typeface="Yu Gothic" pitchFamily="34" charset="-120"/>
+              </a:rPr>
+              <a:t>こうする</a:t>
+            </a:r>
+            <a:endParaRPr lang="en-US" sz="900" dirty="0"/>
+          </a:p>
+        </p:txBody>
+      </p:sp>
+      <p:sp>
+        <p:nvSpPr>
+          <p:cNvPr id="9" name="Text 7"/>
+          <p:cNvSpPr txBox="1"/>
+          <p:nvPr/>
+        </p:nvSpPr>
+        <p:spPr>
+          <a:xfrm>
+            <a:off x="6080760" y="2121408"/>
+            <a:ext cx="5091379" cy="566928"/>
+          </a:xfrm>
+          <a:prstGeom prst="rect">
+            <a:avLst/>
+          </a:prstGeom>
+          <a:noFill/>
+          <a:ln/>
+        </p:spPr>
+        <p:txBody>
+          <a:bodyPr wrap="square" lIns="0" tIns="0" rIns="0" bIns="0" rtlCol="0" anchor="ctr"/>
+          <a:lstStyle/>
+          <a:p>
+            <a:pPr indent="0" marL="0">
+              <a:lnSpc>
+                <a:spcPct val="125000"/>
+              </a:lnSpc>
+              <a:buNone/>
+            </a:pPr>
+            <a:r>
+              <a:rPr lang="en-US" sz="1250" dirty="0">
+                <a:solidFill>
+                  <a:srgbClr val="3F3933"/>
+                </a:solidFill>
+                <a:latin typeface="Yu Gothic" pitchFamily="34" charset="0"/>
+                <a:ea typeface="Yu Gothic" pitchFamily="34" charset="-122"/>
+                <a:cs typeface="Yu Gothic" pitchFamily="34" charset="-120"/>
+              </a:rPr>
+              <a:t>1〜2本ならその場でテキスト化します。多ければ不足資料リストに「デジタル化」として載せ、この回で全部やろうとしません</a:t>
+            </a:r>
+            <a:endParaRPr lang="en-US" sz="1250" dirty="0"/>
+          </a:p>
+        </p:txBody>
+      </p:sp>
+      <p:sp>
+        <p:nvSpPr>
+          <p:cNvPr id="10" name="Shape 8"/>
+          <p:cNvSpPr/>
+          <p:nvPr/>
+        </p:nvSpPr>
+        <p:spPr>
+          <a:xfrm>
+            <a:off x="777240" y="2944368"/>
+            <a:ext cx="10607040" cy="1078992"/>
+          </a:xfrm>
+          <a:prstGeom prst="rect">
+            <a:avLst/>
+          </a:prstGeom>
+          <a:solidFill>
+            <a:srgbClr val="FFFFFF"/>
+          </a:solidFill>
+          <a:ln w="12700">
+            <a:solidFill>
+              <a:srgbClr val="EDE7DB"/>
+            </a:solidFill>
+            <a:prstDash val="solid"/>
+          </a:ln>
+        </p:spPr>
+      </p:sp>
+      <p:sp>
+        <p:nvSpPr>
+          <p:cNvPr id="11" name="Text 9"/>
+          <p:cNvSpPr txBox="1"/>
+          <p:nvPr/>
+        </p:nvSpPr>
+        <p:spPr>
+          <a:xfrm>
+            <a:off x="1051560" y="3063240"/>
+            <a:ext cx="1463040" cy="256032"/>
+          </a:xfrm>
+          <a:prstGeom prst="rect">
+            <a:avLst/>
+          </a:prstGeom>
+          <a:noFill/>
+          <a:ln/>
+        </p:spPr>
+        <p:txBody>
+          <a:bodyPr wrap="square" lIns="0" tIns="0" rIns="0" bIns="0" rtlCol="0" anchor="ctr"/>
+          <a:lstStyle/>
+          <a:p>
+            <a:pPr indent="0" marL="0">
+              <a:buNone/>
+            </a:pPr>
+            <a:r>
+              <a:rPr lang="en-US" sz="900" b="1" spc="150" kern="0" dirty="0">
+                <a:solidFill>
+                  <a:srgbClr val="8A8177"/>
+                </a:solidFill>
+                <a:latin typeface="Yu Gothic" pitchFamily="34" charset="0"/>
+                <a:ea typeface="Yu Gothic" pitchFamily="34" charset="-122"/>
+                <a:cs typeface="Yu Gothic" pitchFamily="34" charset="-120"/>
+              </a:rPr>
+              <a:t>こうなったら</a:t>
+            </a:r>
+            <a:endParaRPr lang="en-US" sz="900" dirty="0"/>
+          </a:p>
+        </p:txBody>
+      </p:sp>
+      <p:sp>
+        <p:nvSpPr>
+          <p:cNvPr id="12" name="Text 10"/>
+          <p:cNvSpPr txBox="1"/>
+          <p:nvPr/>
+        </p:nvSpPr>
+        <p:spPr>
+          <a:xfrm>
+            <a:off x="1051560" y="3328416"/>
+            <a:ext cx="4454957" cy="566928"/>
+          </a:xfrm>
+          <a:prstGeom prst="rect">
+            <a:avLst/>
+          </a:prstGeom>
+          <a:noFill/>
+          <a:ln/>
+        </p:spPr>
+        <p:txBody>
+          <a:bodyPr wrap="square" lIns="0" tIns="0" rIns="0" bIns="0" rtlCol="0" anchor="ctr"/>
+          <a:lstStyle/>
+          <a:p>
+            <a:pPr indent="0" marL="0">
+              <a:lnSpc>
+                <a:spcPct val="120000"/>
+              </a:lnSpc>
+              <a:buNone/>
+            </a:pPr>
+            <a:r>
+              <a:rPr lang="en-US" sz="1350" b="1" dirty="0">
+                <a:solidFill>
+                  <a:srgbClr val="23201D"/>
+                </a:solidFill>
+                <a:latin typeface="Yu Gothic" pitchFamily="34" charset="0"/>
+                <a:ea typeface="Yu Gothic" pitchFamily="34" charset="-122"/>
+                <a:cs typeface="Yu Gothic" pitchFamily="34" charset="-120"/>
+              </a:rPr>
+              <a:t>精度が5割程度で止まる</a:t>
+            </a:r>
+            <a:endParaRPr lang="en-US" sz="1350" dirty="0"/>
+          </a:p>
+        </p:txBody>
+      </p:sp>
+      <p:sp>
+        <p:nvSpPr>
+          <p:cNvPr id="13" name="Shape 11"/>
+          <p:cNvSpPr/>
+          <p:nvPr/>
+        </p:nvSpPr>
+        <p:spPr>
+          <a:xfrm>
+            <a:off x="5762549" y="3054096"/>
+            <a:ext cx="18288" cy="859536"/>
+          </a:xfrm>
+          <a:prstGeom prst="rect">
+            <a:avLst/>
+          </a:prstGeom>
+          <a:solidFill>
+            <a:srgbClr val="EDE7DB"/>
+          </a:solidFill>
+          <a:ln w="12700">
+            <a:solidFill>
+              <a:srgbClr val="333333"/>
+            </a:solidFill>
+            <a:prstDash val="solid"/>
+          </a:ln>
+        </p:spPr>
+      </p:sp>
+      <p:sp>
+        <p:nvSpPr>
+          <p:cNvPr id="14" name="Text 12"/>
+          <p:cNvSpPr txBox="1"/>
+          <p:nvPr/>
+        </p:nvSpPr>
+        <p:spPr>
+          <a:xfrm>
+            <a:off x="6080760" y="3063240"/>
+            <a:ext cx="1463040" cy="256032"/>
+          </a:xfrm>
+          <a:prstGeom prst="rect">
+            <a:avLst/>
+          </a:prstGeom>
+          <a:noFill/>
+          <a:ln/>
+        </p:spPr>
+        <p:txBody>
+          <a:bodyPr wrap="square" lIns="0" tIns="0" rIns="0" bIns="0" rtlCol="0" anchor="ctr"/>
+          <a:lstStyle/>
+          <a:p>
+            <a:pPr indent="0" marL="0">
+              <a:buNone/>
+            </a:pPr>
+            <a:r>
+              <a:rPr lang="en-US" sz="900" b="1" spc="150" kern="0" dirty="0">
+                <a:solidFill>
+                  <a:srgbClr val="B04A2F"/>
+                </a:solidFill>
+                <a:latin typeface="Yu Gothic" pitchFamily="34" charset="0"/>
+                <a:ea typeface="Yu Gothic" pitchFamily="34" charset="-122"/>
+                <a:cs typeface="Yu Gothic" pitchFamily="34" charset="-120"/>
+              </a:rPr>
+              <a:t>こうする</a:t>
+            </a:r>
+            <a:endParaRPr lang="en-US" sz="900" dirty="0"/>
+          </a:p>
+        </p:txBody>
+      </p:sp>
+      <p:sp>
+        <p:nvSpPr>
+          <p:cNvPr id="15" name="Text 13"/>
+          <p:cNvSpPr txBox="1"/>
+          <p:nvPr/>
+        </p:nvSpPr>
+        <p:spPr>
+          <a:xfrm>
+            <a:off x="6080760" y="3328416"/>
+            <a:ext cx="5091379" cy="566928"/>
+          </a:xfrm>
+          <a:prstGeom prst="rect">
+            <a:avLst/>
+          </a:prstGeom>
+          <a:noFill/>
+          <a:ln/>
+        </p:spPr>
+        <p:txBody>
+          <a:bodyPr wrap="square" lIns="0" tIns="0" rIns="0" bIns="0" rtlCol="0" anchor="ctr"/>
+          <a:lstStyle/>
+          <a:p>
+            <a:pPr indent="0" marL="0">
+              <a:lnSpc>
+                <a:spcPct val="125000"/>
+              </a:lnSpc>
+              <a:buNone/>
+            </a:pPr>
+            <a:r>
+              <a:rPr lang="en-US" sz="1250" dirty="0">
+                <a:solidFill>
+                  <a:srgbClr val="3F3933"/>
+                </a:solidFill>
+                <a:latin typeface="Yu Gothic" pitchFamily="34" charset="0"/>
+                <a:ea typeface="Yu Gothic" pitchFamily="34" charset="-122"/>
+                <a:cs typeface="Yu Gothic" pitchFamily="34" charset="-120"/>
+              </a:rPr>
+              <a:t>資料を減らす／1領域に絞り直す／質問の粒度を揃える。この順で試します</a:t>
+            </a:r>
+            <a:endParaRPr lang="en-US" sz="1250" dirty="0"/>
+          </a:p>
+        </p:txBody>
+      </p:sp>
+      <p:sp>
+        <p:nvSpPr>
+          <p:cNvPr id="16" name="Shape 14"/>
+          <p:cNvSpPr/>
+          <p:nvPr/>
+        </p:nvSpPr>
+        <p:spPr>
+          <a:xfrm>
+            <a:off x="777240" y="4151376"/>
+            <a:ext cx="10607040" cy="1078992"/>
+          </a:xfrm>
+          <a:prstGeom prst="rect">
+            <a:avLst/>
+          </a:prstGeom>
+          <a:solidFill>
+            <a:srgbClr val="FFFFFF"/>
+          </a:solidFill>
+          <a:ln w="12700">
+            <a:solidFill>
+              <a:srgbClr val="EDE7DB"/>
+            </a:solidFill>
+            <a:prstDash val="solid"/>
+          </a:ln>
+        </p:spPr>
+      </p:sp>
+      <p:sp>
+        <p:nvSpPr>
+          <p:cNvPr id="17" name="Text 15"/>
+          <p:cNvSpPr txBox="1"/>
+          <p:nvPr/>
+        </p:nvSpPr>
+        <p:spPr>
+          <a:xfrm>
+            <a:off x="1051560" y="4270248"/>
+            <a:ext cx="1463040" cy="256032"/>
+          </a:xfrm>
+          <a:prstGeom prst="rect">
+            <a:avLst/>
+          </a:prstGeom>
+          <a:noFill/>
+          <a:ln/>
+        </p:spPr>
+        <p:txBody>
+          <a:bodyPr wrap="square" lIns="0" tIns="0" rIns="0" bIns="0" rtlCol="0" anchor="ctr"/>
+          <a:lstStyle/>
+          <a:p>
+            <a:pPr indent="0" marL="0">
+              <a:buNone/>
+            </a:pPr>
+            <a:r>
+              <a:rPr lang="en-US" sz="900" b="1" spc="150" kern="0" dirty="0">
+                <a:solidFill>
+                  <a:srgbClr val="8A8177"/>
+                </a:solidFill>
+                <a:latin typeface="Yu Gothic" pitchFamily="34" charset="0"/>
+                <a:ea typeface="Yu Gothic" pitchFamily="34" charset="-122"/>
+                <a:cs typeface="Yu Gothic" pitchFamily="34" charset="-120"/>
+              </a:rPr>
+              <a:t>こうなったら</a:t>
+            </a:r>
+            <a:endParaRPr lang="en-US" sz="900" dirty="0"/>
+          </a:p>
+        </p:txBody>
+      </p:sp>
+      <p:sp>
+        <p:nvSpPr>
+          <p:cNvPr id="18" name="Text 16"/>
+          <p:cNvSpPr txBox="1"/>
+          <p:nvPr/>
+        </p:nvSpPr>
+        <p:spPr>
+          <a:xfrm>
+            <a:off x="1051560" y="4535424"/>
+            <a:ext cx="4454957" cy="566928"/>
+          </a:xfrm>
+          <a:prstGeom prst="rect">
+            <a:avLst/>
+          </a:prstGeom>
+          <a:noFill/>
+          <a:ln/>
+        </p:spPr>
+        <p:txBody>
+          <a:bodyPr wrap="square" lIns="0" tIns="0" rIns="0" bIns="0" rtlCol="0" anchor="ctr"/>
+          <a:lstStyle/>
+          <a:p>
+            <a:pPr indent="0" marL="0">
+              <a:lnSpc>
+                <a:spcPct val="120000"/>
+              </a:lnSpc>
+              <a:buNone/>
+            </a:pPr>
+            <a:r>
+              <a:rPr lang="en-US" sz="1350" b="1" dirty="0">
+                <a:solidFill>
+                  <a:srgbClr val="23201D"/>
+                </a:solidFill>
+                <a:latin typeface="Yu Gothic" pitchFamily="34" charset="0"/>
+                <a:ea typeface="Yu Gothic" pitchFamily="34" charset="-122"/>
+                <a:cs typeface="Yu Gothic" pitchFamily="34" charset="-120"/>
+              </a:rPr>
+              <a:t>「全社の資料を全部入れたい」と言われる</a:t>
+            </a:r>
+            <a:endParaRPr lang="en-US" sz="1350" dirty="0"/>
+          </a:p>
+        </p:txBody>
+      </p:sp>
+      <p:sp>
+        <p:nvSpPr>
+          <p:cNvPr id="19" name="Shape 17"/>
+          <p:cNvSpPr/>
+          <p:nvPr/>
+        </p:nvSpPr>
+        <p:spPr>
+          <a:xfrm>
+            <a:off x="5762549" y="4261104"/>
+            <a:ext cx="18288" cy="859536"/>
+          </a:xfrm>
+          <a:prstGeom prst="rect">
+            <a:avLst/>
+          </a:prstGeom>
+          <a:solidFill>
+            <a:srgbClr val="EDE7DB"/>
+          </a:solidFill>
+          <a:ln w="12700">
+            <a:solidFill>
+              <a:srgbClr val="333333"/>
+            </a:solidFill>
+            <a:prstDash val="solid"/>
+          </a:ln>
+        </p:spPr>
+      </p:sp>
+      <p:sp>
+        <p:nvSpPr>
+          <p:cNvPr id="20" name="Text 18"/>
+          <p:cNvSpPr txBox="1"/>
+          <p:nvPr/>
+        </p:nvSpPr>
+        <p:spPr>
+          <a:xfrm>
+            <a:off x="6080760" y="4270248"/>
+            <a:ext cx="1463040" cy="256032"/>
+          </a:xfrm>
+          <a:prstGeom prst="rect">
+            <a:avLst/>
+          </a:prstGeom>
+          <a:noFill/>
+          <a:ln/>
+        </p:spPr>
+        <p:txBody>
+          <a:bodyPr wrap="square" lIns="0" tIns="0" rIns="0" bIns="0" rtlCol="0" anchor="ctr"/>
+          <a:lstStyle/>
+          <a:p>
+            <a:pPr indent="0" marL="0">
+              <a:buNone/>
+            </a:pPr>
+            <a:r>
+              <a:rPr lang="en-US" sz="900" b="1" spc="150" kern="0" dirty="0">
+                <a:solidFill>
+                  <a:srgbClr val="B04A2F"/>
+                </a:solidFill>
+                <a:latin typeface="Yu Gothic" pitchFamily="34" charset="0"/>
+                <a:ea typeface="Yu Gothic" pitchFamily="34" charset="-122"/>
+                <a:cs typeface="Yu Gothic" pitchFamily="34" charset="-120"/>
+              </a:rPr>
+              <a:t>こうする</a:t>
+            </a:r>
+            <a:endParaRPr lang="en-US" sz="900" dirty="0"/>
+          </a:p>
+        </p:txBody>
+      </p:sp>
+      <p:sp>
+        <p:nvSpPr>
+          <p:cNvPr id="21" name="Text 19"/>
+          <p:cNvSpPr txBox="1"/>
+          <p:nvPr/>
+        </p:nvSpPr>
+        <p:spPr>
+          <a:xfrm>
+            <a:off x="6080760" y="4535424"/>
+            <a:ext cx="5091379" cy="566928"/>
+          </a:xfrm>
+          <a:prstGeom prst="rect">
+            <a:avLst/>
+          </a:prstGeom>
+          <a:noFill/>
+          <a:ln/>
+        </p:spPr>
+        <p:txBody>
+          <a:bodyPr wrap="square" lIns="0" tIns="0" rIns="0" bIns="0" rtlCol="0" anchor="ctr"/>
+          <a:lstStyle/>
+          <a:p>
+            <a:pPr indent="0" marL="0">
+              <a:lnSpc>
+                <a:spcPct val="125000"/>
+              </a:lnSpc>
+              <a:buNone/>
+            </a:pPr>
+            <a:r>
+              <a:rPr lang="en-US" sz="1250" dirty="0">
+                <a:solidFill>
+                  <a:srgbClr val="3F3933"/>
+                </a:solidFill>
+                <a:latin typeface="Yu Gothic" pitchFamily="34" charset="0"/>
+                <a:ea typeface="Yu Gothic" pitchFamily="34" charset="-122"/>
+                <a:cs typeface="Yu Gothic" pitchFamily="34" charset="-120"/>
+              </a:rPr>
+              <a:t>止めます。10問テストで精度が落ちることを実証して見せるのが最も早い説得です</a:t>
+            </a:r>
+            <a:endParaRPr lang="en-US" sz="1250" dirty="0"/>
+          </a:p>
+        </p:txBody>
+      </p:sp>
+      <p:sp>
+        <p:nvSpPr>
+          <p:cNvPr id="22" name="Text 20"/>
+          <p:cNvSpPr txBox="1"/>
+          <p:nvPr/>
+        </p:nvSpPr>
+        <p:spPr>
+          <a:xfrm>
+            <a:off x="777240" y="6382512"/>
+            <a:ext cx="7424928" cy="256032"/>
+          </a:xfrm>
+          <a:prstGeom prst="rect">
+            <a:avLst/>
+          </a:prstGeom>
+          <a:noFill/>
+          <a:ln/>
+        </p:spPr>
+        <p:txBody>
+          <a:bodyPr wrap="square" lIns="0" tIns="0" rIns="0" bIns="0" rtlCol="0" anchor="ctr"/>
+          <a:lstStyle/>
+          <a:p>
+            <a:pPr indent="0" marL="0">
+              <a:buNone/>
+            </a:pPr>
+            <a:r>
+              <a:rPr lang="en-US" sz="900" dirty="0">
+                <a:solidFill>
+                  <a:srgbClr val="8A8177"/>
+                </a:solidFill>
+                <a:latin typeface="Yu Gothic" pitchFamily="34" charset="0"/>
+                <a:ea typeface="Yu Gothic" pitchFamily="34" charset="-122"/>
+                <a:cs typeface="Yu Gothic" pitchFamily="34" charset="-120"/>
+              </a:rPr>
+              <a:t>第8回　社内の知識を検索できるようにする</a:t>
+            </a:r>
+            <a:endParaRPr lang="en-US" sz="900" dirty="0"/>
+          </a:p>
+        </p:txBody>
+      </p:sp>
+      <p:sp>
+        <p:nvSpPr>
+          <p:cNvPr id="23" name="Text 21"/>
+          <p:cNvSpPr txBox="1"/>
+          <p:nvPr/>
+        </p:nvSpPr>
+        <p:spPr>
+          <a:xfrm>
+            <a:off x="8202168" y="6382512"/>
+            <a:ext cx="3182112" cy="256032"/>
+          </a:xfrm>
+          <a:prstGeom prst="rect">
+            <a:avLst/>
+          </a:prstGeom>
+          <a:noFill/>
+          <a:ln/>
+        </p:spPr>
+        <p:txBody>
+          <a:bodyPr wrap="square" lIns="0" tIns="0" rIns="0" bIns="0" rtlCol="0" anchor="ctr"/>
+          <a:lstStyle/>
+          <a:p>
+            <a:pPr algn="r" indent="0" marL="0">
+              <a:buNone/>
+            </a:pPr>
+            <a:r>
+              <a:rPr lang="en-US" sz="900" dirty="0">
+                <a:solidFill>
+                  <a:srgbClr val="8A8177"/>
+                </a:solidFill>
+                <a:latin typeface="Yu Gothic" pitchFamily="34" charset="0"/>
+                <a:ea typeface="Yu Gothic" pitchFamily="34" charset="-122"/>
+                <a:cs typeface="Yu Gothic" pitchFamily="34" charset="-120"/>
+              </a:rPr>
+              <a:t>つまずき</a:t>
+            </a:r>
+            <a:endParaRPr lang="en-US" sz="900" dirty="0"/>
+          </a:p>
+        </p:txBody>
+      </p:sp>
+    </p:spTree>
+  </p:cSld>
+  <p:clrMapOvr>
+    <a:masterClrMapping/>
+  </p:clrMapOvr>
+</p:sld>
+</file>
+
+<file path=ppt/slides/slide9.xml><?xml version="1.0" encoding="utf-8"?>
+<p:sld xmlns:a="http://schemas.openxmlformats.org/drawingml/2006/main" xmlns:r="http://schemas.openxmlformats.org/officeDocument/2006/relationships" xmlns:p="http://schemas.openxmlformats.org/presentationml/2006/main">
+  <p:cSld name="Slide 9">
+    <p:bg>
+      <p:bgPr>
+        <a:solidFill>
+          <a:srgbClr val="F6F2EA"/>
+        </a:solidFill>
+      </p:bgPr>
+    </p:bg>
+    <p:spTree>
+      <p:nvGrpSpPr>
+        <p:cNvPr id="1" name=""/>
+        <p:cNvGrpSpPr/>
+        <p:nvPr/>
+      </p:nvGrpSpPr>
+      <p:grpSpPr>
+        <a:xfrm>
+          <a:off x="0" y="0"/>
+          <a:ext cx="0" cy="0"/>
+          <a:chOff x="0" y="0"/>
+          <a:chExt cx="0" cy="0"/>
+        </a:xfrm>
+      </p:grpSpPr>
+      <p:sp>
+        <p:nvSpPr>
+          <p:cNvPr id="2" name="Text 0"/>
+          <p:cNvSpPr txBox="1"/>
+          <p:nvPr/>
+        </p:nvSpPr>
+        <p:spPr>
+          <a:xfrm>
+            <a:off x="777240" y="566928"/>
+            <a:ext cx="10607040" cy="274320"/>
+          </a:xfrm>
+          <a:prstGeom prst="rect">
+            <a:avLst/>
+          </a:prstGeom>
+          <a:noFill/>
+          <a:ln/>
+        </p:spPr>
+        <p:txBody>
+          <a:bodyPr wrap="square" lIns="0" tIns="0" rIns="0" bIns="0" rtlCol="0" anchor="ctr"/>
+          <a:lstStyle/>
+          <a:p>
+            <a:pPr indent="0" marL="0">
+              <a:buNone/>
+            </a:pPr>
+            <a:r>
+              <a:rPr lang="en-US" sz="1100" b="1" spc="250" kern="0" dirty="0">
+                <a:solidFill>
+                  <a:srgbClr val="2F4F6B"/>
+                </a:solidFill>
+                <a:latin typeface="Yu Gothic" pitchFamily="34" charset="0"/>
+                <a:ea typeface="Yu Gothic" pitchFamily="34" charset="-122"/>
+                <a:cs typeface="Yu Gothic" pitchFamily="34" charset="-120"/>
+              </a:rPr>
+              <a:t>演習</a:t>
+            </a:r>
+            <a:endParaRPr lang="en-US" sz="1100" dirty="0"/>
+          </a:p>
+        </p:txBody>
+      </p:sp>
+      <p:sp>
+        <p:nvSpPr>
+          <p:cNvPr id="3" name="Text 1"/>
+          <p:cNvSpPr txBox="1"/>
+          <p:nvPr/>
+        </p:nvSpPr>
+        <p:spPr>
+          <a:xfrm>
+            <a:off x="777240" y="896112"/>
+            <a:ext cx="10607040" cy="640080"/>
+          </a:xfrm>
+          <a:prstGeom prst="rect">
+            <a:avLst/>
+          </a:prstGeom>
+          <a:noFill/>
+          <a:ln/>
+        </p:spPr>
+        <p:txBody>
+          <a:bodyPr wrap="square" lIns="0" tIns="0" rIns="0" bIns="0" rtlCol="0" anchor="ctr"/>
+          <a:lstStyle/>
+          <a:p>
+            <a:pPr indent="0" marL="0">
+              <a:buNone/>
+            </a:pPr>
+            <a:r>
+              <a:rPr lang="en-US" sz="2600" b="1" dirty="0">
+                <a:solidFill>
+                  <a:srgbClr val="23201D"/>
+                </a:solidFill>
+                <a:latin typeface="Yu Gothic" pitchFamily="34" charset="0"/>
+                <a:ea typeface="Yu Gothic" pitchFamily="34" charset="-122"/>
+                <a:cs typeface="Yu Gothic" pitchFamily="34" charset="-120"/>
+              </a:rPr>
+              <a:t>今日、一緒にやること</a:t>
+            </a:r>
+            <a:endParaRPr lang="en-US" sz="2600" dirty="0"/>
+          </a:p>
+        </p:txBody>
+      </p:sp>
+      <p:sp>
+        <p:nvSpPr>
+          <p:cNvPr id="4" name="Text 2"/>
+          <p:cNvSpPr txBox="1"/>
+          <p:nvPr/>
+        </p:nvSpPr>
+        <p:spPr>
+          <a:xfrm>
+            <a:off x="777240" y="1572768"/>
+            <a:ext cx="10607040" cy="320040"/>
+          </a:xfrm>
+          <a:prstGeom prst="rect">
+            <a:avLst/>
+          </a:prstGeom>
+          <a:noFill/>
+          <a:ln/>
+        </p:spPr>
+        <p:txBody>
+          <a:bodyPr wrap="square" lIns="0" tIns="0" rIns="0" bIns="0" rtlCol="0" anchor="ctr"/>
+          <a:lstStyle/>
+          <a:p>
+            <a:pPr indent="0" marL="0">
+              <a:buNone/>
+            </a:pPr>
+            <a:r>
+              <a:rPr lang="en-US" sz="1250" b="1" dirty="0">
+                <a:solidFill>
+                  <a:srgbClr val="2F4F6B"/>
+                </a:solidFill>
+                <a:latin typeface="Yu Gothic" pitchFamily="34" charset="0"/>
+                <a:ea typeface="Yu Gothic" pitchFamily="34" charset="-122"/>
+                <a:cs typeface="Yu Gothic" pitchFamily="34" charset="-120"/>
+              </a:rPr>
+              <a:t>55分。操作するのはご自身です。</a:t>
+            </a:r>
+            <a:endParaRPr lang="en-US" sz="1250" dirty="0"/>
+          </a:p>
+        </p:txBody>
+      </p:sp>
+      <p:sp>
+        <p:nvSpPr>
+          <p:cNvPr id="5" name="Shape 3"/>
+          <p:cNvSpPr/>
+          <p:nvPr/>
+        </p:nvSpPr>
+        <p:spPr>
+          <a:xfrm>
+            <a:off x="777240" y="2148840"/>
+            <a:ext cx="3383280" cy="2880360"/>
+          </a:xfrm>
+          <a:prstGeom prst="rect">
+            <a:avLst/>
+          </a:prstGeom>
+          <a:solidFill>
+            <a:srgbClr val="FFFFFF"/>
+          </a:solidFill>
+          <a:ln w="12700">
+            <a:solidFill>
+              <a:srgbClr val="EDE7DB"/>
+            </a:solidFill>
+            <a:prstDash val="solid"/>
+          </a:ln>
+        </p:spPr>
+      </p:sp>
+      <p:sp>
+        <p:nvSpPr>
+          <p:cNvPr id="6" name="Shape 4"/>
+          <p:cNvSpPr/>
+          <p:nvPr/>
+        </p:nvSpPr>
+        <p:spPr>
+          <a:xfrm>
+            <a:off x="1051560" y="2395728"/>
+            <a:ext cx="438912" cy="438912"/>
+          </a:xfrm>
+          <a:prstGeom prst="ellipse">
+            <a:avLst/>
+          </a:prstGeom>
+          <a:solidFill>
+            <a:srgbClr val="2F4F6B"/>
+          </a:solidFill>
+          <a:ln w="12700">
+            <a:solidFill>
+              <a:srgbClr val="333333"/>
+            </a:solidFill>
+            <a:prstDash val="solid"/>
+          </a:ln>
+        </p:spPr>
+      </p:sp>
+      <p:sp>
+        <p:nvSpPr>
+          <p:cNvPr id="7" name="Text 5"/>
+          <p:cNvSpPr txBox="1"/>
+          <p:nvPr/>
+        </p:nvSpPr>
+        <p:spPr>
+          <a:xfrm>
+            <a:off x="1051560" y="2395728"/>
+            <a:ext cx="438912" cy="438912"/>
+          </a:xfrm>
+          <a:prstGeom prst="rect">
+            <a:avLst/>
+          </a:prstGeom>
+          <a:noFill/>
+          <a:ln/>
+        </p:spPr>
+        <p:txBody>
+          <a:bodyPr wrap="square" lIns="0" tIns="0" rIns="0" bIns="0" rtlCol="0" anchor="ctr"/>
+          <a:lstStyle/>
+          <a:p>
+            <a:pPr algn="ctr" indent="0" marL="0">
+              <a:buNone/>
+            </a:pPr>
+            <a:r>
+              <a:rPr lang="en-US" sz="1300" b="1" dirty="0">
                 <a:solidFill>
                   <a:srgbClr val="FFFFFF"/>
                 </a:solidFill>
@@ -4978,22 +8477,22 @@
                 <a:ea typeface="Yu Gothic" pitchFamily="34" charset="-122"/>
                 <a:cs typeface="Yu Gothic" pitchFamily="34" charset="-120"/>
               </a:rPr>
-              <a:t>足りない資料のうち、最も簡単な1件を埋める（作る・探す・聞き出す のいずれか）。</a:t>
-            </a:r>
-            <a:endParaRPr lang="en-US" sz="1900" dirty="0"/>
-          </a:p>
-        </p:txBody>
-      </p:sp>
-      <p:sp>
-        <p:nvSpPr>
-          <p:cNvPr id="6" name="Text 4"/>
-          <p:cNvSpPr txBox="1"/>
-          <p:nvPr/>
-        </p:nvSpPr>
-        <p:spPr>
-          <a:xfrm>
-            <a:off x="777240" y="4572000"/>
-            <a:ext cx="10607040" cy="822960"/>
+              <a:t>1</a:t>
+            </a:r>
+            <a:endParaRPr lang="en-US" sz="1300" dirty="0"/>
+          </a:p>
+        </p:txBody>
+      </p:sp>
+      <p:sp>
+        <p:nvSpPr>
+          <p:cNvPr id="8" name="Text 6"/>
+          <p:cNvSpPr txBox="1"/>
+          <p:nvPr/>
+        </p:nvSpPr>
+        <p:spPr>
+          <a:xfrm>
+            <a:off x="1051560" y="2944368"/>
+            <a:ext cx="2834640" cy="731520"/>
           </a:xfrm>
           <a:prstGeom prst="rect">
             <a:avLst/>
@@ -5007,40 +8506,324 @@
           <a:p>
             <a:pPr indent="0" marL="0">
               <a:lnSpc>
-                <a:spcPct val="145000"/>
+                <a:spcPct val="125000"/>
               </a:lnSpc>
               <a:buNone/>
             </a:pPr>
             <a:r>
-              <a:rPr lang="en-US" sz="1300" dirty="0">
-                <a:solidFill>
-                  <a:srgbClr val="B9B0A4"/>
-                </a:solidFill>
-                <a:latin typeface="Yu Gothic" pitchFamily="34" charset="0"/>
-                <a:ea typeface="Yu Gothic" pitchFamily="34" charset="-122"/>
-                <a:cs typeface="Yu Gothic" pitchFamily="34" charset="-120"/>
-              </a:rPr>
-              <a:t>15分で終わる大きさにしてあります。できなかった回があっても構いません。</a:t>
+              <a:rPr lang="en-US" sz="1450" b="1" dirty="0">
+                <a:solidFill>
+                  <a:srgbClr val="23201D"/>
+                </a:solidFill>
+                <a:latin typeface="Yu Gothic" pitchFamily="34" charset="0"/>
+                <a:ea typeface="Yu Gothic" pitchFamily="34" charset="-122"/>
+                <a:cs typeface="Yu Gothic" pitchFamily="34" charset="-120"/>
+              </a:rPr>
+              <a:t>1領域を決めて、資料を載せる</a:t>
+            </a:r>
+            <a:endParaRPr lang="en-US" sz="1450" dirty="0"/>
+          </a:p>
+        </p:txBody>
+      </p:sp>
+      <p:sp>
+        <p:nvSpPr>
+          <p:cNvPr id="9" name="Text 7"/>
+          <p:cNvSpPr txBox="1"/>
+          <p:nvPr/>
+        </p:nvSpPr>
+        <p:spPr>
+          <a:xfrm>
+            <a:off x="1051560" y="3703320"/>
+            <a:ext cx="2834640" cy="1188720"/>
+          </a:xfrm>
+          <a:prstGeom prst="rect">
+            <a:avLst/>
+          </a:prstGeom>
+          <a:noFill/>
+          <a:ln/>
+        </p:spPr>
+        <p:txBody>
+          <a:bodyPr wrap="square" lIns="0" tIns="0" rIns="0" bIns="0" rtlCol="0" anchor="ctr"/>
+          <a:lstStyle/>
+          <a:p>
+            <a:pPr indent="0" marL="0">
+              <a:lnSpc>
+                <a:spcPct val="130000"/>
+              </a:lnSpc>
+              <a:buNone/>
+            </a:pPr>
+            <a:r>
+              <a:rPr lang="en-US" sz="1150" dirty="0">
+                <a:solidFill>
+                  <a:srgbClr val="5A534A"/>
+                </a:solidFill>
+                <a:latin typeface="Yu Gothic" pitchFamily="34" charset="0"/>
+                <a:ea typeface="Yu Gothic" pitchFamily="34" charset="-122"/>
+                <a:cs typeface="Yu Gothic" pitchFamily="34" charset="-120"/>
+              </a:rPr>
+              <a:t>入れない判断が品質を決めます。最新版だけに絞ります</a:t>
+            </a:r>
+            <a:endParaRPr lang="en-US" sz="1150" dirty="0"/>
+          </a:p>
+        </p:txBody>
+      </p:sp>
+      <p:sp>
+        <p:nvSpPr>
+          <p:cNvPr id="10" name="Shape 8"/>
+          <p:cNvSpPr/>
+          <p:nvPr/>
+        </p:nvSpPr>
+        <p:spPr>
+          <a:xfrm>
+            <a:off x="4389120" y="2148840"/>
+            <a:ext cx="3383280" cy="2880360"/>
+          </a:xfrm>
+          <a:prstGeom prst="rect">
+            <a:avLst/>
+          </a:prstGeom>
+          <a:solidFill>
+            <a:srgbClr val="FFFFFF"/>
+          </a:solidFill>
+          <a:ln w="12700">
+            <a:solidFill>
+              <a:srgbClr val="EDE7DB"/>
+            </a:solidFill>
+            <a:prstDash val="solid"/>
+          </a:ln>
+        </p:spPr>
+      </p:sp>
+      <p:sp>
+        <p:nvSpPr>
+          <p:cNvPr id="11" name="Shape 9"/>
+          <p:cNvSpPr/>
+          <p:nvPr/>
+        </p:nvSpPr>
+        <p:spPr>
+          <a:xfrm>
+            <a:off x="4663440" y="2395728"/>
+            <a:ext cx="438912" cy="438912"/>
+          </a:xfrm>
+          <a:prstGeom prst="ellipse">
+            <a:avLst/>
+          </a:prstGeom>
+          <a:solidFill>
+            <a:srgbClr val="2F4F6B"/>
+          </a:solidFill>
+          <a:ln w="12700">
+            <a:solidFill>
+              <a:srgbClr val="333333"/>
+            </a:solidFill>
+            <a:prstDash val="solid"/>
+          </a:ln>
+        </p:spPr>
+      </p:sp>
+      <p:sp>
+        <p:nvSpPr>
+          <p:cNvPr id="12" name="Text 10"/>
+          <p:cNvSpPr txBox="1"/>
+          <p:nvPr/>
+        </p:nvSpPr>
+        <p:spPr>
+          <a:xfrm>
+            <a:off x="4663440" y="2395728"/>
+            <a:ext cx="438912" cy="438912"/>
+          </a:xfrm>
+          <a:prstGeom prst="rect">
+            <a:avLst/>
+          </a:prstGeom>
+          <a:noFill/>
+          <a:ln/>
+        </p:spPr>
+        <p:txBody>
+          <a:bodyPr wrap="square" lIns="0" tIns="0" rIns="0" bIns="0" rtlCol="0" anchor="ctr"/>
+          <a:lstStyle/>
+          <a:p>
+            <a:pPr algn="ctr" indent="0" marL="0">
+              <a:buNone/>
+            </a:pPr>
+            <a:r>
+              <a:rPr lang="en-US" sz="1300" b="1" dirty="0">
+                <a:solidFill>
+                  <a:srgbClr val="FFFFFF"/>
+                </a:solidFill>
+                <a:latin typeface="Yu Gothic" pitchFamily="34" charset="0"/>
+                <a:ea typeface="Yu Gothic" pitchFamily="34" charset="-122"/>
+                <a:cs typeface="Yu Gothic" pitchFamily="34" charset="-120"/>
+              </a:rPr>
+              <a:t>2</a:t>
             </a:r>
             <a:endParaRPr lang="en-US" sz="1300" dirty="0"/>
           </a:p>
+        </p:txBody>
+      </p:sp>
+      <p:sp>
+        <p:nvSpPr>
+          <p:cNvPr id="13" name="Text 11"/>
+          <p:cNvSpPr txBox="1"/>
+          <p:nvPr/>
+        </p:nvSpPr>
+        <p:spPr>
+          <a:xfrm>
+            <a:off x="4663440" y="2944368"/>
+            <a:ext cx="2834640" cy="731520"/>
+          </a:xfrm>
+          <a:prstGeom prst="rect">
+            <a:avLst/>
+          </a:prstGeom>
+          <a:noFill/>
+          <a:ln/>
+        </p:spPr>
+        <p:txBody>
+          <a:bodyPr wrap="square" lIns="0" tIns="0" rIns="0" bIns="0" rtlCol="0" anchor="ctr"/>
+          <a:lstStyle/>
           <a:p>
             <a:pPr indent="0" marL="0">
               <a:lnSpc>
-                <a:spcPct val="145000"/>
+                <a:spcPct val="125000"/>
               </a:lnSpc>
               <a:buNone/>
             </a:pPr>
             <a:r>
-              <a:rPr lang="en-US" sz="1300" dirty="0">
-                <a:solidFill>
-                  <a:srgbClr val="B9B0A4"/>
-                </a:solidFill>
-                <a:latin typeface="Yu Gothic" pitchFamily="34" charset="0"/>
-                <a:ea typeface="Yu Gothic" pitchFamily="34" charset="-122"/>
-                <a:cs typeface="Yu Gothic" pitchFamily="34" charset="-120"/>
-              </a:rPr>
-              <a:t>2回続いたら、宿題の出し方を見直します。</a:t>
+              <a:rPr lang="en-US" sz="1450" b="1" dirty="0">
+                <a:solidFill>
+                  <a:srgbClr val="23201D"/>
+                </a:solidFill>
+                <a:latin typeface="Yu Gothic" pitchFamily="34" charset="0"/>
+                <a:ea typeface="Yu Gothic" pitchFamily="34" charset="-122"/>
+                <a:cs typeface="Yu Gothic" pitchFamily="34" charset="-120"/>
+              </a:rPr>
+              <a:t>10問投げて、精度を測る</a:t>
+            </a:r>
+            <a:endParaRPr lang="en-US" sz="1450" dirty="0"/>
+          </a:p>
+        </p:txBody>
+      </p:sp>
+      <p:sp>
+        <p:nvSpPr>
+          <p:cNvPr id="14" name="Text 12"/>
+          <p:cNvSpPr txBox="1"/>
+          <p:nvPr/>
+        </p:nvSpPr>
+        <p:spPr>
+          <a:xfrm>
+            <a:off x="4663440" y="3703320"/>
+            <a:ext cx="2834640" cy="1188720"/>
+          </a:xfrm>
+          <a:prstGeom prst="rect">
+            <a:avLst/>
+          </a:prstGeom>
+          <a:noFill/>
+          <a:ln/>
+        </p:spPr>
+        <p:txBody>
+          <a:bodyPr wrap="square" lIns="0" tIns="0" rIns="0" bIns="0" rtlCol="0" anchor="ctr"/>
+          <a:lstStyle/>
+          <a:p>
+            <a:pPr indent="0" marL="0">
+              <a:lnSpc>
+                <a:spcPct val="130000"/>
+              </a:lnSpc>
+              <a:buNone/>
+            </a:pPr>
+            <a:r>
+              <a:rPr lang="en-US" sz="1150" dirty="0">
+                <a:solidFill>
+                  <a:srgbClr val="5A534A"/>
+                </a:solidFill>
+                <a:latin typeface="Yu Gothic" pitchFamily="34" charset="0"/>
+                <a:ea typeface="Yu Gothic" pitchFamily="34" charset="-122"/>
+                <a:cs typeface="Yu Gothic" pitchFamily="34" charset="-120"/>
+              </a:rPr>
+              <a:t>社員の方が実際にしそうな質問で試します。○△×を数えます</a:t>
+            </a:r>
+            <a:endParaRPr lang="en-US" sz="1150" dirty="0"/>
+          </a:p>
+        </p:txBody>
+      </p:sp>
+      <p:sp>
+        <p:nvSpPr>
+          <p:cNvPr id="15" name="Shape 13"/>
+          <p:cNvSpPr/>
+          <p:nvPr/>
+        </p:nvSpPr>
+        <p:spPr>
+          <a:xfrm>
+            <a:off x="8001000" y="2148840"/>
+            <a:ext cx="3383280" cy="2880360"/>
+          </a:xfrm>
+          <a:prstGeom prst="rect">
+            <a:avLst/>
+          </a:prstGeom>
+          <a:solidFill>
+            <a:srgbClr val="FFFFFF"/>
+          </a:solidFill>
+          <a:ln w="12700">
+            <a:solidFill>
+              <a:srgbClr val="EDE7DB"/>
+            </a:solidFill>
+            <a:prstDash val="solid"/>
+          </a:ln>
+        </p:spPr>
+      </p:sp>
+      <p:sp>
+        <p:nvSpPr>
+          <p:cNvPr id="16" name="Shape 14"/>
+          <p:cNvSpPr/>
+          <p:nvPr/>
+        </p:nvSpPr>
+        <p:spPr>
+          <a:xfrm>
+            <a:off x="8275320" y="2395728"/>
+            <a:ext cx="438912" cy="438912"/>
+          </a:xfrm>
+          <a:prstGeom prst="ellipse">
+            <a:avLst/>
+          </a:prstGeom>
+          <a:solidFill>
+            <a:srgbClr val="2F4F6B"/>
+          </a:solidFill>
+          <a:ln w="12700">
+            <a:solidFill>
+              <a:srgbClr val="333333"/>
+            </a:solidFill>
+            <a:prstDash val="solid"/>
+          </a:ln>
+        </p:spPr>
+      </p:sp>
+      <p:sp>
+        <p:nvSpPr>
+          <p:cNvPr id="17" name="Text 15"/>
+          <p:cNvSpPr txBox="1"/>
+          <p:nvPr/>
+        </p:nvSpPr>
+        <p:spPr>
+          <a:xfrm>
+            <a:off x="8275320" y="2395728"/>
+            <a:ext cx="438912" cy="438912"/>
+          </a:xfrm>
+          <a:prstGeom prst="rect">
+            <a:avLst/>
+          </a:prstGeom>
+          <a:noFill/>
+          <a:ln/>
+        </p:spPr>
+        <p:txBody>
+          <a:bodyPr wrap="square" lIns="0" tIns="0" rIns="0" bIns="0" rtlCol="0" anchor="ctr"/>
+          <a:lstStyle/>
+          <a:p>
+            <a:pPr algn="ctr" indent="0" marL="0">
+              <a:buNone/>
+            </a:pPr>
+            <a:r>
+              <a:rPr lang="en-US" sz="1300" b="1" dirty="0">
+                <a:solidFill>
+                  <a:srgbClr val="FFFFFF"/>
+                </a:solidFill>
+                <a:latin typeface="Yu Gothic" pitchFamily="34" charset="0"/>
+                <a:ea typeface="Yu Gothic" pitchFamily="34" charset="-122"/>
+                <a:cs typeface="Yu Gothic" pitchFamily="34" charset="-120"/>
+              </a:rPr>
+              <a:t>3</a:t>
             </a:r>
             <a:endParaRPr lang="en-US" sz="1300" dirty="0"/>
           </a:p>
@@ -5048,14 +8831,98 @@
       </p:sp>
       <p:sp>
         <p:nvSpPr>
-          <p:cNvPr id="7" name="Text 5"/>
-          <p:cNvSpPr txBox="1"/>
-          <p:nvPr/>
-        </p:nvSpPr>
-        <p:spPr>
-          <a:xfrm>
-            <a:off x="777240" y="6355080"/>
-            <a:ext cx="10607040" cy="274320"/>
+          <p:cNvPr id="18" name="Text 16"/>
+          <p:cNvSpPr txBox="1"/>
+          <p:nvPr/>
+        </p:nvSpPr>
+        <p:spPr>
+          <a:xfrm>
+            <a:off x="8275320" y="2944368"/>
+            <a:ext cx="2834640" cy="731520"/>
+          </a:xfrm>
+          <a:prstGeom prst="rect">
+            <a:avLst/>
+          </a:prstGeom>
+          <a:noFill/>
+          <a:ln/>
+        </p:spPr>
+        <p:txBody>
+          <a:bodyPr wrap="square" lIns="0" tIns="0" rIns="0" bIns="0" rtlCol="0" anchor="ctr"/>
+          <a:lstStyle/>
+          <a:p>
+            <a:pPr indent="0" marL="0">
+              <a:lnSpc>
+                <a:spcPct val="125000"/>
+              </a:lnSpc>
+              <a:buNone/>
+            </a:pPr>
+            <a:r>
+              <a:rPr lang="en-US" sz="1450" b="1" dirty="0">
+                <a:solidFill>
+                  <a:srgbClr val="23201D"/>
+                </a:solidFill>
+                <a:latin typeface="Yu Gothic" pitchFamily="34" charset="0"/>
+                <a:ea typeface="Yu Gothic" pitchFamily="34" charset="-122"/>
+                <a:cs typeface="Yu Gothic" pitchFamily="34" charset="-120"/>
+              </a:rPr>
+              <a:t>答えられなかった質問を書き出す</a:t>
+            </a:r>
+            <a:endParaRPr lang="en-US" sz="1450" dirty="0"/>
+          </a:p>
+        </p:txBody>
+      </p:sp>
+      <p:sp>
+        <p:nvSpPr>
+          <p:cNvPr id="19" name="Text 17"/>
+          <p:cNvSpPr txBox="1"/>
+          <p:nvPr/>
+        </p:nvSpPr>
+        <p:spPr>
+          <a:xfrm>
+            <a:off x="8275320" y="3703320"/>
+            <a:ext cx="2834640" cy="1188720"/>
+          </a:xfrm>
+          <a:prstGeom prst="rect">
+            <a:avLst/>
+          </a:prstGeom>
+          <a:noFill/>
+          <a:ln/>
+        </p:spPr>
+        <p:txBody>
+          <a:bodyPr wrap="square" lIns="0" tIns="0" rIns="0" bIns="0" rtlCol="0" anchor="ctr"/>
+          <a:lstStyle/>
+          <a:p>
+            <a:pPr indent="0" marL="0">
+              <a:lnSpc>
+                <a:spcPct val="130000"/>
+              </a:lnSpc>
+              <a:buNone/>
+            </a:pPr>
+            <a:r>
+              <a:rPr lang="en-US" sz="1150" dirty="0">
+                <a:solidFill>
+                  <a:srgbClr val="5A534A"/>
+                </a:solidFill>
+                <a:latin typeface="Yu Gothic" pitchFamily="34" charset="0"/>
+                <a:ea typeface="Yu Gothic" pitchFamily="34" charset="-122"/>
+                <a:cs typeface="Yu Gothic" pitchFamily="34" charset="-120"/>
+              </a:rPr>
+              <a:t>今日いちばんの成果物です。5列の表に落とします</a:t>
+            </a:r>
+            <a:endParaRPr lang="en-US" sz="1150" dirty="0"/>
+          </a:p>
+        </p:txBody>
+      </p:sp>
+      <p:sp>
+        <p:nvSpPr>
+          <p:cNvPr id="20" name="Text 18"/>
+          <p:cNvSpPr txBox="1"/>
+          <p:nvPr/>
+        </p:nvSpPr>
+        <p:spPr>
+          <a:xfrm>
+            <a:off x="777240" y="6382512"/>
+            <a:ext cx="7424928" cy="256032"/>
           </a:xfrm>
           <a:prstGeom prst="rect">
             <a:avLst/>
@@ -5073,13 +8940,52 @@
             <a:r>
               <a:rPr lang="en-US" sz="900" dirty="0">
                 <a:solidFill>
-                  <a:srgbClr val="6E6558"/>
+                  <a:srgbClr val="8A8177"/>
                 </a:solidFill>
                 <a:latin typeface="Yu Gothic" pitchFamily="34" charset="0"/>
                 <a:ea typeface="Yu Gothic" pitchFamily="34" charset="-122"/>
                 <a:cs typeface="Yu Gothic" pitchFamily="34" charset="-120"/>
               </a:rPr>
               <a:t>第8回　社内の知識を検索できるようにする</a:t>
+            </a:r>
+            <a:endParaRPr lang="en-US" sz="900" dirty="0"/>
+          </a:p>
+        </p:txBody>
+      </p:sp>
+      <p:sp>
+        <p:nvSpPr>
+          <p:cNvPr id="21" name="Text 19"/>
+          <p:cNvSpPr txBox="1"/>
+          <p:nvPr/>
+        </p:nvSpPr>
+        <p:spPr>
+          <a:xfrm>
+            <a:off x="8202168" y="6382512"/>
+            <a:ext cx="3182112" cy="256032"/>
+          </a:xfrm>
+          <a:prstGeom prst="rect">
+            <a:avLst/>
+          </a:prstGeom>
+          <a:noFill/>
+          <a:ln/>
+        </p:spPr>
+        <p:txBody>
+          <a:bodyPr wrap="square" lIns="0" tIns="0" rIns="0" bIns="0" rtlCol="0" anchor="ctr"/>
+          <a:lstStyle/>
+          <a:p>
+            <a:pPr algn="r" indent="0" marL="0">
+              <a:buNone/>
+            </a:pPr>
+            <a:r>
+              <a:rPr lang="en-US" sz="900" dirty="0">
+                <a:solidFill>
+                  <a:srgbClr val="8A8177"/>
+                </a:solidFill>
+                <a:latin typeface="Yu Gothic" pitchFamily="34" charset="0"/>
+                <a:ea typeface="Yu Gothic" pitchFamily="34" charset="-122"/>
+                <a:cs typeface="Yu Gothic" pitchFamily="34" charset="-120"/>
+              </a:rPr>
+              <a:t>演習</a:t>
             </a:r>
             <a:endParaRPr lang="en-US" sz="900" dirty="0"/>
           </a:p>

--- a/slides/pptx/第08回_社内の知識を検索できるようにする.pptx
+++ b/slides/pptx/第08回_社内の知識を検索できるようにする.pptx
@@ -17,9 +17,12 @@
     <p:sldId id="265" r:id="rId11"/>
     <p:sldId id="266" r:id="rId12"/>
     <p:sldId id="267" r:id="rId13"/>
+    <p:sldId id="268" r:id="rId14"/>
+    <p:sldId id="269" r:id="rId15"/>
+    <p:sldId id="270" r:id="rId16"/>
   </p:sldIdLst>
   <p:notesMasterIdLst>
-    <p:notesMasterId r:id="rId14"/>
+    <p:notesMasterId r:id="rId17"/>
   </p:notesMasterIdLst>
   <p:sldSz cx="12192000" cy="6858000"/>
   <p:notesSz cx="6858000" cy="12192000"/>
@@ -601,7 +604,7 @@
           <a:p>
             <a:r>
               <a:rPr lang="en-US" dirty="0"/>
-              <a:t>更新担当を決める。ここが空欄のナレッジは半年で腐る、と明言する。</a:t>
+              <a:t>不足資料リストを『事業承継の課題リスト』と言い換えると、経営者の関心が跳ね上がる。ここは急がない。</a:t>
             </a:r>
             <a:endParaRPr lang="en-US" dirty="0"/>
           </a:p>
@@ -689,7 +692,7 @@
           <a:p>
             <a:r>
               <a:rPr lang="en-US" dirty="0"/>
-              <a:t>経営者の関心が最も高まる場面。事業承継の話に接続すると、講座の位置づけが一段上がる。急がず時間を取る。</a:t>
+              <a:t>10問は必ず投げる。感想で終わらせない。数えることで、次回以降の比較ができるようになる。</a:t>
             </a:r>
             <a:endParaRPr lang="en-US" dirty="0"/>
           </a:p>
@@ -777,7 +780,7 @@
           <a:p>
             <a:r>
               <a:rPr lang="en-US" dirty="0"/>
-              <a:t>「最も簡単な1件」を一緒に選ぶ。難しいものを選ぶと止まる。選ぶところまでを今日やる。</a:t>
+              <a:t>更新担当を決める。ここが空欄のナレッジは半年で腐る、と明言する。</a:t>
             </a:r>
             <a:endParaRPr lang="en-US" dirty="0"/>
           </a:p>
@@ -801,6 +804,270 @@
             <a:fld id="{F7021451-1387-4CA6-816F-3879F97B5CBC}" type="slidenum">
               <a:rPr lang="en-US"/>
               <a:t>12</a:t>
+            </a:fld>
+            <a:endParaRPr lang="en-US"/>
+          </a:p>
+        </p:txBody>
+      </p:sp>
+    </p:spTree>
+    <p:extLst>
+      <p:ext uri="{BB962C8B-B14F-4D97-AF65-F5344CB8AC3E}">
+        <p14:creationId xmlns:p14="http://schemas.microsoft.com/office/powerpoint/2010/main" val="1024086991"/>
+      </p:ext>
+    </p:extLst>
+  </p:cSld>
+  <p:clrMapOvr>
+    <a:masterClrMapping/>
+  </p:clrMapOvr>
+</p:notes>
+</file>
+
+<file path=ppt/notesSlides/notesSlide13.xml><?xml version="1.0" encoding="utf-8"?>
+<p:notes xmlns:a="http://schemas.openxmlformats.org/drawingml/2006/main" xmlns:r="http://schemas.openxmlformats.org/officeDocument/2006/relationships" xmlns:p="http://schemas.openxmlformats.org/presentationml/2006/main">
+  <p:cSld>
+    <p:spTree>
+      <p:nvGrpSpPr>
+        <p:cNvPr id="1" name=""/>
+        <p:cNvGrpSpPr/>
+        <p:nvPr/>
+      </p:nvGrpSpPr>
+      <p:grpSpPr>
+        <a:xfrm>
+          <a:off x="0" y="0"/>
+          <a:ext cx="0" cy="0"/>
+          <a:chOff x="0" y="0"/>
+          <a:chExt cx="0" cy="0"/>
+        </a:xfrm>
+      </p:grpSpPr>
+      <p:sp>
+        <p:nvSpPr>
+          <p:cNvPr id="2" name="Slide Image Placeholder 1"/>
+          <p:cNvSpPr>
+            <a:spLocks noGrp="1" noRot="1" noChangeAspect="1"/>
+          </p:cNvSpPr>
+          <p:nvPr>
+            <p:ph type="sldImg"/>
+          </p:nvPr>
+        </p:nvSpPr>
+        <p:spPr/>
+      </p:sp>
+      <p:sp>
+        <p:nvSpPr>
+          <p:cNvPr id="3" name="Notes Placeholder 2"/>
+          <p:cNvSpPr>
+            <a:spLocks noGrp="1"/>
+          </p:cNvSpPr>
+          <p:nvPr>
+            <p:ph type="body" idx="1"/>
+          </p:nvPr>
+        </p:nvSpPr>
+        <p:spPr/>
+        <p:txBody>
+          <a:bodyPr/>
+          <a:lstStyle/>
+          <a:p>
+            <a:r>
+              <a:rPr lang="en-US" dirty="0"/>
+              <a:t>経営者の関心が最も高まる場面。事業承継の話に接続すると、講座の位置づけが一段上がる。急がず時間を取る。</a:t>
+            </a:r>
+            <a:endParaRPr lang="en-US" dirty="0"/>
+          </a:p>
+        </p:txBody>
+      </p:sp>
+      <p:sp>
+        <p:nvSpPr>
+          <p:cNvPr id="4" name="Slide Number Placeholder 3"/>
+          <p:cNvSpPr>
+            <a:spLocks noGrp="1"/>
+          </p:cNvSpPr>
+          <p:nvPr>
+            <p:ph type="sldNum" sz="quarter" idx="10"/>
+          </p:nvPr>
+        </p:nvSpPr>
+        <p:spPr/>
+        <p:txBody>
+          <a:bodyPr/>
+          <a:lstStyle/>
+          <a:p>
+            <a:fld id="{F7021451-1387-4CA6-816F-3879F97B5CBC}" type="slidenum">
+              <a:rPr lang="en-US"/>
+              <a:t>13</a:t>
+            </a:fld>
+            <a:endParaRPr lang="en-US"/>
+          </a:p>
+        </p:txBody>
+      </p:sp>
+    </p:spTree>
+    <p:extLst>
+      <p:ext uri="{BB962C8B-B14F-4D97-AF65-F5344CB8AC3E}">
+        <p14:creationId xmlns:p14="http://schemas.microsoft.com/office/powerpoint/2010/main" val="1024086991"/>
+      </p:ext>
+    </p:extLst>
+  </p:cSld>
+  <p:clrMapOvr>
+    <a:masterClrMapping/>
+  </p:clrMapOvr>
+</p:notes>
+</file>
+
+<file path=ppt/notesSlides/notesSlide14.xml><?xml version="1.0" encoding="utf-8"?>
+<p:notes xmlns:a="http://schemas.openxmlformats.org/drawingml/2006/main" xmlns:r="http://schemas.openxmlformats.org/officeDocument/2006/relationships" xmlns:p="http://schemas.openxmlformats.org/presentationml/2006/main">
+  <p:cSld>
+    <p:spTree>
+      <p:nvGrpSpPr>
+        <p:cNvPr id="1" name=""/>
+        <p:cNvGrpSpPr/>
+        <p:nvPr/>
+      </p:nvGrpSpPr>
+      <p:grpSpPr>
+        <a:xfrm>
+          <a:off x="0" y="0"/>
+          <a:ext cx="0" cy="0"/>
+          <a:chOff x="0" y="0"/>
+          <a:chExt cx="0" cy="0"/>
+        </a:xfrm>
+      </p:grpSpPr>
+      <p:sp>
+        <p:nvSpPr>
+          <p:cNvPr id="2" name="Slide Image Placeholder 1"/>
+          <p:cNvSpPr>
+            <a:spLocks noGrp="1" noRot="1" noChangeAspect="1"/>
+          </p:cNvSpPr>
+          <p:nvPr>
+            <p:ph type="sldImg"/>
+          </p:nvPr>
+        </p:nvSpPr>
+        <p:spPr/>
+      </p:sp>
+      <p:sp>
+        <p:nvSpPr>
+          <p:cNvPr id="3" name="Notes Placeholder 2"/>
+          <p:cNvSpPr>
+            <a:spLocks noGrp="1"/>
+          </p:cNvSpPr>
+          <p:nvPr>
+            <p:ph type="body" idx="1"/>
+          </p:nvPr>
+        </p:nvSpPr>
+        <p:spPr/>
+        <p:txBody>
+          <a:bodyPr/>
+          <a:lstStyle/>
+          <a:p>
+            <a:r>
+              <a:rPr lang="en-US" dirty="0"/>
+              <a:t>次回の業務選びが演習の質を決める。3工程以上、を具体例で示しておく。</a:t>
+            </a:r>
+            <a:endParaRPr lang="en-US" dirty="0"/>
+          </a:p>
+        </p:txBody>
+      </p:sp>
+      <p:sp>
+        <p:nvSpPr>
+          <p:cNvPr id="4" name="Slide Number Placeholder 3"/>
+          <p:cNvSpPr>
+            <a:spLocks noGrp="1"/>
+          </p:cNvSpPr>
+          <p:nvPr>
+            <p:ph type="sldNum" sz="quarter" idx="10"/>
+          </p:nvPr>
+        </p:nvSpPr>
+        <p:spPr/>
+        <p:txBody>
+          <a:bodyPr/>
+          <a:lstStyle/>
+          <a:p>
+            <a:fld id="{F7021451-1387-4CA6-816F-3879F97B5CBC}" type="slidenum">
+              <a:rPr lang="en-US"/>
+              <a:t>14</a:t>
+            </a:fld>
+            <a:endParaRPr lang="en-US"/>
+          </a:p>
+        </p:txBody>
+      </p:sp>
+    </p:spTree>
+    <p:extLst>
+      <p:ext uri="{BB962C8B-B14F-4D97-AF65-F5344CB8AC3E}">
+        <p14:creationId xmlns:p14="http://schemas.microsoft.com/office/powerpoint/2010/main" val="1024086991"/>
+      </p:ext>
+    </p:extLst>
+  </p:cSld>
+  <p:clrMapOvr>
+    <a:masterClrMapping/>
+  </p:clrMapOvr>
+</p:notes>
+</file>
+
+<file path=ppt/notesSlides/notesSlide15.xml><?xml version="1.0" encoding="utf-8"?>
+<p:notes xmlns:a="http://schemas.openxmlformats.org/drawingml/2006/main" xmlns:r="http://schemas.openxmlformats.org/officeDocument/2006/relationships" xmlns:p="http://schemas.openxmlformats.org/presentationml/2006/main">
+  <p:cSld>
+    <p:spTree>
+      <p:nvGrpSpPr>
+        <p:cNvPr id="1" name=""/>
+        <p:cNvGrpSpPr/>
+        <p:nvPr/>
+      </p:nvGrpSpPr>
+      <p:grpSpPr>
+        <a:xfrm>
+          <a:off x="0" y="0"/>
+          <a:ext cx="0" cy="0"/>
+          <a:chOff x="0" y="0"/>
+          <a:chExt cx="0" cy="0"/>
+        </a:xfrm>
+      </p:grpSpPr>
+      <p:sp>
+        <p:nvSpPr>
+          <p:cNvPr id="2" name="Slide Image Placeholder 1"/>
+          <p:cNvSpPr>
+            <a:spLocks noGrp="1" noRot="1" noChangeAspect="1"/>
+          </p:cNvSpPr>
+          <p:nvPr>
+            <p:ph type="sldImg"/>
+          </p:nvPr>
+        </p:nvSpPr>
+        <p:spPr/>
+      </p:sp>
+      <p:sp>
+        <p:nvSpPr>
+          <p:cNvPr id="3" name="Notes Placeholder 2"/>
+          <p:cNvSpPr>
+            <a:spLocks noGrp="1"/>
+          </p:cNvSpPr>
+          <p:nvPr>
+            <p:ph type="body" idx="1"/>
+          </p:nvPr>
+        </p:nvSpPr>
+        <p:spPr/>
+        <p:txBody>
+          <a:bodyPr/>
+          <a:lstStyle/>
+          <a:p>
+            <a:r>
+              <a:rPr lang="en-US" dirty="0"/>
+              <a:t>「最も簡単な1件」を一緒に選ぶ。難しいものを選ぶと止まる。選ぶところまでを今日やる。</a:t>
+            </a:r>
+            <a:endParaRPr lang="en-US" dirty="0"/>
+          </a:p>
+        </p:txBody>
+      </p:sp>
+      <p:sp>
+        <p:nvSpPr>
+          <p:cNvPr id="4" name="Slide Number Placeholder 3"/>
+          <p:cNvSpPr>
+            <a:spLocks noGrp="1"/>
+          </p:cNvSpPr>
+          <p:nvPr>
+            <p:ph type="sldNum" sz="quarter" idx="10"/>
+          </p:nvPr>
+        </p:nvSpPr>
+        <p:spPr/>
+        <p:txBody>
+          <a:bodyPr/>
+          <a:lstStyle/>
+          <a:p>
+            <a:fld id="{F7021451-1387-4CA6-816F-3879F97B5CBC}" type="slidenum">
+              <a:rPr lang="en-US"/>
+              <a:t>15</a:t>
             </a:fld>
             <a:endParaRPr lang="en-US"/>
           </a:p>
@@ -1481,7 +1748,7 @@
           <a:p>
             <a:r>
               <a:rPr lang="en-US" dirty="0"/>
-              <a:t>10問は必ず投げる。感想で終わらせない。数えることで、次回以降の比較ができるようになる。</a:t>
+              <a:t>1つ目は必ず出る。説得より実証。その場で全部入れて精度が落ちるのを見せるのが最速。3つ目は価値の転換点なので、丁寧に。</a:t>
             </a:r>
             <a:endParaRPr lang="en-US" dirty="0"/>
           </a:p>
@@ -2175,13 +2442,13 @@
             <a:r>
               <a:rPr lang="en-US" sz="1100" b="1" spc="250" kern="0" dirty="0">
                 <a:solidFill>
-                  <a:srgbClr val="3B6B4A"/>
-                </a:solidFill>
-                <a:latin typeface="Yu Gothic" pitchFamily="34" charset="0"/>
-                <a:ea typeface="Yu Gothic" pitchFamily="34" charset="-122"/>
-                <a:cs typeface="Yu Gothic" pitchFamily="34" charset="-120"/>
-              </a:rPr>
-              <a:t>業務への組み込み</a:t>
+                  <a:srgbClr val="8A8177"/>
+                </a:solidFill>
+                <a:latin typeface="Yu Gothic" pitchFamily="34" charset="0"/>
+                <a:ea typeface="Yu Gothic" pitchFamily="34" charset="-122"/>
+                <a:cs typeface="Yu Gothic" pitchFamily="34" charset="-120"/>
+              </a:rPr>
+              <a:t>用語</a:t>
             </a:r>
             <a:endParaRPr lang="en-US" sz="1100" dirty="0"/>
           </a:p>
@@ -2220,7 +2487,7 @@
                 <a:ea typeface="Yu Gothic" pitchFamily="34" charset="-122"/>
                 <a:cs typeface="Yu Gothic" pitchFamily="34" charset="-120"/>
               </a:rPr>
-              <a:t>帰る前に決めること</a:t>
+              <a:t>今日出てきた言葉</a:t>
             </a:r>
             <a:endParaRPr lang="en-US" sz="2600" dirty="0"/>
           </a:p>
@@ -2228,53 +2495,14 @@
       </p:sp>
       <p:sp>
         <p:nvSpPr>
-          <p:cNvPr id="4" name="Text 2"/>
-          <p:cNvSpPr txBox="1"/>
-          <p:nvPr/>
-        </p:nvSpPr>
-        <p:spPr>
-          <a:xfrm>
-            <a:off x="777240" y="1572768"/>
-            <a:ext cx="10607040" cy="320040"/>
-          </a:xfrm>
-          <a:prstGeom prst="rect">
-            <a:avLst/>
-          </a:prstGeom>
-          <a:noFill/>
-          <a:ln/>
-        </p:spPr>
-        <p:txBody>
-          <a:bodyPr wrap="square" lIns="0" tIns="0" rIns="0" bIns="0" rtlCol="0" anchor="ctr"/>
-          <a:lstStyle/>
-          <a:p>
-            <a:pPr indent="0" marL="0">
-              <a:buNone/>
-            </a:pPr>
-            <a:r>
-              <a:rPr lang="en-US" sz="1250" b="1" dirty="0">
-                <a:solidFill>
-                  <a:srgbClr val="3B6B4A"/>
-                </a:solidFill>
-                <a:latin typeface="Yu Gothic" pitchFamily="34" charset="0"/>
-                <a:ea typeface="Yu Gothic" pitchFamily="34" charset="-122"/>
-                <a:cs typeface="Yu Gothic" pitchFamily="34" charset="-120"/>
-              </a:rPr>
-              <a:t>ここを決めないと、持ち帰っても使われません。紙に書きます。</a:t>
-            </a:r>
-            <a:endParaRPr lang="en-US" sz="1250" dirty="0"/>
-          </a:p>
-        </p:txBody>
-      </p:sp>
-      <p:sp>
-        <p:nvSpPr>
-          <p:cNvPr id="5" name="Shape 3"/>
+          <p:cNvPr id="4" name="Shape 2"/>
           <p:cNvSpPr/>
           <p:nvPr/>
         </p:nvSpPr>
         <p:spPr>
           <a:xfrm>
-            <a:off x="777240" y="2103120"/>
-            <a:ext cx="10607040" cy="914400"/>
+            <a:off x="777240" y="1828800"/>
+            <a:ext cx="10607040" cy="1078992"/>
           </a:xfrm>
           <a:prstGeom prst="rect">
             <a:avLst/>
@@ -2292,20 +2520,59 @@
       </p:sp>
       <p:sp>
         <p:nvSpPr>
+          <p:cNvPr id="5" name="Text 3"/>
+          <p:cNvSpPr txBox="1"/>
+          <p:nvPr/>
+        </p:nvSpPr>
+        <p:spPr>
+          <a:xfrm>
+            <a:off x="1097280" y="1920240"/>
+            <a:ext cx="2969971" cy="896112"/>
+          </a:xfrm>
+          <a:prstGeom prst="rect">
+            <a:avLst/>
+          </a:prstGeom>
+          <a:noFill/>
+          <a:ln/>
+        </p:spPr>
+        <p:txBody>
+          <a:bodyPr wrap="square" lIns="0" tIns="0" rIns="0" bIns="0" rtlCol="0" anchor="ctr"/>
+          <a:lstStyle/>
+          <a:p>
+            <a:pPr indent="0" marL="0">
+              <a:buNone/>
+            </a:pPr>
+            <a:r>
+              <a:rPr lang="en-US" sz="1500" b="1" dirty="0">
+                <a:solidFill>
+                  <a:srgbClr val="23201D"/>
+                </a:solidFill>
+                <a:latin typeface="Yu Gothic" pitchFamily="34" charset="0"/>
+                <a:ea typeface="Yu Gothic" pitchFamily="34" charset="-122"/>
+                <a:cs typeface="Yu Gothic" pitchFamily="34" charset="-120"/>
+              </a:rPr>
+              <a:t>ナレッジ検索</a:t>
+            </a:r>
+            <a:endParaRPr lang="en-US" sz="1500" dirty="0"/>
+          </a:p>
+        </p:txBody>
+      </p:sp>
+      <p:sp>
+        <p:nvSpPr>
           <p:cNvPr id="6" name="Shape 4"/>
           <p:cNvSpPr/>
           <p:nvPr/>
         </p:nvSpPr>
         <p:spPr>
           <a:xfrm>
-            <a:off x="777240" y="2103120"/>
-            <a:ext cx="54864" cy="914400"/>
+            <a:off x="4065422" y="1956816"/>
+            <a:ext cx="18288" cy="822960"/>
           </a:xfrm>
           <a:prstGeom prst="rect">
             <a:avLst/>
           </a:prstGeom>
           <a:solidFill>
-            <a:srgbClr val="3B6B4A"/>
+            <a:srgbClr val="EDE7DB"/>
           </a:solidFill>
           <a:ln w="12700">
             <a:solidFill>
@@ -2323,47 +2590,8 @@
         </p:nvSpPr>
         <p:spPr>
           <a:xfrm>
-            <a:off x="1143000" y="2176272"/>
-            <a:ext cx="2757830" cy="768096"/>
-          </a:xfrm>
-          <a:prstGeom prst="rect">
-            <a:avLst/>
-          </a:prstGeom>
-          <a:noFill/>
-          <a:ln/>
-        </p:spPr>
-        <p:txBody>
-          <a:bodyPr wrap="square" lIns="0" tIns="0" rIns="0" bIns="0" rtlCol="0" anchor="ctr"/>
-          <a:lstStyle/>
-          <a:p>
-            <a:pPr indent="0" marL="0">
-              <a:buNone/>
-            </a:pPr>
-            <a:r>
-              <a:rPr lang="en-US" sz="1400" b="1" dirty="0">
-                <a:solidFill>
-                  <a:srgbClr val="3B6B4A"/>
-                </a:solidFill>
-                <a:latin typeface="Yu Gothic" pitchFamily="34" charset="0"/>
-                <a:ea typeface="Yu Gothic" pitchFamily="34" charset="-122"/>
-                <a:cs typeface="Yu Gothic" pitchFamily="34" charset="-120"/>
-              </a:rPr>
-              <a:t>誰に使わせるか</a:t>
-            </a:r>
-            <a:endParaRPr lang="en-US" sz="1400" dirty="0"/>
-          </a:p>
-        </p:txBody>
-      </p:sp>
-      <p:sp>
-        <p:nvSpPr>
-          <p:cNvPr id="8" name="Text 6"/>
-          <p:cNvSpPr txBox="1"/>
-          <p:nvPr/>
-        </p:nvSpPr>
-        <p:spPr>
-          <a:xfrm>
-            <a:off x="4006901" y="2176272"/>
-            <a:ext cx="7011619" cy="768096"/>
+            <a:off x="4383634" y="1920240"/>
+            <a:ext cx="6682435" cy="896112"/>
           </a:xfrm>
           <a:prstGeom prst="rect">
             <a:avLst/>
@@ -2384,13 +2612,13 @@
             <a:r>
               <a:rPr lang="en-US" sz="1250" dirty="0">
                 <a:solidFill>
-                  <a:srgbClr val="3F3933"/>
-                </a:solidFill>
-                <a:latin typeface="Yu Gothic" pitchFamily="34" charset="0"/>
-                <a:ea typeface="Yu Gothic" pitchFamily="34" charset="-122"/>
-                <a:cs typeface="Yu Gothic" pitchFamily="34" charset="-120"/>
-              </a:rPr>
-              <a:t>総務や事務など、質問を受ける側の方から始めます</a:t>
+                  <a:srgbClr val="5A534A"/>
+                </a:solidFill>
+                <a:latin typeface="Yu Gothic" pitchFamily="34" charset="0"/>
+                <a:ea typeface="Yu Gothic" pitchFamily="34" charset="-122"/>
+                <a:cs typeface="Yu Gothic" pitchFamily="34" charset="-120"/>
+              </a:rPr>
+              <a:t>自社資料を検索させてから答えさせるやり方。出典を示させるのが要点です</a:t>
             </a:r>
             <a:endParaRPr lang="en-US" sz="1250" dirty="0"/>
           </a:p>
@@ -2398,14 +2626,14 @@
       </p:sp>
       <p:sp>
         <p:nvSpPr>
-          <p:cNvPr id="9" name="Shape 7"/>
+          <p:cNvPr id="8" name="Shape 6"/>
           <p:cNvSpPr/>
           <p:nvPr/>
         </p:nvSpPr>
         <p:spPr>
           <a:xfrm>
-            <a:off x="777240" y="3154680"/>
-            <a:ext cx="10607040" cy="914400"/>
+            <a:off x="777240" y="3063240"/>
+            <a:ext cx="10607040" cy="1078992"/>
           </a:xfrm>
           <a:prstGeom prst="rect">
             <a:avLst/>
@@ -2423,20 +2651,59 @@
       </p:sp>
       <p:sp>
         <p:nvSpPr>
+          <p:cNvPr id="9" name="Text 7"/>
+          <p:cNvSpPr txBox="1"/>
+          <p:nvPr/>
+        </p:nvSpPr>
+        <p:spPr>
+          <a:xfrm>
+            <a:off x="1097280" y="3154680"/>
+            <a:ext cx="2969971" cy="896112"/>
+          </a:xfrm>
+          <a:prstGeom prst="rect">
+            <a:avLst/>
+          </a:prstGeom>
+          <a:noFill/>
+          <a:ln/>
+        </p:spPr>
+        <p:txBody>
+          <a:bodyPr wrap="square" lIns="0" tIns="0" rIns="0" bIns="0" rtlCol="0" anchor="ctr"/>
+          <a:lstStyle/>
+          <a:p>
+            <a:pPr indent="0" marL="0">
+              <a:buNone/>
+            </a:pPr>
+            <a:r>
+              <a:rPr lang="en-US" sz="1500" b="1" dirty="0">
+                <a:solidFill>
+                  <a:srgbClr val="23201D"/>
+                </a:solidFill>
+                <a:latin typeface="Yu Gothic" pitchFamily="34" charset="0"/>
+                <a:ea typeface="Yu Gothic" pitchFamily="34" charset="-122"/>
+                <a:cs typeface="Yu Gothic" pitchFamily="34" charset="-120"/>
+              </a:rPr>
+              <a:t>10問テスト</a:t>
+            </a:r>
+            <a:endParaRPr lang="en-US" sz="1500" dirty="0"/>
+          </a:p>
+        </p:txBody>
+      </p:sp>
+      <p:sp>
+        <p:nvSpPr>
           <p:cNvPr id="10" name="Shape 8"/>
           <p:cNvSpPr/>
           <p:nvPr/>
         </p:nvSpPr>
         <p:spPr>
           <a:xfrm>
-            <a:off x="777240" y="3154680"/>
-            <a:ext cx="54864" cy="914400"/>
+            <a:off x="4065422" y="3191256"/>
+            <a:ext cx="18288" cy="822960"/>
           </a:xfrm>
           <a:prstGeom prst="rect">
             <a:avLst/>
           </a:prstGeom>
           <a:solidFill>
-            <a:srgbClr val="3B6B4A"/>
+            <a:srgbClr val="EDE7DB"/>
           </a:solidFill>
           <a:ln w="12700">
             <a:solidFill>
@@ -2454,47 +2721,8 @@
         </p:nvSpPr>
         <p:spPr>
           <a:xfrm>
-            <a:off x="1143000" y="3227832"/>
-            <a:ext cx="2757830" cy="768096"/>
-          </a:xfrm>
-          <a:prstGeom prst="rect">
-            <a:avLst/>
-          </a:prstGeom>
-          <a:noFill/>
-          <a:ln/>
-        </p:spPr>
-        <p:txBody>
-          <a:bodyPr wrap="square" lIns="0" tIns="0" rIns="0" bIns="0" rtlCol="0" anchor="ctr"/>
-          <a:lstStyle/>
-          <a:p>
-            <a:pPr indent="0" marL="0">
-              <a:buNone/>
-            </a:pPr>
-            <a:r>
-              <a:rPr lang="en-US" sz="1400" b="1" dirty="0">
-                <a:solidFill>
-                  <a:srgbClr val="3B6B4A"/>
-                </a:solidFill>
-                <a:latin typeface="Yu Gothic" pitchFamily="34" charset="0"/>
-                <a:ea typeface="Yu Gothic" pitchFamily="34" charset="-122"/>
-                <a:cs typeface="Yu Gothic" pitchFamily="34" charset="-120"/>
-              </a:rPr>
-              <a:t>資料を更新するのは誰か</a:t>
-            </a:r>
-            <a:endParaRPr lang="en-US" sz="1400" dirty="0"/>
-          </a:p>
-        </p:txBody>
-      </p:sp>
-      <p:sp>
-        <p:nvSpPr>
-          <p:cNvPr id="12" name="Text 10"/>
-          <p:cNvSpPr txBox="1"/>
-          <p:nvPr/>
-        </p:nvSpPr>
-        <p:spPr>
-          <a:xfrm>
-            <a:off x="4006901" y="3227832"/>
-            <a:ext cx="7011619" cy="768096"/>
+            <a:off x="4383634" y="3154680"/>
+            <a:ext cx="6682435" cy="896112"/>
           </a:xfrm>
           <a:prstGeom prst="rect">
             <a:avLst/>
@@ -2515,13 +2743,13 @@
             <a:r>
               <a:rPr lang="en-US" sz="1250" dirty="0">
                 <a:solidFill>
-                  <a:srgbClr val="3F3933"/>
-                </a:solidFill>
-                <a:latin typeface="Yu Gothic" pitchFamily="34" charset="0"/>
-                <a:ea typeface="Yu Gothic" pitchFamily="34" charset="-122"/>
-                <a:cs typeface="Yu Gothic" pitchFamily="34" charset="-120"/>
-              </a:rPr>
-              <a:t>更新の担当が決まっていないナレッジは、半年で腐ります</a:t>
+                  <a:srgbClr val="5A534A"/>
+                </a:solidFill>
+                <a:latin typeface="Yu Gothic" pitchFamily="34" charset="0"/>
+                <a:ea typeface="Yu Gothic" pitchFamily="34" charset="-122"/>
+                <a:cs typeface="Yu Gothic" pitchFamily="34" charset="-120"/>
+              </a:rPr>
+              <a:t>○△×で数える精度の測り方。○が7件以上で実務に出せます</a:t>
             </a:r>
             <a:endParaRPr lang="en-US" sz="1250" dirty="0"/>
           </a:p>
@@ -2529,14 +2757,14 @@
       </p:sp>
       <p:sp>
         <p:nvSpPr>
-          <p:cNvPr id="13" name="Shape 11"/>
+          <p:cNvPr id="12" name="Shape 10"/>
           <p:cNvSpPr/>
           <p:nvPr/>
         </p:nvSpPr>
         <p:spPr>
           <a:xfrm>
-            <a:off x="777240" y="4206240"/>
-            <a:ext cx="10607040" cy="914400"/>
+            <a:off x="777240" y="4297680"/>
+            <a:ext cx="10607040" cy="1078992"/>
           </a:xfrm>
           <a:prstGeom prst="rect">
             <a:avLst/>
@@ -2554,20 +2782,59 @@
       </p:sp>
       <p:sp>
         <p:nvSpPr>
+          <p:cNvPr id="13" name="Text 11"/>
+          <p:cNvSpPr txBox="1"/>
+          <p:nvPr/>
+        </p:nvSpPr>
+        <p:spPr>
+          <a:xfrm>
+            <a:off x="1097280" y="4389120"/>
+            <a:ext cx="2969971" cy="896112"/>
+          </a:xfrm>
+          <a:prstGeom prst="rect">
+            <a:avLst/>
+          </a:prstGeom>
+          <a:noFill/>
+          <a:ln/>
+        </p:spPr>
+        <p:txBody>
+          <a:bodyPr wrap="square" lIns="0" tIns="0" rIns="0" bIns="0" rtlCol="0" anchor="ctr"/>
+          <a:lstStyle/>
+          <a:p>
+            <a:pPr indent="0" marL="0">
+              <a:buNone/>
+            </a:pPr>
+            <a:r>
+              <a:rPr lang="en-US" sz="1500" b="1" dirty="0">
+                <a:solidFill>
+                  <a:srgbClr val="23201D"/>
+                </a:solidFill>
+                <a:latin typeface="Yu Gothic" pitchFamily="34" charset="0"/>
+                <a:ea typeface="Yu Gothic" pitchFamily="34" charset="-122"/>
+                <a:cs typeface="Yu Gothic" pitchFamily="34" charset="-120"/>
+              </a:rPr>
+              <a:t>不足資料リスト</a:t>
+            </a:r>
+            <a:endParaRPr lang="en-US" sz="1500" dirty="0"/>
+          </a:p>
+        </p:txBody>
+      </p:sp>
+      <p:sp>
+        <p:nvSpPr>
           <p:cNvPr id="14" name="Shape 12"/>
           <p:cNvSpPr/>
           <p:nvPr/>
         </p:nvSpPr>
         <p:spPr>
           <a:xfrm>
-            <a:off x="777240" y="4206240"/>
-            <a:ext cx="54864" cy="914400"/>
+            <a:off x="4065422" y="4425696"/>
+            <a:ext cx="18288" cy="822960"/>
           </a:xfrm>
           <a:prstGeom prst="rect">
             <a:avLst/>
           </a:prstGeom>
           <a:solidFill>
-            <a:srgbClr val="3B6B4A"/>
+            <a:srgbClr val="EDE7DB"/>
           </a:solidFill>
           <a:ln w="12700">
             <a:solidFill>
@@ -2585,47 +2852,8 @@
         </p:nvSpPr>
         <p:spPr>
           <a:xfrm>
-            <a:off x="1143000" y="4279392"/>
-            <a:ext cx="2757830" cy="768096"/>
-          </a:xfrm>
-          <a:prstGeom prst="rect">
-            <a:avLst/>
-          </a:prstGeom>
-          <a:noFill/>
-          <a:ln/>
-        </p:spPr>
-        <p:txBody>
-          <a:bodyPr wrap="square" lIns="0" tIns="0" rIns="0" bIns="0" rtlCol="0" anchor="ctr"/>
-          <a:lstStyle/>
-          <a:p>
-            <a:pPr indent="0" marL="0">
-              <a:buNone/>
-            </a:pPr>
-            <a:r>
-              <a:rPr lang="en-US" sz="1400" b="1" dirty="0">
-                <a:solidFill>
-                  <a:srgbClr val="3B6B4A"/>
-                </a:solidFill>
-                <a:latin typeface="Yu Gothic" pitchFamily="34" charset="0"/>
-                <a:ea typeface="Yu Gothic" pitchFamily="34" charset="-122"/>
-                <a:cs typeface="Yu Gothic" pitchFamily="34" charset="-120"/>
-              </a:rPr>
-              <a:t>不足資料は誰がいつ作るか</a:t>
-            </a:r>
-            <a:endParaRPr lang="en-US" sz="1400" dirty="0"/>
-          </a:p>
-        </p:txBody>
-      </p:sp>
-      <p:sp>
-        <p:nvSpPr>
-          <p:cNvPr id="16" name="Text 14"/>
-          <p:cNvSpPr txBox="1"/>
-          <p:nvPr/>
-        </p:nvSpPr>
-        <p:spPr>
-          <a:xfrm>
-            <a:off x="4006901" y="4279392"/>
-            <a:ext cx="7011619" cy="768096"/>
+            <a:off x="4383634" y="4389120"/>
+            <a:ext cx="6682435" cy="896112"/>
           </a:xfrm>
           <a:prstGeom prst="rect">
             <a:avLst/>
@@ -2646,15 +2874,54 @@
             <a:r>
               <a:rPr lang="en-US" sz="1250" dirty="0">
                 <a:solidFill>
-                  <a:srgbClr val="3F3933"/>
-                </a:solidFill>
-                <a:latin typeface="Yu Gothic" pitchFamily="34" charset="0"/>
-                <a:ea typeface="Yu Gothic" pitchFamily="34" charset="-122"/>
-                <a:cs typeface="Yu Gothic" pitchFamily="34" charset="-120"/>
-              </a:rPr>
-              <a:t>5列の表の右2列を、実名と期日で埋めます</a:t>
+                  <a:srgbClr val="5A534A"/>
+                </a:solidFill>
+                <a:latin typeface="Yu Gothic" pitchFamily="34" charset="0"/>
+                <a:ea typeface="Yu Gothic" pitchFamily="34" charset="-122"/>
+                <a:cs typeface="Yu Gothic" pitchFamily="34" charset="-120"/>
+              </a:rPr>
+              <a:t>答えられなかった質問から作る一覧。事業承継の課題リストになります</a:t>
             </a:r>
             <a:endParaRPr lang="en-US" sz="1250" dirty="0"/>
+          </a:p>
+        </p:txBody>
+      </p:sp>
+      <p:sp>
+        <p:nvSpPr>
+          <p:cNvPr id="16" name="Text 14"/>
+          <p:cNvSpPr txBox="1"/>
+          <p:nvPr/>
+        </p:nvSpPr>
+        <p:spPr>
+          <a:xfrm>
+            <a:off x="777240" y="5623560"/>
+            <a:ext cx="10607040" cy="411480"/>
+          </a:xfrm>
+          <a:prstGeom prst="rect">
+            <a:avLst/>
+          </a:prstGeom>
+          <a:noFill/>
+          <a:ln/>
+        </p:spPr>
+        <p:txBody>
+          <a:bodyPr wrap="square" lIns="0" tIns="0" rIns="0" bIns="0" rtlCol="0" anchor="ctr"/>
+          <a:lstStyle/>
+          <a:p>
+            <a:pPr indent="0" marL="0">
+              <a:buNone/>
+            </a:pPr>
+            <a:r>
+              <a:rPr lang="en-US" sz="1150" dirty="0">
+                <a:solidFill>
+                  <a:srgbClr val="8A8177"/>
+                </a:solidFill>
+                <a:latin typeface="Yu Gothic" pitchFamily="34" charset="0"/>
+                <a:ea typeface="Yu Gothic" pitchFamily="34" charset="-122"/>
+                <a:cs typeface="Yu Gothic" pitchFamily="34" charset="-120"/>
+              </a:rPr>
+              <a:t>配布した用語辞典にも同じものが載っています。覚える必要はありません。</a:t>
+            </a:r>
+            <a:endParaRPr lang="en-US" sz="1150" dirty="0"/>
           </a:p>
         </p:txBody>
       </p:sp>
@@ -2730,7 +2997,7 @@
                 <a:ea typeface="Yu Gothic" pitchFamily="34" charset="-122"/>
                 <a:cs typeface="Yu Gothic" pitchFamily="34" charset="-120"/>
               </a:rPr>
-              <a:t>組み込み</a:t>
+              <a:t>用語</a:t>
             </a:r>
             <a:endParaRPr lang="en-US" sz="900" dirty="0"/>
           </a:p>
@@ -2795,13 +3062,13 @@
             <a:r>
               <a:rPr lang="en-US" sz="1100" b="1" spc="250" kern="0" dirty="0">
                 <a:solidFill>
-                  <a:srgbClr val="B04A2F"/>
-                </a:solidFill>
-                <a:latin typeface="Yu Gothic" pitchFamily="34" charset="0"/>
-                <a:ea typeface="Yu Gothic" pitchFamily="34" charset="-122"/>
-                <a:cs typeface="Yu Gothic" pitchFamily="34" charset="-120"/>
-              </a:rPr>
-              <a:t>ここだけは</a:t>
+                  <a:srgbClr val="2F4F6B"/>
+                </a:solidFill>
+                <a:latin typeface="Yu Gothic" pitchFamily="34" charset="0"/>
+                <a:ea typeface="Yu Gothic" pitchFamily="34" charset="-122"/>
+                <a:cs typeface="Yu Gothic" pitchFamily="34" charset="-120"/>
+              </a:rPr>
+              <a:t>演習</a:t>
             </a:r>
             <a:endParaRPr lang="en-US" sz="1100" dirty="0"/>
           </a:p>
@@ -2815,7 +3082,7 @@
         </p:nvSpPr>
         <p:spPr>
           <a:xfrm>
-            <a:off x="777240" y="1097280"/>
+            <a:off x="777240" y="896112"/>
             <a:ext cx="10607040" cy="640080"/>
           </a:xfrm>
           <a:prstGeom prst="rect">
@@ -2840,7 +3107,7 @@
                 <a:ea typeface="Yu Gothic" pitchFamily="34" charset="-122"/>
                 <a:cs typeface="Yu Gothic" pitchFamily="34" charset="-120"/>
               </a:rPr>
-              <a:t>答えられなかった質問こそ、成果です</a:t>
+              <a:t>今日、一緒にやること</a:t>
             </a:r>
             <a:endParaRPr lang="en-US" sz="2600" dirty="0"/>
           </a:p>
@@ -2848,20 +3115,84 @@
       </p:sp>
       <p:sp>
         <p:nvSpPr>
-          <p:cNvPr id="4" name="Shape 2"/>
+          <p:cNvPr id="4" name="Text 2"/>
+          <p:cNvSpPr txBox="1"/>
+          <p:nvPr/>
+        </p:nvSpPr>
+        <p:spPr>
+          <a:xfrm>
+            <a:off x="777240" y="1572768"/>
+            <a:ext cx="10607040" cy="320040"/>
+          </a:xfrm>
+          <a:prstGeom prst="rect">
+            <a:avLst/>
+          </a:prstGeom>
+          <a:noFill/>
+          <a:ln/>
+        </p:spPr>
+        <p:txBody>
+          <a:bodyPr wrap="square" lIns="0" tIns="0" rIns="0" bIns="0" rtlCol="0" anchor="ctr"/>
+          <a:lstStyle/>
+          <a:p>
+            <a:pPr indent="0" marL="0">
+              <a:buNone/>
+            </a:pPr>
+            <a:r>
+              <a:rPr lang="en-US" sz="1250" b="1" dirty="0">
+                <a:solidFill>
+                  <a:srgbClr val="2F4F6B"/>
+                </a:solidFill>
+                <a:latin typeface="Yu Gothic" pitchFamily="34" charset="0"/>
+                <a:ea typeface="Yu Gothic" pitchFamily="34" charset="-122"/>
+                <a:cs typeface="Yu Gothic" pitchFamily="34" charset="-120"/>
+              </a:rPr>
+              <a:t>55分。操作するのはご自身です。</a:t>
+            </a:r>
+            <a:endParaRPr lang="en-US" sz="1250" dirty="0"/>
+          </a:p>
+        </p:txBody>
+      </p:sp>
+      <p:sp>
+        <p:nvSpPr>
+          <p:cNvPr id="5" name="Shape 3"/>
           <p:cNvSpPr/>
           <p:nvPr/>
         </p:nvSpPr>
         <p:spPr>
           <a:xfrm>
             <a:off x="777240" y="2148840"/>
-            <a:ext cx="64008" cy="2194560"/>
+            <a:ext cx="3383280" cy="2880360"/>
           </a:xfrm>
           <a:prstGeom prst="rect">
             <a:avLst/>
           </a:prstGeom>
           <a:solidFill>
-            <a:srgbClr val="B04A2F"/>
+            <a:srgbClr val="FFFFFF"/>
+          </a:solidFill>
+          <a:ln w="12700">
+            <a:solidFill>
+              <a:srgbClr val="EDE7DB"/>
+            </a:solidFill>
+            <a:prstDash val="solid"/>
+          </a:ln>
+        </p:spPr>
+      </p:sp>
+      <p:sp>
+        <p:nvSpPr>
+          <p:cNvPr id="6" name="Shape 4"/>
+          <p:cNvSpPr/>
+          <p:nvPr/>
+        </p:nvSpPr>
+        <p:spPr>
+          <a:xfrm>
+            <a:off x="1051560" y="2395728"/>
+            <a:ext cx="438912" cy="438912"/>
+          </a:xfrm>
+          <a:prstGeom prst="ellipse">
+            <a:avLst/>
+          </a:prstGeom>
+          <a:solidFill>
+            <a:srgbClr val="2F4F6B"/>
           </a:solidFill>
           <a:ln w="12700">
             <a:solidFill>
@@ -2873,14 +3204,53 @@
       </p:sp>
       <p:sp>
         <p:nvSpPr>
-          <p:cNvPr id="5" name="Text 3"/>
-          <p:cNvSpPr txBox="1"/>
-          <p:nvPr/>
-        </p:nvSpPr>
-        <p:spPr>
-          <a:xfrm>
-            <a:off x="1188720" y="2148840"/>
-            <a:ext cx="9966960" cy="2194560"/>
+          <p:cNvPr id="7" name="Text 5"/>
+          <p:cNvSpPr txBox="1"/>
+          <p:nvPr/>
+        </p:nvSpPr>
+        <p:spPr>
+          <a:xfrm>
+            <a:off x="1051560" y="2395728"/>
+            <a:ext cx="438912" cy="438912"/>
+          </a:xfrm>
+          <a:prstGeom prst="rect">
+            <a:avLst/>
+          </a:prstGeom>
+          <a:noFill/>
+          <a:ln/>
+        </p:spPr>
+        <p:txBody>
+          <a:bodyPr wrap="square" lIns="0" tIns="0" rIns="0" bIns="0" rtlCol="0" anchor="ctr"/>
+          <a:lstStyle/>
+          <a:p>
+            <a:pPr algn="ctr" indent="0" marL="0">
+              <a:buNone/>
+            </a:pPr>
+            <a:r>
+              <a:rPr lang="en-US" sz="1300" b="1" dirty="0">
+                <a:solidFill>
+                  <a:srgbClr val="FFFFFF"/>
+                </a:solidFill>
+                <a:latin typeface="Yu Gothic" pitchFamily="34" charset="0"/>
+                <a:ea typeface="Yu Gothic" pitchFamily="34" charset="-122"/>
+                <a:cs typeface="Yu Gothic" pitchFamily="34" charset="-120"/>
+              </a:rPr>
+              <a:t>1</a:t>
+            </a:r>
+            <a:endParaRPr lang="en-US" sz="1300" dirty="0"/>
+          </a:p>
+        </p:txBody>
+      </p:sp>
+      <p:sp>
+        <p:nvSpPr>
+          <p:cNvPr id="8" name="Text 6"/>
+          <p:cNvSpPr txBox="1"/>
+          <p:nvPr/>
+        </p:nvSpPr>
+        <p:spPr>
+          <a:xfrm>
+            <a:off x="1051560" y="2944368"/>
+            <a:ext cx="2834640" cy="731520"/>
           </a:xfrm>
           <a:prstGeom prst="rect">
             <a:avLst/>
@@ -2894,41 +3264,108 @@
           <a:p>
             <a:pPr indent="0" marL="0">
               <a:lnSpc>
-                <a:spcPct val="160000"/>
+                <a:spcPct val="125000"/>
               </a:lnSpc>
               <a:buNone/>
             </a:pPr>
             <a:r>
-              <a:rPr lang="en-US" sz="1650" dirty="0">
-                <a:solidFill>
-                  <a:srgbClr val="3F3933"/>
-                </a:solidFill>
-                <a:latin typeface="Yu Gothic" pitchFamily="34" charset="0"/>
-                <a:ea typeface="Yu Gothic" pitchFamily="34" charset="-122"/>
-                <a:cs typeface="Yu Gothic" pitchFamily="34" charset="-120"/>
-              </a:rPr>
-              <a:t>それは、資料が存在しないか、社長の頭の中にしかない知識です。AIが答えられなかったということは、新しく入った社員も答えられないということです。ここは経営者の関心が最も高まる場面なので、丁寧に扱ってください。</a:t>
-            </a:r>
-            <a:endParaRPr lang="en-US" sz="1650" dirty="0"/>
-          </a:p>
-        </p:txBody>
-      </p:sp>
-      <p:sp>
-        <p:nvSpPr>
-          <p:cNvPr id="6" name="Shape 4"/>
+              <a:rPr lang="en-US" sz="1450" b="1" dirty="0">
+                <a:solidFill>
+                  <a:srgbClr val="23201D"/>
+                </a:solidFill>
+                <a:latin typeface="Yu Gothic" pitchFamily="34" charset="0"/>
+                <a:ea typeface="Yu Gothic" pitchFamily="34" charset="-122"/>
+                <a:cs typeface="Yu Gothic" pitchFamily="34" charset="-120"/>
+              </a:rPr>
+              <a:t>1領域を決めて、資料を載せる</a:t>
+            </a:r>
+            <a:endParaRPr lang="en-US" sz="1450" dirty="0"/>
+          </a:p>
+        </p:txBody>
+      </p:sp>
+      <p:sp>
+        <p:nvSpPr>
+          <p:cNvPr id="9" name="Text 7"/>
+          <p:cNvSpPr txBox="1"/>
+          <p:nvPr/>
+        </p:nvSpPr>
+        <p:spPr>
+          <a:xfrm>
+            <a:off x="1051560" y="3703320"/>
+            <a:ext cx="2834640" cy="1188720"/>
+          </a:xfrm>
+          <a:prstGeom prst="rect">
+            <a:avLst/>
+          </a:prstGeom>
+          <a:noFill/>
+          <a:ln/>
+        </p:spPr>
+        <p:txBody>
+          <a:bodyPr wrap="square" lIns="0" tIns="0" rIns="0" bIns="0" rtlCol="0" anchor="ctr"/>
+          <a:lstStyle/>
+          <a:p>
+            <a:pPr indent="0" marL="0">
+              <a:lnSpc>
+                <a:spcPct val="130000"/>
+              </a:lnSpc>
+              <a:buNone/>
+            </a:pPr>
+            <a:r>
+              <a:rPr lang="en-US" sz="1150" dirty="0">
+                <a:solidFill>
+                  <a:srgbClr val="5A534A"/>
+                </a:solidFill>
+                <a:latin typeface="Yu Gothic" pitchFamily="34" charset="0"/>
+                <a:ea typeface="Yu Gothic" pitchFamily="34" charset="-122"/>
+                <a:cs typeface="Yu Gothic" pitchFamily="34" charset="-120"/>
+              </a:rPr>
+              <a:t>入れない判断が品質を決めます。最新版だけに絞ります</a:t>
+            </a:r>
+            <a:endParaRPr lang="en-US" sz="1150" dirty="0"/>
+          </a:p>
+        </p:txBody>
+      </p:sp>
+      <p:sp>
+        <p:nvSpPr>
+          <p:cNvPr id="10" name="Shape 8"/>
           <p:cNvSpPr/>
           <p:nvPr/>
         </p:nvSpPr>
         <p:spPr>
           <a:xfrm>
-            <a:off x="777240" y="4709160"/>
-            <a:ext cx="10607040" cy="960120"/>
+            <a:off x="4389120" y="2148840"/>
+            <a:ext cx="3383280" cy="2880360"/>
           </a:xfrm>
           <a:prstGeom prst="rect">
             <a:avLst/>
           </a:prstGeom>
           <a:solidFill>
-            <a:srgbClr val="EDE7DB"/>
+            <a:srgbClr val="FFFFFF"/>
+          </a:solidFill>
+          <a:ln w="12700">
+            <a:solidFill>
+              <a:srgbClr val="EDE7DB"/>
+            </a:solidFill>
+            <a:prstDash val="solid"/>
+          </a:ln>
+        </p:spPr>
+      </p:sp>
+      <p:sp>
+        <p:nvSpPr>
+          <p:cNvPr id="11" name="Shape 9"/>
+          <p:cNvSpPr/>
+          <p:nvPr/>
+        </p:nvSpPr>
+        <p:spPr>
+          <a:xfrm>
+            <a:off x="4663440" y="2395728"/>
+            <a:ext cx="438912" cy="438912"/>
+          </a:xfrm>
+          <a:prstGeom prst="ellipse">
+            <a:avLst/>
+          </a:prstGeom>
+          <a:solidFill>
+            <a:srgbClr val="2F4F6B"/>
           </a:solidFill>
           <a:ln w="12700">
             <a:solidFill>
@@ -2940,53 +3377,95 @@
       </p:sp>
       <p:sp>
         <p:nvSpPr>
-          <p:cNvPr id="7" name="Text 5"/>
-          <p:cNvSpPr txBox="1"/>
-          <p:nvPr/>
-        </p:nvSpPr>
-        <p:spPr>
-          <a:xfrm>
-            <a:off x="1051560" y="4800600"/>
-            <a:ext cx="1463040" cy="256032"/>
-          </a:xfrm>
-          <a:prstGeom prst="rect">
-            <a:avLst/>
-          </a:prstGeom>
-          <a:noFill/>
-          <a:ln/>
-        </p:spPr>
-        <p:txBody>
-          <a:bodyPr wrap="square" lIns="0" tIns="0" rIns="0" bIns="0" rtlCol="0" anchor="ctr"/>
-          <a:lstStyle/>
-          <a:p>
-            <a:pPr indent="0" marL="0">
-              <a:buNone/>
-            </a:pPr>
-            <a:r>
-              <a:rPr lang="en-US" sz="900" b="1" spc="150" kern="0" dirty="0">
-                <a:solidFill>
-                  <a:srgbClr val="B04A2F"/>
-                </a:solidFill>
-                <a:latin typeface="Yu Gothic" pitchFamily="34" charset="0"/>
-                <a:ea typeface="Yu Gothic" pitchFamily="34" charset="-122"/>
-                <a:cs typeface="Yu Gothic" pitchFamily="34" charset="-120"/>
-              </a:rPr>
-              <a:t>他社では</a:t>
-            </a:r>
-            <a:endParaRPr lang="en-US" sz="900" dirty="0"/>
-          </a:p>
-        </p:txBody>
-      </p:sp>
-      <p:sp>
-        <p:nvSpPr>
-          <p:cNvPr id="8" name="Text 6"/>
-          <p:cNvSpPr txBox="1"/>
-          <p:nvPr/>
-        </p:nvSpPr>
-        <p:spPr>
-          <a:xfrm>
-            <a:off x="1051560" y="5029200"/>
-            <a:ext cx="10058400" cy="566928"/>
+          <p:cNvPr id="12" name="Text 10"/>
+          <p:cNvSpPr txBox="1"/>
+          <p:nvPr/>
+        </p:nvSpPr>
+        <p:spPr>
+          <a:xfrm>
+            <a:off x="4663440" y="2395728"/>
+            <a:ext cx="438912" cy="438912"/>
+          </a:xfrm>
+          <a:prstGeom prst="rect">
+            <a:avLst/>
+          </a:prstGeom>
+          <a:noFill/>
+          <a:ln/>
+        </p:spPr>
+        <p:txBody>
+          <a:bodyPr wrap="square" lIns="0" tIns="0" rIns="0" bIns="0" rtlCol="0" anchor="ctr"/>
+          <a:lstStyle/>
+          <a:p>
+            <a:pPr algn="ctr" indent="0" marL="0">
+              <a:buNone/>
+            </a:pPr>
+            <a:r>
+              <a:rPr lang="en-US" sz="1300" b="1" dirty="0">
+                <a:solidFill>
+                  <a:srgbClr val="FFFFFF"/>
+                </a:solidFill>
+                <a:latin typeface="Yu Gothic" pitchFamily="34" charset="0"/>
+                <a:ea typeface="Yu Gothic" pitchFamily="34" charset="-122"/>
+                <a:cs typeface="Yu Gothic" pitchFamily="34" charset="-120"/>
+              </a:rPr>
+              <a:t>2</a:t>
+            </a:r>
+            <a:endParaRPr lang="en-US" sz="1300" dirty="0"/>
+          </a:p>
+        </p:txBody>
+      </p:sp>
+      <p:sp>
+        <p:nvSpPr>
+          <p:cNvPr id="13" name="Text 11"/>
+          <p:cNvSpPr txBox="1"/>
+          <p:nvPr/>
+        </p:nvSpPr>
+        <p:spPr>
+          <a:xfrm>
+            <a:off x="4663440" y="2944368"/>
+            <a:ext cx="2834640" cy="731520"/>
+          </a:xfrm>
+          <a:prstGeom prst="rect">
+            <a:avLst/>
+          </a:prstGeom>
+          <a:noFill/>
+          <a:ln/>
+        </p:spPr>
+        <p:txBody>
+          <a:bodyPr wrap="square" lIns="0" tIns="0" rIns="0" bIns="0" rtlCol="0" anchor="ctr"/>
+          <a:lstStyle/>
+          <a:p>
+            <a:pPr indent="0" marL="0">
+              <a:lnSpc>
+                <a:spcPct val="125000"/>
+              </a:lnSpc>
+              <a:buNone/>
+            </a:pPr>
+            <a:r>
+              <a:rPr lang="en-US" sz="1450" b="1" dirty="0">
+                <a:solidFill>
+                  <a:srgbClr val="23201D"/>
+                </a:solidFill>
+                <a:latin typeface="Yu Gothic" pitchFamily="34" charset="0"/>
+                <a:ea typeface="Yu Gothic" pitchFamily="34" charset="-122"/>
+                <a:cs typeface="Yu Gothic" pitchFamily="34" charset="-120"/>
+              </a:rPr>
+              <a:t>10問投げて、精度を測る</a:t>
+            </a:r>
+            <a:endParaRPr lang="en-US" sz="1450" dirty="0"/>
+          </a:p>
+        </p:txBody>
+      </p:sp>
+      <p:sp>
+        <p:nvSpPr>
+          <p:cNvPr id="14" name="Text 12"/>
+          <p:cNvSpPr txBox="1"/>
+          <p:nvPr/>
+        </p:nvSpPr>
+        <p:spPr>
+          <a:xfrm>
+            <a:off x="4663440" y="3703320"/>
+            <a:ext cx="2834640" cy="1188720"/>
           </a:xfrm>
           <a:prstGeom prst="rect">
             <a:avLst/>
@@ -3005,23 +3484,196 @@
               <a:buNone/>
             </a:pPr>
             <a:r>
-              <a:rPr lang="en-US" sz="1250" dirty="0">
-                <a:solidFill>
-                  <a:srgbClr val="3F3933"/>
-                </a:solidFill>
-                <a:latin typeface="Yu Gothic" pitchFamily="34" charset="0"/>
-                <a:ea typeface="Yu Gothic" pitchFamily="34" charset="-122"/>
-                <a:cs typeface="Yu Gothic" pitchFamily="34" charset="-120"/>
-              </a:rPr>
-              <a:t>営業資料を載せた会社では、いちばん役立ったのは新人教育でした。ベテランに聞きにくい質問をAIに聞けるようになり、質問の総量が増えました。</a:t>
-            </a:r>
-            <a:endParaRPr lang="en-US" sz="1250" dirty="0"/>
-          </a:p>
-        </p:txBody>
-      </p:sp>
-      <p:sp>
-        <p:nvSpPr>
-          <p:cNvPr id="9" name="Text 7"/>
+              <a:rPr lang="en-US" sz="1150" dirty="0">
+                <a:solidFill>
+                  <a:srgbClr val="5A534A"/>
+                </a:solidFill>
+                <a:latin typeface="Yu Gothic" pitchFamily="34" charset="0"/>
+                <a:ea typeface="Yu Gothic" pitchFamily="34" charset="-122"/>
+                <a:cs typeface="Yu Gothic" pitchFamily="34" charset="-120"/>
+              </a:rPr>
+              <a:t>社員の方が実際にしそうな質問で試します。○△×を数えます</a:t>
+            </a:r>
+            <a:endParaRPr lang="en-US" sz="1150" dirty="0"/>
+          </a:p>
+        </p:txBody>
+      </p:sp>
+      <p:sp>
+        <p:nvSpPr>
+          <p:cNvPr id="15" name="Shape 13"/>
+          <p:cNvSpPr/>
+          <p:nvPr/>
+        </p:nvSpPr>
+        <p:spPr>
+          <a:xfrm>
+            <a:off x="8001000" y="2148840"/>
+            <a:ext cx="3383280" cy="2880360"/>
+          </a:xfrm>
+          <a:prstGeom prst="rect">
+            <a:avLst/>
+          </a:prstGeom>
+          <a:solidFill>
+            <a:srgbClr val="FFFFFF"/>
+          </a:solidFill>
+          <a:ln w="12700">
+            <a:solidFill>
+              <a:srgbClr val="EDE7DB"/>
+            </a:solidFill>
+            <a:prstDash val="solid"/>
+          </a:ln>
+        </p:spPr>
+      </p:sp>
+      <p:sp>
+        <p:nvSpPr>
+          <p:cNvPr id="16" name="Shape 14"/>
+          <p:cNvSpPr/>
+          <p:nvPr/>
+        </p:nvSpPr>
+        <p:spPr>
+          <a:xfrm>
+            <a:off x="8275320" y="2395728"/>
+            <a:ext cx="438912" cy="438912"/>
+          </a:xfrm>
+          <a:prstGeom prst="ellipse">
+            <a:avLst/>
+          </a:prstGeom>
+          <a:solidFill>
+            <a:srgbClr val="2F4F6B"/>
+          </a:solidFill>
+          <a:ln w="12700">
+            <a:solidFill>
+              <a:srgbClr val="333333"/>
+            </a:solidFill>
+            <a:prstDash val="solid"/>
+          </a:ln>
+        </p:spPr>
+      </p:sp>
+      <p:sp>
+        <p:nvSpPr>
+          <p:cNvPr id="17" name="Text 15"/>
+          <p:cNvSpPr txBox="1"/>
+          <p:nvPr/>
+        </p:nvSpPr>
+        <p:spPr>
+          <a:xfrm>
+            <a:off x="8275320" y="2395728"/>
+            <a:ext cx="438912" cy="438912"/>
+          </a:xfrm>
+          <a:prstGeom prst="rect">
+            <a:avLst/>
+          </a:prstGeom>
+          <a:noFill/>
+          <a:ln/>
+        </p:spPr>
+        <p:txBody>
+          <a:bodyPr wrap="square" lIns="0" tIns="0" rIns="0" bIns="0" rtlCol="0" anchor="ctr"/>
+          <a:lstStyle/>
+          <a:p>
+            <a:pPr algn="ctr" indent="0" marL="0">
+              <a:buNone/>
+            </a:pPr>
+            <a:r>
+              <a:rPr lang="en-US" sz="1300" b="1" dirty="0">
+                <a:solidFill>
+                  <a:srgbClr val="FFFFFF"/>
+                </a:solidFill>
+                <a:latin typeface="Yu Gothic" pitchFamily="34" charset="0"/>
+                <a:ea typeface="Yu Gothic" pitchFamily="34" charset="-122"/>
+                <a:cs typeface="Yu Gothic" pitchFamily="34" charset="-120"/>
+              </a:rPr>
+              <a:t>3</a:t>
+            </a:r>
+            <a:endParaRPr lang="en-US" sz="1300" dirty="0"/>
+          </a:p>
+        </p:txBody>
+      </p:sp>
+      <p:sp>
+        <p:nvSpPr>
+          <p:cNvPr id="18" name="Text 16"/>
+          <p:cNvSpPr txBox="1"/>
+          <p:nvPr/>
+        </p:nvSpPr>
+        <p:spPr>
+          <a:xfrm>
+            <a:off x="8275320" y="2944368"/>
+            <a:ext cx="2834640" cy="731520"/>
+          </a:xfrm>
+          <a:prstGeom prst="rect">
+            <a:avLst/>
+          </a:prstGeom>
+          <a:noFill/>
+          <a:ln/>
+        </p:spPr>
+        <p:txBody>
+          <a:bodyPr wrap="square" lIns="0" tIns="0" rIns="0" bIns="0" rtlCol="0" anchor="ctr"/>
+          <a:lstStyle/>
+          <a:p>
+            <a:pPr indent="0" marL="0">
+              <a:lnSpc>
+                <a:spcPct val="125000"/>
+              </a:lnSpc>
+              <a:buNone/>
+            </a:pPr>
+            <a:r>
+              <a:rPr lang="en-US" sz="1450" b="1" dirty="0">
+                <a:solidFill>
+                  <a:srgbClr val="23201D"/>
+                </a:solidFill>
+                <a:latin typeface="Yu Gothic" pitchFamily="34" charset="0"/>
+                <a:ea typeface="Yu Gothic" pitchFamily="34" charset="-122"/>
+                <a:cs typeface="Yu Gothic" pitchFamily="34" charset="-120"/>
+              </a:rPr>
+              <a:t>答えられなかった質問を書き出す</a:t>
+            </a:r>
+            <a:endParaRPr lang="en-US" sz="1450" dirty="0"/>
+          </a:p>
+        </p:txBody>
+      </p:sp>
+      <p:sp>
+        <p:nvSpPr>
+          <p:cNvPr id="19" name="Text 17"/>
+          <p:cNvSpPr txBox="1"/>
+          <p:nvPr/>
+        </p:nvSpPr>
+        <p:spPr>
+          <a:xfrm>
+            <a:off x="8275320" y="3703320"/>
+            <a:ext cx="2834640" cy="1188720"/>
+          </a:xfrm>
+          <a:prstGeom prst="rect">
+            <a:avLst/>
+          </a:prstGeom>
+          <a:noFill/>
+          <a:ln/>
+        </p:spPr>
+        <p:txBody>
+          <a:bodyPr wrap="square" lIns="0" tIns="0" rIns="0" bIns="0" rtlCol="0" anchor="ctr"/>
+          <a:lstStyle/>
+          <a:p>
+            <a:pPr indent="0" marL="0">
+              <a:lnSpc>
+                <a:spcPct val="130000"/>
+              </a:lnSpc>
+              <a:buNone/>
+            </a:pPr>
+            <a:r>
+              <a:rPr lang="en-US" sz="1150" dirty="0">
+                <a:solidFill>
+                  <a:srgbClr val="5A534A"/>
+                </a:solidFill>
+                <a:latin typeface="Yu Gothic" pitchFamily="34" charset="0"/>
+                <a:ea typeface="Yu Gothic" pitchFamily="34" charset="-122"/>
+                <a:cs typeface="Yu Gothic" pitchFamily="34" charset="-120"/>
+              </a:rPr>
+              <a:t>今日いちばんの成果物です。5列の表に落とします</a:t>
+            </a:r>
+            <a:endParaRPr lang="en-US" sz="1150" dirty="0"/>
+          </a:p>
+        </p:txBody>
+      </p:sp>
+      <p:sp>
+        <p:nvSpPr>
+          <p:cNvPr id="20" name="Text 18"/>
           <p:cNvSpPr txBox="1"/>
           <p:nvPr/>
         </p:nvSpPr>
@@ -3060,7 +3712,7 @@
       </p:sp>
       <p:sp>
         <p:nvSpPr>
-          <p:cNvPr id="10" name="Text 8"/>
+          <p:cNvPr id="21" name="Text 19"/>
           <p:cNvSpPr txBox="1"/>
           <p:nvPr/>
         </p:nvSpPr>
@@ -3091,7 +3743,7 @@
                 <a:ea typeface="Yu Gothic" pitchFamily="34" charset="-122"/>
                 <a:cs typeface="Yu Gothic" pitchFamily="34" charset="-120"/>
               </a:rPr>
-              <a:t>ここだけは</a:t>
+              <a:t>演習</a:t>
             </a:r>
             <a:endParaRPr lang="en-US" sz="900" dirty="0"/>
           </a:p>
@@ -3108,6 +3760,1490 @@
 <file path=ppt/slides/slide12.xml><?xml version="1.0" encoding="utf-8"?>
 <p:sld xmlns:a="http://schemas.openxmlformats.org/drawingml/2006/main" xmlns:r="http://schemas.openxmlformats.org/officeDocument/2006/relationships" xmlns:p="http://schemas.openxmlformats.org/presentationml/2006/main">
   <p:cSld name="Slide 12">
+    <p:bg>
+      <p:bgPr>
+        <a:solidFill>
+          <a:srgbClr val="F6F2EA"/>
+        </a:solidFill>
+      </p:bgPr>
+    </p:bg>
+    <p:spTree>
+      <p:nvGrpSpPr>
+        <p:cNvPr id="1" name=""/>
+        <p:cNvGrpSpPr/>
+        <p:nvPr/>
+      </p:nvGrpSpPr>
+      <p:grpSpPr>
+        <a:xfrm>
+          <a:off x="0" y="0"/>
+          <a:ext cx="0" cy="0"/>
+          <a:chOff x="0" y="0"/>
+          <a:chExt cx="0" cy="0"/>
+        </a:xfrm>
+      </p:grpSpPr>
+      <p:sp>
+        <p:nvSpPr>
+          <p:cNvPr id="2" name="Text 0"/>
+          <p:cNvSpPr txBox="1"/>
+          <p:nvPr/>
+        </p:nvSpPr>
+        <p:spPr>
+          <a:xfrm>
+            <a:off x="777240" y="566928"/>
+            <a:ext cx="10607040" cy="274320"/>
+          </a:xfrm>
+          <a:prstGeom prst="rect">
+            <a:avLst/>
+          </a:prstGeom>
+          <a:noFill/>
+          <a:ln/>
+        </p:spPr>
+        <p:txBody>
+          <a:bodyPr wrap="square" lIns="0" tIns="0" rIns="0" bIns="0" rtlCol="0" anchor="ctr"/>
+          <a:lstStyle/>
+          <a:p>
+            <a:pPr indent="0" marL="0">
+              <a:buNone/>
+            </a:pPr>
+            <a:r>
+              <a:rPr lang="en-US" sz="1100" b="1" spc="250" kern="0" dirty="0">
+                <a:solidFill>
+                  <a:srgbClr val="3B6B4A"/>
+                </a:solidFill>
+                <a:latin typeface="Yu Gothic" pitchFamily="34" charset="0"/>
+                <a:ea typeface="Yu Gothic" pitchFamily="34" charset="-122"/>
+                <a:cs typeface="Yu Gothic" pitchFamily="34" charset="-120"/>
+              </a:rPr>
+              <a:t>業務への組み込み</a:t>
+            </a:r>
+            <a:endParaRPr lang="en-US" sz="1100" dirty="0"/>
+          </a:p>
+        </p:txBody>
+      </p:sp>
+      <p:sp>
+        <p:nvSpPr>
+          <p:cNvPr id="3" name="Text 1"/>
+          <p:cNvSpPr txBox="1"/>
+          <p:nvPr/>
+        </p:nvSpPr>
+        <p:spPr>
+          <a:xfrm>
+            <a:off x="777240" y="896112"/>
+            <a:ext cx="10607040" cy="640080"/>
+          </a:xfrm>
+          <a:prstGeom prst="rect">
+            <a:avLst/>
+          </a:prstGeom>
+          <a:noFill/>
+          <a:ln/>
+        </p:spPr>
+        <p:txBody>
+          <a:bodyPr wrap="square" lIns="0" tIns="0" rIns="0" bIns="0" rtlCol="0" anchor="ctr"/>
+          <a:lstStyle/>
+          <a:p>
+            <a:pPr indent="0" marL="0">
+              <a:buNone/>
+            </a:pPr>
+            <a:r>
+              <a:rPr lang="en-US" sz="2600" b="1" dirty="0">
+                <a:solidFill>
+                  <a:srgbClr val="23201D"/>
+                </a:solidFill>
+                <a:latin typeface="Yu Gothic" pitchFamily="34" charset="0"/>
+                <a:ea typeface="Yu Gothic" pitchFamily="34" charset="-122"/>
+                <a:cs typeface="Yu Gothic" pitchFamily="34" charset="-120"/>
+              </a:rPr>
+              <a:t>帰る前に決めること</a:t>
+            </a:r>
+            <a:endParaRPr lang="en-US" sz="2600" dirty="0"/>
+          </a:p>
+        </p:txBody>
+      </p:sp>
+      <p:sp>
+        <p:nvSpPr>
+          <p:cNvPr id="4" name="Text 2"/>
+          <p:cNvSpPr txBox="1"/>
+          <p:nvPr/>
+        </p:nvSpPr>
+        <p:spPr>
+          <a:xfrm>
+            <a:off x="777240" y="1572768"/>
+            <a:ext cx="10607040" cy="320040"/>
+          </a:xfrm>
+          <a:prstGeom prst="rect">
+            <a:avLst/>
+          </a:prstGeom>
+          <a:noFill/>
+          <a:ln/>
+        </p:spPr>
+        <p:txBody>
+          <a:bodyPr wrap="square" lIns="0" tIns="0" rIns="0" bIns="0" rtlCol="0" anchor="ctr"/>
+          <a:lstStyle/>
+          <a:p>
+            <a:pPr indent="0" marL="0">
+              <a:buNone/>
+            </a:pPr>
+            <a:r>
+              <a:rPr lang="en-US" sz="1250" b="1" dirty="0">
+                <a:solidFill>
+                  <a:srgbClr val="3B6B4A"/>
+                </a:solidFill>
+                <a:latin typeface="Yu Gothic" pitchFamily="34" charset="0"/>
+                <a:ea typeface="Yu Gothic" pitchFamily="34" charset="-122"/>
+                <a:cs typeface="Yu Gothic" pitchFamily="34" charset="-120"/>
+              </a:rPr>
+              <a:t>ここを決めないと、持ち帰っても使われません。紙に書きます。</a:t>
+            </a:r>
+            <a:endParaRPr lang="en-US" sz="1250" dirty="0"/>
+          </a:p>
+        </p:txBody>
+      </p:sp>
+      <p:sp>
+        <p:nvSpPr>
+          <p:cNvPr id="5" name="Shape 3"/>
+          <p:cNvSpPr/>
+          <p:nvPr/>
+        </p:nvSpPr>
+        <p:spPr>
+          <a:xfrm>
+            <a:off x="777240" y="2103120"/>
+            <a:ext cx="10607040" cy="914400"/>
+          </a:xfrm>
+          <a:prstGeom prst="rect">
+            <a:avLst/>
+          </a:prstGeom>
+          <a:solidFill>
+            <a:srgbClr val="FFFFFF"/>
+          </a:solidFill>
+          <a:ln w="12700">
+            <a:solidFill>
+              <a:srgbClr val="EDE7DB"/>
+            </a:solidFill>
+            <a:prstDash val="solid"/>
+          </a:ln>
+        </p:spPr>
+      </p:sp>
+      <p:sp>
+        <p:nvSpPr>
+          <p:cNvPr id="6" name="Shape 4"/>
+          <p:cNvSpPr/>
+          <p:nvPr/>
+        </p:nvSpPr>
+        <p:spPr>
+          <a:xfrm>
+            <a:off x="777240" y="2103120"/>
+            <a:ext cx="54864" cy="914400"/>
+          </a:xfrm>
+          <a:prstGeom prst="rect">
+            <a:avLst/>
+          </a:prstGeom>
+          <a:solidFill>
+            <a:srgbClr val="3B6B4A"/>
+          </a:solidFill>
+          <a:ln w="12700">
+            <a:solidFill>
+              <a:srgbClr val="333333"/>
+            </a:solidFill>
+            <a:prstDash val="solid"/>
+          </a:ln>
+        </p:spPr>
+      </p:sp>
+      <p:sp>
+        <p:nvSpPr>
+          <p:cNvPr id="7" name="Text 5"/>
+          <p:cNvSpPr txBox="1"/>
+          <p:nvPr/>
+        </p:nvSpPr>
+        <p:spPr>
+          <a:xfrm>
+            <a:off x="1143000" y="2176272"/>
+            <a:ext cx="2757830" cy="768096"/>
+          </a:xfrm>
+          <a:prstGeom prst="rect">
+            <a:avLst/>
+          </a:prstGeom>
+          <a:noFill/>
+          <a:ln/>
+        </p:spPr>
+        <p:txBody>
+          <a:bodyPr wrap="square" lIns="0" tIns="0" rIns="0" bIns="0" rtlCol="0" anchor="ctr"/>
+          <a:lstStyle/>
+          <a:p>
+            <a:pPr indent="0" marL="0">
+              <a:buNone/>
+            </a:pPr>
+            <a:r>
+              <a:rPr lang="en-US" sz="1400" b="1" dirty="0">
+                <a:solidFill>
+                  <a:srgbClr val="3B6B4A"/>
+                </a:solidFill>
+                <a:latin typeface="Yu Gothic" pitchFamily="34" charset="0"/>
+                <a:ea typeface="Yu Gothic" pitchFamily="34" charset="-122"/>
+                <a:cs typeface="Yu Gothic" pitchFamily="34" charset="-120"/>
+              </a:rPr>
+              <a:t>誰に使わせるか</a:t>
+            </a:r>
+            <a:endParaRPr lang="en-US" sz="1400" dirty="0"/>
+          </a:p>
+        </p:txBody>
+      </p:sp>
+      <p:sp>
+        <p:nvSpPr>
+          <p:cNvPr id="8" name="Text 6"/>
+          <p:cNvSpPr txBox="1"/>
+          <p:nvPr/>
+        </p:nvSpPr>
+        <p:spPr>
+          <a:xfrm>
+            <a:off x="4006901" y="2176272"/>
+            <a:ext cx="7011619" cy="768096"/>
+          </a:xfrm>
+          <a:prstGeom prst="rect">
+            <a:avLst/>
+          </a:prstGeom>
+          <a:noFill/>
+          <a:ln/>
+        </p:spPr>
+        <p:txBody>
+          <a:bodyPr wrap="square" lIns="0" tIns="0" rIns="0" bIns="0" rtlCol="0" anchor="ctr"/>
+          <a:lstStyle/>
+          <a:p>
+            <a:pPr indent="0" marL="0">
+              <a:lnSpc>
+                <a:spcPct val="130000"/>
+              </a:lnSpc>
+              <a:buNone/>
+            </a:pPr>
+            <a:r>
+              <a:rPr lang="en-US" sz="1250" dirty="0">
+                <a:solidFill>
+                  <a:srgbClr val="3F3933"/>
+                </a:solidFill>
+                <a:latin typeface="Yu Gothic" pitchFamily="34" charset="0"/>
+                <a:ea typeface="Yu Gothic" pitchFamily="34" charset="-122"/>
+                <a:cs typeface="Yu Gothic" pitchFamily="34" charset="-120"/>
+              </a:rPr>
+              <a:t>総務や事務など、質問を受ける側の方から始めます</a:t>
+            </a:r>
+            <a:endParaRPr lang="en-US" sz="1250" dirty="0"/>
+          </a:p>
+        </p:txBody>
+      </p:sp>
+      <p:sp>
+        <p:nvSpPr>
+          <p:cNvPr id="9" name="Shape 7"/>
+          <p:cNvSpPr/>
+          <p:nvPr/>
+        </p:nvSpPr>
+        <p:spPr>
+          <a:xfrm>
+            <a:off x="777240" y="3154680"/>
+            <a:ext cx="10607040" cy="914400"/>
+          </a:xfrm>
+          <a:prstGeom prst="rect">
+            <a:avLst/>
+          </a:prstGeom>
+          <a:solidFill>
+            <a:srgbClr val="FFFFFF"/>
+          </a:solidFill>
+          <a:ln w="12700">
+            <a:solidFill>
+              <a:srgbClr val="EDE7DB"/>
+            </a:solidFill>
+            <a:prstDash val="solid"/>
+          </a:ln>
+        </p:spPr>
+      </p:sp>
+      <p:sp>
+        <p:nvSpPr>
+          <p:cNvPr id="10" name="Shape 8"/>
+          <p:cNvSpPr/>
+          <p:nvPr/>
+        </p:nvSpPr>
+        <p:spPr>
+          <a:xfrm>
+            <a:off x="777240" y="3154680"/>
+            <a:ext cx="54864" cy="914400"/>
+          </a:xfrm>
+          <a:prstGeom prst="rect">
+            <a:avLst/>
+          </a:prstGeom>
+          <a:solidFill>
+            <a:srgbClr val="3B6B4A"/>
+          </a:solidFill>
+          <a:ln w="12700">
+            <a:solidFill>
+              <a:srgbClr val="333333"/>
+            </a:solidFill>
+            <a:prstDash val="solid"/>
+          </a:ln>
+        </p:spPr>
+      </p:sp>
+      <p:sp>
+        <p:nvSpPr>
+          <p:cNvPr id="11" name="Text 9"/>
+          <p:cNvSpPr txBox="1"/>
+          <p:nvPr/>
+        </p:nvSpPr>
+        <p:spPr>
+          <a:xfrm>
+            <a:off x="1143000" y="3227832"/>
+            <a:ext cx="2757830" cy="768096"/>
+          </a:xfrm>
+          <a:prstGeom prst="rect">
+            <a:avLst/>
+          </a:prstGeom>
+          <a:noFill/>
+          <a:ln/>
+        </p:spPr>
+        <p:txBody>
+          <a:bodyPr wrap="square" lIns="0" tIns="0" rIns="0" bIns="0" rtlCol="0" anchor="ctr"/>
+          <a:lstStyle/>
+          <a:p>
+            <a:pPr indent="0" marL="0">
+              <a:buNone/>
+            </a:pPr>
+            <a:r>
+              <a:rPr lang="en-US" sz="1400" b="1" dirty="0">
+                <a:solidFill>
+                  <a:srgbClr val="3B6B4A"/>
+                </a:solidFill>
+                <a:latin typeface="Yu Gothic" pitchFamily="34" charset="0"/>
+                <a:ea typeface="Yu Gothic" pitchFamily="34" charset="-122"/>
+                <a:cs typeface="Yu Gothic" pitchFamily="34" charset="-120"/>
+              </a:rPr>
+              <a:t>資料を更新するのは誰か</a:t>
+            </a:r>
+            <a:endParaRPr lang="en-US" sz="1400" dirty="0"/>
+          </a:p>
+        </p:txBody>
+      </p:sp>
+      <p:sp>
+        <p:nvSpPr>
+          <p:cNvPr id="12" name="Text 10"/>
+          <p:cNvSpPr txBox="1"/>
+          <p:nvPr/>
+        </p:nvSpPr>
+        <p:spPr>
+          <a:xfrm>
+            <a:off x="4006901" y="3227832"/>
+            <a:ext cx="7011619" cy="768096"/>
+          </a:xfrm>
+          <a:prstGeom prst="rect">
+            <a:avLst/>
+          </a:prstGeom>
+          <a:noFill/>
+          <a:ln/>
+        </p:spPr>
+        <p:txBody>
+          <a:bodyPr wrap="square" lIns="0" tIns="0" rIns="0" bIns="0" rtlCol="0" anchor="ctr"/>
+          <a:lstStyle/>
+          <a:p>
+            <a:pPr indent="0" marL="0">
+              <a:lnSpc>
+                <a:spcPct val="130000"/>
+              </a:lnSpc>
+              <a:buNone/>
+            </a:pPr>
+            <a:r>
+              <a:rPr lang="en-US" sz="1250" dirty="0">
+                <a:solidFill>
+                  <a:srgbClr val="3F3933"/>
+                </a:solidFill>
+                <a:latin typeface="Yu Gothic" pitchFamily="34" charset="0"/>
+                <a:ea typeface="Yu Gothic" pitchFamily="34" charset="-122"/>
+                <a:cs typeface="Yu Gothic" pitchFamily="34" charset="-120"/>
+              </a:rPr>
+              <a:t>更新の担当が決まっていないナレッジは、半年で腐ります</a:t>
+            </a:r>
+            <a:endParaRPr lang="en-US" sz="1250" dirty="0"/>
+          </a:p>
+        </p:txBody>
+      </p:sp>
+      <p:sp>
+        <p:nvSpPr>
+          <p:cNvPr id="13" name="Shape 11"/>
+          <p:cNvSpPr/>
+          <p:nvPr/>
+        </p:nvSpPr>
+        <p:spPr>
+          <a:xfrm>
+            <a:off x="777240" y="4206240"/>
+            <a:ext cx="10607040" cy="914400"/>
+          </a:xfrm>
+          <a:prstGeom prst="rect">
+            <a:avLst/>
+          </a:prstGeom>
+          <a:solidFill>
+            <a:srgbClr val="FFFFFF"/>
+          </a:solidFill>
+          <a:ln w="12700">
+            <a:solidFill>
+              <a:srgbClr val="EDE7DB"/>
+            </a:solidFill>
+            <a:prstDash val="solid"/>
+          </a:ln>
+        </p:spPr>
+      </p:sp>
+      <p:sp>
+        <p:nvSpPr>
+          <p:cNvPr id="14" name="Shape 12"/>
+          <p:cNvSpPr/>
+          <p:nvPr/>
+        </p:nvSpPr>
+        <p:spPr>
+          <a:xfrm>
+            <a:off x="777240" y="4206240"/>
+            <a:ext cx="54864" cy="914400"/>
+          </a:xfrm>
+          <a:prstGeom prst="rect">
+            <a:avLst/>
+          </a:prstGeom>
+          <a:solidFill>
+            <a:srgbClr val="3B6B4A"/>
+          </a:solidFill>
+          <a:ln w="12700">
+            <a:solidFill>
+              <a:srgbClr val="333333"/>
+            </a:solidFill>
+            <a:prstDash val="solid"/>
+          </a:ln>
+        </p:spPr>
+      </p:sp>
+      <p:sp>
+        <p:nvSpPr>
+          <p:cNvPr id="15" name="Text 13"/>
+          <p:cNvSpPr txBox="1"/>
+          <p:nvPr/>
+        </p:nvSpPr>
+        <p:spPr>
+          <a:xfrm>
+            <a:off x="1143000" y="4279392"/>
+            <a:ext cx="2757830" cy="768096"/>
+          </a:xfrm>
+          <a:prstGeom prst="rect">
+            <a:avLst/>
+          </a:prstGeom>
+          <a:noFill/>
+          <a:ln/>
+        </p:spPr>
+        <p:txBody>
+          <a:bodyPr wrap="square" lIns="0" tIns="0" rIns="0" bIns="0" rtlCol="0" anchor="ctr"/>
+          <a:lstStyle/>
+          <a:p>
+            <a:pPr indent="0" marL="0">
+              <a:buNone/>
+            </a:pPr>
+            <a:r>
+              <a:rPr lang="en-US" sz="1400" b="1" dirty="0">
+                <a:solidFill>
+                  <a:srgbClr val="3B6B4A"/>
+                </a:solidFill>
+                <a:latin typeface="Yu Gothic" pitchFamily="34" charset="0"/>
+                <a:ea typeface="Yu Gothic" pitchFamily="34" charset="-122"/>
+                <a:cs typeface="Yu Gothic" pitchFamily="34" charset="-120"/>
+              </a:rPr>
+              <a:t>不足資料は誰がいつ作るか</a:t>
+            </a:r>
+            <a:endParaRPr lang="en-US" sz="1400" dirty="0"/>
+          </a:p>
+        </p:txBody>
+      </p:sp>
+      <p:sp>
+        <p:nvSpPr>
+          <p:cNvPr id="16" name="Text 14"/>
+          <p:cNvSpPr txBox="1"/>
+          <p:nvPr/>
+        </p:nvSpPr>
+        <p:spPr>
+          <a:xfrm>
+            <a:off x="4006901" y="4279392"/>
+            <a:ext cx="7011619" cy="768096"/>
+          </a:xfrm>
+          <a:prstGeom prst="rect">
+            <a:avLst/>
+          </a:prstGeom>
+          <a:noFill/>
+          <a:ln/>
+        </p:spPr>
+        <p:txBody>
+          <a:bodyPr wrap="square" lIns="0" tIns="0" rIns="0" bIns="0" rtlCol="0" anchor="ctr"/>
+          <a:lstStyle/>
+          <a:p>
+            <a:pPr indent="0" marL="0">
+              <a:lnSpc>
+                <a:spcPct val="130000"/>
+              </a:lnSpc>
+              <a:buNone/>
+            </a:pPr>
+            <a:r>
+              <a:rPr lang="en-US" sz="1250" dirty="0">
+                <a:solidFill>
+                  <a:srgbClr val="3F3933"/>
+                </a:solidFill>
+                <a:latin typeface="Yu Gothic" pitchFamily="34" charset="0"/>
+                <a:ea typeface="Yu Gothic" pitchFamily="34" charset="-122"/>
+                <a:cs typeface="Yu Gothic" pitchFamily="34" charset="-120"/>
+              </a:rPr>
+              <a:t>5列の表の右2列を、実名と期日で埋めます</a:t>
+            </a:r>
+            <a:endParaRPr lang="en-US" sz="1250" dirty="0"/>
+          </a:p>
+        </p:txBody>
+      </p:sp>
+      <p:sp>
+        <p:nvSpPr>
+          <p:cNvPr id="17" name="Text 15"/>
+          <p:cNvSpPr txBox="1"/>
+          <p:nvPr/>
+        </p:nvSpPr>
+        <p:spPr>
+          <a:xfrm>
+            <a:off x="777240" y="6382512"/>
+            <a:ext cx="7424928" cy="256032"/>
+          </a:xfrm>
+          <a:prstGeom prst="rect">
+            <a:avLst/>
+          </a:prstGeom>
+          <a:noFill/>
+          <a:ln/>
+        </p:spPr>
+        <p:txBody>
+          <a:bodyPr wrap="square" lIns="0" tIns="0" rIns="0" bIns="0" rtlCol="0" anchor="ctr"/>
+          <a:lstStyle/>
+          <a:p>
+            <a:pPr indent="0" marL="0">
+              <a:buNone/>
+            </a:pPr>
+            <a:r>
+              <a:rPr lang="en-US" sz="900" dirty="0">
+                <a:solidFill>
+                  <a:srgbClr val="8A8177"/>
+                </a:solidFill>
+                <a:latin typeface="Yu Gothic" pitchFamily="34" charset="0"/>
+                <a:ea typeface="Yu Gothic" pitchFamily="34" charset="-122"/>
+                <a:cs typeface="Yu Gothic" pitchFamily="34" charset="-120"/>
+              </a:rPr>
+              <a:t>第8回　社内の知識を検索できるようにする</a:t>
+            </a:r>
+            <a:endParaRPr lang="en-US" sz="900" dirty="0"/>
+          </a:p>
+        </p:txBody>
+      </p:sp>
+      <p:sp>
+        <p:nvSpPr>
+          <p:cNvPr id="18" name="Text 16"/>
+          <p:cNvSpPr txBox="1"/>
+          <p:nvPr/>
+        </p:nvSpPr>
+        <p:spPr>
+          <a:xfrm>
+            <a:off x="8202168" y="6382512"/>
+            <a:ext cx="3182112" cy="256032"/>
+          </a:xfrm>
+          <a:prstGeom prst="rect">
+            <a:avLst/>
+          </a:prstGeom>
+          <a:noFill/>
+          <a:ln/>
+        </p:spPr>
+        <p:txBody>
+          <a:bodyPr wrap="square" lIns="0" tIns="0" rIns="0" bIns="0" rtlCol="0" anchor="ctr"/>
+          <a:lstStyle/>
+          <a:p>
+            <a:pPr algn="r" indent="0" marL="0">
+              <a:buNone/>
+            </a:pPr>
+            <a:r>
+              <a:rPr lang="en-US" sz="900" dirty="0">
+                <a:solidFill>
+                  <a:srgbClr val="8A8177"/>
+                </a:solidFill>
+                <a:latin typeface="Yu Gothic" pitchFamily="34" charset="0"/>
+                <a:ea typeface="Yu Gothic" pitchFamily="34" charset="-122"/>
+                <a:cs typeface="Yu Gothic" pitchFamily="34" charset="-120"/>
+              </a:rPr>
+              <a:t>組み込み</a:t>
+            </a:r>
+            <a:endParaRPr lang="en-US" sz="900" dirty="0"/>
+          </a:p>
+        </p:txBody>
+      </p:sp>
+    </p:spTree>
+  </p:cSld>
+  <p:clrMapOvr>
+    <a:masterClrMapping/>
+  </p:clrMapOvr>
+</p:sld>
+</file>
+
+<file path=ppt/slides/slide13.xml><?xml version="1.0" encoding="utf-8"?>
+<p:sld xmlns:a="http://schemas.openxmlformats.org/drawingml/2006/main" xmlns:r="http://schemas.openxmlformats.org/officeDocument/2006/relationships" xmlns:p="http://schemas.openxmlformats.org/presentationml/2006/main">
+  <p:cSld name="Slide 13">
+    <p:bg>
+      <p:bgPr>
+        <a:solidFill>
+          <a:srgbClr val="F6F2EA"/>
+        </a:solidFill>
+      </p:bgPr>
+    </p:bg>
+    <p:spTree>
+      <p:nvGrpSpPr>
+        <p:cNvPr id="1" name=""/>
+        <p:cNvGrpSpPr/>
+        <p:nvPr/>
+      </p:nvGrpSpPr>
+      <p:grpSpPr>
+        <a:xfrm>
+          <a:off x="0" y="0"/>
+          <a:ext cx="0" cy="0"/>
+          <a:chOff x="0" y="0"/>
+          <a:chExt cx="0" cy="0"/>
+        </a:xfrm>
+      </p:grpSpPr>
+      <p:sp>
+        <p:nvSpPr>
+          <p:cNvPr id="2" name="Text 0"/>
+          <p:cNvSpPr txBox="1"/>
+          <p:nvPr/>
+        </p:nvSpPr>
+        <p:spPr>
+          <a:xfrm>
+            <a:off x="777240" y="566928"/>
+            <a:ext cx="10607040" cy="274320"/>
+          </a:xfrm>
+          <a:prstGeom prst="rect">
+            <a:avLst/>
+          </a:prstGeom>
+          <a:noFill/>
+          <a:ln/>
+        </p:spPr>
+        <p:txBody>
+          <a:bodyPr wrap="square" lIns="0" tIns="0" rIns="0" bIns="0" rtlCol="0" anchor="ctr"/>
+          <a:lstStyle/>
+          <a:p>
+            <a:pPr indent="0" marL="0">
+              <a:buNone/>
+            </a:pPr>
+            <a:r>
+              <a:rPr lang="en-US" sz="1100" b="1" spc="250" kern="0" dirty="0">
+                <a:solidFill>
+                  <a:srgbClr val="B04A2F"/>
+                </a:solidFill>
+                <a:latin typeface="Yu Gothic" pitchFamily="34" charset="0"/>
+                <a:ea typeface="Yu Gothic" pitchFamily="34" charset="-122"/>
+                <a:cs typeface="Yu Gothic" pitchFamily="34" charset="-120"/>
+              </a:rPr>
+              <a:t>ここだけは</a:t>
+            </a:r>
+            <a:endParaRPr lang="en-US" sz="1100" dirty="0"/>
+          </a:p>
+        </p:txBody>
+      </p:sp>
+      <p:sp>
+        <p:nvSpPr>
+          <p:cNvPr id="3" name="Text 1"/>
+          <p:cNvSpPr txBox="1"/>
+          <p:nvPr/>
+        </p:nvSpPr>
+        <p:spPr>
+          <a:xfrm>
+            <a:off x="777240" y="1097280"/>
+            <a:ext cx="10607040" cy="640080"/>
+          </a:xfrm>
+          <a:prstGeom prst="rect">
+            <a:avLst/>
+          </a:prstGeom>
+          <a:noFill/>
+          <a:ln/>
+        </p:spPr>
+        <p:txBody>
+          <a:bodyPr wrap="square" lIns="0" tIns="0" rIns="0" bIns="0" rtlCol="0" anchor="ctr"/>
+          <a:lstStyle/>
+          <a:p>
+            <a:pPr indent="0" marL="0">
+              <a:buNone/>
+            </a:pPr>
+            <a:r>
+              <a:rPr lang="en-US" sz="2600" b="1" dirty="0">
+                <a:solidFill>
+                  <a:srgbClr val="23201D"/>
+                </a:solidFill>
+                <a:latin typeface="Yu Gothic" pitchFamily="34" charset="0"/>
+                <a:ea typeface="Yu Gothic" pitchFamily="34" charset="-122"/>
+                <a:cs typeface="Yu Gothic" pitchFamily="34" charset="-120"/>
+              </a:rPr>
+              <a:t>答えられなかった質問こそ、成果です</a:t>
+            </a:r>
+            <a:endParaRPr lang="en-US" sz="2600" dirty="0"/>
+          </a:p>
+        </p:txBody>
+      </p:sp>
+      <p:sp>
+        <p:nvSpPr>
+          <p:cNvPr id="4" name="Shape 2"/>
+          <p:cNvSpPr/>
+          <p:nvPr/>
+        </p:nvSpPr>
+        <p:spPr>
+          <a:xfrm>
+            <a:off x="777240" y="2148840"/>
+            <a:ext cx="64008" cy="2194560"/>
+          </a:xfrm>
+          <a:prstGeom prst="rect">
+            <a:avLst/>
+          </a:prstGeom>
+          <a:solidFill>
+            <a:srgbClr val="B04A2F"/>
+          </a:solidFill>
+          <a:ln w="12700">
+            <a:solidFill>
+              <a:srgbClr val="333333"/>
+            </a:solidFill>
+            <a:prstDash val="solid"/>
+          </a:ln>
+        </p:spPr>
+      </p:sp>
+      <p:sp>
+        <p:nvSpPr>
+          <p:cNvPr id="5" name="Text 3"/>
+          <p:cNvSpPr txBox="1"/>
+          <p:nvPr/>
+        </p:nvSpPr>
+        <p:spPr>
+          <a:xfrm>
+            <a:off x="1188720" y="2148840"/>
+            <a:ext cx="9966960" cy="2194560"/>
+          </a:xfrm>
+          <a:prstGeom prst="rect">
+            <a:avLst/>
+          </a:prstGeom>
+          <a:noFill/>
+          <a:ln/>
+        </p:spPr>
+        <p:txBody>
+          <a:bodyPr wrap="square" lIns="0" tIns="0" rIns="0" bIns="0" rtlCol="0" anchor="ctr"/>
+          <a:lstStyle/>
+          <a:p>
+            <a:pPr indent="0" marL="0">
+              <a:lnSpc>
+                <a:spcPct val="160000"/>
+              </a:lnSpc>
+              <a:buNone/>
+            </a:pPr>
+            <a:r>
+              <a:rPr lang="en-US" sz="1650" dirty="0">
+                <a:solidFill>
+                  <a:srgbClr val="3F3933"/>
+                </a:solidFill>
+                <a:latin typeface="Yu Gothic" pitchFamily="34" charset="0"/>
+                <a:ea typeface="Yu Gothic" pitchFamily="34" charset="-122"/>
+                <a:cs typeface="Yu Gothic" pitchFamily="34" charset="-120"/>
+              </a:rPr>
+              <a:t>それは、資料が存在しないか、社長の頭の中にしかない知識です。AIが答えられなかったということは、新しく入った社員も答えられないということです。ここは経営者の関心が最も高まる場面なので、丁寧に扱ってください。</a:t>
+            </a:r>
+            <a:endParaRPr lang="en-US" sz="1650" dirty="0"/>
+          </a:p>
+        </p:txBody>
+      </p:sp>
+      <p:sp>
+        <p:nvSpPr>
+          <p:cNvPr id="6" name="Shape 4"/>
+          <p:cNvSpPr/>
+          <p:nvPr/>
+        </p:nvSpPr>
+        <p:spPr>
+          <a:xfrm>
+            <a:off x="777240" y="4709160"/>
+            <a:ext cx="10607040" cy="960120"/>
+          </a:xfrm>
+          <a:prstGeom prst="rect">
+            <a:avLst/>
+          </a:prstGeom>
+          <a:solidFill>
+            <a:srgbClr val="EDE7DB"/>
+          </a:solidFill>
+          <a:ln w="12700">
+            <a:solidFill>
+              <a:srgbClr val="333333"/>
+            </a:solidFill>
+            <a:prstDash val="solid"/>
+          </a:ln>
+        </p:spPr>
+      </p:sp>
+      <p:sp>
+        <p:nvSpPr>
+          <p:cNvPr id="7" name="Text 5"/>
+          <p:cNvSpPr txBox="1"/>
+          <p:nvPr/>
+        </p:nvSpPr>
+        <p:spPr>
+          <a:xfrm>
+            <a:off x="1051560" y="4800600"/>
+            <a:ext cx="1463040" cy="256032"/>
+          </a:xfrm>
+          <a:prstGeom prst="rect">
+            <a:avLst/>
+          </a:prstGeom>
+          <a:noFill/>
+          <a:ln/>
+        </p:spPr>
+        <p:txBody>
+          <a:bodyPr wrap="square" lIns="0" tIns="0" rIns="0" bIns="0" rtlCol="0" anchor="ctr"/>
+          <a:lstStyle/>
+          <a:p>
+            <a:pPr indent="0" marL="0">
+              <a:buNone/>
+            </a:pPr>
+            <a:r>
+              <a:rPr lang="en-US" sz="900" b="1" spc="150" kern="0" dirty="0">
+                <a:solidFill>
+                  <a:srgbClr val="B04A2F"/>
+                </a:solidFill>
+                <a:latin typeface="Yu Gothic" pitchFamily="34" charset="0"/>
+                <a:ea typeface="Yu Gothic" pitchFamily="34" charset="-122"/>
+                <a:cs typeface="Yu Gothic" pitchFamily="34" charset="-120"/>
+              </a:rPr>
+              <a:t>他社では</a:t>
+            </a:r>
+            <a:endParaRPr lang="en-US" sz="900" dirty="0"/>
+          </a:p>
+        </p:txBody>
+      </p:sp>
+      <p:sp>
+        <p:nvSpPr>
+          <p:cNvPr id="8" name="Text 6"/>
+          <p:cNvSpPr txBox="1"/>
+          <p:nvPr/>
+        </p:nvSpPr>
+        <p:spPr>
+          <a:xfrm>
+            <a:off x="1051560" y="5029200"/>
+            <a:ext cx="10058400" cy="566928"/>
+          </a:xfrm>
+          <a:prstGeom prst="rect">
+            <a:avLst/>
+          </a:prstGeom>
+          <a:noFill/>
+          <a:ln/>
+        </p:spPr>
+        <p:txBody>
+          <a:bodyPr wrap="square" lIns="0" tIns="0" rIns="0" bIns="0" rtlCol="0" anchor="ctr"/>
+          <a:lstStyle/>
+          <a:p>
+            <a:pPr indent="0" marL="0">
+              <a:lnSpc>
+                <a:spcPct val="130000"/>
+              </a:lnSpc>
+              <a:buNone/>
+            </a:pPr>
+            <a:r>
+              <a:rPr lang="en-US" sz="1250" dirty="0">
+                <a:solidFill>
+                  <a:srgbClr val="3F3933"/>
+                </a:solidFill>
+                <a:latin typeface="Yu Gothic" pitchFamily="34" charset="0"/>
+                <a:ea typeface="Yu Gothic" pitchFamily="34" charset="-122"/>
+                <a:cs typeface="Yu Gothic" pitchFamily="34" charset="-120"/>
+              </a:rPr>
+              <a:t>営業資料を載せた会社では、いちばん役立ったのは新人教育でした。ベテランに聞きにくい質問をAIに聞けるようになり、質問の総量が増えました。</a:t>
+            </a:r>
+            <a:endParaRPr lang="en-US" sz="1250" dirty="0"/>
+          </a:p>
+        </p:txBody>
+      </p:sp>
+      <p:sp>
+        <p:nvSpPr>
+          <p:cNvPr id="9" name="Text 7"/>
+          <p:cNvSpPr txBox="1"/>
+          <p:nvPr/>
+        </p:nvSpPr>
+        <p:spPr>
+          <a:xfrm>
+            <a:off x="777240" y="6382512"/>
+            <a:ext cx="7424928" cy="256032"/>
+          </a:xfrm>
+          <a:prstGeom prst="rect">
+            <a:avLst/>
+          </a:prstGeom>
+          <a:noFill/>
+          <a:ln/>
+        </p:spPr>
+        <p:txBody>
+          <a:bodyPr wrap="square" lIns="0" tIns="0" rIns="0" bIns="0" rtlCol="0" anchor="ctr"/>
+          <a:lstStyle/>
+          <a:p>
+            <a:pPr indent="0" marL="0">
+              <a:buNone/>
+            </a:pPr>
+            <a:r>
+              <a:rPr lang="en-US" sz="900" dirty="0">
+                <a:solidFill>
+                  <a:srgbClr val="8A8177"/>
+                </a:solidFill>
+                <a:latin typeface="Yu Gothic" pitchFamily="34" charset="0"/>
+                <a:ea typeface="Yu Gothic" pitchFamily="34" charset="-122"/>
+                <a:cs typeface="Yu Gothic" pitchFamily="34" charset="-120"/>
+              </a:rPr>
+              <a:t>第8回　社内の知識を検索できるようにする</a:t>
+            </a:r>
+            <a:endParaRPr lang="en-US" sz="900" dirty="0"/>
+          </a:p>
+        </p:txBody>
+      </p:sp>
+      <p:sp>
+        <p:nvSpPr>
+          <p:cNvPr id="10" name="Text 8"/>
+          <p:cNvSpPr txBox="1"/>
+          <p:nvPr/>
+        </p:nvSpPr>
+        <p:spPr>
+          <a:xfrm>
+            <a:off x="8202168" y="6382512"/>
+            <a:ext cx="3182112" cy="256032"/>
+          </a:xfrm>
+          <a:prstGeom prst="rect">
+            <a:avLst/>
+          </a:prstGeom>
+          <a:noFill/>
+          <a:ln/>
+        </p:spPr>
+        <p:txBody>
+          <a:bodyPr wrap="square" lIns="0" tIns="0" rIns="0" bIns="0" rtlCol="0" anchor="ctr"/>
+          <a:lstStyle/>
+          <a:p>
+            <a:pPr algn="r" indent="0" marL="0">
+              <a:buNone/>
+            </a:pPr>
+            <a:r>
+              <a:rPr lang="en-US" sz="900" dirty="0">
+                <a:solidFill>
+                  <a:srgbClr val="8A8177"/>
+                </a:solidFill>
+                <a:latin typeface="Yu Gothic" pitchFamily="34" charset="0"/>
+                <a:ea typeface="Yu Gothic" pitchFamily="34" charset="-122"/>
+                <a:cs typeface="Yu Gothic" pitchFamily="34" charset="-120"/>
+              </a:rPr>
+              <a:t>ここだけは</a:t>
+            </a:r>
+            <a:endParaRPr lang="en-US" sz="900" dirty="0"/>
+          </a:p>
+        </p:txBody>
+      </p:sp>
+    </p:spTree>
+  </p:cSld>
+  <p:clrMapOvr>
+    <a:masterClrMapping/>
+  </p:clrMapOvr>
+</p:sld>
+</file>
+
+<file path=ppt/slides/slide14.xml><?xml version="1.0" encoding="utf-8"?>
+<p:sld xmlns:a="http://schemas.openxmlformats.org/drawingml/2006/main" xmlns:r="http://schemas.openxmlformats.org/officeDocument/2006/relationships" xmlns:p="http://schemas.openxmlformats.org/presentationml/2006/main">
+  <p:cSld name="Slide 14">
+    <p:bg>
+      <p:bgPr>
+        <a:solidFill>
+          <a:srgbClr val="F6F2EA"/>
+        </a:solidFill>
+      </p:bgPr>
+    </p:bg>
+    <p:spTree>
+      <p:nvGrpSpPr>
+        <p:cNvPr id="1" name=""/>
+        <p:cNvGrpSpPr/>
+        <p:nvPr/>
+      </p:nvGrpSpPr>
+      <p:grpSpPr>
+        <a:xfrm>
+          <a:off x="0" y="0"/>
+          <a:ext cx="0" cy="0"/>
+          <a:chOff x="0" y="0"/>
+          <a:chExt cx="0" cy="0"/>
+        </a:xfrm>
+      </p:grpSpPr>
+      <p:sp>
+        <p:nvSpPr>
+          <p:cNvPr id="2" name="Text 0"/>
+          <p:cNvSpPr txBox="1"/>
+          <p:nvPr/>
+        </p:nvSpPr>
+        <p:spPr>
+          <a:xfrm>
+            <a:off x="777240" y="566928"/>
+            <a:ext cx="10607040" cy="274320"/>
+          </a:xfrm>
+          <a:prstGeom prst="rect">
+            <a:avLst/>
+          </a:prstGeom>
+          <a:noFill/>
+          <a:ln/>
+        </p:spPr>
+        <p:txBody>
+          <a:bodyPr wrap="square" lIns="0" tIns="0" rIns="0" bIns="0" rtlCol="0" anchor="ctr"/>
+          <a:lstStyle/>
+          <a:p>
+            <a:pPr indent="0" marL="0">
+              <a:buNone/>
+            </a:pPr>
+            <a:r>
+              <a:rPr lang="en-US" sz="1100" b="1" spc="250" kern="0" dirty="0">
+                <a:solidFill>
+                  <a:srgbClr val="3B6B4A"/>
+                </a:solidFill>
+                <a:latin typeface="Yu Gothic" pitchFamily="34" charset="0"/>
+                <a:ea typeface="Yu Gothic" pitchFamily="34" charset="-122"/>
+                <a:cs typeface="Yu Gothic" pitchFamily="34" charset="-120"/>
+              </a:rPr>
+              <a:t>次回まで</a:t>
+            </a:r>
+            <a:endParaRPr lang="en-US" sz="1100" dirty="0"/>
+          </a:p>
+        </p:txBody>
+      </p:sp>
+      <p:sp>
+        <p:nvSpPr>
+          <p:cNvPr id="3" name="Text 1"/>
+          <p:cNvSpPr txBox="1"/>
+          <p:nvPr/>
+        </p:nvSpPr>
+        <p:spPr>
+          <a:xfrm>
+            <a:off x="777240" y="896112"/>
+            <a:ext cx="10607040" cy="640080"/>
+          </a:xfrm>
+          <a:prstGeom prst="rect">
+            <a:avLst/>
+          </a:prstGeom>
+          <a:noFill/>
+          <a:ln/>
+        </p:spPr>
+        <p:txBody>
+          <a:bodyPr wrap="square" lIns="0" tIns="0" rIns="0" bIns="0" rtlCol="0" anchor="ctr"/>
+          <a:lstStyle/>
+          <a:p>
+            <a:pPr indent="0" marL="0">
+              <a:buNone/>
+            </a:pPr>
+            <a:r>
+              <a:rPr lang="en-US" sz="2600" b="1" dirty="0">
+                <a:solidFill>
+                  <a:srgbClr val="23201D"/>
+                </a:solidFill>
+                <a:latin typeface="Yu Gothic" pitchFamily="34" charset="0"/>
+                <a:ea typeface="Yu Gothic" pitchFamily="34" charset="-122"/>
+                <a:cs typeface="Yu Gothic" pitchFamily="34" charset="-120"/>
+              </a:rPr>
+              <a:t>次回は「複数の工程をまとめて任せる」</a:t>
+            </a:r>
+            <a:endParaRPr lang="en-US" sz="2600" dirty="0"/>
+          </a:p>
+        </p:txBody>
+      </p:sp>
+      <p:sp>
+        <p:nvSpPr>
+          <p:cNvPr id="4" name="Text 2"/>
+          <p:cNvSpPr txBox="1"/>
+          <p:nvPr/>
+        </p:nvSpPr>
+        <p:spPr>
+          <a:xfrm>
+            <a:off x="777240" y="1572768"/>
+            <a:ext cx="9546336" cy="457200"/>
+          </a:xfrm>
+          <a:prstGeom prst="rect">
+            <a:avLst/>
+          </a:prstGeom>
+          <a:noFill/>
+          <a:ln/>
+        </p:spPr>
+        <p:txBody>
+          <a:bodyPr wrap="square" lIns="0" tIns="0" rIns="0" bIns="0" rtlCol="0" anchor="ctr"/>
+          <a:lstStyle/>
+          <a:p>
+            <a:pPr indent="0" marL="0">
+              <a:buNone/>
+            </a:pPr>
+            <a:r>
+              <a:rPr lang="en-US" sz="1400" b="1" dirty="0">
+                <a:solidFill>
+                  <a:srgbClr val="3B6B4A"/>
+                </a:solidFill>
+                <a:latin typeface="Yu Gothic" pitchFamily="34" charset="0"/>
+                <a:ea typeface="Yu Gothic" pitchFamily="34" charset="-122"/>
+                <a:cs typeface="Yu Gothic" pitchFamily="34" charset="-120"/>
+              </a:rPr>
+              <a:t>次回は、手順のある仕事をまとめて渡す設計をします。人に仕事を任せるのと同じ話です。</a:t>
+            </a:r>
+            <a:endParaRPr lang="en-US" sz="1400" dirty="0"/>
+          </a:p>
+        </p:txBody>
+      </p:sp>
+      <p:sp>
+        <p:nvSpPr>
+          <p:cNvPr id="5" name="Shape 3"/>
+          <p:cNvSpPr/>
+          <p:nvPr/>
+        </p:nvSpPr>
+        <p:spPr>
+          <a:xfrm>
+            <a:off x="777240" y="2240280"/>
+            <a:ext cx="4985309" cy="2286000"/>
+          </a:xfrm>
+          <a:prstGeom prst="rect">
+            <a:avLst/>
+          </a:prstGeom>
+          <a:solidFill>
+            <a:srgbClr val="FFFFFF"/>
+          </a:solidFill>
+          <a:ln w="12700">
+            <a:solidFill>
+              <a:srgbClr val="EDE7DB"/>
+            </a:solidFill>
+            <a:prstDash val="solid"/>
+          </a:ln>
+        </p:spPr>
+      </p:sp>
+      <p:sp>
+        <p:nvSpPr>
+          <p:cNvPr id="6" name="Text 4"/>
+          <p:cNvSpPr txBox="1"/>
+          <p:nvPr/>
+        </p:nvSpPr>
+        <p:spPr>
+          <a:xfrm>
+            <a:off x="1051560" y="2377440"/>
+            <a:ext cx="4242816" cy="274320"/>
+          </a:xfrm>
+          <a:prstGeom prst="rect">
+            <a:avLst/>
+          </a:prstGeom>
+          <a:noFill/>
+          <a:ln/>
+        </p:spPr>
+        <p:txBody>
+          <a:bodyPr wrap="square" lIns="0" tIns="0" rIns="0" bIns="0" rtlCol="0" anchor="ctr"/>
+          <a:lstStyle/>
+          <a:p>
+            <a:pPr indent="0" marL="0">
+              <a:buNone/>
+            </a:pPr>
+            <a:r>
+              <a:rPr lang="en-US" sz="1000" b="1" spc="150" kern="0" dirty="0">
+                <a:solidFill>
+                  <a:srgbClr val="B04A2F"/>
+                </a:solidFill>
+                <a:latin typeface="Yu Gothic" pitchFamily="34" charset="0"/>
+                <a:ea typeface="Yu Gothic" pitchFamily="34" charset="-122"/>
+                <a:cs typeface="Yu Gothic" pitchFamily="34" charset="-120"/>
+              </a:rPr>
+              <a:t>次回までにやること</a:t>
+            </a:r>
+            <a:endParaRPr lang="en-US" sz="1000" dirty="0"/>
+          </a:p>
+        </p:txBody>
+      </p:sp>
+      <p:sp>
+        <p:nvSpPr>
+          <p:cNvPr id="7" name="Text 5"/>
+          <p:cNvSpPr txBox="1"/>
+          <p:nvPr/>
+        </p:nvSpPr>
+        <p:spPr>
+          <a:xfrm>
+            <a:off x="1051560" y="2743200"/>
+            <a:ext cx="4436669" cy="1554480"/>
+          </a:xfrm>
+          <a:prstGeom prst="rect">
+            <a:avLst/>
+          </a:prstGeom>
+          <a:noFill/>
+          <a:ln/>
+        </p:spPr>
+        <p:txBody>
+          <a:bodyPr wrap="square" lIns="0" tIns="0" rIns="0" bIns="0" rtlCol="0" anchor="ctr"/>
+          <a:lstStyle/>
+          <a:p>
+            <a:pPr indent="0" marL="0">
+              <a:lnSpc>
+                <a:spcPct val="140000"/>
+              </a:lnSpc>
+              <a:buNone/>
+            </a:pPr>
+            <a:r>
+              <a:rPr lang="en-US" sz="1400" dirty="0">
+                <a:solidFill>
+                  <a:srgbClr val="23201D"/>
+                </a:solidFill>
+                <a:latin typeface="Yu Gothic" pitchFamily="34" charset="0"/>
+                <a:ea typeface="Yu Gothic" pitchFamily="34" charset="-122"/>
+                <a:cs typeface="Yu Gothic" pitchFamily="34" charset="-120"/>
+              </a:rPr>
+              <a:t>足りない資料のうち、最も簡単な1件を埋める</a:t>
+            </a:r>
+            <a:endParaRPr lang="en-US" sz="1400" dirty="0"/>
+          </a:p>
+        </p:txBody>
+      </p:sp>
+      <p:sp>
+        <p:nvSpPr>
+          <p:cNvPr id="8" name="Shape 6"/>
+          <p:cNvSpPr/>
+          <p:nvPr/>
+        </p:nvSpPr>
+        <p:spPr>
+          <a:xfrm>
+            <a:off x="6398971" y="2240280"/>
+            <a:ext cx="4985309" cy="2286000"/>
+          </a:xfrm>
+          <a:prstGeom prst="rect">
+            <a:avLst/>
+          </a:prstGeom>
+          <a:solidFill>
+            <a:srgbClr val="FFFFFF"/>
+          </a:solidFill>
+          <a:ln w="12700">
+            <a:solidFill>
+              <a:srgbClr val="EDE7DB"/>
+            </a:solidFill>
+            <a:prstDash val="solid"/>
+          </a:ln>
+        </p:spPr>
+      </p:sp>
+      <p:sp>
+        <p:nvSpPr>
+          <p:cNvPr id="9" name="Text 7"/>
+          <p:cNvSpPr txBox="1"/>
+          <p:nvPr/>
+        </p:nvSpPr>
+        <p:spPr>
+          <a:xfrm>
+            <a:off x="6673291" y="2377440"/>
+            <a:ext cx="4242816" cy="274320"/>
+          </a:xfrm>
+          <a:prstGeom prst="rect">
+            <a:avLst/>
+          </a:prstGeom>
+          <a:noFill/>
+          <a:ln/>
+        </p:spPr>
+        <p:txBody>
+          <a:bodyPr wrap="square" lIns="0" tIns="0" rIns="0" bIns="0" rtlCol="0" anchor="ctr"/>
+          <a:lstStyle/>
+          <a:p>
+            <a:pPr indent="0" marL="0">
+              <a:buNone/>
+            </a:pPr>
+            <a:r>
+              <a:rPr lang="en-US" sz="1000" b="1" spc="150" kern="0" dirty="0">
+                <a:solidFill>
+                  <a:srgbClr val="3B6B4A"/>
+                </a:solidFill>
+                <a:latin typeface="Yu Gothic" pitchFamily="34" charset="0"/>
+                <a:ea typeface="Yu Gothic" pitchFamily="34" charset="-122"/>
+                <a:cs typeface="Yu Gothic" pitchFamily="34" charset="-120"/>
+              </a:rPr>
+              <a:t>次回の持ち物</a:t>
+            </a:r>
+            <a:endParaRPr lang="en-US" sz="1000" dirty="0"/>
+          </a:p>
+        </p:txBody>
+      </p:sp>
+      <p:sp>
+        <p:nvSpPr>
+          <p:cNvPr id="10" name="Text 8"/>
+          <p:cNvSpPr txBox="1"/>
+          <p:nvPr/>
+        </p:nvSpPr>
+        <p:spPr>
+          <a:xfrm>
+            <a:off x="6673291" y="2743200"/>
+            <a:ext cx="4436669" cy="694944"/>
+          </a:xfrm>
+          <a:prstGeom prst="rect">
+            <a:avLst/>
+          </a:prstGeom>
+          <a:noFill/>
+          <a:ln/>
+        </p:spPr>
+        <p:txBody>
+          <a:bodyPr wrap="square" lIns="0" tIns="0" rIns="0" bIns="0" rtlCol="0" anchor="ctr"/>
+          <a:lstStyle/>
+          <a:p>
+            <a:pPr indent="0" marL="0">
+              <a:lnSpc>
+                <a:spcPct val="130000"/>
+              </a:lnSpc>
+              <a:buNone/>
+            </a:pPr>
+            <a:r>
+              <a:rPr lang="en-US" sz="1250" dirty="0">
+                <a:solidFill>
+                  <a:srgbClr val="23201D"/>
+                </a:solidFill>
+                <a:latin typeface="Yu Gothic" pitchFamily="34" charset="0"/>
+                <a:ea typeface="Yu Gothic" pitchFamily="34" charset="-122"/>
+                <a:cs typeface="Yu Gothic" pitchFamily="34" charset="-120"/>
+              </a:rPr>
+              <a:t>・3工程以上ある業務を1つ選んでくる（見積・採用・月次処理など）</a:t>
+            </a:r>
+            <a:endParaRPr lang="en-US" sz="1250" dirty="0"/>
+          </a:p>
+        </p:txBody>
+      </p:sp>
+      <p:sp>
+        <p:nvSpPr>
+          <p:cNvPr id="11" name="Shape 9"/>
+          <p:cNvSpPr/>
+          <p:nvPr/>
+        </p:nvSpPr>
+        <p:spPr>
+          <a:xfrm>
+            <a:off x="777240" y="4800600"/>
+            <a:ext cx="10607040" cy="777240"/>
+          </a:xfrm>
+          <a:prstGeom prst="rect">
+            <a:avLst/>
+          </a:prstGeom>
+          <a:solidFill>
+            <a:srgbClr val="EDE7DB"/>
+          </a:solidFill>
+          <a:ln w="12700">
+            <a:solidFill>
+              <a:srgbClr val="333333"/>
+            </a:solidFill>
+            <a:prstDash val="solid"/>
+          </a:ln>
+        </p:spPr>
+      </p:sp>
+      <p:sp>
+        <p:nvSpPr>
+          <p:cNvPr id="12" name="Text 10"/>
+          <p:cNvSpPr txBox="1"/>
+          <p:nvPr/>
+        </p:nvSpPr>
+        <p:spPr>
+          <a:xfrm>
+            <a:off x="1097280" y="4800600"/>
+            <a:ext cx="9966960" cy="777240"/>
+          </a:xfrm>
+          <a:prstGeom prst="rect">
+            <a:avLst/>
+          </a:prstGeom>
+          <a:noFill/>
+          <a:ln/>
+        </p:spPr>
+        <p:txBody>
+          <a:bodyPr wrap="square" lIns="0" tIns="0" rIns="0" bIns="0" rtlCol="0" anchor="ctr"/>
+          <a:lstStyle/>
+          <a:p>
+            <a:pPr indent="0" marL="0">
+              <a:buNone/>
+            </a:pPr>
+            <a:r>
+              <a:rPr lang="en-US" sz="1250" dirty="0">
+                <a:solidFill>
+                  <a:srgbClr val="5A534A"/>
+                </a:solidFill>
+                <a:latin typeface="Yu Gothic" pitchFamily="34" charset="0"/>
+                <a:ea typeface="Yu Gothic" pitchFamily="34" charset="-122"/>
+                <a:cs typeface="Yu Gothic" pitchFamily="34" charset="-120"/>
+              </a:rPr>
+              <a:t>この内容は、次回の3日前にあらためてお送りします。</a:t>
+            </a:r>
+            <a:endParaRPr lang="en-US" sz="1250" dirty="0"/>
+          </a:p>
+        </p:txBody>
+      </p:sp>
+      <p:sp>
+        <p:nvSpPr>
+          <p:cNvPr id="13" name="Text 11"/>
+          <p:cNvSpPr txBox="1"/>
+          <p:nvPr/>
+        </p:nvSpPr>
+        <p:spPr>
+          <a:xfrm>
+            <a:off x="777240" y="6382512"/>
+            <a:ext cx="7424928" cy="256032"/>
+          </a:xfrm>
+          <a:prstGeom prst="rect">
+            <a:avLst/>
+          </a:prstGeom>
+          <a:noFill/>
+          <a:ln/>
+        </p:spPr>
+        <p:txBody>
+          <a:bodyPr wrap="square" lIns="0" tIns="0" rIns="0" bIns="0" rtlCol="0" anchor="ctr"/>
+          <a:lstStyle/>
+          <a:p>
+            <a:pPr indent="0" marL="0">
+              <a:buNone/>
+            </a:pPr>
+            <a:r>
+              <a:rPr lang="en-US" sz="900" dirty="0">
+                <a:solidFill>
+                  <a:srgbClr val="8A8177"/>
+                </a:solidFill>
+                <a:latin typeface="Yu Gothic" pitchFamily="34" charset="0"/>
+                <a:ea typeface="Yu Gothic" pitchFamily="34" charset="-122"/>
+                <a:cs typeface="Yu Gothic" pitchFamily="34" charset="-120"/>
+              </a:rPr>
+              <a:t>第8回　社内の知識を検索できるようにする</a:t>
+            </a:r>
+            <a:endParaRPr lang="en-US" sz="900" dirty="0"/>
+          </a:p>
+        </p:txBody>
+      </p:sp>
+      <p:sp>
+        <p:nvSpPr>
+          <p:cNvPr id="14" name="Text 12"/>
+          <p:cNvSpPr txBox="1"/>
+          <p:nvPr/>
+        </p:nvSpPr>
+        <p:spPr>
+          <a:xfrm>
+            <a:off x="8202168" y="6382512"/>
+            <a:ext cx="3182112" cy="256032"/>
+          </a:xfrm>
+          <a:prstGeom prst="rect">
+            <a:avLst/>
+          </a:prstGeom>
+          <a:noFill/>
+          <a:ln/>
+        </p:spPr>
+        <p:txBody>
+          <a:bodyPr wrap="square" lIns="0" tIns="0" rIns="0" bIns="0" rtlCol="0" anchor="ctr"/>
+          <a:lstStyle/>
+          <a:p>
+            <a:pPr algn="r" indent="0" marL="0">
+              <a:buNone/>
+            </a:pPr>
+            <a:r>
+              <a:rPr lang="en-US" sz="900" dirty="0">
+                <a:solidFill>
+                  <a:srgbClr val="8A8177"/>
+                </a:solidFill>
+                <a:latin typeface="Yu Gothic" pitchFamily="34" charset="0"/>
+                <a:ea typeface="Yu Gothic" pitchFamily="34" charset="-122"/>
+                <a:cs typeface="Yu Gothic" pitchFamily="34" charset="-120"/>
+              </a:rPr>
+              <a:t>次回まで</a:t>
+            </a:r>
+            <a:endParaRPr lang="en-US" sz="900" dirty="0"/>
+          </a:p>
+        </p:txBody>
+      </p:sp>
+    </p:spTree>
+  </p:cSld>
+  <p:clrMapOvr>
+    <a:masterClrMapping/>
+  </p:clrMapOvr>
+</p:sld>
+</file>
+
+<file path=ppt/slides/slide15.xml><?xml version="1.0" encoding="utf-8"?>
+<p:sld xmlns:a="http://schemas.openxmlformats.org/drawingml/2006/main" xmlns:r="http://schemas.openxmlformats.org/officeDocument/2006/relationships" xmlns:p="http://schemas.openxmlformats.org/presentationml/2006/main">
+  <p:cSld name="Slide 15">
     <p:bg>
       <p:bgPr>
         <a:solidFill>
@@ -8304,13 +10440,13 @@
             <a:r>
               <a:rPr lang="en-US" sz="1100" b="1" spc="250" kern="0" dirty="0">
                 <a:solidFill>
-                  <a:srgbClr val="2F4F6B"/>
-                </a:solidFill>
-                <a:latin typeface="Yu Gothic" pitchFamily="34" charset="0"/>
-                <a:ea typeface="Yu Gothic" pitchFamily="34" charset="-122"/>
-                <a:cs typeface="Yu Gothic" pitchFamily="34" charset="-120"/>
-              </a:rPr>
-              <a:t>演習</a:t>
+                  <a:srgbClr val="B04A2F"/>
+                </a:solidFill>
+                <a:latin typeface="Yu Gothic" pitchFamily="34" charset="0"/>
+                <a:ea typeface="Yu Gothic" pitchFamily="34" charset="-122"/>
+                <a:cs typeface="Yu Gothic" pitchFamily="34" charset="-120"/>
+              </a:rPr>
+              <a:t>想定問答</a:t>
             </a:r>
             <a:endParaRPr lang="en-US" sz="1100" dirty="0"/>
           </a:p>
@@ -8349,7 +10485,7 @@
                 <a:ea typeface="Yu Gothic" pitchFamily="34" charset="-122"/>
                 <a:cs typeface="Yu Gothic" pitchFamily="34" charset="-120"/>
               </a:rPr>
-              <a:t>今日、一緒にやること</a:t>
+              <a:t>この回で、よく聞かれること</a:t>
             </a:r>
             <a:endParaRPr lang="en-US" sz="2600" dirty="0"/>
           </a:p>
@@ -8357,53 +10493,14 @@
       </p:sp>
       <p:sp>
         <p:nvSpPr>
-          <p:cNvPr id="4" name="Text 2"/>
-          <p:cNvSpPr txBox="1"/>
-          <p:nvPr/>
-        </p:nvSpPr>
-        <p:spPr>
-          <a:xfrm>
-            <a:off x="777240" y="1572768"/>
-            <a:ext cx="10607040" cy="320040"/>
-          </a:xfrm>
-          <a:prstGeom prst="rect">
-            <a:avLst/>
-          </a:prstGeom>
-          <a:noFill/>
-          <a:ln/>
-        </p:spPr>
-        <p:txBody>
-          <a:bodyPr wrap="square" lIns="0" tIns="0" rIns="0" bIns="0" rtlCol="0" anchor="ctr"/>
-          <a:lstStyle/>
-          <a:p>
-            <a:pPr indent="0" marL="0">
-              <a:buNone/>
-            </a:pPr>
-            <a:r>
-              <a:rPr lang="en-US" sz="1250" b="1" dirty="0">
-                <a:solidFill>
-                  <a:srgbClr val="2F4F6B"/>
-                </a:solidFill>
-                <a:latin typeface="Yu Gothic" pitchFamily="34" charset="0"/>
-                <a:ea typeface="Yu Gothic" pitchFamily="34" charset="-122"/>
-                <a:cs typeface="Yu Gothic" pitchFamily="34" charset="-120"/>
-              </a:rPr>
-              <a:t>55分。操作するのはご自身です。</a:t>
-            </a:r>
-            <a:endParaRPr lang="en-US" sz="1250" dirty="0"/>
-          </a:p>
-        </p:txBody>
-      </p:sp>
-      <p:sp>
-        <p:nvSpPr>
-          <p:cNvPr id="5" name="Shape 3"/>
+          <p:cNvPr id="4" name="Shape 2"/>
           <p:cNvSpPr/>
           <p:nvPr/>
         </p:nvSpPr>
         <p:spPr>
           <a:xfrm>
-            <a:off x="777240" y="2148840"/>
-            <a:ext cx="3383280" cy="2880360"/>
+            <a:off x="777240" y="1737360"/>
+            <a:ext cx="10607040" cy="1170432"/>
           </a:xfrm>
           <a:prstGeom prst="rect">
             <a:avLst/>
@@ -8421,16 +10518,16 @@
       </p:sp>
       <p:sp>
         <p:nvSpPr>
-          <p:cNvPr id="6" name="Shape 4"/>
+          <p:cNvPr id="5" name="Shape 3"/>
           <p:cNvSpPr/>
           <p:nvPr/>
         </p:nvSpPr>
         <p:spPr>
           <a:xfrm>
-            <a:off x="1051560" y="2395728"/>
-            <a:ext cx="438912" cy="438912"/>
-          </a:xfrm>
-          <a:prstGeom prst="ellipse">
+            <a:off x="777240" y="1737360"/>
+            <a:ext cx="54864" cy="1170432"/>
+          </a:xfrm>
+          <a:prstGeom prst="rect">
             <a:avLst/>
           </a:prstGeom>
           <a:solidFill>
@@ -8446,95 +10543,53 @@
       </p:sp>
       <p:sp>
         <p:nvSpPr>
+          <p:cNvPr id="6" name="Text 4"/>
+          <p:cNvSpPr txBox="1"/>
+          <p:nvPr/>
+        </p:nvSpPr>
+        <p:spPr>
+          <a:xfrm>
+            <a:off x="1097280" y="1828800"/>
+            <a:ext cx="9966960" cy="384048"/>
+          </a:xfrm>
+          <a:prstGeom prst="rect">
+            <a:avLst/>
+          </a:prstGeom>
+          <a:noFill/>
+          <a:ln/>
+        </p:spPr>
+        <p:txBody>
+          <a:bodyPr wrap="square" lIns="0" tIns="0" rIns="0" bIns="0" rtlCol="0" anchor="ctr"/>
+          <a:lstStyle/>
+          <a:p>
+            <a:pPr indent="0" marL="0">
+              <a:buNone/>
+            </a:pPr>
+            <a:r>
+              <a:rPr lang="en-US" sz="1400" b="1" dirty="0">
+                <a:solidFill>
+                  <a:srgbClr val="2F4F6B"/>
+                </a:solidFill>
+                <a:latin typeface="Yu Gothic" pitchFamily="34" charset="0"/>
+                <a:ea typeface="Yu Gothic" pitchFamily="34" charset="-122"/>
+                <a:cs typeface="Yu Gothic" pitchFamily="34" charset="-120"/>
+              </a:rPr>
+              <a:t>「全社の資料を入れたらもっと賢くなりますか」</a:t>
+            </a:r>
+            <a:endParaRPr lang="en-US" sz="1400" dirty="0"/>
+          </a:p>
+        </p:txBody>
+      </p:sp>
+      <p:sp>
+        <p:nvSpPr>
           <p:cNvPr id="7" name="Text 5"/>
           <p:cNvSpPr txBox="1"/>
           <p:nvPr/>
         </p:nvSpPr>
         <p:spPr>
           <a:xfrm>
-            <a:off x="1051560" y="2395728"/>
-            <a:ext cx="438912" cy="438912"/>
-          </a:xfrm>
-          <a:prstGeom prst="rect">
-            <a:avLst/>
-          </a:prstGeom>
-          <a:noFill/>
-          <a:ln/>
-        </p:spPr>
-        <p:txBody>
-          <a:bodyPr wrap="square" lIns="0" tIns="0" rIns="0" bIns="0" rtlCol="0" anchor="ctr"/>
-          <a:lstStyle/>
-          <a:p>
-            <a:pPr algn="ctr" indent="0" marL="0">
-              <a:buNone/>
-            </a:pPr>
-            <a:r>
-              <a:rPr lang="en-US" sz="1300" b="1" dirty="0">
-                <a:solidFill>
-                  <a:srgbClr val="FFFFFF"/>
-                </a:solidFill>
-                <a:latin typeface="Yu Gothic" pitchFamily="34" charset="0"/>
-                <a:ea typeface="Yu Gothic" pitchFamily="34" charset="-122"/>
-                <a:cs typeface="Yu Gothic" pitchFamily="34" charset="-120"/>
-              </a:rPr>
-              <a:t>1</a:t>
-            </a:r>
-            <a:endParaRPr lang="en-US" sz="1300" dirty="0"/>
-          </a:p>
-        </p:txBody>
-      </p:sp>
-      <p:sp>
-        <p:nvSpPr>
-          <p:cNvPr id="8" name="Text 6"/>
-          <p:cNvSpPr txBox="1"/>
-          <p:nvPr/>
-        </p:nvSpPr>
-        <p:spPr>
-          <a:xfrm>
-            <a:off x="1051560" y="2944368"/>
-            <a:ext cx="2834640" cy="731520"/>
-          </a:xfrm>
-          <a:prstGeom prst="rect">
-            <a:avLst/>
-          </a:prstGeom>
-          <a:noFill/>
-          <a:ln/>
-        </p:spPr>
-        <p:txBody>
-          <a:bodyPr wrap="square" lIns="0" tIns="0" rIns="0" bIns="0" rtlCol="0" anchor="ctr"/>
-          <a:lstStyle/>
-          <a:p>
-            <a:pPr indent="0" marL="0">
-              <a:lnSpc>
-                <a:spcPct val="125000"/>
-              </a:lnSpc>
-              <a:buNone/>
-            </a:pPr>
-            <a:r>
-              <a:rPr lang="en-US" sz="1450" b="1" dirty="0">
-                <a:solidFill>
-                  <a:srgbClr val="23201D"/>
-                </a:solidFill>
-                <a:latin typeface="Yu Gothic" pitchFamily="34" charset="0"/>
-                <a:ea typeface="Yu Gothic" pitchFamily="34" charset="-122"/>
-                <a:cs typeface="Yu Gothic" pitchFamily="34" charset="-120"/>
-              </a:rPr>
-              <a:t>1領域を決めて、資料を載せる</a:t>
-            </a:r>
-            <a:endParaRPr lang="en-US" sz="1450" dirty="0"/>
-          </a:p>
-        </p:txBody>
-      </p:sp>
-      <p:sp>
-        <p:nvSpPr>
-          <p:cNvPr id="9" name="Text 7"/>
-          <p:cNvSpPr txBox="1"/>
-          <p:nvPr/>
-        </p:nvSpPr>
-        <p:spPr>
-          <a:xfrm>
-            <a:off x="1051560" y="3703320"/>
-            <a:ext cx="2834640" cy="1188720"/>
+            <a:off x="1097280" y="2231136"/>
+            <a:ext cx="9966960" cy="603504"/>
           </a:xfrm>
           <a:prstGeom prst="rect">
             <a:avLst/>
@@ -8553,30 +10608,30 @@
               <a:buNone/>
             </a:pPr>
             <a:r>
-              <a:rPr lang="en-US" sz="1150" dirty="0">
-                <a:solidFill>
-                  <a:srgbClr val="5A534A"/>
-                </a:solidFill>
-                <a:latin typeface="Yu Gothic" pitchFamily="34" charset="0"/>
-                <a:ea typeface="Yu Gothic" pitchFamily="34" charset="-122"/>
-                <a:cs typeface="Yu Gothic" pitchFamily="34" charset="-120"/>
-              </a:rPr>
-              <a:t>入れない判断が品質を決めます。最新版だけに絞ります</a:t>
-            </a:r>
-            <a:endParaRPr lang="en-US" sz="1150" dirty="0"/>
-          </a:p>
-        </p:txBody>
-      </p:sp>
-      <p:sp>
-        <p:nvSpPr>
-          <p:cNvPr id="10" name="Shape 8"/>
+              <a:rPr lang="en-US" sz="1250" dirty="0">
+                <a:solidFill>
+                  <a:srgbClr val="3F3933"/>
+                </a:solidFill>
+                <a:latin typeface="Yu Gothic" pitchFamily="34" charset="0"/>
+                <a:ea typeface="Yu Gothic" pitchFamily="34" charset="-122"/>
+                <a:cs typeface="Yu Gothic" pitchFamily="34" charset="-120"/>
+              </a:rPr>
+              <a:t>逆です。範囲を広げるほど精度は落ちます。今日、実際に入れて落ちるところをお見せします。</a:t>
+            </a:r>
+            <a:endParaRPr lang="en-US" sz="1250" dirty="0"/>
+          </a:p>
+        </p:txBody>
+      </p:sp>
+      <p:sp>
+        <p:nvSpPr>
+          <p:cNvPr id="8" name="Shape 6"/>
           <p:cNvSpPr/>
           <p:nvPr/>
         </p:nvSpPr>
         <p:spPr>
           <a:xfrm>
-            <a:off x="4389120" y="2148840"/>
-            <a:ext cx="3383280" cy="2880360"/>
+            <a:off x="777240" y="3035808"/>
+            <a:ext cx="10607040" cy="1170432"/>
           </a:xfrm>
           <a:prstGeom prst="rect">
             <a:avLst/>
@@ -8594,16 +10649,16 @@
       </p:sp>
       <p:sp>
         <p:nvSpPr>
-          <p:cNvPr id="11" name="Shape 9"/>
+          <p:cNvPr id="9" name="Shape 7"/>
           <p:cNvSpPr/>
           <p:nvPr/>
         </p:nvSpPr>
         <p:spPr>
           <a:xfrm>
-            <a:off x="4663440" y="2395728"/>
-            <a:ext cx="438912" cy="438912"/>
-          </a:xfrm>
-          <a:prstGeom prst="ellipse">
+            <a:off x="777240" y="3035808"/>
+            <a:ext cx="54864" cy="1170432"/>
+          </a:xfrm>
+          <a:prstGeom prst="rect">
             <a:avLst/>
           </a:prstGeom>
           <a:solidFill>
@@ -8619,95 +10674,53 @@
       </p:sp>
       <p:sp>
         <p:nvSpPr>
-          <p:cNvPr id="12" name="Text 10"/>
-          <p:cNvSpPr txBox="1"/>
-          <p:nvPr/>
-        </p:nvSpPr>
-        <p:spPr>
-          <a:xfrm>
-            <a:off x="4663440" y="2395728"/>
-            <a:ext cx="438912" cy="438912"/>
-          </a:xfrm>
-          <a:prstGeom prst="rect">
-            <a:avLst/>
-          </a:prstGeom>
-          <a:noFill/>
-          <a:ln/>
-        </p:spPr>
-        <p:txBody>
-          <a:bodyPr wrap="square" lIns="0" tIns="0" rIns="0" bIns="0" rtlCol="0" anchor="ctr"/>
-          <a:lstStyle/>
-          <a:p>
-            <a:pPr algn="ctr" indent="0" marL="0">
-              <a:buNone/>
-            </a:pPr>
-            <a:r>
-              <a:rPr lang="en-US" sz="1300" b="1" dirty="0">
-                <a:solidFill>
-                  <a:srgbClr val="FFFFFF"/>
-                </a:solidFill>
-                <a:latin typeface="Yu Gothic" pitchFamily="34" charset="0"/>
-                <a:ea typeface="Yu Gothic" pitchFamily="34" charset="-122"/>
-                <a:cs typeface="Yu Gothic" pitchFamily="34" charset="-120"/>
-              </a:rPr>
-              <a:t>2</a:t>
-            </a:r>
-            <a:endParaRPr lang="en-US" sz="1300" dirty="0"/>
-          </a:p>
-        </p:txBody>
-      </p:sp>
-      <p:sp>
-        <p:nvSpPr>
-          <p:cNvPr id="13" name="Text 11"/>
-          <p:cNvSpPr txBox="1"/>
-          <p:nvPr/>
-        </p:nvSpPr>
-        <p:spPr>
-          <a:xfrm>
-            <a:off x="4663440" y="2944368"/>
-            <a:ext cx="2834640" cy="731520"/>
-          </a:xfrm>
-          <a:prstGeom prst="rect">
-            <a:avLst/>
-          </a:prstGeom>
-          <a:noFill/>
-          <a:ln/>
-        </p:spPr>
-        <p:txBody>
-          <a:bodyPr wrap="square" lIns="0" tIns="0" rIns="0" bIns="0" rtlCol="0" anchor="ctr"/>
-          <a:lstStyle/>
-          <a:p>
-            <a:pPr indent="0" marL="0">
-              <a:lnSpc>
-                <a:spcPct val="125000"/>
-              </a:lnSpc>
-              <a:buNone/>
-            </a:pPr>
-            <a:r>
-              <a:rPr lang="en-US" sz="1450" b="1" dirty="0">
-                <a:solidFill>
-                  <a:srgbClr val="23201D"/>
-                </a:solidFill>
-                <a:latin typeface="Yu Gothic" pitchFamily="34" charset="0"/>
-                <a:ea typeface="Yu Gothic" pitchFamily="34" charset="-122"/>
-                <a:cs typeface="Yu Gothic" pitchFamily="34" charset="-120"/>
-              </a:rPr>
-              <a:t>10問投げて、精度を測る</a:t>
-            </a:r>
-            <a:endParaRPr lang="en-US" sz="1450" dirty="0"/>
-          </a:p>
-        </p:txBody>
-      </p:sp>
-      <p:sp>
-        <p:nvSpPr>
-          <p:cNvPr id="14" name="Text 12"/>
-          <p:cNvSpPr txBox="1"/>
-          <p:nvPr/>
-        </p:nvSpPr>
-        <p:spPr>
-          <a:xfrm>
-            <a:off x="4663440" y="3703320"/>
-            <a:ext cx="2834640" cy="1188720"/>
+          <p:cNvPr id="10" name="Text 8"/>
+          <p:cNvSpPr txBox="1"/>
+          <p:nvPr/>
+        </p:nvSpPr>
+        <p:spPr>
+          <a:xfrm>
+            <a:off x="1097280" y="3127248"/>
+            <a:ext cx="9966960" cy="384048"/>
+          </a:xfrm>
+          <a:prstGeom prst="rect">
+            <a:avLst/>
+          </a:prstGeom>
+          <a:noFill/>
+          <a:ln/>
+        </p:spPr>
+        <p:txBody>
+          <a:bodyPr wrap="square" lIns="0" tIns="0" rIns="0" bIns="0" rtlCol="0" anchor="ctr"/>
+          <a:lstStyle/>
+          <a:p>
+            <a:pPr indent="0" marL="0">
+              <a:buNone/>
+            </a:pPr>
+            <a:r>
+              <a:rPr lang="en-US" sz="1400" b="1" dirty="0">
+                <a:solidFill>
+                  <a:srgbClr val="2F4F6B"/>
+                </a:solidFill>
+                <a:latin typeface="Yu Gothic" pitchFamily="34" charset="0"/>
+                <a:ea typeface="Yu Gothic" pitchFamily="34" charset="-122"/>
+                <a:cs typeface="Yu Gothic" pitchFamily="34" charset="-120"/>
+              </a:rPr>
+              <a:t>「人事情報や個人情報も入れていいですか」</a:t>
+            </a:r>
+            <a:endParaRPr lang="en-US" sz="1400" dirty="0"/>
+          </a:p>
+        </p:txBody>
+      </p:sp>
+      <p:sp>
+        <p:nvSpPr>
+          <p:cNvPr id="11" name="Text 9"/>
+          <p:cNvSpPr txBox="1"/>
+          <p:nvPr/>
+        </p:nvSpPr>
+        <p:spPr>
+          <a:xfrm>
+            <a:off x="1097280" y="3529584"/>
+            <a:ext cx="9966960" cy="603504"/>
           </a:xfrm>
           <a:prstGeom prst="rect">
             <a:avLst/>
@@ -8726,30 +10739,30 @@
               <a:buNone/>
             </a:pPr>
             <a:r>
-              <a:rPr lang="en-US" sz="1150" dirty="0">
-                <a:solidFill>
-                  <a:srgbClr val="5A534A"/>
-                </a:solidFill>
-                <a:latin typeface="Yu Gothic" pitchFamily="34" charset="0"/>
-                <a:ea typeface="Yu Gothic" pitchFamily="34" charset="-122"/>
-                <a:cs typeface="Yu Gothic" pitchFamily="34" charset="-120"/>
-              </a:rPr>
-              <a:t>社員の方が実際にしそうな質問で試します。○△×を数えます</a:t>
-            </a:r>
-            <a:endParaRPr lang="en-US" sz="1150" dirty="0"/>
-          </a:p>
-        </p:txBody>
-      </p:sp>
-      <p:sp>
-        <p:nvSpPr>
-          <p:cNvPr id="15" name="Shape 13"/>
+              <a:rPr lang="en-US" sz="1250" dirty="0">
+                <a:solidFill>
+                  <a:srgbClr val="3F3933"/>
+                </a:solidFill>
+                <a:latin typeface="Yu Gothic" pitchFamily="34" charset="0"/>
+                <a:ea typeface="Yu Gothic" pitchFamily="34" charset="-122"/>
+                <a:cs typeface="Yu Gothic" pitchFamily="34" charset="-120"/>
+              </a:rPr>
+              <a:t>入れません。誰が見られるかの管理が難しくなり、事故の元になります。領域を分けて運用します。</a:t>
+            </a:r>
+            <a:endParaRPr lang="en-US" sz="1250" dirty="0"/>
+          </a:p>
+        </p:txBody>
+      </p:sp>
+      <p:sp>
+        <p:nvSpPr>
+          <p:cNvPr id="12" name="Shape 10"/>
           <p:cNvSpPr/>
           <p:nvPr/>
         </p:nvSpPr>
         <p:spPr>
           <a:xfrm>
-            <a:off x="8001000" y="2148840"/>
-            <a:ext cx="3383280" cy="2880360"/>
+            <a:off x="777240" y="4334256"/>
+            <a:ext cx="10607040" cy="1170432"/>
           </a:xfrm>
           <a:prstGeom prst="rect">
             <a:avLst/>
@@ -8767,16 +10780,16 @@
       </p:sp>
       <p:sp>
         <p:nvSpPr>
-          <p:cNvPr id="16" name="Shape 14"/>
+          <p:cNvPr id="13" name="Shape 11"/>
           <p:cNvSpPr/>
           <p:nvPr/>
         </p:nvSpPr>
         <p:spPr>
           <a:xfrm>
-            <a:off x="8275320" y="2395728"/>
-            <a:ext cx="438912" cy="438912"/>
-          </a:xfrm>
-          <a:prstGeom prst="ellipse">
+            <a:off x="777240" y="4334256"/>
+            <a:ext cx="54864" cy="1170432"/>
+          </a:xfrm>
+          <a:prstGeom prst="rect">
             <a:avLst/>
           </a:prstGeom>
           <a:solidFill>
@@ -8792,95 +10805,53 @@
       </p:sp>
       <p:sp>
         <p:nvSpPr>
-          <p:cNvPr id="17" name="Text 15"/>
-          <p:cNvSpPr txBox="1"/>
-          <p:nvPr/>
-        </p:nvSpPr>
-        <p:spPr>
-          <a:xfrm>
-            <a:off x="8275320" y="2395728"/>
-            <a:ext cx="438912" cy="438912"/>
-          </a:xfrm>
-          <a:prstGeom prst="rect">
-            <a:avLst/>
-          </a:prstGeom>
-          <a:noFill/>
-          <a:ln/>
-        </p:spPr>
-        <p:txBody>
-          <a:bodyPr wrap="square" lIns="0" tIns="0" rIns="0" bIns="0" rtlCol="0" anchor="ctr"/>
-          <a:lstStyle/>
-          <a:p>
-            <a:pPr algn="ctr" indent="0" marL="0">
-              <a:buNone/>
-            </a:pPr>
-            <a:r>
-              <a:rPr lang="en-US" sz="1300" b="1" dirty="0">
-                <a:solidFill>
-                  <a:srgbClr val="FFFFFF"/>
-                </a:solidFill>
-                <a:latin typeface="Yu Gothic" pitchFamily="34" charset="0"/>
-                <a:ea typeface="Yu Gothic" pitchFamily="34" charset="-122"/>
-                <a:cs typeface="Yu Gothic" pitchFamily="34" charset="-120"/>
-              </a:rPr>
-              <a:t>3</a:t>
-            </a:r>
-            <a:endParaRPr lang="en-US" sz="1300" dirty="0"/>
-          </a:p>
-        </p:txBody>
-      </p:sp>
-      <p:sp>
-        <p:nvSpPr>
-          <p:cNvPr id="18" name="Text 16"/>
-          <p:cNvSpPr txBox="1"/>
-          <p:nvPr/>
-        </p:nvSpPr>
-        <p:spPr>
-          <a:xfrm>
-            <a:off x="8275320" y="2944368"/>
-            <a:ext cx="2834640" cy="731520"/>
-          </a:xfrm>
-          <a:prstGeom prst="rect">
-            <a:avLst/>
-          </a:prstGeom>
-          <a:noFill/>
-          <a:ln/>
-        </p:spPr>
-        <p:txBody>
-          <a:bodyPr wrap="square" lIns="0" tIns="0" rIns="0" bIns="0" rtlCol="0" anchor="ctr"/>
-          <a:lstStyle/>
-          <a:p>
-            <a:pPr indent="0" marL="0">
-              <a:lnSpc>
-                <a:spcPct val="125000"/>
-              </a:lnSpc>
-              <a:buNone/>
-            </a:pPr>
-            <a:r>
-              <a:rPr lang="en-US" sz="1450" b="1" dirty="0">
-                <a:solidFill>
-                  <a:srgbClr val="23201D"/>
-                </a:solidFill>
-                <a:latin typeface="Yu Gothic" pitchFamily="34" charset="0"/>
-                <a:ea typeface="Yu Gothic" pitchFamily="34" charset="-122"/>
-                <a:cs typeface="Yu Gothic" pitchFamily="34" charset="-120"/>
-              </a:rPr>
-              <a:t>答えられなかった質問を書き出す</a:t>
-            </a:r>
-            <a:endParaRPr lang="en-US" sz="1450" dirty="0"/>
-          </a:p>
-        </p:txBody>
-      </p:sp>
-      <p:sp>
-        <p:nvSpPr>
-          <p:cNvPr id="19" name="Text 17"/>
-          <p:cNvSpPr txBox="1"/>
-          <p:nvPr/>
-        </p:nvSpPr>
-        <p:spPr>
-          <a:xfrm>
-            <a:off x="8275320" y="3703320"/>
-            <a:ext cx="2834640" cy="1188720"/>
+          <p:cNvPr id="14" name="Text 12"/>
+          <p:cNvSpPr txBox="1"/>
+          <p:nvPr/>
+        </p:nvSpPr>
+        <p:spPr>
+          <a:xfrm>
+            <a:off x="1097280" y="4425696"/>
+            <a:ext cx="9966960" cy="384048"/>
+          </a:xfrm>
+          <a:prstGeom prst="rect">
+            <a:avLst/>
+          </a:prstGeom>
+          <a:noFill/>
+          <a:ln/>
+        </p:spPr>
+        <p:txBody>
+          <a:bodyPr wrap="square" lIns="0" tIns="0" rIns="0" bIns="0" rtlCol="0" anchor="ctr"/>
+          <a:lstStyle/>
+          <a:p>
+            <a:pPr indent="0" marL="0">
+              <a:buNone/>
+            </a:pPr>
+            <a:r>
+              <a:rPr lang="en-US" sz="1400" b="1" dirty="0">
+                <a:solidFill>
+                  <a:srgbClr val="2F4F6B"/>
+                </a:solidFill>
+                <a:latin typeface="Yu Gothic" pitchFamily="34" charset="0"/>
+                <a:ea typeface="Yu Gothic" pitchFamily="34" charset="-122"/>
+                <a:cs typeface="Yu Gothic" pitchFamily="34" charset="-120"/>
+              </a:rPr>
+              <a:t>「答えられない質問が多いと、失敗ですか」</a:t>
+            </a:r>
+            <a:endParaRPr lang="en-US" sz="1400" dirty="0"/>
+          </a:p>
+        </p:txBody>
+      </p:sp>
+      <p:sp>
+        <p:nvSpPr>
+          <p:cNvPr id="15" name="Text 13"/>
+          <p:cNvSpPr txBox="1"/>
+          <p:nvPr/>
+        </p:nvSpPr>
+        <p:spPr>
+          <a:xfrm>
+            <a:off x="1097280" y="4828032"/>
+            <a:ext cx="9966960" cy="603504"/>
           </a:xfrm>
           <a:prstGeom prst="rect">
             <a:avLst/>
@@ -8899,23 +10870,23 @@
               <a:buNone/>
             </a:pPr>
             <a:r>
-              <a:rPr lang="en-US" sz="1150" dirty="0">
-                <a:solidFill>
-                  <a:srgbClr val="5A534A"/>
-                </a:solidFill>
-                <a:latin typeface="Yu Gothic" pitchFamily="34" charset="0"/>
-                <a:ea typeface="Yu Gothic" pitchFamily="34" charset="-122"/>
-                <a:cs typeface="Yu Gothic" pitchFamily="34" charset="-120"/>
-              </a:rPr>
-              <a:t>今日いちばんの成果物です。5列の表に落とします</a:t>
-            </a:r>
-            <a:endParaRPr lang="en-US" sz="1150" dirty="0"/>
-          </a:p>
-        </p:txBody>
-      </p:sp>
-      <p:sp>
-        <p:nvSpPr>
-          <p:cNvPr id="20" name="Text 18"/>
+              <a:rPr lang="en-US" sz="1250" dirty="0">
+                <a:solidFill>
+                  <a:srgbClr val="3F3933"/>
+                </a:solidFill>
+                <a:latin typeface="Yu Gothic" pitchFamily="34" charset="0"/>
+                <a:ea typeface="Yu Gothic" pitchFamily="34" charset="-122"/>
+                <a:cs typeface="Yu Gothic" pitchFamily="34" charset="-120"/>
+              </a:rPr>
+              <a:t>失敗ではありません。それが、社内に資料が無いことの証明です。今日いちばんの成果物になります。</a:t>
+            </a:r>
+            <a:endParaRPr lang="en-US" sz="1250" dirty="0"/>
+          </a:p>
+        </p:txBody>
+      </p:sp>
+      <p:sp>
+        <p:nvSpPr>
+          <p:cNvPr id="16" name="Text 14"/>
           <p:cNvSpPr txBox="1"/>
           <p:nvPr/>
         </p:nvSpPr>
@@ -8954,7 +10925,7 @@
       </p:sp>
       <p:sp>
         <p:nvSpPr>
-          <p:cNvPr id="21" name="Text 19"/>
+          <p:cNvPr id="17" name="Text 15"/>
           <p:cNvSpPr txBox="1"/>
           <p:nvPr/>
         </p:nvSpPr>
@@ -8985,7 +10956,7 @@
                 <a:ea typeface="Yu Gothic" pitchFamily="34" charset="-122"/>
                 <a:cs typeface="Yu Gothic" pitchFamily="34" charset="-120"/>
               </a:rPr>
-              <a:t>演習</a:t>
+              <a:t>想定問答</a:t>
             </a:r>
             <a:endParaRPr lang="en-US" sz="900" dirty="0"/>
           </a:p>

--- a/slides/pptx/第08回_社内の知識を検索できるようにする.pptx
+++ b/slides/pptx/第08回_社内の知識を検索できるようにする.pptx
@@ -4604,7 +4604,7 @@
                 <a:ea typeface="Yu Gothic" pitchFamily="34" charset="-122"/>
                 <a:cs typeface="Yu Gothic" pitchFamily="34" charset="-120"/>
               </a:rPr>
-              <a:t>他社では</a:t>
+              <a:t>よくある型</a:t>
             </a:r>
             <a:endParaRPr lang="en-US" sz="900" dirty="0"/>
           </a:p>
@@ -4646,7 +4646,7 @@
                 <a:ea typeface="Yu Gothic" pitchFamily="34" charset="-122"/>
                 <a:cs typeface="Yu Gothic" pitchFamily="34" charset="-120"/>
               </a:rPr>
-              <a:t>営業資料を載せた会社では、いちばん役立ったのは新人教育でした。ベテランに聞きにくい質問をAIに聞けるようになり、質問の総量が増えました。</a:t>
+              <a:t>ナレッジ検索がいちばん役立つのは、実は新人教育。ベテランに聞きにくい質問をAIに聞けるようになると、質問の総量が増える。</a:t>
             </a:r>
             <a:endParaRPr lang="en-US" sz="1250" dirty="0"/>
           </a:p>

--- a/slides/pptx/第08回_社内の知識を検索できるようにする.pptx
+++ b/slides/pptx/第08回_社内の知識を検索できるようにする.pptx
@@ -3146,7 +3146,7 @@
                 <a:ea typeface="Yu Gothic" pitchFamily="34" charset="-122"/>
                 <a:cs typeface="Yu Gothic" pitchFamily="34" charset="-120"/>
               </a:rPr>
-              <a:t>55分。操作するのはご自身です。</a:t>
+              <a:t>65分。操作するのはご自身です。</a:t>
             </a:r>
             <a:endParaRPr lang="en-US" sz="1250" dirty="0"/>
           </a:p>

--- a/slides/pptx/第08回_社内の知識を検索できるようにする.pptx
+++ b/slides/pptx/第08回_社内の知識を検索できるようにする.pptx
@@ -6308,7 +6308,7 @@
         <p:spPr>
           <a:xfrm>
             <a:off x="960120" y="4873752"/>
-            <a:ext cx="1956816" cy="237744"/>
+            <a:ext cx="2468880" cy="237744"/>
           </a:xfrm>
           <a:prstGeom prst="rect">
             <a:avLst/>
@@ -6347,7 +6347,7 @@
         <p:spPr>
           <a:xfrm>
             <a:off x="960120" y="5111496"/>
-            <a:ext cx="1956816" cy="384048"/>
+            <a:ext cx="2468880" cy="384048"/>
           </a:xfrm>
           <a:prstGeom prst="rect">
             <a:avLst/>
@@ -6385,8 +6385,8 @@
         </p:nvSpPr>
         <p:spPr>
           <a:xfrm>
-            <a:off x="3008376" y="4873752"/>
-            <a:ext cx="1956816" cy="237744"/>
+            <a:off x="3520440" y="4873752"/>
+            <a:ext cx="2468880" cy="237744"/>
           </a:xfrm>
           <a:prstGeom prst="rect">
             <a:avLst/>
@@ -6424,8 +6424,8 @@
         </p:nvSpPr>
         <p:spPr>
           <a:xfrm>
-            <a:off x="3008376" y="5111496"/>
-            <a:ext cx="1956816" cy="384048"/>
+            <a:off x="3520440" y="5111496"/>
+            <a:ext cx="2468880" cy="384048"/>
           </a:xfrm>
           <a:prstGeom prst="rect">
             <a:avLst/>
@@ -6463,8 +6463,8 @@
         </p:nvSpPr>
         <p:spPr>
           <a:xfrm>
-            <a:off x="5056632" y="4873752"/>
-            <a:ext cx="1956816" cy="237744"/>
+            <a:off x="6080760" y="4873752"/>
+            <a:ext cx="2468880" cy="237744"/>
           </a:xfrm>
           <a:prstGeom prst="rect">
             <a:avLst/>
@@ -6488,7 +6488,7 @@
                 <a:ea typeface="Yu Gothic" pitchFamily="34" charset="-122"/>
                 <a:cs typeface="Yu Gothic" pitchFamily="34" charset="-120"/>
               </a:rPr>
-              <a:t>35-90分</a:t>
+              <a:t>35-100分</a:t>
             </a:r>
             <a:endParaRPr lang="en-US" sz="900" dirty="0"/>
           </a:p>
@@ -6502,8 +6502,8 @@
         </p:nvSpPr>
         <p:spPr>
           <a:xfrm>
-            <a:off x="5056632" y="5111496"/>
-            <a:ext cx="1956816" cy="384048"/>
+            <a:off x="6080760" y="5111496"/>
+            <a:ext cx="2468880" cy="384048"/>
           </a:xfrm>
           <a:prstGeom prst="rect">
             <a:avLst/>
@@ -6541,8 +6541,8 @@
         </p:nvSpPr>
         <p:spPr>
           <a:xfrm>
-            <a:off x="7104888" y="4873752"/>
-            <a:ext cx="1956816" cy="237744"/>
+            <a:off x="8641080" y="4873752"/>
+            <a:ext cx="2468880" cy="237744"/>
           </a:xfrm>
           <a:prstGeom prst="rect">
             <a:avLst/>
@@ -6566,7 +6566,7 @@
                 <a:ea typeface="Yu Gothic" pitchFamily="34" charset="-122"/>
                 <a:cs typeface="Yu Gothic" pitchFamily="34" charset="-120"/>
               </a:rPr>
-              <a:t>90-105分</a:t>
+              <a:t>100-120分</a:t>
             </a:r>
             <a:endParaRPr lang="en-US" sz="900" dirty="0"/>
           </a:p>
@@ -6580,8 +6580,8 @@
         </p:nvSpPr>
         <p:spPr>
           <a:xfrm>
-            <a:off x="7104888" y="5111496"/>
-            <a:ext cx="1956816" cy="384048"/>
+            <a:off x="8641080" y="5111496"/>
+            <a:ext cx="2468880" cy="384048"/>
           </a:xfrm>
           <a:prstGeom prst="rect">
             <a:avLst/>
@@ -6605,7 +6605,7 @@
                 <a:ea typeface="Yu Gothic" pitchFamily="34" charset="-122"/>
                 <a:cs typeface="Yu Gothic" pitchFamily="34" charset="-120"/>
               </a:rPr>
-              <a:t>業務への組み込み</a:t>
+              <a:t>組み込み・宿題・記録</a:t>
             </a:r>
             <a:endParaRPr lang="en-US" sz="1100" dirty="0"/>
           </a:p>
@@ -6614,84 +6614,6 @@
       <p:sp>
         <p:nvSpPr>
           <p:cNvPr id="15" name="Text 13"/>
-          <p:cNvSpPr txBox="1"/>
-          <p:nvPr/>
-        </p:nvSpPr>
-        <p:spPr>
-          <a:xfrm>
-            <a:off x="9153144" y="4873752"/>
-            <a:ext cx="1956816" cy="237744"/>
-          </a:xfrm>
-          <a:prstGeom prst="rect">
-            <a:avLst/>
-          </a:prstGeom>
-          <a:noFill/>
-          <a:ln/>
-        </p:spPr>
-        <p:txBody>
-          <a:bodyPr wrap="square" lIns="0" tIns="0" rIns="0" bIns="0" rtlCol="0" anchor="ctr"/>
-          <a:lstStyle/>
-          <a:p>
-            <a:pPr indent="0" marL="0">
-              <a:buNone/>
-            </a:pPr>
-            <a:r>
-              <a:rPr lang="en-US" sz="900" b="1" dirty="0">
-                <a:solidFill>
-                  <a:srgbClr val="B04A2F"/>
-                </a:solidFill>
-                <a:latin typeface="Yu Gothic" pitchFamily="34" charset="0"/>
-                <a:ea typeface="Yu Gothic" pitchFamily="34" charset="-122"/>
-                <a:cs typeface="Yu Gothic" pitchFamily="34" charset="-120"/>
-              </a:rPr>
-              <a:t>105-120分</a:t>
-            </a:r>
-            <a:endParaRPr lang="en-US" sz="900" dirty="0"/>
-          </a:p>
-        </p:txBody>
-      </p:sp>
-      <p:sp>
-        <p:nvSpPr>
-          <p:cNvPr id="16" name="Text 14"/>
-          <p:cNvSpPr txBox="1"/>
-          <p:nvPr/>
-        </p:nvSpPr>
-        <p:spPr>
-          <a:xfrm>
-            <a:off x="9153144" y="5111496"/>
-            <a:ext cx="1956816" cy="384048"/>
-          </a:xfrm>
-          <a:prstGeom prst="rect">
-            <a:avLst/>
-          </a:prstGeom>
-          <a:noFill/>
-          <a:ln/>
-        </p:spPr>
-        <p:txBody>
-          <a:bodyPr wrap="square" lIns="0" tIns="0" rIns="0" bIns="0" rtlCol="0" anchor="ctr"/>
-          <a:lstStyle/>
-          <a:p>
-            <a:pPr indent="0" marL="0">
-              <a:buNone/>
-            </a:pPr>
-            <a:r>
-              <a:rPr lang="en-US" sz="1100" dirty="0">
-                <a:solidFill>
-                  <a:srgbClr val="23201D"/>
-                </a:solidFill>
-                <a:latin typeface="Yu Gothic" pitchFamily="34" charset="0"/>
-                <a:ea typeface="Yu Gothic" pitchFamily="34" charset="-122"/>
-                <a:cs typeface="Yu Gothic" pitchFamily="34" charset="-120"/>
-              </a:rPr>
-              <a:t>宿題・記録</a:t>
-            </a:r>
-            <a:endParaRPr lang="en-US" sz="1100" dirty="0"/>
-          </a:p>
-        </p:txBody>
-      </p:sp>
-      <p:sp>
-        <p:nvSpPr>
-          <p:cNvPr id="17" name="Text 15"/>
           <p:cNvSpPr txBox="1"/>
           <p:nvPr/>
         </p:nvSpPr>
@@ -6730,7 +6652,7 @@
       </p:sp>
       <p:sp>
         <p:nvSpPr>
-          <p:cNvPr id="18" name="Text 16"/>
+          <p:cNvPr id="16" name="Text 14"/>
           <p:cNvSpPr txBox="1"/>
           <p:nvPr/>
         </p:nvSpPr>

--- a/slides/pptx/第08回_社内の知識を検索できるようにする.pptx
+++ b/slides/pptx/第08回_社内の知識を検索できるようにする.pptx
@@ -2304,6 +2304,10 @@
             <a:prstDash val="solid"/>
           </a:ln>
         </p:spPr>
+        <p:txBody>
+          <a:bodyPr/>
+          <a:p/>
+        </p:txBody>
       </p:sp>
       <p:sp>
         <p:nvSpPr>
@@ -2517,6 +2521,10 @@
             <a:prstDash val="solid"/>
           </a:ln>
         </p:spPr>
+        <p:txBody>
+          <a:bodyPr/>
+          <a:p/>
+        </p:txBody>
       </p:sp>
       <p:sp>
         <p:nvSpPr>
@@ -2581,6 +2589,10 @@
             <a:prstDash val="solid"/>
           </a:ln>
         </p:spPr>
+        <p:txBody>
+          <a:bodyPr/>
+          <a:p/>
+        </p:txBody>
       </p:sp>
       <p:sp>
         <p:nvSpPr>
@@ -2648,6 +2660,10 @@
             <a:prstDash val="solid"/>
           </a:ln>
         </p:spPr>
+        <p:txBody>
+          <a:bodyPr/>
+          <a:p/>
+        </p:txBody>
       </p:sp>
       <p:sp>
         <p:nvSpPr>
@@ -2712,6 +2728,10 @@
             <a:prstDash val="solid"/>
           </a:ln>
         </p:spPr>
+        <p:txBody>
+          <a:bodyPr/>
+          <a:p/>
+        </p:txBody>
       </p:sp>
       <p:sp>
         <p:nvSpPr>
@@ -2779,6 +2799,10 @@
             <a:prstDash val="solid"/>
           </a:ln>
         </p:spPr>
+        <p:txBody>
+          <a:bodyPr/>
+          <a:p/>
+        </p:txBody>
       </p:sp>
       <p:sp>
         <p:nvSpPr>
@@ -2843,6 +2867,10 @@
             <a:prstDash val="solid"/>
           </a:ln>
         </p:spPr>
+        <p:txBody>
+          <a:bodyPr/>
+          <a:p/>
+        </p:txBody>
       </p:sp>
       <p:sp>
         <p:nvSpPr>
@@ -3068,7 +3096,7 @@
                 <a:ea typeface="Yu Gothic" pitchFamily="34" charset="-122"/>
                 <a:cs typeface="Yu Gothic" pitchFamily="34" charset="-120"/>
               </a:rPr>
-              <a:t>演習</a:t>
+              <a:t>実演</a:t>
             </a:r>
             <a:endParaRPr lang="en-US" sz="1100" dirty="0"/>
           </a:p>
@@ -3107,7 +3135,7 @@
                 <a:ea typeface="Yu Gothic" pitchFamily="34" charset="-122"/>
                 <a:cs typeface="Yu Gothic" pitchFamily="34" charset="-120"/>
               </a:rPr>
-              <a:t>今日、一緒にやること</a:t>
+              <a:t>今日、画面でお見せすること</a:t>
             </a:r>
             <a:endParaRPr lang="en-US" sz="2600" dirty="0"/>
           </a:p>
@@ -3146,7 +3174,7 @@
                 <a:ea typeface="Yu Gothic" pitchFamily="34" charset="-122"/>
                 <a:cs typeface="Yu Gothic" pitchFamily="34" charset="-120"/>
               </a:rPr>
-              <a:t>65分。操作するのはご自身です。</a:t>
+              <a:t>65分。講師の画面でお見せします。</a:t>
             </a:r>
             <a:endParaRPr lang="en-US" sz="1250" dirty="0"/>
           </a:p>
@@ -3176,6 +3204,10 @@
             <a:prstDash val="solid"/>
           </a:ln>
         </p:spPr>
+        <p:txBody>
+          <a:bodyPr/>
+          <a:p/>
+        </p:txBody>
       </p:sp>
       <p:sp>
         <p:nvSpPr>
@@ -3201,6 +3233,10 @@
             <a:prstDash val="solid"/>
           </a:ln>
         </p:spPr>
+        <p:txBody>
+          <a:bodyPr/>
+          <a:p/>
+        </p:txBody>
       </p:sp>
       <p:sp>
         <p:nvSpPr>
@@ -3349,6 +3385,10 @@
             <a:prstDash val="solid"/>
           </a:ln>
         </p:spPr>
+        <p:txBody>
+          <a:bodyPr/>
+          <a:p/>
+        </p:txBody>
       </p:sp>
       <p:sp>
         <p:nvSpPr>
@@ -3374,6 +3414,10 @@
             <a:prstDash val="solid"/>
           </a:ln>
         </p:spPr>
+        <p:txBody>
+          <a:bodyPr/>
+          <a:p/>
+        </p:txBody>
       </p:sp>
       <p:sp>
         <p:nvSpPr>
@@ -3522,6 +3566,10 @@
             <a:prstDash val="solid"/>
           </a:ln>
         </p:spPr>
+        <p:txBody>
+          <a:bodyPr/>
+          <a:p/>
+        </p:txBody>
       </p:sp>
       <p:sp>
         <p:nvSpPr>
@@ -3547,6 +3595,10 @@
             <a:prstDash val="solid"/>
           </a:ln>
         </p:spPr>
+        <p:txBody>
+          <a:bodyPr/>
+          <a:p/>
+        </p:txBody>
       </p:sp>
       <p:sp>
         <p:nvSpPr>
@@ -3743,7 +3795,7 @@
                 <a:ea typeface="Yu Gothic" pitchFamily="34" charset="-122"/>
                 <a:cs typeface="Yu Gothic" pitchFamily="34" charset="-120"/>
               </a:rPr>
-              <a:t>演習</a:t>
+              <a:t>実演</a:t>
             </a:r>
             <a:endParaRPr lang="en-US" sz="900" dirty="0"/>
           </a:p>
@@ -3922,6 +3974,10 @@
             <a:prstDash val="solid"/>
           </a:ln>
         </p:spPr>
+        <p:txBody>
+          <a:bodyPr/>
+          <a:p/>
+        </p:txBody>
       </p:sp>
       <p:sp>
         <p:nvSpPr>
@@ -3947,6 +4003,10 @@
             <a:prstDash val="solid"/>
           </a:ln>
         </p:spPr>
+        <p:txBody>
+          <a:bodyPr/>
+          <a:p/>
+        </p:txBody>
       </p:sp>
       <p:sp>
         <p:nvSpPr>
@@ -4053,6 +4113,10 @@
             <a:prstDash val="solid"/>
           </a:ln>
         </p:spPr>
+        <p:txBody>
+          <a:bodyPr/>
+          <a:p/>
+        </p:txBody>
       </p:sp>
       <p:sp>
         <p:nvSpPr>
@@ -4078,6 +4142,10 @@
             <a:prstDash val="solid"/>
           </a:ln>
         </p:spPr>
+        <p:txBody>
+          <a:bodyPr/>
+          <a:p/>
+        </p:txBody>
       </p:sp>
       <p:sp>
         <p:nvSpPr>
@@ -4184,6 +4252,10 @@
             <a:prstDash val="solid"/>
           </a:ln>
         </p:spPr>
+        <p:txBody>
+          <a:bodyPr/>
+          <a:p/>
+        </p:txBody>
       </p:sp>
       <p:sp>
         <p:nvSpPr>
@@ -4209,6 +4281,10 @@
             <a:prstDash val="solid"/>
           </a:ln>
         </p:spPr>
+        <p:txBody>
+          <a:bodyPr/>
+          <a:p/>
+        </p:txBody>
       </p:sp>
       <p:sp>
         <p:nvSpPr>
@@ -4503,6 +4579,10 @@
             <a:prstDash val="solid"/>
           </a:ln>
         </p:spPr>
+        <p:txBody>
+          <a:bodyPr/>
+          <a:p/>
+        </p:txBody>
       </p:sp>
       <p:sp>
         <p:nvSpPr>
@@ -4570,6 +4650,10 @@
             <a:prstDash val="solid"/>
           </a:ln>
         </p:spPr>
+        <p:txBody>
+          <a:bodyPr/>
+          <a:p/>
+        </p:txBody>
       </p:sp>
       <p:sp>
         <p:nvSpPr>
@@ -4903,6 +4987,10 @@
             <a:prstDash val="solid"/>
           </a:ln>
         </p:spPr>
+        <p:txBody>
+          <a:bodyPr/>
+          <a:p/>
+        </p:txBody>
       </p:sp>
       <p:sp>
         <p:nvSpPr>
@@ -5009,6 +5097,10 @@
             <a:prstDash val="solid"/>
           </a:ln>
         </p:spPr>
+        <p:txBody>
+          <a:bodyPr/>
+          <a:p/>
+        </p:txBody>
       </p:sp>
       <p:sp>
         <p:nvSpPr>
@@ -5115,6 +5207,10 @@
             <a:prstDash val="solid"/>
           </a:ln>
         </p:spPr>
+        <p:txBody>
+          <a:bodyPr/>
+          <a:p/>
+        </p:txBody>
       </p:sp>
       <p:sp>
         <p:nvSpPr>
@@ -5367,6 +5463,10 @@
             <a:prstDash val="solid"/>
           </a:ln>
         </p:spPr>
+        <p:txBody>
+          <a:bodyPr/>
+          <a:p/>
+        </p:txBody>
       </p:sp>
       <p:sp>
         <p:nvSpPr>
@@ -5664,6 +5764,10 @@
             <a:prstDash val="solid"/>
           </a:ln>
         </p:spPr>
+        <p:txBody>
+          <a:bodyPr/>
+          <a:p/>
+        </p:txBody>
       </p:sp>
       <p:sp>
         <p:nvSpPr>
@@ -5767,6 +5871,10 @@
             <a:prstDash val="solid"/>
           </a:ln>
         </p:spPr>
+        <p:txBody>
+          <a:bodyPr/>
+          <a:p/>
+        </p:txBody>
       </p:sp>
       <p:sp>
         <p:nvSpPr>
@@ -5870,6 +5978,10 @@
             <a:prstDash val="solid"/>
           </a:ln>
         </p:spPr>
+        <p:txBody>
+          <a:bodyPr/>
+          <a:p/>
+        </p:txBody>
       </p:sp>
       <p:sp>
         <p:nvSpPr>
@@ -5973,6 +6085,10 @@
             <a:prstDash val="solid"/>
           </a:ln>
         </p:spPr>
+        <p:txBody>
+          <a:bodyPr/>
+          <a:p/>
+        </p:txBody>
       </p:sp>
       <p:sp>
         <p:nvSpPr>
@@ -6231,6 +6347,10 @@
             <a:prstDash val="solid"/>
           </a:ln>
         </p:spPr>
+        <p:txBody>
+          <a:bodyPr/>
+          <a:p/>
+        </p:txBody>
       </p:sp>
       <p:sp>
         <p:nvSpPr>
@@ -6298,6 +6418,10 @@
             <a:prstDash val="solid"/>
           </a:ln>
         </p:spPr>
+        <p:txBody>
+          <a:bodyPr/>
+          <a:p/>
+        </p:txBody>
       </p:sp>
       <p:sp>
         <p:nvSpPr>
@@ -6527,7 +6651,7 @@
                 <a:ea typeface="Yu Gothic" pitchFamily="34" charset="-122"/>
                 <a:cs typeface="Yu Gothic" pitchFamily="34" charset="-120"/>
               </a:rPr>
-              <a:t>一緒に手を動かす</a:t>
+              <a:t>画面で順にお見せする</a:t>
             </a:r>
             <a:endParaRPr lang="en-US" sz="1100" dirty="0"/>
           </a:p>
@@ -6823,6 +6947,10 @@
             <a:prstDash val="solid"/>
           </a:ln>
         </p:spPr>
+        <p:txBody>
+          <a:bodyPr/>
+          <a:p/>
+        </p:txBody>
       </p:sp>
       <p:sp>
         <p:nvSpPr>
@@ -6848,6 +6976,10 @@
             <a:prstDash val="solid"/>
           </a:ln>
         </p:spPr>
+        <p:txBody>
+          <a:bodyPr/>
+          <a:p/>
+        </p:txBody>
       </p:sp>
       <p:sp>
         <p:nvSpPr>
@@ -6993,6 +7125,10 @@
             <a:prstDash val="solid"/>
           </a:ln>
         </p:spPr>
+        <p:txBody>
+          <a:bodyPr/>
+          <a:p/>
+        </p:txBody>
       </p:sp>
       <p:sp>
         <p:nvSpPr>
@@ -7018,6 +7154,10 @@
             <a:prstDash val="solid"/>
           </a:ln>
         </p:spPr>
+        <p:txBody>
+          <a:bodyPr/>
+          <a:p/>
+        </p:txBody>
       </p:sp>
       <p:sp>
         <p:nvSpPr>
@@ -7163,6 +7303,10 @@
             <a:prstDash val="solid"/>
           </a:ln>
         </p:spPr>
+        <p:txBody>
+          <a:bodyPr/>
+          <a:p/>
+        </p:txBody>
       </p:sp>
       <p:sp>
         <p:nvSpPr>
@@ -7188,6 +7332,10 @@
             <a:prstDash val="solid"/>
           </a:ln>
         </p:spPr>
+        <p:txBody>
+          <a:bodyPr/>
+          <a:p/>
+        </p:txBody>
       </p:sp>
       <p:sp>
         <p:nvSpPr>
@@ -7560,6 +7708,10 @@
             <a:prstDash val="solid"/>
           </a:ln>
         </p:spPr>
+        <p:txBody>
+          <a:bodyPr/>
+          <a:p/>
+        </p:txBody>
       </p:sp>
       <p:sp>
         <p:nvSpPr>
@@ -7585,6 +7737,10 @@
             <a:prstDash val="solid"/>
           </a:ln>
         </p:spPr>
+        <p:txBody>
+          <a:bodyPr/>
+          <a:p/>
+        </p:txBody>
       </p:sp>
       <p:sp>
         <p:nvSpPr>
@@ -8299,6 +8455,10 @@
             <a:prstDash val="solid"/>
           </a:ln>
         </p:spPr>
+        <p:txBody>
+          <a:bodyPr/>
+          <a:p/>
+        </p:txBody>
       </p:sp>
       <p:sp>
         <p:nvSpPr>
@@ -8405,6 +8565,10 @@
             <a:prstDash val="solid"/>
           </a:ln>
         </p:spPr>
+        <p:txBody>
+          <a:bodyPr/>
+          <a:p/>
+        </p:txBody>
       </p:sp>
       <p:sp>
         <p:nvSpPr>
@@ -8637,6 +8801,10 @@
             <a:prstDash val="solid"/>
           </a:ln>
         </p:spPr>
+        <p:txBody>
+          <a:bodyPr/>
+          <a:p/>
+        </p:txBody>
       </p:sp>
       <p:sp>
         <p:nvSpPr>
@@ -8704,6 +8872,10 @@
             <a:prstDash val="solid"/>
           </a:ln>
         </p:spPr>
+        <p:txBody>
+          <a:bodyPr/>
+          <a:p/>
+        </p:txBody>
       </p:sp>
       <p:sp>
         <p:nvSpPr>
@@ -8956,6 +9128,10 @@
             <a:prstDash val="solid"/>
           </a:ln>
         </p:spPr>
+        <p:txBody>
+          <a:bodyPr/>
+          <a:p/>
+        </p:txBody>
       </p:sp>
       <p:sp>
         <p:nvSpPr>
@@ -9062,6 +9238,10 @@
             <a:prstDash val="solid"/>
           </a:ln>
         </p:spPr>
+        <p:txBody>
+          <a:bodyPr/>
+          <a:p/>
+        </p:txBody>
       </p:sp>
       <p:sp>
         <p:nvSpPr>
@@ -9294,6 +9474,10 @@
             <a:prstDash val="solid"/>
           </a:ln>
         </p:spPr>
+        <p:txBody>
+          <a:bodyPr/>
+          <a:p/>
+        </p:txBody>
       </p:sp>
       <p:sp>
         <p:nvSpPr>
@@ -9361,6 +9545,10 @@
             <a:prstDash val="solid"/>
           </a:ln>
         </p:spPr>
+        <p:txBody>
+          <a:bodyPr/>
+          <a:p/>
+        </p:txBody>
       </p:sp>
       <p:sp>
         <p:nvSpPr>
@@ -9613,6 +9801,10 @@
             <a:prstDash val="solid"/>
           </a:ln>
         </p:spPr>
+        <p:txBody>
+          <a:bodyPr/>
+          <a:p/>
+        </p:txBody>
       </p:sp>
       <p:sp>
         <p:nvSpPr>
@@ -9719,6 +9911,10 @@
             <a:prstDash val="solid"/>
           </a:ln>
         </p:spPr>
+        <p:txBody>
+          <a:bodyPr/>
+          <a:p/>
+        </p:txBody>
       </p:sp>
       <p:sp>
         <p:nvSpPr>
@@ -9825,6 +10021,10 @@
             <a:prstDash val="solid"/>
           </a:ln>
         </p:spPr>
+        <p:txBody>
+          <a:bodyPr/>
+          <a:p/>
+        </p:txBody>
       </p:sp>
       <p:sp>
         <p:nvSpPr>
@@ -9931,6 +10131,10 @@
             <a:prstDash val="solid"/>
           </a:ln>
         </p:spPr>
+        <p:txBody>
+          <a:bodyPr/>
+          <a:p/>
+        </p:txBody>
       </p:sp>
       <p:sp>
         <p:nvSpPr>
@@ -10037,6 +10241,10 @@
             <a:prstDash val="solid"/>
           </a:ln>
         </p:spPr>
+        <p:txBody>
+          <a:bodyPr/>
+          <a:p/>
+        </p:txBody>
       </p:sp>
       <p:sp>
         <p:nvSpPr>
@@ -10143,6 +10351,10 @@
             <a:prstDash val="solid"/>
           </a:ln>
         </p:spPr>
+        <p:txBody>
+          <a:bodyPr/>
+          <a:p/>
+        </p:txBody>
       </p:sp>
       <p:sp>
         <p:nvSpPr>
@@ -10437,6 +10649,10 @@
             <a:prstDash val="solid"/>
           </a:ln>
         </p:spPr>
+        <p:txBody>
+          <a:bodyPr/>
+          <a:p/>
+        </p:txBody>
       </p:sp>
       <p:sp>
         <p:nvSpPr>
@@ -10462,6 +10678,10 @@
             <a:prstDash val="solid"/>
           </a:ln>
         </p:spPr>
+        <p:txBody>
+          <a:bodyPr/>
+          <a:p/>
+        </p:txBody>
       </p:sp>
       <p:sp>
         <p:nvSpPr>
@@ -10568,6 +10788,10 @@
             <a:prstDash val="solid"/>
           </a:ln>
         </p:spPr>
+        <p:txBody>
+          <a:bodyPr/>
+          <a:p/>
+        </p:txBody>
       </p:sp>
       <p:sp>
         <p:nvSpPr>
@@ -10593,6 +10817,10 @@
             <a:prstDash val="solid"/>
           </a:ln>
         </p:spPr>
+        <p:txBody>
+          <a:bodyPr/>
+          <a:p/>
+        </p:txBody>
       </p:sp>
       <p:sp>
         <p:nvSpPr>
@@ -10699,6 +10927,10 @@
             <a:prstDash val="solid"/>
           </a:ln>
         </p:spPr>
+        <p:txBody>
+          <a:bodyPr/>
+          <a:p/>
+        </p:txBody>
       </p:sp>
       <p:sp>
         <p:nvSpPr>
@@ -10724,6 +10956,10 @@
             <a:prstDash val="solid"/>
           </a:ln>
         </p:spPr>
+        <p:txBody>
+          <a:bodyPr/>
+          <a:p/>
+        </p:txBody>
       </p:sp>
       <p:sp>
         <p:nvSpPr>
